--- a/a7/build/out/u3/A7 3.T2 Negative Exponents with Variable Bases - Slides.pptx
+++ b/a7/build/out/u3/A7 3.T2 Negative Exponents with Variable Bases - Slides.pptx
@@ -3129,7 +3129,7 @@
         </p:nvSpPr>
         <p:spPr>
           <a:xfrm>
-            <a:off x="777240" y="1691640"/>
+            <a:off x="777240" y="2148840"/>
             <a:ext cx="10607040" cy="347472"/>
           </a:xfrm>
           <a:prstGeom prst="rect">
@@ -3164,7 +3164,7 @@
         </p:nvSpPr>
         <p:spPr>
           <a:xfrm>
-            <a:off x="777240" y="2048256"/>
+            <a:off x="777240" y="2505456"/>
             <a:ext cx="10607040" cy="1005840"/>
           </a:xfrm>
           <a:prstGeom prst="rect">
@@ -3199,7 +3199,7 @@
         </p:nvCxnSpPr>
         <p:spPr>
           <a:xfrm>
-            <a:off x="3291840" y="3255264"/>
+            <a:off x="3291840" y="3712464"/>
             <a:ext cx="5577840" cy="0"/>
           </a:xfrm>
           <a:prstGeom prst="line">
@@ -3234,7 +3234,7 @@
         </p:nvCxnSpPr>
         <p:spPr>
           <a:xfrm>
-            <a:off x="3291840" y="3337560"/>
+            <a:off x="3291840" y="3794760"/>
             <a:ext cx="5577840" cy="0"/>
           </a:xfrm>
           <a:prstGeom prst="line">
@@ -3269,7 +3269,7 @@
         </p:nvSpPr>
         <p:spPr>
           <a:xfrm>
-            <a:off x="777240" y="3502152"/>
+            <a:off x="777240" y="3959352"/>
             <a:ext cx="10607040" cy="310896"/>
           </a:xfrm>
           <a:prstGeom prst="rect">
@@ -3304,7 +3304,7 @@
         </p:nvSpPr>
         <p:spPr>
           <a:xfrm>
-            <a:off x="777240" y="3840480"/>
+            <a:off x="777240" y="4297680"/>
             <a:ext cx="10607040" cy="731520"/>
           </a:xfrm>
           <a:prstGeom prst="rect">
@@ -3331,143 +3331,9 @@
           </a:p>
         </p:txBody>
       </p:sp>
-      <p:sp>
-        <p:nvSpPr>
-          <p:cNvPr id="8" name="Rectangle 7"/>
-          <p:cNvSpPr/>
-          <p:nvPr/>
-        </p:nvSpPr>
-        <p:spPr>
-          <a:xfrm>
-            <a:off x="2377440" y="4736592"/>
-            <a:ext cx="7406640" cy="1051560"/>
-          </a:xfrm>
-          <a:prstGeom prst="rect">
-            <a:avLst/>
-          </a:prstGeom>
-          <a:solidFill>
-            <a:srgbClr val="F2F2F0"/>
-          </a:solidFill>
-          <a:ln w="9525">
-            <a:solidFill>
-              <a:srgbClr val="BFBFBF"/>
-            </a:solidFill>
-          </a:ln>
-          <a:effectLst/>
-        </p:spPr>
-        <p:style>
-          <a:lnRef idx="1">
-            <a:schemeClr val="accent1"/>
-          </a:lnRef>
-          <a:fillRef idx="3">
-            <a:schemeClr val="accent1"/>
-          </a:fillRef>
-          <a:effectRef idx="2">
-            <a:schemeClr val="accent1"/>
-          </a:effectRef>
-          <a:fontRef idx="minor">
-            <a:schemeClr val="lt1"/>
-          </a:fontRef>
-        </p:style>
-        <p:txBody>
-          <a:bodyPr rtlCol="0" anchor="ctr"/>
-          <a:lstStyle/>
-          <a:p>
-            <a:pPr algn="ctr"/>
-          </a:p>
-        </p:txBody>
-      </p:sp>
-      <p:sp>
-        <p:nvSpPr>
-          <p:cNvPr id="9" name="TextBox 8"/>
-          <p:cNvSpPr txBox="1"/>
-          <p:nvPr/>
-        </p:nvSpPr>
-        <p:spPr>
-          <a:xfrm>
-            <a:off x="2606040" y="4892040"/>
-            <a:ext cx="6949440" cy="365760"/>
-          </a:xfrm>
-          <a:prstGeom prst="rect">
-            <a:avLst/>
-          </a:prstGeom>
-          <a:noFill/>
-        </p:spPr>
-        <p:txBody>
-          <a:bodyPr wrap="square" lIns="45720" rIns="45720" tIns="18288" bIns="18288" anchor="t">
-            <a:spAutoFit/>
-          </a:bodyPr>
-          <a:lstStyle/>
-          <a:p>
-            <a:pPr algn="ctr"/>
-            <a:r>
-              <a:rPr sz="1700" b="0" i="1">
-                <a:solidFill>
-                  <a:srgbClr val="6B6B6B"/>
-                </a:solidFill>
-                <a:latin typeface="Century Schoolbook"/>
-              </a:rPr>
-              <a:t>Yesterday every exponent on a letter was positive.</a:t>
-            </a:r>
-          </a:p>
-        </p:txBody>
-      </p:sp>
-      <p:sp>
-        <p:nvSpPr>
-          <p:cNvPr id="10" name="TextBox 9"/>
-          <p:cNvSpPr txBox="1"/>
-          <p:nvPr/>
-        </p:nvSpPr>
-        <p:spPr>
-          <a:xfrm>
-            <a:off x="2606040" y="5276088"/>
-            <a:ext cx="6949440" cy="365760"/>
-          </a:xfrm>
-          <a:prstGeom prst="rect">
-            <a:avLst/>
-          </a:prstGeom>
-          <a:noFill/>
-        </p:spPr>
-        <p:txBody>
-          <a:bodyPr wrap="square" lIns="45720" rIns="45720" tIns="18288" bIns="18288" anchor="t">
-            <a:spAutoFit/>
-          </a:bodyPr>
-          <a:lstStyle/>
-          <a:p>
-            <a:pPr algn="ctr"/>
-            <a:r>
-              <a:rPr sz="1700" b="1" i="0">
-                <a:solidFill>
-                  <a:srgbClr val="1A1A1A"/>
-                </a:solidFill>
-                <a:latin typeface="Century Schoolbook"/>
-              </a:rPr>
-              <a:t>Today x</a:t>
-            </a:r>
-            <a:r>
-              <a:rPr sz="1700" b="1" i="0" baseline="30000">
-                <a:solidFill>
-                  <a:srgbClr val="1A1A1A"/>
-                </a:solidFill>
-                <a:latin typeface="Century Schoolbook"/>
-              </a:rPr>
-              <a:t>-3</a:t>
-            </a:r>
-            <a:r>
-              <a:rPr sz="1700" b="1" i="0">
-                <a:solidFill>
-                  <a:srgbClr val="1A1A1A"/>
-                </a:solidFill>
-                <a:latin typeface="Century Schoolbook"/>
-              </a:rPr>
-              <a:t> arrives — and it is not a negative number.</a:t>
-            </a:r>
-          </a:p>
-        </p:txBody>
-      </p:sp>
       <p:cxnSp>
         <p:nvCxnSpPr>
-          <p:cNvPr id="11" name="Connector 10"/>
+          <p:cNvPr id="8" name="Connector 7"/>
           <p:cNvCxnSpPr/>
           <p:nvPr/>
         </p:nvCxnSpPr>
@@ -3502,7 +3368,7 @@
       </p:cxnSp>
       <p:sp>
         <p:nvSpPr>
-          <p:cNvPr id="12" name="TextBox 11"/>
+          <p:cNvPr id="9" name="TextBox 8"/>
           <p:cNvSpPr txBox="1"/>
           <p:nvPr/>
         </p:nvSpPr>
@@ -3537,7 +3403,7 @@
       </p:sp>
       <p:sp>
         <p:nvSpPr>
-          <p:cNvPr id="13" name="TextBox 12"/>
+          <p:cNvPr id="10" name="TextBox 9"/>
           <p:cNvSpPr txBox="1"/>
           <p:nvPr/>
         </p:nvSpPr>
@@ -3693,44 +3559,9 @@
           </a:fontRef>
         </p:style>
       </p:cxnSp>
-      <p:sp>
-        <p:nvSpPr>
-          <p:cNvPr id="5" name="TextBox 4"/>
-          <p:cNvSpPr txBox="1"/>
-          <p:nvPr/>
-        </p:nvSpPr>
-        <p:spPr>
-          <a:xfrm>
-            <a:off x="777240" y="1261872"/>
-            <a:ext cx="10607040" cy="310896"/>
-          </a:xfrm>
-          <a:prstGeom prst="rect">
-            <a:avLst/>
-          </a:prstGeom>
-          <a:noFill/>
-        </p:spPr>
-        <p:txBody>
-          <a:bodyPr wrap="square" lIns="45720" rIns="45720" tIns="18288" bIns="18288" anchor="t">
-            <a:spAutoFit/>
-          </a:bodyPr>
-          <a:lstStyle/>
-          <a:p>
-            <a:pPr algn="l"/>
-            <a:r>
-              <a:rPr sz="1700" b="0" i="1">
-                <a:solidFill>
-                  <a:srgbClr val="6B6B6B"/>
-                </a:solidFill>
-                <a:latin typeface="Century Schoolbook"/>
-              </a:rPr>
-              <a:t>Answer.</a:t>
-            </a:r>
-          </a:p>
-        </p:txBody>
-      </p:sp>
       <p:cxnSp>
         <p:nvCxnSpPr>
-          <p:cNvPr id="6" name="Connector 5"/>
+          <p:cNvPr id="5" name="Connector 4"/>
           <p:cNvCxnSpPr/>
           <p:nvPr/>
         </p:nvCxnSpPr>
@@ -3765,7 +3596,7 @@
       </p:cxnSp>
       <p:sp>
         <p:nvSpPr>
-          <p:cNvPr id="7" name="TextBox 6"/>
+          <p:cNvPr id="6" name="TextBox 5"/>
           <p:cNvSpPr txBox="1"/>
           <p:nvPr/>
         </p:nvSpPr>
@@ -3800,7 +3631,7 @@
       </p:sp>
       <p:sp>
         <p:nvSpPr>
-          <p:cNvPr id="8" name="TextBox 7"/>
+          <p:cNvPr id="7" name="TextBox 6"/>
           <p:cNvSpPr txBox="1"/>
           <p:nvPr/>
         </p:nvSpPr>
@@ -3835,7 +3666,7 @@
       </p:sp>
       <p:pic>
         <p:nvPicPr>
-          <p:cNvPr id="9" name="Picture 8" descr="6f4e119bf12e311e.png"/>
+          <p:cNvPr id="8" name="Picture 7" descr="6f4e119bf12e311e.png"/>
           <p:cNvPicPr>
             <a:picLocks noChangeAspect="1"/>
           </p:cNvPicPr>
@@ -3859,13 +3690,13 @@
       </p:pic>
       <p:sp>
         <p:nvSpPr>
-          <p:cNvPr id="10" name="TextBox 9"/>
-          <p:cNvSpPr txBox="1"/>
-          <p:nvPr/>
-        </p:nvSpPr>
-        <p:spPr>
-          <a:xfrm>
-            <a:off x="777240" y="3032760"/>
+          <p:cNvPr id="9" name="TextBox 8"/>
+          <p:cNvSpPr txBox="1"/>
+          <p:nvPr/>
+        </p:nvSpPr>
+        <p:spPr>
+          <a:xfrm>
+            <a:off x="777240" y="3215640"/>
             <a:ext cx="10607040" cy="429370"/>
           </a:xfrm>
           <a:prstGeom prst="rect">
@@ -3881,47 +3712,20 @@
           <a:p>
             <a:pPr algn="ctr"/>
             <a:r>
-              <a:rPr sz="2400" b="0" i="0">
-                <a:solidFill>
-                  <a:srgbClr val="6B6B6B"/>
-                </a:solidFill>
-                <a:latin typeface="Century Schoolbook"/>
-              </a:rPr>
-              <a:t>4 · a</a:t>
-            </a:r>
-            <a:r>
-              <a:rPr sz="2400" b="0" i="0" baseline="30000">
-                <a:solidFill>
-                  <a:srgbClr val="6B6B6B"/>
-                </a:solidFill>
-                <a:latin typeface="Century Schoolbook"/>
-              </a:rPr>
-              <a:t>3</a:t>
-            </a:r>
-            <a:r>
-              <a:rPr sz="2400" b="0" i="0">
-                <a:solidFill>
-                  <a:srgbClr val="6B6B6B"/>
-                </a:solidFill>
-                <a:latin typeface="Century Schoolbook"/>
-              </a:rPr>
-              <a:t> · b</a:t>
-            </a:r>
-            <a:r>
-              <a:rPr sz="2400" b="0" i="0" baseline="30000">
-                <a:solidFill>
-                  <a:srgbClr val="6B6B6B"/>
-                </a:solidFill>
-                <a:latin typeface="Century Schoolbook"/>
-              </a:rPr>
-              <a:t>-2</a:t>
-            </a:r>
-          </a:p>
-        </p:txBody>
-      </p:sp>
-      <p:sp>
-        <p:nvSpPr>
-          <p:cNvPr id="11" name="TextBox 10"/>
+              <a:rPr sz="2400" b="1" i="0">
+                <a:solidFill>
+                  <a:srgbClr val="1A1A1A"/>
+                </a:solidFill>
+                <a:latin typeface="Century Schoolbook"/>
+              </a:rPr>
+              <a:t>Write an equivalent expression with positive exponents only.</a:t>
+            </a:r>
+          </a:p>
+        </p:txBody>
+      </p:sp>
+      <p:sp>
+        <p:nvSpPr>
+          <p:cNvPr id="10" name="TextBox 9"/>
           <p:cNvSpPr txBox="1"/>
           <p:nvPr/>
         </p:nvSpPr>
@@ -3956,7 +3760,7 @@
       </p:sp>
       <p:pic>
         <p:nvPicPr>
-          <p:cNvPr id="12" name="Picture 11" descr="5fcfdcd223fa6117.png"/>
+          <p:cNvPr id="11" name="Picture 10" descr="5fcfdcd223fa6117.png"/>
           <p:cNvPicPr>
             <a:picLocks noChangeAspect="1"/>
           </p:cNvPicPr>
@@ -4101,44 +3905,9 @@
           </a:fontRef>
         </p:style>
       </p:cxnSp>
-      <p:sp>
-        <p:nvSpPr>
-          <p:cNvPr id="5" name="TextBox 4"/>
-          <p:cNvSpPr txBox="1"/>
-          <p:nvPr/>
-        </p:nvSpPr>
-        <p:spPr>
-          <a:xfrm>
-            <a:off x="777240" y="1261872"/>
-            <a:ext cx="10607040" cy="310896"/>
-          </a:xfrm>
-          <a:prstGeom prst="rect">
-            <a:avLst/>
-          </a:prstGeom>
-          <a:noFill/>
-        </p:spPr>
-        <p:txBody>
-          <a:bodyPr wrap="square" lIns="45720" rIns="45720" tIns="18288" bIns="18288" anchor="t">
-            <a:spAutoFit/>
-          </a:bodyPr>
-          <a:lstStyle/>
-          <a:p>
-            <a:pPr algn="l"/>
-            <a:r>
-              <a:rPr sz="1700" b="0" i="1">
-                <a:solidFill>
-                  <a:srgbClr val="6B6B6B"/>
-                </a:solidFill>
-                <a:latin typeface="Century Schoolbook"/>
-              </a:rPr>
-              <a:t>Several laws in one expression — the state guide's item.</a:t>
-            </a:r>
-          </a:p>
-        </p:txBody>
-      </p:sp>
       <p:cxnSp>
         <p:nvCxnSpPr>
-          <p:cNvPr id="6" name="Connector 5"/>
+          <p:cNvPr id="5" name="Connector 4"/>
           <p:cNvCxnSpPr/>
           <p:nvPr/>
         </p:nvCxnSpPr>
@@ -4173,7 +3942,7 @@
       </p:cxnSp>
       <p:sp>
         <p:nvSpPr>
-          <p:cNvPr id="7" name="TextBox 6"/>
+          <p:cNvPr id="6" name="TextBox 5"/>
           <p:cNvSpPr txBox="1"/>
           <p:nvPr/>
         </p:nvSpPr>
@@ -4208,7 +3977,7 @@
       </p:sp>
       <p:sp>
         <p:nvSpPr>
-          <p:cNvPr id="8" name="TextBox 7"/>
+          <p:cNvPr id="7" name="TextBox 6"/>
           <p:cNvSpPr txBox="1"/>
           <p:nvPr/>
         </p:nvSpPr>
@@ -4243,7 +4012,7 @@
       </p:sp>
       <p:pic>
         <p:nvPicPr>
-          <p:cNvPr id="9" name="Picture 8" descr="061639b8c49f6a31.png"/>
+          <p:cNvPr id="8" name="Picture 7" descr="061639b8c49f6a31.png"/>
           <p:cNvPicPr>
             <a:picLocks noChangeAspect="1"/>
           </p:cNvPicPr>
@@ -4267,7 +4036,7 @@
       </p:pic>
       <p:sp>
         <p:nvSpPr>
-          <p:cNvPr id="10" name="TextBox 9"/>
+          <p:cNvPr id="9" name="TextBox 8"/>
           <p:cNvSpPr txBox="1"/>
           <p:nvPr/>
         </p:nvSpPr>
@@ -4423,44 +4192,9 @@
           </a:fontRef>
         </p:style>
       </p:cxnSp>
-      <p:sp>
-        <p:nvSpPr>
-          <p:cNvPr id="5" name="TextBox 4"/>
-          <p:cNvSpPr txBox="1"/>
-          <p:nvPr/>
-        </p:nvSpPr>
-        <p:spPr>
-          <a:xfrm>
-            <a:off x="777240" y="1261872"/>
-            <a:ext cx="10607040" cy="310896"/>
-          </a:xfrm>
-          <a:prstGeom prst="rect">
-            <a:avLst/>
-          </a:prstGeom>
-          <a:noFill/>
-        </p:spPr>
-        <p:txBody>
-          <a:bodyPr wrap="square" lIns="45720" rIns="45720" tIns="18288" bIns="18288" anchor="t">
-            <a:spAutoFit/>
-          </a:bodyPr>
-          <a:lstStyle/>
-          <a:p>
-            <a:pPr algn="l"/>
-            <a:r>
-              <a:rPr sz="1700" b="0" i="1">
-                <a:solidFill>
-                  <a:srgbClr val="6B6B6B"/>
-                </a:solidFill>
-                <a:latin typeface="Century Schoolbook"/>
-              </a:rPr>
-              <a:t>Worked.</a:t>
-            </a:r>
-          </a:p>
-        </p:txBody>
-      </p:sp>
       <p:cxnSp>
         <p:nvCxnSpPr>
-          <p:cNvPr id="6" name="Connector 5"/>
+          <p:cNvPr id="5" name="Connector 4"/>
           <p:cNvCxnSpPr/>
           <p:nvPr/>
         </p:nvCxnSpPr>
@@ -4495,7 +4229,7 @@
       </p:cxnSp>
       <p:sp>
         <p:nvSpPr>
-          <p:cNvPr id="7" name="TextBox 6"/>
+          <p:cNvPr id="6" name="TextBox 5"/>
           <p:cNvSpPr txBox="1"/>
           <p:nvPr/>
         </p:nvSpPr>
@@ -4530,7 +4264,7 @@
       </p:sp>
       <p:sp>
         <p:nvSpPr>
-          <p:cNvPr id="8" name="TextBox 7"/>
+          <p:cNvPr id="7" name="TextBox 6"/>
           <p:cNvSpPr txBox="1"/>
           <p:nvPr/>
         </p:nvSpPr>
@@ -4565,7 +4299,7 @@
       </p:sp>
       <p:pic>
         <p:nvPicPr>
-          <p:cNvPr id="9" name="Picture 8" descr="dc62f1bbbc7a81f8.png"/>
+          <p:cNvPr id="8" name="Picture 7" descr="dc62f1bbbc7a81f8.png"/>
           <p:cNvPicPr>
             <a:picLocks noChangeAspect="1"/>
           </p:cNvPicPr>
@@ -4587,71 +4321,9 @@
           </a:prstGeom>
         </p:spPr>
       </p:pic>
-      <p:sp>
-        <p:nvSpPr>
-          <p:cNvPr id="10" name="TextBox 9"/>
-          <p:cNvSpPr txBox="1"/>
-          <p:nvPr/>
-        </p:nvSpPr>
-        <p:spPr>
-          <a:xfrm>
-            <a:off x="5251704" y="2100072"/>
-            <a:ext cx="6132575" cy="502920"/>
-          </a:xfrm>
-          <a:prstGeom prst="rect">
-            <a:avLst/>
-          </a:prstGeom>
-          <a:noFill/>
-        </p:spPr>
-        <p:txBody>
-          <a:bodyPr wrap="square" lIns="45720" rIns="45720" tIns="18288" bIns="18288" anchor="ctr">
-            <a:spAutoFit/>
-          </a:bodyPr>
-          <a:lstStyle/>
-          <a:p>
-            <a:pPr algn="l"/>
-            <a:r>
-              <a:rPr sz="2100" b="0" i="1">
-                <a:solidFill>
-                  <a:srgbClr val="6B6B6B"/>
-                </a:solidFill>
-                <a:latin typeface="Century Schoolbook"/>
-              </a:rPr>
-              <a:t>raise every factor: a</a:t>
-            </a:r>
-            <a:r>
-              <a:rPr sz="2100" b="0" i="1" baseline="30000">
-                <a:solidFill>
-                  <a:srgbClr val="6B6B6B"/>
-                </a:solidFill>
-                <a:latin typeface="Century Schoolbook"/>
-              </a:rPr>
-              <a:t>3</a:t>
-            </a:r>
-            <a:r>
-              <a:rPr sz="2100" b="0" i="1">
-                <a:solidFill>
-                  <a:srgbClr val="6B6B6B"/>
-                </a:solidFill>
-                <a:latin typeface="Century Schoolbook"/>
-              </a:rPr>
-              <a:t>, 4, b</a:t>
-            </a:r>
-            <a:r>
-              <a:rPr sz="2100" b="0" i="1" baseline="30000">
-                <a:solidFill>
-                  <a:srgbClr val="6B6B6B"/>
-                </a:solidFill>
-                <a:latin typeface="Century Schoolbook"/>
-              </a:rPr>
-              <a:t>-7</a:t>
-            </a:r>
-          </a:p>
-        </p:txBody>
-      </p:sp>
       <p:pic>
         <p:nvPicPr>
-          <p:cNvPr id="11" name="Picture 10" descr="d55cada8037b336a.png"/>
+          <p:cNvPr id="9" name="Picture 8" descr="d55cada8037b336a.png"/>
           <p:cNvPicPr>
             <a:picLocks noChangeAspect="1"/>
           </p:cNvPicPr>
@@ -4675,87 +4347,7 @@
       </p:pic>
       <p:sp>
         <p:nvSpPr>
-          <p:cNvPr id="12" name="TextBox 11"/>
-          <p:cNvSpPr txBox="1"/>
-          <p:nvPr/>
-        </p:nvSpPr>
-        <p:spPr>
-          <a:xfrm>
-            <a:off x="3685032" y="3186683"/>
-            <a:ext cx="6400800" cy="502920"/>
-          </a:xfrm>
-          <a:prstGeom prst="rect">
-            <a:avLst/>
-          </a:prstGeom>
-          <a:noFill/>
-        </p:spPr>
-        <p:txBody>
-          <a:bodyPr wrap="square" lIns="45720" rIns="45720" tIns="18288" bIns="18288" anchor="ctr">
-            <a:spAutoFit/>
-          </a:bodyPr>
-          <a:lstStyle/>
-          <a:p>
-            <a:pPr algn="l"/>
-            <a:r>
-              <a:rPr sz="2100" b="0" i="1">
-                <a:solidFill>
-                  <a:srgbClr val="6B6B6B"/>
-                </a:solidFill>
-                <a:latin typeface="Century Schoolbook"/>
-              </a:rPr>
-              <a:t>4</a:t>
-            </a:r>
-            <a:r>
-              <a:rPr sz="2100" b="0" i="1" baseline="30000">
-                <a:solidFill>
-                  <a:srgbClr val="6B6B6B"/>
-                </a:solidFill>
-                <a:latin typeface="Century Schoolbook"/>
-              </a:rPr>
-              <a:t>5</a:t>
-            </a:r>
-            <a:r>
-              <a:rPr sz="2100" b="0" i="1">
-                <a:solidFill>
-                  <a:srgbClr val="6B6B6B"/>
-                </a:solidFill>
-                <a:latin typeface="Century Schoolbook"/>
-              </a:rPr>
-              <a:t> = 1,024; b</a:t>
-            </a:r>
-            <a:r>
-              <a:rPr sz="2100" b="0" i="1" baseline="30000">
-                <a:solidFill>
-                  <a:srgbClr val="6B6B6B"/>
-                </a:solidFill>
-                <a:latin typeface="Century Schoolbook"/>
-              </a:rPr>
-              <a:t>-35</a:t>
-            </a:r>
-            <a:r>
-              <a:rPr sz="2100" b="0" i="1">
-                <a:solidFill>
-                  <a:srgbClr val="6B6B6B"/>
-                </a:solidFill>
-                <a:latin typeface="Century Schoolbook"/>
-              </a:rPr>
-              <a:t> moves up as b</a:t>
-            </a:r>
-            <a:r>
-              <a:rPr sz="2100" b="0" i="1" baseline="30000">
-                <a:solidFill>
-                  <a:srgbClr val="6B6B6B"/>
-                </a:solidFill>
-                <a:latin typeface="Century Schoolbook"/>
-              </a:rPr>
-              <a:t>35</a:t>
-            </a:r>
-          </a:p>
-        </p:txBody>
-      </p:sp>
-      <p:sp>
-        <p:nvSpPr>
-          <p:cNvPr id="13" name="TextBox 12"/>
+          <p:cNvPr id="10" name="TextBox 9"/>
           <p:cNvSpPr txBox="1"/>
           <p:nvPr/>
         </p:nvSpPr>
@@ -4947,44 +4539,9 @@
           </a:fontRef>
         </p:style>
       </p:cxnSp>
-      <p:sp>
-        <p:nvSpPr>
-          <p:cNvPr id="5" name="TextBox 4"/>
-          <p:cNvSpPr txBox="1"/>
-          <p:nvPr/>
-        </p:nvSpPr>
-        <p:spPr>
-          <a:xfrm>
-            <a:off x="777240" y="1261872"/>
-            <a:ext cx="10607040" cy="310896"/>
-          </a:xfrm>
-          <a:prstGeom prst="rect">
-            <a:avLst/>
-          </a:prstGeom>
-          <a:noFill/>
-        </p:spPr>
-        <p:txBody>
-          <a:bodyPr wrap="square" lIns="45720" rIns="45720" tIns="18288" bIns="18288" anchor="t">
-            <a:spAutoFit/>
-          </a:bodyPr>
-          <a:lstStyle/>
-          <a:p>
-            <a:pPr algn="l"/>
-            <a:r>
-              <a:rPr sz="1700" b="0" i="1">
-                <a:solidFill>
-                  <a:srgbClr val="6B6B6B"/>
-                </a:solidFill>
-                <a:latin typeface="Century Schoolbook"/>
-              </a:rPr>
-              <a:t>Same steps, your numbers. Boards up when done.</a:t>
-            </a:r>
-          </a:p>
-        </p:txBody>
-      </p:sp>
       <p:cxnSp>
         <p:nvCxnSpPr>
-          <p:cNvPr id="6" name="Connector 5"/>
+          <p:cNvPr id="5" name="Connector 4"/>
           <p:cNvCxnSpPr/>
           <p:nvPr/>
         </p:nvCxnSpPr>
@@ -5019,7 +4576,7 @@
       </p:cxnSp>
       <p:sp>
         <p:nvSpPr>
-          <p:cNvPr id="7" name="TextBox 6"/>
+          <p:cNvPr id="6" name="TextBox 5"/>
           <p:cNvSpPr txBox="1"/>
           <p:nvPr/>
         </p:nvSpPr>
@@ -5054,7 +4611,7 @@
       </p:sp>
       <p:sp>
         <p:nvSpPr>
-          <p:cNvPr id="8" name="TextBox 7"/>
+          <p:cNvPr id="7" name="TextBox 6"/>
           <p:cNvSpPr txBox="1"/>
           <p:nvPr/>
         </p:nvSpPr>
@@ -5089,7 +4646,7 @@
       </p:sp>
       <p:pic>
         <p:nvPicPr>
-          <p:cNvPr id="9" name="Picture 8" descr="c42f4571630d5047.png"/>
+          <p:cNvPr id="8" name="Picture 7" descr="c42f4571630d5047.png"/>
           <p:cNvPicPr>
             <a:picLocks noChangeAspect="1"/>
           </p:cNvPicPr>
@@ -5111,6 +4668,41 @@
           </a:prstGeom>
         </p:spPr>
       </p:pic>
+      <p:sp>
+        <p:nvSpPr>
+          <p:cNvPr id="9" name="TextBox 8"/>
+          <p:cNvSpPr txBox="1"/>
+          <p:nvPr/>
+        </p:nvSpPr>
+        <p:spPr>
+          <a:xfrm>
+            <a:off x="777240" y="3809999"/>
+            <a:ext cx="10607040" cy="429370"/>
+          </a:xfrm>
+          <a:prstGeom prst="rect">
+            <a:avLst/>
+          </a:prstGeom>
+          <a:noFill/>
+        </p:spPr>
+        <p:txBody>
+          <a:bodyPr wrap="square" lIns="45720" rIns="45720" tIns="18288" bIns="18288" anchor="t">
+            <a:spAutoFit/>
+          </a:bodyPr>
+          <a:lstStyle/>
+          <a:p>
+            <a:pPr algn="ctr"/>
+            <a:r>
+              <a:rPr sz="2400" b="1" i="0">
+                <a:solidFill>
+                  <a:srgbClr val="1A1A1A"/>
+                </a:solidFill>
+                <a:latin typeface="Century Schoolbook"/>
+              </a:rPr>
+              <a:t>Write an equivalent expression with positive exponents only.</a:t>
+            </a:r>
+          </a:p>
+        </p:txBody>
+      </p:sp>
     </p:spTree>
   </p:cSld>
   <p:clrMapOvr>
@@ -5234,44 +4826,9 @@
           </a:fontRef>
         </p:style>
       </p:cxnSp>
-      <p:sp>
-        <p:nvSpPr>
-          <p:cNvPr id="5" name="TextBox 4"/>
-          <p:cNvSpPr txBox="1"/>
-          <p:nvPr/>
-        </p:nvSpPr>
-        <p:spPr>
-          <a:xfrm>
-            <a:off x="777240" y="1261872"/>
-            <a:ext cx="10607040" cy="310896"/>
-          </a:xfrm>
-          <a:prstGeom prst="rect">
-            <a:avLst/>
-          </a:prstGeom>
-          <a:noFill/>
-        </p:spPr>
-        <p:txBody>
-          <a:bodyPr wrap="square" lIns="45720" rIns="45720" tIns="18288" bIns="18288" anchor="t">
-            <a:spAutoFit/>
-          </a:bodyPr>
-          <a:lstStyle/>
-          <a:p>
-            <a:pPr algn="l"/>
-            <a:r>
-              <a:rPr sz="1700" b="0" i="1">
-                <a:solidFill>
-                  <a:srgbClr val="6B6B6B"/>
-                </a:solidFill>
-                <a:latin typeface="Century Schoolbook"/>
-              </a:rPr>
-              <a:t>Answer.</a:t>
-            </a:r>
-          </a:p>
-        </p:txBody>
-      </p:sp>
       <p:cxnSp>
         <p:nvCxnSpPr>
-          <p:cNvPr id="6" name="Connector 5"/>
+          <p:cNvPr id="5" name="Connector 4"/>
           <p:cNvCxnSpPr/>
           <p:nvPr/>
         </p:nvCxnSpPr>
@@ -5306,7 +4863,7 @@
       </p:cxnSp>
       <p:sp>
         <p:nvSpPr>
-          <p:cNvPr id="7" name="TextBox 6"/>
+          <p:cNvPr id="6" name="TextBox 5"/>
           <p:cNvSpPr txBox="1"/>
           <p:nvPr/>
         </p:nvSpPr>
@@ -5341,7 +4898,7 @@
       </p:sp>
       <p:sp>
         <p:nvSpPr>
-          <p:cNvPr id="8" name="TextBox 7"/>
+          <p:cNvPr id="7" name="TextBox 6"/>
           <p:cNvSpPr txBox="1"/>
           <p:nvPr/>
         </p:nvSpPr>
@@ -5376,7 +4933,7 @@
       </p:sp>
       <p:pic>
         <p:nvPicPr>
-          <p:cNvPr id="9" name="Picture 8" descr="195018b9c2dda353.png"/>
+          <p:cNvPr id="8" name="Picture 7" descr="195018b9c2dda353.png"/>
           <p:cNvPicPr>
             <a:picLocks noChangeAspect="1"/>
           </p:cNvPicPr>
@@ -5400,13 +4957,13 @@
       </p:pic>
       <p:sp>
         <p:nvSpPr>
-          <p:cNvPr id="10" name="TextBox 9"/>
-          <p:cNvSpPr txBox="1"/>
-          <p:nvPr/>
-        </p:nvSpPr>
-        <p:spPr>
-          <a:xfrm>
-            <a:off x="777240" y="3627119"/>
+          <p:cNvPr id="9" name="TextBox 8"/>
+          <p:cNvSpPr txBox="1"/>
+          <p:nvPr/>
+        </p:nvSpPr>
+        <p:spPr>
+          <a:xfrm>
+            <a:off x="777240" y="3809999"/>
             <a:ext cx="10607040" cy="429370"/>
           </a:xfrm>
           <a:prstGeom prst="rect">
@@ -5422,62 +4979,26 @@
           <a:p>
             <a:pPr algn="ctr"/>
             <a:r>
-              <a:rPr sz="2400" b="0" i="0">
-                <a:solidFill>
-                  <a:srgbClr val="6B6B6B"/>
-                </a:solidFill>
-                <a:latin typeface="Century Schoolbook"/>
-              </a:rPr>
-              <a:t>x</a:t>
-            </a:r>
-            <a:r>
-              <a:rPr sz="2400" b="0" i="0" baseline="30000">
-                <a:solidFill>
-                  <a:srgbClr val="6B6B6B"/>
-                </a:solidFill>
-                <a:latin typeface="Century Schoolbook"/>
-              </a:rPr>
-              <a:t>6</a:t>
-            </a:r>
-            <a:r>
-              <a:rPr sz="2400" b="0" i="0">
-                <a:solidFill>
-                  <a:srgbClr val="6B6B6B"/>
-                </a:solidFill>
-                <a:latin typeface="Century Schoolbook"/>
-              </a:rPr>
-              <a:t> over 27y</a:t>
-            </a:r>
-            <a:r>
-              <a:rPr sz="2400" b="0" i="0" baseline="30000">
-                <a:solidFill>
-                  <a:srgbClr val="6B6B6B"/>
-                </a:solidFill>
-                <a:latin typeface="Century Schoolbook"/>
-              </a:rPr>
-              <a:t>-6</a:t>
-            </a:r>
-            <a:r>
-              <a:rPr sz="2400" b="0" i="0">
-                <a:solidFill>
-                  <a:srgbClr val="6B6B6B"/>
-                </a:solidFill>
-                <a:latin typeface="Century Schoolbook"/>
-              </a:rPr>
-              <a:t>, then move the y up</a:t>
-            </a:r>
-          </a:p>
-        </p:txBody>
-      </p:sp>
-      <p:sp>
-        <p:nvSpPr>
-          <p:cNvPr id="11" name="TextBox 10"/>
-          <p:cNvSpPr txBox="1"/>
-          <p:nvPr/>
-        </p:nvSpPr>
-        <p:spPr>
-          <a:xfrm>
-            <a:off x="4652772" y="4725924"/>
+              <a:rPr sz="2400" b="1" i="0">
+                <a:solidFill>
+                  <a:srgbClr val="1A1A1A"/>
+                </a:solidFill>
+                <a:latin typeface="Century Schoolbook"/>
+              </a:rPr>
+              <a:t>Write an equivalent expression with positive exponents only.</a:t>
+            </a:r>
+          </a:p>
+        </p:txBody>
+      </p:sp>
+      <p:sp>
+        <p:nvSpPr>
+          <p:cNvPr id="10" name="TextBox 9"/>
+          <p:cNvSpPr txBox="1"/>
+          <p:nvPr/>
+        </p:nvSpPr>
+        <p:spPr>
+          <a:xfrm>
+            <a:off x="4652772" y="4777342"/>
             <a:ext cx="1920240" cy="548640"/>
           </a:xfrm>
           <a:prstGeom prst="rect">
@@ -5506,7 +5027,7 @@
       </p:sp>
       <p:pic>
         <p:nvPicPr>
-          <p:cNvPr id="12" name="Picture 11" descr="3636f909b16359db.png"/>
+          <p:cNvPr id="11" name="Picture 10" descr="3636f909b16359db.png"/>
           <p:cNvPicPr>
             <a:picLocks noChangeAspect="1"/>
           </p:cNvPicPr>
@@ -5520,7 +5041,7 @@
         </p:blipFill>
         <p:spPr>
           <a:xfrm>
-            <a:off x="6573011" y="4480560"/>
+            <a:off x="6573011" y="4531978"/>
             <a:ext cx="935736" cy="1039368"/>
           </a:xfrm>
           <a:prstGeom prst="rect">
@@ -5651,44 +5172,9 @@
           </a:fontRef>
         </p:style>
       </p:cxnSp>
-      <p:sp>
-        <p:nvSpPr>
-          <p:cNvPr id="5" name="TextBox 4"/>
-          <p:cNvSpPr txBox="1"/>
-          <p:nvPr/>
-        </p:nvSpPr>
-        <p:spPr>
-          <a:xfrm>
-            <a:off x="777240" y="1261872"/>
-            <a:ext cx="10607040" cy="310896"/>
-          </a:xfrm>
-          <a:prstGeom prst="rect">
-            <a:avLst/>
-          </a:prstGeom>
-          <a:noFill/>
-        </p:spPr>
-        <p:txBody>
-          <a:bodyPr wrap="square" lIns="45720" rIns="45720" tIns="18288" bIns="18288" anchor="t">
-            <a:spAutoFit/>
-          </a:bodyPr>
-          <a:lstStyle/>
-          <a:p>
-            <a:pPr algn="l"/>
-            <a:r>
-              <a:rPr sz="1700" b="0" i="1">
-                <a:solidFill>
-                  <a:srgbClr val="6B6B6B"/>
-                </a:solidFill>
-                <a:latin typeface="Century Schoolbook"/>
-              </a:rPr>
-              <a:t>Boards up on three.</a:t>
-            </a:r>
-          </a:p>
-        </p:txBody>
-      </p:sp>
       <p:cxnSp>
         <p:nvCxnSpPr>
-          <p:cNvPr id="6" name="Connector 5"/>
+          <p:cNvPr id="5" name="Connector 4"/>
           <p:cNvCxnSpPr/>
           <p:nvPr/>
         </p:nvCxnSpPr>
@@ -5723,7 +5209,7 @@
       </p:cxnSp>
       <p:sp>
         <p:nvSpPr>
-          <p:cNvPr id="7" name="TextBox 6"/>
+          <p:cNvPr id="6" name="TextBox 5"/>
           <p:cNvSpPr txBox="1"/>
           <p:nvPr/>
         </p:nvSpPr>
@@ -5758,7 +5244,7 @@
       </p:sp>
       <p:sp>
         <p:nvSpPr>
-          <p:cNvPr id="8" name="TextBox 7"/>
+          <p:cNvPr id="7" name="TextBox 6"/>
           <p:cNvSpPr txBox="1"/>
           <p:nvPr/>
         </p:nvSpPr>
@@ -5793,7 +5279,7 @@
       </p:sp>
       <p:pic>
         <p:nvPicPr>
-          <p:cNvPr id="9" name="Picture 8" descr="49cdf5a8f688d8ec.png"/>
+          <p:cNvPr id="8" name="Picture 7" descr="49cdf5a8f688d8ec.png"/>
           <p:cNvPicPr>
             <a:picLocks noChangeAspect="1"/>
           </p:cNvPicPr>
@@ -5817,7 +5303,7 @@
       </p:pic>
       <p:sp>
         <p:nvSpPr>
-          <p:cNvPr id="10" name="TextBox 9"/>
+          <p:cNvPr id="9" name="TextBox 8"/>
           <p:cNvSpPr txBox="1"/>
           <p:nvPr/>
         </p:nvSpPr>
@@ -5846,41 +5332,6 @@
                 <a:latin typeface="Century Schoolbook"/>
               </a:rPr>
               <a:t>Answer it.</a:t>
-            </a:r>
-          </a:p>
-        </p:txBody>
-      </p:sp>
-      <p:sp>
-        <p:nvSpPr>
-          <p:cNvPr id="11" name="TextBox 10"/>
-          <p:cNvSpPr txBox="1"/>
-          <p:nvPr/>
-        </p:nvSpPr>
-        <p:spPr>
-          <a:xfrm>
-            <a:off x="777240" y="4828032"/>
-            <a:ext cx="10607040" cy="365760"/>
-          </a:xfrm>
-          <a:prstGeom prst="rect">
-            <a:avLst/>
-          </a:prstGeom>
-          <a:noFill/>
-        </p:spPr>
-        <p:txBody>
-          <a:bodyPr wrap="square" lIns="45720" rIns="45720" tIns="18288" bIns="18288" anchor="t">
-            <a:spAutoFit/>
-          </a:bodyPr>
-          <a:lstStyle/>
-          <a:p>
-            <a:pPr algn="ctr"/>
-            <a:r>
-              <a:rPr sz="1900" b="0" i="1">
-                <a:solidFill>
-                  <a:srgbClr val="6B6B6B"/>
-                </a:solidFill>
-                <a:latin typeface="Century Schoolbook"/>
-              </a:rPr>
-              <a:t>Rewrite with a positive exponent.</a:t>
             </a:r>
           </a:p>
         </p:txBody>
@@ -6008,44 +5459,9 @@
           </a:fontRef>
         </p:style>
       </p:cxnSp>
-      <p:sp>
-        <p:nvSpPr>
-          <p:cNvPr id="5" name="TextBox 4"/>
-          <p:cNvSpPr txBox="1"/>
-          <p:nvPr/>
-        </p:nvSpPr>
-        <p:spPr>
-          <a:xfrm>
-            <a:off x="777240" y="1261872"/>
-            <a:ext cx="10607040" cy="310896"/>
-          </a:xfrm>
-          <a:prstGeom prst="rect">
-            <a:avLst/>
-          </a:prstGeom>
-          <a:noFill/>
-        </p:spPr>
-        <p:txBody>
-          <a:bodyPr wrap="square" lIns="45720" rIns="45720" tIns="18288" bIns="18288" anchor="t">
-            <a:spAutoFit/>
-          </a:bodyPr>
-          <a:lstStyle/>
-          <a:p>
-            <a:pPr algn="l"/>
-            <a:r>
-              <a:rPr sz="1700" b="0" i="1">
-                <a:solidFill>
-                  <a:srgbClr val="6B6B6B"/>
-                </a:solidFill>
-                <a:latin typeface="Century Schoolbook"/>
-              </a:rPr>
-              <a:t>Answer.</a:t>
-            </a:r>
-          </a:p>
-        </p:txBody>
-      </p:sp>
       <p:cxnSp>
         <p:nvCxnSpPr>
-          <p:cNvPr id="6" name="Connector 5"/>
+          <p:cNvPr id="5" name="Connector 4"/>
           <p:cNvCxnSpPr/>
           <p:nvPr/>
         </p:nvCxnSpPr>
@@ -6080,7 +5496,7 @@
       </p:cxnSp>
       <p:sp>
         <p:nvSpPr>
-          <p:cNvPr id="7" name="TextBox 6"/>
+          <p:cNvPr id="6" name="TextBox 5"/>
           <p:cNvSpPr txBox="1"/>
           <p:nvPr/>
         </p:nvSpPr>
@@ -6115,7 +5531,7 @@
       </p:sp>
       <p:sp>
         <p:nvSpPr>
-          <p:cNvPr id="8" name="TextBox 7"/>
+          <p:cNvPr id="7" name="TextBox 6"/>
           <p:cNvSpPr txBox="1"/>
           <p:nvPr/>
         </p:nvSpPr>
@@ -6150,7 +5566,7 @@
       </p:sp>
       <p:pic>
         <p:nvPicPr>
-          <p:cNvPr id="9" name="Picture 8" descr="6299b72688be4fad.png"/>
+          <p:cNvPr id="8" name="Picture 7" descr="6299b72688be4fad.png"/>
           <p:cNvPicPr>
             <a:picLocks noChangeAspect="1"/>
           </p:cNvPicPr>
@@ -6174,51 +5590,7 @@
       </p:pic>
       <p:sp>
         <p:nvSpPr>
-          <p:cNvPr id="10" name="TextBox 9"/>
-          <p:cNvSpPr txBox="1"/>
-          <p:nvPr/>
-        </p:nvSpPr>
-        <p:spPr>
-          <a:xfrm>
-            <a:off x="1828800" y="2801111"/>
-            <a:ext cx="8503920" cy="548640"/>
-          </a:xfrm>
-          <a:prstGeom prst="rect">
-            <a:avLst/>
-          </a:prstGeom>
-          <a:noFill/>
-        </p:spPr>
-        <p:txBody>
-          <a:bodyPr wrap="square" lIns="45720" rIns="45720" tIns="18288" bIns="18288" anchor="t">
-            <a:spAutoFit/>
-          </a:bodyPr>
-          <a:lstStyle/>
-          <a:p>
-            <a:pPr algn="ctr"/>
-            <a:r>
-              <a:rPr sz="2400" b="0" i="0">
-                <a:solidFill>
-                  <a:srgbClr val="6B6B6B"/>
-                </a:solidFill>
-                <a:latin typeface="Century Schoolbook"/>
-              </a:rPr>
-              <a:t>reciprocal of x</a:t>
-            </a:r>
-            <a:r>
-              <a:rPr sz="2400" b="0" i="0" baseline="30000">
-                <a:solidFill>
-                  <a:srgbClr val="6B6B6B"/>
-                </a:solidFill>
-                <a:latin typeface="Century Schoolbook"/>
-              </a:rPr>
-              <a:t>4</a:t>
-            </a:r>
-          </a:p>
-        </p:txBody>
-      </p:sp>
-      <p:sp>
-        <p:nvSpPr>
-          <p:cNvPr id="11" name="TextBox 10"/>
+          <p:cNvPr id="9" name="TextBox 8"/>
           <p:cNvSpPr txBox="1"/>
           <p:nvPr/>
         </p:nvSpPr>
@@ -6253,7 +5625,7 @@
       </p:sp>
       <p:pic>
         <p:nvPicPr>
-          <p:cNvPr id="12" name="Picture 11" descr="f4033d6f9e46bb18.png"/>
+          <p:cNvPr id="10" name="Picture 9" descr="f4033d6f9e46bb18.png"/>
           <p:cNvPicPr>
             <a:picLocks noChangeAspect="1"/>
           </p:cNvPicPr>
@@ -6398,44 +5770,9 @@
           </a:fontRef>
         </p:style>
       </p:cxnSp>
-      <p:sp>
-        <p:nvSpPr>
-          <p:cNvPr id="5" name="TextBox 4"/>
-          <p:cNvSpPr txBox="1"/>
-          <p:nvPr/>
-        </p:nvSpPr>
-        <p:spPr>
-          <a:xfrm>
-            <a:off x="777240" y="1261872"/>
-            <a:ext cx="10607040" cy="310896"/>
-          </a:xfrm>
-          <a:prstGeom prst="rect">
-            <a:avLst/>
-          </a:prstGeom>
-          <a:noFill/>
-        </p:spPr>
-        <p:txBody>
-          <a:bodyPr wrap="square" lIns="45720" rIns="45720" tIns="18288" bIns="18288" anchor="t">
-            <a:spAutoFit/>
-          </a:bodyPr>
-          <a:lstStyle/>
-          <a:p>
-            <a:pPr algn="l"/>
-            <a:r>
-              <a:rPr sz="1700" b="0" i="1">
-                <a:solidFill>
-                  <a:srgbClr val="6B6B6B"/>
-                </a:solidFill>
-                <a:latin typeface="Century Schoolbook"/>
-              </a:rPr>
-              <a:t>Boards up on three.</a:t>
-            </a:r>
-          </a:p>
-        </p:txBody>
-      </p:sp>
       <p:cxnSp>
         <p:nvCxnSpPr>
-          <p:cNvPr id="6" name="Connector 5"/>
+          <p:cNvPr id="5" name="Connector 4"/>
           <p:cNvCxnSpPr/>
           <p:nvPr/>
         </p:nvCxnSpPr>
@@ -6470,7 +5807,7 @@
       </p:cxnSp>
       <p:sp>
         <p:nvSpPr>
-          <p:cNvPr id="7" name="TextBox 6"/>
+          <p:cNvPr id="6" name="TextBox 5"/>
           <p:cNvSpPr txBox="1"/>
           <p:nvPr/>
         </p:nvSpPr>
@@ -6505,7 +5842,7 @@
       </p:sp>
       <p:sp>
         <p:nvSpPr>
-          <p:cNvPr id="8" name="TextBox 7"/>
+          <p:cNvPr id="7" name="TextBox 6"/>
           <p:cNvSpPr txBox="1"/>
           <p:nvPr/>
         </p:nvSpPr>
@@ -6540,7 +5877,7 @@
       </p:sp>
       <p:pic>
         <p:nvPicPr>
-          <p:cNvPr id="9" name="Picture 8" descr="70a7739fb7946438.png"/>
+          <p:cNvPr id="8" name="Picture 7" descr="70a7739fb7946438.png"/>
           <p:cNvPicPr>
             <a:picLocks noChangeAspect="1"/>
           </p:cNvPicPr>
@@ -6564,7 +5901,7 @@
       </p:pic>
       <p:sp>
         <p:nvSpPr>
-          <p:cNvPr id="10" name="TextBox 9"/>
+          <p:cNvPr id="9" name="TextBox 8"/>
           <p:cNvSpPr txBox="1"/>
           <p:nvPr/>
         </p:nvSpPr>
@@ -6593,41 +5930,6 @@
                 <a:latin typeface="Century Schoolbook"/>
               </a:rPr>
               <a:t>Answer it.</a:t>
-            </a:r>
-          </a:p>
-        </p:txBody>
-      </p:sp>
-      <p:sp>
-        <p:nvSpPr>
-          <p:cNvPr id="11" name="TextBox 10"/>
-          <p:cNvSpPr txBox="1"/>
-          <p:nvPr/>
-        </p:nvSpPr>
-        <p:spPr>
-          <a:xfrm>
-            <a:off x="777240" y="4828032"/>
-            <a:ext cx="10607040" cy="365760"/>
-          </a:xfrm>
-          <a:prstGeom prst="rect">
-            <a:avLst/>
-          </a:prstGeom>
-          <a:noFill/>
-        </p:spPr>
-        <p:txBody>
-          <a:bodyPr wrap="square" lIns="45720" rIns="45720" tIns="18288" bIns="18288" anchor="t">
-            <a:spAutoFit/>
-          </a:bodyPr>
-          <a:lstStyle/>
-          <a:p>
-            <a:pPr algn="ctr"/>
-            <a:r>
-              <a:rPr sz="1900" b="0" i="1">
-                <a:solidFill>
-                  <a:srgbClr val="6B6B6B"/>
-                </a:solidFill>
-                <a:latin typeface="Century Schoolbook"/>
-              </a:rPr>
-              <a:t>Rewrite with a positive exponent.</a:t>
             </a:r>
           </a:p>
         </p:txBody>
@@ -6755,44 +6057,9 @@
           </a:fontRef>
         </p:style>
       </p:cxnSp>
-      <p:sp>
-        <p:nvSpPr>
-          <p:cNvPr id="5" name="TextBox 4"/>
-          <p:cNvSpPr txBox="1"/>
-          <p:nvPr/>
-        </p:nvSpPr>
-        <p:spPr>
-          <a:xfrm>
-            <a:off x="777240" y="1261872"/>
-            <a:ext cx="10607040" cy="310896"/>
-          </a:xfrm>
-          <a:prstGeom prst="rect">
-            <a:avLst/>
-          </a:prstGeom>
-          <a:noFill/>
-        </p:spPr>
-        <p:txBody>
-          <a:bodyPr wrap="square" lIns="45720" rIns="45720" tIns="18288" bIns="18288" anchor="t">
-            <a:spAutoFit/>
-          </a:bodyPr>
-          <a:lstStyle/>
-          <a:p>
-            <a:pPr algn="l"/>
-            <a:r>
-              <a:rPr sz="1700" b="0" i="1">
-                <a:solidFill>
-                  <a:srgbClr val="6B6B6B"/>
-                </a:solidFill>
-                <a:latin typeface="Century Schoolbook"/>
-              </a:rPr>
-              <a:t>Answer.</a:t>
-            </a:r>
-          </a:p>
-        </p:txBody>
-      </p:sp>
       <p:cxnSp>
         <p:nvCxnSpPr>
-          <p:cNvPr id="6" name="Connector 5"/>
+          <p:cNvPr id="5" name="Connector 4"/>
           <p:cNvCxnSpPr/>
           <p:nvPr/>
         </p:nvCxnSpPr>
@@ -6827,7 +6094,7 @@
       </p:cxnSp>
       <p:sp>
         <p:nvSpPr>
-          <p:cNvPr id="7" name="TextBox 6"/>
+          <p:cNvPr id="6" name="TextBox 5"/>
           <p:cNvSpPr txBox="1"/>
           <p:nvPr/>
         </p:nvSpPr>
@@ -6862,7 +6129,7 @@
       </p:sp>
       <p:sp>
         <p:nvSpPr>
-          <p:cNvPr id="8" name="TextBox 7"/>
+          <p:cNvPr id="7" name="TextBox 6"/>
           <p:cNvSpPr txBox="1"/>
           <p:nvPr/>
         </p:nvSpPr>
@@ -6897,7 +6164,7 @@
       </p:sp>
       <p:pic>
         <p:nvPicPr>
-          <p:cNvPr id="9" name="Picture 8" descr="1b19adcea2f05b41.png"/>
+          <p:cNvPr id="8" name="Picture 7" descr="1b19adcea2f05b41.png"/>
           <p:cNvPicPr>
             <a:picLocks noChangeAspect="1"/>
           </p:cNvPicPr>
@@ -6921,42 +6188,7 @@
       </p:pic>
       <p:sp>
         <p:nvSpPr>
-          <p:cNvPr id="10" name="TextBox 9"/>
-          <p:cNvSpPr txBox="1"/>
-          <p:nvPr/>
-        </p:nvSpPr>
-        <p:spPr>
-          <a:xfrm>
-            <a:off x="1828800" y="3410711"/>
-            <a:ext cx="8503920" cy="548640"/>
-          </a:xfrm>
-          <a:prstGeom prst="rect">
-            <a:avLst/>
-          </a:prstGeom>
-          <a:noFill/>
-        </p:spPr>
-        <p:txBody>
-          <a:bodyPr wrap="square" lIns="45720" rIns="45720" tIns="18288" bIns="18288" anchor="t">
-            <a:spAutoFit/>
-          </a:bodyPr>
-          <a:lstStyle/>
-          <a:p>
-            <a:pPr algn="ctr"/>
-            <a:r>
-              <a:rPr sz="2400" b="0" i="0">
-                <a:solidFill>
-                  <a:srgbClr val="6B6B6B"/>
-                </a:solidFill>
-                <a:latin typeface="Century Schoolbook"/>
-              </a:rPr>
-              <a:t>the power moves up</a:t>
-            </a:r>
-          </a:p>
-        </p:txBody>
-      </p:sp>
-      <p:sp>
-        <p:nvSpPr>
-          <p:cNvPr id="11" name="TextBox 10"/>
+          <p:cNvPr id="9" name="TextBox 8"/>
           <p:cNvSpPr txBox="1"/>
           <p:nvPr/>
         </p:nvSpPr>
@@ -6991,7 +6223,7 @@
       </p:sp>
       <p:pic>
         <p:nvPicPr>
-          <p:cNvPr id="12" name="Picture 11" descr="666f79c957ad2d7e.png"/>
+          <p:cNvPr id="10" name="Picture 9" descr="666f79c957ad2d7e.png"/>
           <p:cNvPicPr>
             <a:picLocks noChangeAspect="1"/>
           </p:cNvPicPr>
@@ -7136,44 +6368,9 @@
           </a:fontRef>
         </p:style>
       </p:cxnSp>
-      <p:sp>
-        <p:nvSpPr>
-          <p:cNvPr id="5" name="TextBox 4"/>
-          <p:cNvSpPr txBox="1"/>
-          <p:nvPr/>
-        </p:nvSpPr>
-        <p:spPr>
-          <a:xfrm>
-            <a:off x="777240" y="1261872"/>
-            <a:ext cx="10607040" cy="310896"/>
-          </a:xfrm>
-          <a:prstGeom prst="rect">
-            <a:avLst/>
-          </a:prstGeom>
-          <a:noFill/>
-        </p:spPr>
-        <p:txBody>
-          <a:bodyPr wrap="square" lIns="45720" rIns="45720" tIns="18288" bIns="18288" anchor="t">
-            <a:spAutoFit/>
-          </a:bodyPr>
-          <a:lstStyle/>
-          <a:p>
-            <a:pPr algn="l"/>
-            <a:r>
-              <a:rPr sz="1700" b="0" i="1">
-                <a:solidFill>
-                  <a:srgbClr val="6B6B6B"/>
-                </a:solidFill>
-                <a:latin typeface="Century Schoolbook"/>
-              </a:rPr>
-              <a:t>Boards up on three.</a:t>
-            </a:r>
-          </a:p>
-        </p:txBody>
-      </p:sp>
       <p:cxnSp>
         <p:nvCxnSpPr>
-          <p:cNvPr id="6" name="Connector 5"/>
+          <p:cNvPr id="5" name="Connector 4"/>
           <p:cNvCxnSpPr/>
           <p:nvPr/>
         </p:nvCxnSpPr>
@@ -7208,7 +6405,7 @@
       </p:cxnSp>
       <p:sp>
         <p:nvSpPr>
-          <p:cNvPr id="7" name="TextBox 6"/>
+          <p:cNvPr id="6" name="TextBox 5"/>
           <p:cNvSpPr txBox="1"/>
           <p:nvPr/>
         </p:nvSpPr>
@@ -7243,7 +6440,7 @@
       </p:sp>
       <p:sp>
         <p:nvSpPr>
-          <p:cNvPr id="8" name="TextBox 7"/>
+          <p:cNvPr id="7" name="TextBox 6"/>
           <p:cNvSpPr txBox="1"/>
           <p:nvPr/>
         </p:nvSpPr>
@@ -7278,7 +6475,7 @@
       </p:sp>
       <p:sp>
         <p:nvSpPr>
-          <p:cNvPr id="9" name="TextBox 8"/>
+          <p:cNvPr id="8" name="TextBox 7"/>
           <p:cNvSpPr txBox="1"/>
           <p:nvPr/>
         </p:nvSpPr>
@@ -7313,7 +6510,7 @@
       </p:sp>
       <p:pic>
         <p:nvPicPr>
-          <p:cNvPr id="10" name="Picture 9" descr="36ab662f01dc4d91.png"/>
+          <p:cNvPr id="9" name="Picture 8" descr="36ab662f01dc4d91.png"/>
           <p:cNvPicPr>
             <a:picLocks noChangeAspect="1"/>
           </p:cNvPicPr>
@@ -7337,7 +6534,7 @@
       </p:pic>
       <p:sp>
         <p:nvSpPr>
-          <p:cNvPr id="11" name="TextBox 10"/>
+          <p:cNvPr id="10" name="TextBox 9"/>
           <p:cNvSpPr txBox="1"/>
           <p:nvPr/>
         </p:nvSpPr>
@@ -7372,7 +6569,7 @@
       </p:sp>
       <p:pic>
         <p:nvPicPr>
-          <p:cNvPr id="12" name="Picture 11" descr="47fe29c90fa7b53b.png"/>
+          <p:cNvPr id="11" name="Picture 10" descr="47fe29c90fa7b53b.png"/>
           <p:cNvPicPr>
             <a:picLocks noChangeAspect="1"/>
           </p:cNvPicPr>
@@ -7396,7 +6593,7 @@
       </p:pic>
       <p:sp>
         <p:nvSpPr>
-          <p:cNvPr id="13" name="TextBox 12"/>
+          <p:cNvPr id="12" name="TextBox 11"/>
           <p:cNvSpPr txBox="1"/>
           <p:nvPr/>
         </p:nvSpPr>
@@ -7431,7 +6628,7 @@
       </p:sp>
       <p:sp>
         <p:nvSpPr>
-          <p:cNvPr id="14" name="TextBox 13"/>
+          <p:cNvPr id="13" name="TextBox 12"/>
           <p:cNvSpPr txBox="1"/>
           <p:nvPr/>
         </p:nvSpPr>
@@ -7466,7 +6663,7 @@
       </p:sp>
       <p:sp>
         <p:nvSpPr>
-          <p:cNvPr id="15" name="TextBox 14"/>
+          <p:cNvPr id="14" name="TextBox 13"/>
           <p:cNvSpPr txBox="1"/>
           <p:nvPr/>
         </p:nvSpPr>
@@ -7501,7 +6698,7 @@
       </p:sp>
       <p:sp>
         <p:nvSpPr>
-          <p:cNvPr id="16" name="TextBox 15"/>
+          <p:cNvPr id="15" name="TextBox 14"/>
           <p:cNvSpPr txBox="1"/>
           <p:nvPr/>
         </p:nvSpPr>
@@ -7657,44 +6854,9 @@
           </a:fontRef>
         </p:style>
       </p:cxnSp>
-      <p:sp>
-        <p:nvSpPr>
-          <p:cNvPr id="5" name="TextBox 4"/>
-          <p:cNvSpPr txBox="1"/>
-          <p:nvPr/>
-        </p:nvSpPr>
-        <p:spPr>
-          <a:xfrm>
-            <a:off x="777240" y="1261872"/>
-            <a:ext cx="10607040" cy="310896"/>
-          </a:xfrm>
-          <a:prstGeom prst="rect">
-            <a:avLst/>
-          </a:prstGeom>
-          <a:noFill/>
-        </p:spPr>
-        <p:txBody>
-          <a:bodyPr wrap="square" lIns="45720" rIns="45720" tIns="18288" bIns="18288" anchor="t">
-            <a:spAutoFit/>
-          </a:bodyPr>
-          <a:lstStyle/>
-          <a:p>
-            <a:pPr algn="l"/>
-            <a:r>
-              <a:rPr sz="1700" b="0" i="1">
-                <a:solidFill>
-                  <a:srgbClr val="6B6B6B"/>
-                </a:solidFill>
-                <a:latin typeface="Century Schoolbook"/>
-              </a:rPr>
-              <a:t>On your own. Four minutes. No notes.</a:t>
-            </a:r>
-          </a:p>
-        </p:txBody>
-      </p:sp>
       <p:cxnSp>
         <p:nvCxnSpPr>
-          <p:cNvPr id="6" name="Connector 5"/>
+          <p:cNvPr id="5" name="Connector 4"/>
           <p:cNvCxnSpPr/>
           <p:nvPr/>
         </p:nvCxnSpPr>
@@ -7729,7 +6891,7 @@
       </p:cxnSp>
       <p:sp>
         <p:nvSpPr>
-          <p:cNvPr id="7" name="TextBox 6"/>
+          <p:cNvPr id="6" name="TextBox 5"/>
           <p:cNvSpPr txBox="1"/>
           <p:nvPr/>
         </p:nvSpPr>
@@ -7764,7 +6926,7 @@
       </p:sp>
       <p:sp>
         <p:nvSpPr>
-          <p:cNvPr id="8" name="TextBox 7"/>
+          <p:cNvPr id="7" name="TextBox 6"/>
           <p:cNvSpPr txBox="1"/>
           <p:nvPr/>
         </p:nvSpPr>
@@ -7799,13 +6961,13 @@
       </p:sp>
       <p:sp>
         <p:nvSpPr>
-          <p:cNvPr id="9" name="TextBox 8"/>
-          <p:cNvSpPr txBox="1"/>
-          <p:nvPr/>
-        </p:nvSpPr>
-        <p:spPr>
-          <a:xfrm>
-            <a:off x="1874519" y="1760220"/>
+          <p:cNvPr id="8" name="TextBox 7"/>
+          <p:cNvSpPr txBox="1"/>
+          <p:nvPr/>
+        </p:nvSpPr>
+        <p:spPr>
+          <a:xfrm>
+            <a:off x="1874519" y="1440180"/>
             <a:ext cx="4874632" cy="457200"/>
           </a:xfrm>
           <a:prstGeom prst="rect">
@@ -7834,7 +6996,7 @@
       </p:sp>
       <p:pic>
         <p:nvPicPr>
-          <p:cNvPr id="10" name="Picture 9" descr="c0ecde76b6542cae.png"/>
+          <p:cNvPr id="9" name="Picture 8" descr="c0ecde76b6542cae.png"/>
           <p:cNvPicPr>
             <a:picLocks noChangeAspect="1"/>
           </p:cNvPicPr>
@@ -7848,7 +7010,7 @@
         </p:blipFill>
         <p:spPr>
           <a:xfrm>
-            <a:off x="6611992" y="1821180"/>
+            <a:off x="6611992" y="1501140"/>
             <a:ext cx="771144" cy="335280"/>
           </a:xfrm>
           <a:prstGeom prst="rect">
@@ -7858,13 +7020,13 @@
       </p:pic>
       <p:sp>
         <p:nvSpPr>
-          <p:cNvPr id="11" name="TextBox 10"/>
-          <p:cNvSpPr txBox="1"/>
-          <p:nvPr/>
-        </p:nvSpPr>
-        <p:spPr>
-          <a:xfrm>
-            <a:off x="1874519" y="2372868"/>
+          <p:cNvPr id="10" name="TextBox 9"/>
+          <p:cNvSpPr txBox="1"/>
+          <p:nvPr/>
+        </p:nvSpPr>
+        <p:spPr>
+          <a:xfrm>
+            <a:off x="1874519" y="2052828"/>
             <a:ext cx="3064939" cy="457200"/>
           </a:xfrm>
           <a:prstGeom prst="rect">
@@ -7893,7 +7055,7 @@
       </p:sp>
       <p:pic>
         <p:nvPicPr>
-          <p:cNvPr id="12" name="Picture 11" descr="baf21e0fadb8b9e2.png"/>
+          <p:cNvPr id="11" name="Picture 10" descr="baf21e0fadb8b9e2.png"/>
           <p:cNvPicPr>
             <a:picLocks noChangeAspect="1"/>
           </p:cNvPicPr>
@@ -7907,7 +7069,7 @@
         </p:blipFill>
         <p:spPr>
           <a:xfrm>
-            <a:off x="4802299" y="2461260"/>
+            <a:off x="4802299" y="2141220"/>
             <a:ext cx="426720" cy="280416"/>
           </a:xfrm>
           <a:prstGeom prst="rect">
@@ -7917,13 +7079,13 @@
       </p:pic>
       <p:sp>
         <p:nvSpPr>
-          <p:cNvPr id="13" name="TextBox 12"/>
-          <p:cNvSpPr txBox="1"/>
-          <p:nvPr/>
-        </p:nvSpPr>
-        <p:spPr>
-          <a:xfrm>
-            <a:off x="1874519" y="2985516"/>
+          <p:cNvPr id="12" name="TextBox 11"/>
+          <p:cNvSpPr txBox="1"/>
+          <p:nvPr/>
+        </p:nvSpPr>
+        <p:spPr>
+          <a:xfrm>
+            <a:off x="1874519" y="2665476"/>
             <a:ext cx="3341646" cy="457200"/>
           </a:xfrm>
           <a:prstGeom prst="rect">
@@ -7952,7 +7114,7 @@
       </p:sp>
       <p:pic>
         <p:nvPicPr>
-          <p:cNvPr id="14" name="Picture 13" descr="57c771350ef6ea07.png"/>
+          <p:cNvPr id="13" name="Picture 12" descr="57c771350ef6ea07.png"/>
           <p:cNvPicPr>
             <a:picLocks noChangeAspect="1"/>
           </p:cNvPicPr>
@@ -7966,7 +7128,7 @@
         </p:blipFill>
         <p:spPr>
           <a:xfrm>
-            <a:off x="5079006" y="3009900"/>
+            <a:off x="5079006" y="2689860"/>
             <a:ext cx="688848" cy="408432"/>
           </a:xfrm>
           <a:prstGeom prst="rect">
@@ -7976,13 +7138,13 @@
       </p:pic>
       <p:sp>
         <p:nvSpPr>
-          <p:cNvPr id="15" name="TextBox 14"/>
-          <p:cNvSpPr txBox="1"/>
-          <p:nvPr/>
-        </p:nvSpPr>
-        <p:spPr>
-          <a:xfrm>
-            <a:off x="5767854" y="2985516"/>
+          <p:cNvPr id="14" name="TextBox 13"/>
+          <p:cNvSpPr txBox="1"/>
+          <p:nvPr/>
+        </p:nvSpPr>
+        <p:spPr>
+          <a:xfrm>
+            <a:off x="5767854" y="2665476"/>
             <a:ext cx="1156543" cy="457200"/>
           </a:xfrm>
           <a:prstGeom prst="rect">
@@ -8011,13 +7173,13 @@
       </p:sp>
       <p:sp>
         <p:nvSpPr>
-          <p:cNvPr id="16" name="TextBox 15"/>
-          <p:cNvSpPr txBox="1"/>
-          <p:nvPr/>
-        </p:nvSpPr>
-        <p:spPr>
-          <a:xfrm>
-            <a:off x="1874519" y="3668268"/>
+          <p:cNvPr id="15" name="TextBox 14"/>
+          <p:cNvSpPr txBox="1"/>
+          <p:nvPr/>
+        </p:nvSpPr>
+        <p:spPr>
+          <a:xfrm>
+            <a:off x="1874519" y="3348228"/>
             <a:ext cx="4395048" cy="457200"/>
           </a:xfrm>
           <a:prstGeom prst="rect">
@@ -8046,7 +7208,7 @@
       </p:sp>
       <p:pic>
         <p:nvPicPr>
-          <p:cNvPr id="17" name="Picture 16" descr="e8022fa09c25c018.png"/>
+          <p:cNvPr id="16" name="Picture 15" descr="e8022fa09c25c018.png"/>
           <p:cNvPicPr>
             <a:picLocks noChangeAspect="1"/>
           </p:cNvPicPr>
@@ -8060,7 +7222,7 @@
         </p:blipFill>
         <p:spPr>
           <a:xfrm>
-            <a:off x="6132408" y="3621024"/>
+            <a:off x="6132408" y="3300984"/>
             <a:ext cx="170688" cy="551688"/>
           </a:xfrm>
           <a:prstGeom prst="rect">
@@ -8070,13 +7232,13 @@
       </p:pic>
       <p:sp>
         <p:nvSpPr>
-          <p:cNvPr id="18" name="TextBox 17"/>
-          <p:cNvSpPr txBox="1"/>
-          <p:nvPr/>
-        </p:nvSpPr>
-        <p:spPr>
-          <a:xfrm>
-            <a:off x="6303096" y="3668268"/>
+          <p:cNvPr id="17" name="TextBox 16"/>
+          <p:cNvSpPr txBox="1"/>
+          <p:nvPr/>
+        </p:nvSpPr>
+        <p:spPr>
+          <a:xfrm>
+            <a:off x="6303096" y="3348228"/>
             <a:ext cx="433854" cy="457200"/>
           </a:xfrm>
           <a:prstGeom prst="rect">
@@ -8226,44 +7388,9 @@
           </a:fontRef>
         </p:style>
       </p:cxnSp>
-      <p:sp>
-        <p:nvSpPr>
-          <p:cNvPr id="5" name="TextBox 4"/>
-          <p:cNvSpPr txBox="1"/>
-          <p:nvPr/>
-        </p:nvSpPr>
-        <p:spPr>
-          <a:xfrm>
-            <a:off x="777240" y="1261872"/>
-            <a:ext cx="10607040" cy="310896"/>
-          </a:xfrm>
-          <a:prstGeom prst="rect">
-            <a:avLst/>
-          </a:prstGeom>
-          <a:noFill/>
-        </p:spPr>
-        <p:txBody>
-          <a:bodyPr wrap="square" lIns="45720" rIns="45720" tIns="18288" bIns="18288" anchor="t">
-            <a:spAutoFit/>
-          </a:bodyPr>
-          <a:lstStyle/>
-          <a:p>
-            <a:pPr algn="l"/>
-            <a:r>
-              <a:rPr sz="1700" b="0" i="1">
-                <a:solidFill>
-                  <a:srgbClr val="6B6B6B"/>
-                </a:solidFill>
-                <a:latin typeface="Century Schoolbook"/>
-              </a:rPr>
-              <a:t>Answer.</a:t>
-            </a:r>
-          </a:p>
-        </p:txBody>
-      </p:sp>
       <p:cxnSp>
         <p:nvCxnSpPr>
-          <p:cNvPr id="6" name="Connector 5"/>
+          <p:cNvPr id="5" name="Connector 4"/>
           <p:cNvCxnSpPr/>
           <p:nvPr/>
         </p:nvCxnSpPr>
@@ -8298,7 +7425,7 @@
       </p:cxnSp>
       <p:sp>
         <p:nvSpPr>
-          <p:cNvPr id="7" name="TextBox 6"/>
+          <p:cNvPr id="6" name="TextBox 5"/>
           <p:cNvSpPr txBox="1"/>
           <p:nvPr/>
         </p:nvSpPr>
@@ -8333,7 +7460,7 @@
       </p:sp>
       <p:sp>
         <p:nvSpPr>
-          <p:cNvPr id="8" name="TextBox 7"/>
+          <p:cNvPr id="7" name="TextBox 6"/>
           <p:cNvSpPr txBox="1"/>
           <p:nvPr/>
         </p:nvSpPr>
@@ -8368,7 +7495,7 @@
       </p:sp>
       <p:sp>
         <p:nvSpPr>
-          <p:cNvPr id="9" name="TextBox 8"/>
+          <p:cNvPr id="8" name="TextBox 7"/>
           <p:cNvSpPr txBox="1"/>
           <p:nvPr/>
         </p:nvSpPr>
@@ -8403,7 +7530,7 @@
       </p:sp>
       <p:pic>
         <p:nvPicPr>
-          <p:cNvPr id="10" name="Picture 9" descr="36ab662f01dc4d91.png"/>
+          <p:cNvPr id="9" name="Picture 8" descr="36ab662f01dc4d91.png"/>
           <p:cNvPicPr>
             <a:picLocks noChangeAspect="1"/>
           </p:cNvPicPr>
@@ -8427,7 +7554,7 @@
       </p:pic>
       <p:sp>
         <p:nvSpPr>
-          <p:cNvPr id="11" name="TextBox 10"/>
+          <p:cNvPr id="10" name="TextBox 9"/>
           <p:cNvSpPr txBox="1"/>
           <p:nvPr/>
         </p:nvSpPr>
@@ -8462,7 +7589,7 @@
       </p:sp>
       <p:pic>
         <p:nvPicPr>
-          <p:cNvPr id="12" name="Picture 11" descr="69ad6c7cdf468fd0.png"/>
+          <p:cNvPr id="11" name="Picture 10" descr="69ad6c7cdf468fd0.png"/>
           <p:cNvPicPr>
             <a:picLocks noChangeAspect="1"/>
           </p:cNvPicPr>
@@ -8486,7 +7613,7 @@
       </p:pic>
       <p:sp>
         <p:nvSpPr>
-          <p:cNvPr id="13" name="TextBox 12"/>
+          <p:cNvPr id="12" name="TextBox 11"/>
           <p:cNvSpPr txBox="1"/>
           <p:nvPr/>
         </p:nvSpPr>
@@ -8521,7 +7648,7 @@
       </p:sp>
       <p:sp>
         <p:nvSpPr>
-          <p:cNvPr id="14" name="TextBox 13"/>
+          <p:cNvPr id="13" name="TextBox 12"/>
           <p:cNvSpPr txBox="1"/>
           <p:nvPr/>
         </p:nvSpPr>
@@ -8556,7 +7683,7 @@
       </p:sp>
       <p:sp>
         <p:nvSpPr>
-          <p:cNvPr id="15" name="TextBox 14"/>
+          <p:cNvPr id="14" name="TextBox 13"/>
           <p:cNvSpPr txBox="1"/>
           <p:nvPr/>
         </p:nvSpPr>
@@ -8591,69 +7718,7 @@
       </p:sp>
       <p:sp>
         <p:nvSpPr>
-          <p:cNvPr id="16" name="TextBox 15"/>
-          <p:cNvSpPr txBox="1"/>
-          <p:nvPr/>
-        </p:nvSpPr>
-        <p:spPr>
-          <a:xfrm>
-            <a:off x="1828800" y="3656804"/>
-            <a:ext cx="8503920" cy="548640"/>
-          </a:xfrm>
-          <a:prstGeom prst="rect">
-            <a:avLst/>
-          </a:prstGeom>
-          <a:noFill/>
-        </p:spPr>
-        <p:txBody>
-          <a:bodyPr wrap="square" lIns="45720" rIns="45720" tIns="18288" bIns="18288" anchor="t">
-            <a:spAutoFit/>
-          </a:bodyPr>
-          <a:lstStyle/>
-          <a:p>
-            <a:pPr algn="ctr"/>
-            <a:r>
-              <a:rPr sz="2400" b="0" i="0">
-                <a:solidFill>
-                  <a:srgbClr val="6B6B6B"/>
-                </a:solidFill>
-                <a:latin typeface="Century Schoolbook"/>
-              </a:rPr>
-              <a:t>3 · 2</a:t>
-            </a:r>
-            <a:r>
-              <a:rPr sz="2400" b="0" i="0" baseline="30000">
-                <a:solidFill>
-                  <a:srgbClr val="6B6B6B"/>
-                </a:solidFill>
-                <a:latin typeface="Century Schoolbook"/>
-              </a:rPr>
-              <a:t>-2</a:t>
-            </a:r>
-            <a:r>
-              <a:rPr sz="2400" b="0" i="0">
-                <a:solidFill>
-                  <a:srgbClr val="6B6B6B"/>
-                </a:solidFill>
-                <a:latin typeface="Century Schoolbook"/>
-              </a:rPr>
-              <a:t> = 3 over 2</a:t>
-            </a:r>
-            <a:r>
-              <a:rPr sz="2400" b="0" i="0" baseline="30000">
-                <a:solidFill>
-                  <a:srgbClr val="6B6B6B"/>
-                </a:solidFill>
-                <a:latin typeface="Century Schoolbook"/>
-              </a:rPr>
-              <a:t>2</a:t>
-            </a:r>
-          </a:p>
-        </p:txBody>
-      </p:sp>
-      <p:sp>
-        <p:nvSpPr>
-          <p:cNvPr id="17" name="TextBox 16"/>
+          <p:cNvPr id="15" name="TextBox 14"/>
           <p:cNvSpPr txBox="1"/>
           <p:nvPr/>
         </p:nvSpPr>
@@ -8688,7 +7753,7 @@
       </p:sp>
       <p:pic>
         <p:nvPicPr>
-          <p:cNvPr id="18" name="Picture 17" descr="c414c4c741c779c8.png"/>
+          <p:cNvPr id="16" name="Picture 15" descr="c414c4c741c779c8.png"/>
           <p:cNvPicPr>
             <a:picLocks noChangeAspect="1"/>
           </p:cNvPicPr>
@@ -8833,44 +7898,9 @@
           </a:fontRef>
         </p:style>
       </p:cxnSp>
-      <p:sp>
-        <p:nvSpPr>
-          <p:cNvPr id="5" name="TextBox 4"/>
-          <p:cNvSpPr txBox="1"/>
-          <p:nvPr/>
-        </p:nvSpPr>
-        <p:spPr>
-          <a:xfrm>
-            <a:off x="777240" y="1261872"/>
-            <a:ext cx="10607040" cy="310896"/>
-          </a:xfrm>
-          <a:prstGeom prst="rect">
-            <a:avLst/>
-          </a:prstGeom>
-          <a:noFill/>
-        </p:spPr>
-        <p:txBody>
-          <a:bodyPr wrap="square" lIns="45720" rIns="45720" tIns="18288" bIns="18288" anchor="t">
-            <a:spAutoFit/>
-          </a:bodyPr>
-          <a:lstStyle/>
-          <a:p>
-            <a:pPr algn="l"/>
-            <a:r>
-              <a:rPr sz="1700" b="0" i="1">
-                <a:solidFill>
-                  <a:srgbClr val="6B6B6B"/>
-                </a:solidFill>
-                <a:latin typeface="Century Schoolbook"/>
-              </a:rPr>
-              <a:t>Boards up on three.</a:t>
-            </a:r>
-          </a:p>
-        </p:txBody>
-      </p:sp>
       <p:cxnSp>
         <p:nvCxnSpPr>
-          <p:cNvPr id="6" name="Connector 5"/>
+          <p:cNvPr id="5" name="Connector 4"/>
           <p:cNvCxnSpPr/>
           <p:nvPr/>
         </p:nvCxnSpPr>
@@ -8905,7 +7935,7 @@
       </p:cxnSp>
       <p:sp>
         <p:nvSpPr>
-          <p:cNvPr id="7" name="TextBox 6"/>
+          <p:cNvPr id="6" name="TextBox 5"/>
           <p:cNvSpPr txBox="1"/>
           <p:nvPr/>
         </p:nvSpPr>
@@ -8940,7 +7970,7 @@
       </p:sp>
       <p:sp>
         <p:nvSpPr>
-          <p:cNvPr id="8" name="TextBox 7"/>
+          <p:cNvPr id="7" name="TextBox 6"/>
           <p:cNvSpPr txBox="1"/>
           <p:nvPr/>
         </p:nvSpPr>
@@ -8975,7 +8005,7 @@
       </p:sp>
       <p:pic>
         <p:nvPicPr>
-          <p:cNvPr id="9" name="Picture 8" descr="42962fa6a8bfce14.png"/>
+          <p:cNvPr id="8" name="Picture 7" descr="42962fa6a8bfce14.png"/>
           <p:cNvPicPr>
             <a:picLocks noChangeAspect="1"/>
           </p:cNvPicPr>
@@ -8999,7 +8029,7 @@
       </p:pic>
       <p:sp>
         <p:nvSpPr>
-          <p:cNvPr id="10" name="TextBox 9"/>
+          <p:cNvPr id="9" name="TextBox 8"/>
           <p:cNvSpPr txBox="1"/>
           <p:nvPr/>
         </p:nvSpPr>
@@ -9028,41 +8058,6 @@
                 <a:latin typeface="Century Schoolbook"/>
               </a:rPr>
               <a:t>Answer it.</a:t>
-            </a:r>
-          </a:p>
-        </p:txBody>
-      </p:sp>
-      <p:sp>
-        <p:nvSpPr>
-          <p:cNvPr id="11" name="TextBox 10"/>
-          <p:cNvSpPr txBox="1"/>
-          <p:nvPr/>
-        </p:nvSpPr>
-        <p:spPr>
-          <a:xfrm>
-            <a:off x="777240" y="4828032"/>
-            <a:ext cx="10607040" cy="365760"/>
-          </a:xfrm>
-          <a:prstGeom prst="rect">
-            <a:avLst/>
-          </a:prstGeom>
-          <a:noFill/>
-        </p:spPr>
-        <p:txBody>
-          <a:bodyPr wrap="square" lIns="45720" rIns="45720" tIns="18288" bIns="18288" anchor="t">
-            <a:spAutoFit/>
-          </a:bodyPr>
-          <a:lstStyle/>
-          <a:p>
-            <a:pPr algn="ctr"/>
-            <a:r>
-              <a:rPr sz="1900" b="0" i="1">
-                <a:solidFill>
-                  <a:srgbClr val="6B6B6B"/>
-                </a:solidFill>
-                <a:latin typeface="Century Schoolbook"/>
-              </a:rPr>
-              <a:t>Rewrite with positive exponents.</a:t>
             </a:r>
           </a:p>
         </p:txBody>
@@ -9190,44 +8185,9 @@
           </a:fontRef>
         </p:style>
       </p:cxnSp>
-      <p:sp>
-        <p:nvSpPr>
-          <p:cNvPr id="5" name="TextBox 4"/>
-          <p:cNvSpPr txBox="1"/>
-          <p:nvPr/>
-        </p:nvSpPr>
-        <p:spPr>
-          <a:xfrm>
-            <a:off x="777240" y="1261872"/>
-            <a:ext cx="10607040" cy="310896"/>
-          </a:xfrm>
-          <a:prstGeom prst="rect">
-            <a:avLst/>
-          </a:prstGeom>
-          <a:noFill/>
-        </p:spPr>
-        <p:txBody>
-          <a:bodyPr wrap="square" lIns="45720" rIns="45720" tIns="18288" bIns="18288" anchor="t">
-            <a:spAutoFit/>
-          </a:bodyPr>
-          <a:lstStyle/>
-          <a:p>
-            <a:pPr algn="l"/>
-            <a:r>
-              <a:rPr sz="1700" b="0" i="1">
-                <a:solidFill>
-                  <a:srgbClr val="6B6B6B"/>
-                </a:solidFill>
-                <a:latin typeface="Century Schoolbook"/>
-              </a:rPr>
-              <a:t>Answer.</a:t>
-            </a:r>
-          </a:p>
-        </p:txBody>
-      </p:sp>
       <p:cxnSp>
         <p:nvCxnSpPr>
-          <p:cNvPr id="6" name="Connector 5"/>
+          <p:cNvPr id="5" name="Connector 4"/>
           <p:cNvCxnSpPr/>
           <p:nvPr/>
         </p:nvCxnSpPr>
@@ -9262,7 +8222,7 @@
       </p:cxnSp>
       <p:sp>
         <p:nvSpPr>
-          <p:cNvPr id="7" name="TextBox 6"/>
+          <p:cNvPr id="6" name="TextBox 5"/>
           <p:cNvSpPr txBox="1"/>
           <p:nvPr/>
         </p:nvSpPr>
@@ -9297,7 +8257,7 @@
       </p:sp>
       <p:sp>
         <p:nvSpPr>
-          <p:cNvPr id="8" name="TextBox 7"/>
+          <p:cNvPr id="7" name="TextBox 6"/>
           <p:cNvSpPr txBox="1"/>
           <p:nvPr/>
         </p:nvSpPr>
@@ -9332,7 +8292,7 @@
       </p:sp>
       <p:pic>
         <p:nvPicPr>
-          <p:cNvPr id="9" name="Picture 8" descr="c896e7a3b1e79bee.png"/>
+          <p:cNvPr id="8" name="Picture 7" descr="c896e7a3b1e79bee.png"/>
           <p:cNvPicPr>
             <a:picLocks noChangeAspect="1"/>
           </p:cNvPicPr>
@@ -9356,42 +8316,7 @@
       </p:pic>
       <p:sp>
         <p:nvSpPr>
-          <p:cNvPr id="10" name="TextBox 9"/>
-          <p:cNvSpPr txBox="1"/>
-          <p:nvPr/>
-        </p:nvSpPr>
-        <p:spPr>
-          <a:xfrm>
-            <a:off x="1828800" y="2901695"/>
-            <a:ext cx="8503920" cy="548640"/>
-          </a:xfrm>
-          <a:prstGeom prst="rect">
-            <a:avLst/>
-          </a:prstGeom>
-          <a:noFill/>
-        </p:spPr>
-        <p:txBody>
-          <a:bodyPr wrap="square" lIns="45720" rIns="45720" tIns="18288" bIns="18288" anchor="t">
-            <a:spAutoFit/>
-          </a:bodyPr>
-          <a:lstStyle/>
-          <a:p>
-            <a:pPr algn="ctr"/>
-            <a:r>
-              <a:rPr sz="2400" b="0" i="0">
-                <a:solidFill>
-                  <a:srgbClr val="6B6B6B"/>
-                </a:solidFill>
-                <a:latin typeface="Century Schoolbook"/>
-              </a:rPr>
-              <a:t>both factors move down</a:t>
-            </a:r>
-          </a:p>
-        </p:txBody>
-      </p:sp>
-      <p:sp>
-        <p:nvSpPr>
-          <p:cNvPr id="11" name="TextBox 10"/>
+          <p:cNvPr id="9" name="TextBox 8"/>
           <p:cNvSpPr txBox="1"/>
           <p:nvPr/>
         </p:nvSpPr>
@@ -9426,7 +8351,7 @@
       </p:sp>
       <p:pic>
         <p:nvPicPr>
-          <p:cNvPr id="12" name="Picture 11" descr="f532a74f60c6ce26.png"/>
+          <p:cNvPr id="10" name="Picture 9" descr="f532a74f60c6ce26.png"/>
           <p:cNvPicPr>
             <a:picLocks noChangeAspect="1"/>
           </p:cNvPicPr>
@@ -9571,44 +8496,9 @@
           </a:fontRef>
         </p:style>
       </p:cxnSp>
-      <p:sp>
-        <p:nvSpPr>
-          <p:cNvPr id="5" name="TextBox 4"/>
-          <p:cNvSpPr txBox="1"/>
-          <p:nvPr/>
-        </p:nvSpPr>
-        <p:spPr>
-          <a:xfrm>
-            <a:off x="777240" y="1261872"/>
-            <a:ext cx="10607040" cy="310896"/>
-          </a:xfrm>
-          <a:prstGeom prst="rect">
-            <a:avLst/>
-          </a:prstGeom>
-          <a:noFill/>
-        </p:spPr>
-        <p:txBody>
-          <a:bodyPr wrap="square" lIns="45720" rIns="45720" tIns="18288" bIns="18288" anchor="t">
-            <a:spAutoFit/>
-          </a:bodyPr>
-          <a:lstStyle/>
-          <a:p>
-            <a:pPr algn="l"/>
-            <a:r>
-              <a:rPr sz="1700" b="0" i="1">
-                <a:solidFill>
-                  <a:srgbClr val="6B6B6B"/>
-                </a:solidFill>
-                <a:latin typeface="Century Schoolbook"/>
-              </a:rPr>
-              <a:t>Boards up on three.</a:t>
-            </a:r>
-          </a:p>
-        </p:txBody>
-      </p:sp>
       <p:cxnSp>
         <p:nvCxnSpPr>
-          <p:cNvPr id="6" name="Connector 5"/>
+          <p:cNvPr id="5" name="Connector 4"/>
           <p:cNvCxnSpPr/>
           <p:nvPr/>
         </p:nvCxnSpPr>
@@ -9643,7 +8533,7 @@
       </p:cxnSp>
       <p:sp>
         <p:nvSpPr>
-          <p:cNvPr id="7" name="TextBox 6"/>
+          <p:cNvPr id="6" name="TextBox 5"/>
           <p:cNvSpPr txBox="1"/>
           <p:nvPr/>
         </p:nvSpPr>
@@ -9678,7 +8568,7 @@
       </p:sp>
       <p:sp>
         <p:nvSpPr>
-          <p:cNvPr id="8" name="TextBox 7"/>
+          <p:cNvPr id="7" name="TextBox 6"/>
           <p:cNvSpPr txBox="1"/>
           <p:nvPr/>
         </p:nvSpPr>
@@ -9713,7 +8603,7 @@
       </p:sp>
       <p:pic>
         <p:nvPicPr>
-          <p:cNvPr id="9" name="Picture 8" descr="950663683f0a3af4.png"/>
+          <p:cNvPr id="8" name="Picture 7" descr="950663683f0a3af4.png"/>
           <p:cNvPicPr>
             <a:picLocks noChangeAspect="1"/>
           </p:cNvPicPr>
@@ -9737,7 +8627,7 @@
       </p:pic>
       <p:sp>
         <p:nvSpPr>
-          <p:cNvPr id="10" name="TextBox 9"/>
+          <p:cNvPr id="9" name="TextBox 8"/>
           <p:cNvSpPr txBox="1"/>
           <p:nvPr/>
         </p:nvSpPr>
@@ -9772,7 +8662,7 @@
       </p:sp>
       <p:sp>
         <p:nvSpPr>
-          <p:cNvPr id="11" name="TextBox 10"/>
+          <p:cNvPr id="10" name="TextBox 9"/>
           <p:cNvSpPr txBox="1"/>
           <p:nvPr/>
         </p:nvSpPr>
@@ -9825,7 +8715,7 @@
       </p:sp>
       <p:sp>
         <p:nvSpPr>
-          <p:cNvPr id="12" name="TextBox 11"/>
+          <p:cNvPr id="11" name="TextBox 10"/>
           <p:cNvSpPr txBox="1"/>
           <p:nvPr/>
         </p:nvSpPr>
@@ -9878,7 +8768,7 @@
       </p:sp>
       <p:sp>
         <p:nvSpPr>
-          <p:cNvPr id="13" name="TextBox 12"/>
+          <p:cNvPr id="12" name="TextBox 11"/>
           <p:cNvSpPr txBox="1"/>
           <p:nvPr/>
         </p:nvSpPr>
@@ -9931,7 +8821,7 @@
       </p:sp>
       <p:sp>
         <p:nvSpPr>
-          <p:cNvPr id="14" name="TextBox 13"/>
+          <p:cNvPr id="13" name="TextBox 12"/>
           <p:cNvSpPr txBox="1"/>
           <p:nvPr/>
         </p:nvSpPr>
@@ -9984,7 +8874,7 @@
       </p:sp>
       <p:sp>
         <p:nvSpPr>
-          <p:cNvPr id="15" name="TextBox 14"/>
+          <p:cNvPr id="14" name="TextBox 13"/>
           <p:cNvSpPr txBox="1"/>
           <p:nvPr/>
         </p:nvSpPr>
@@ -10140,44 +9030,9 @@
           </a:fontRef>
         </p:style>
       </p:cxnSp>
-      <p:sp>
-        <p:nvSpPr>
-          <p:cNvPr id="5" name="TextBox 4"/>
-          <p:cNvSpPr txBox="1"/>
-          <p:nvPr/>
-        </p:nvSpPr>
-        <p:spPr>
-          <a:xfrm>
-            <a:off x="777240" y="1261872"/>
-            <a:ext cx="10607040" cy="310896"/>
-          </a:xfrm>
-          <a:prstGeom prst="rect">
-            <a:avLst/>
-          </a:prstGeom>
-          <a:noFill/>
-        </p:spPr>
-        <p:txBody>
-          <a:bodyPr wrap="square" lIns="45720" rIns="45720" tIns="18288" bIns="18288" anchor="t">
-            <a:spAutoFit/>
-          </a:bodyPr>
-          <a:lstStyle/>
-          <a:p>
-            <a:pPr algn="l"/>
-            <a:r>
-              <a:rPr sz="1700" b="0" i="1">
-                <a:solidFill>
-                  <a:srgbClr val="6B6B6B"/>
-                </a:solidFill>
-                <a:latin typeface="Century Schoolbook"/>
-              </a:rPr>
-              <a:t>Answer.</a:t>
-            </a:r>
-          </a:p>
-        </p:txBody>
-      </p:sp>
       <p:cxnSp>
         <p:nvCxnSpPr>
-          <p:cNvPr id="6" name="Connector 5"/>
+          <p:cNvPr id="5" name="Connector 4"/>
           <p:cNvCxnSpPr/>
           <p:nvPr/>
         </p:nvCxnSpPr>
@@ -10212,7 +9067,7 @@
       </p:cxnSp>
       <p:sp>
         <p:nvSpPr>
-          <p:cNvPr id="7" name="TextBox 6"/>
+          <p:cNvPr id="6" name="TextBox 5"/>
           <p:cNvSpPr txBox="1"/>
           <p:nvPr/>
         </p:nvSpPr>
@@ -10247,7 +9102,7 @@
       </p:sp>
       <p:sp>
         <p:nvSpPr>
-          <p:cNvPr id="8" name="TextBox 7"/>
+          <p:cNvPr id="7" name="TextBox 6"/>
           <p:cNvSpPr txBox="1"/>
           <p:nvPr/>
         </p:nvSpPr>
@@ -10282,7 +9137,7 @@
       </p:sp>
       <p:pic>
         <p:nvPicPr>
-          <p:cNvPr id="9" name="Picture 8" descr="1b7d9d459c285456.png"/>
+          <p:cNvPr id="8" name="Picture 7" descr="1b7d9d459c285456.png"/>
           <p:cNvPicPr>
             <a:picLocks noChangeAspect="1"/>
           </p:cNvPicPr>
@@ -10306,7 +9161,7 @@
       </p:pic>
       <p:sp>
         <p:nvSpPr>
-          <p:cNvPr id="10" name="TextBox 9"/>
+          <p:cNvPr id="9" name="TextBox 8"/>
           <p:cNvSpPr txBox="1"/>
           <p:nvPr/>
         </p:nvSpPr>
@@ -10341,7 +9196,7 @@
       </p:sp>
       <p:sp>
         <p:nvSpPr>
-          <p:cNvPr id="11" name="TextBox 10"/>
+          <p:cNvPr id="10" name="TextBox 9"/>
           <p:cNvSpPr txBox="1"/>
           <p:nvPr/>
         </p:nvSpPr>
@@ -10394,7 +9249,7 @@
       </p:sp>
       <p:sp>
         <p:nvSpPr>
-          <p:cNvPr id="12" name="TextBox 11"/>
+          <p:cNvPr id="11" name="TextBox 10"/>
           <p:cNvSpPr txBox="1"/>
           <p:nvPr/>
         </p:nvSpPr>
@@ -10447,7 +9302,7 @@
       </p:sp>
       <p:sp>
         <p:nvSpPr>
-          <p:cNvPr id="13" name="TextBox 12"/>
+          <p:cNvPr id="12" name="TextBox 11"/>
           <p:cNvSpPr txBox="1"/>
           <p:nvPr/>
         </p:nvSpPr>
@@ -10500,7 +9355,7 @@
       </p:sp>
       <p:sp>
         <p:nvSpPr>
-          <p:cNvPr id="14" name="TextBox 13"/>
+          <p:cNvPr id="13" name="TextBox 12"/>
           <p:cNvSpPr txBox="1"/>
           <p:nvPr/>
         </p:nvSpPr>
@@ -10553,7 +9408,7 @@
       </p:sp>
       <p:sp>
         <p:nvSpPr>
-          <p:cNvPr id="15" name="TextBox 14"/>
+          <p:cNvPr id="14" name="TextBox 13"/>
           <p:cNvSpPr txBox="1"/>
           <p:nvPr/>
         </p:nvSpPr>
@@ -10718,44 +9573,9 @@
           </a:fontRef>
         </p:style>
       </p:cxnSp>
-      <p:sp>
-        <p:nvSpPr>
-          <p:cNvPr id="5" name="TextBox 4"/>
-          <p:cNvSpPr txBox="1"/>
-          <p:nvPr/>
-        </p:nvSpPr>
-        <p:spPr>
-          <a:xfrm>
-            <a:off x="777240" y="1261872"/>
-            <a:ext cx="10607040" cy="310896"/>
-          </a:xfrm>
-          <a:prstGeom prst="rect">
-            <a:avLst/>
-          </a:prstGeom>
-          <a:noFill/>
-        </p:spPr>
-        <p:txBody>
-          <a:bodyPr wrap="square" lIns="45720" rIns="45720" tIns="18288" bIns="18288" anchor="t">
-            <a:spAutoFit/>
-          </a:bodyPr>
-          <a:lstStyle/>
-          <a:p>
-            <a:pPr algn="l"/>
-            <a:r>
-              <a:rPr sz="1700" b="0" i="1">
-                <a:solidFill>
-                  <a:srgbClr val="6B6B6B"/>
-                </a:solidFill>
-                <a:latin typeface="Century Schoolbook"/>
-              </a:rPr>
-              <a:t>Boards up on three.</a:t>
-            </a:r>
-          </a:p>
-        </p:txBody>
-      </p:sp>
       <p:cxnSp>
         <p:nvCxnSpPr>
-          <p:cNvPr id="6" name="Connector 5"/>
+          <p:cNvPr id="5" name="Connector 4"/>
           <p:cNvCxnSpPr/>
           <p:nvPr/>
         </p:nvCxnSpPr>
@@ -10790,7 +9610,7 @@
       </p:cxnSp>
       <p:sp>
         <p:nvSpPr>
-          <p:cNvPr id="7" name="TextBox 6"/>
+          <p:cNvPr id="6" name="TextBox 5"/>
           <p:cNvSpPr txBox="1"/>
           <p:nvPr/>
         </p:nvSpPr>
@@ -10825,7 +9645,7 @@
       </p:sp>
       <p:sp>
         <p:nvSpPr>
-          <p:cNvPr id="8" name="TextBox 7"/>
+          <p:cNvPr id="7" name="TextBox 6"/>
           <p:cNvSpPr txBox="1"/>
           <p:nvPr/>
         </p:nvSpPr>
@@ -10860,7 +9680,7 @@
       </p:sp>
       <p:pic>
         <p:nvPicPr>
-          <p:cNvPr id="9" name="Picture 8" descr="cd9c5622a19be95d.png"/>
+          <p:cNvPr id="8" name="Picture 7" descr="cd9c5622a19be95d.png"/>
           <p:cNvPicPr>
             <a:picLocks noChangeAspect="1"/>
           </p:cNvPicPr>
@@ -10884,7 +9704,7 @@
       </p:pic>
       <p:sp>
         <p:nvSpPr>
-          <p:cNvPr id="10" name="TextBox 9"/>
+          <p:cNvPr id="9" name="TextBox 8"/>
           <p:cNvSpPr txBox="1"/>
           <p:nvPr/>
         </p:nvSpPr>
@@ -10919,7 +9739,7 @@
       </p:sp>
       <p:sp>
         <p:nvSpPr>
-          <p:cNvPr id="11" name="TextBox 10"/>
+          <p:cNvPr id="10" name="TextBox 9"/>
           <p:cNvSpPr txBox="1"/>
           <p:nvPr/>
         </p:nvSpPr>
@@ -10963,7 +9783,7 @@
       </p:sp>
       <p:sp>
         <p:nvSpPr>
-          <p:cNvPr id="12" name="TextBox 11"/>
+          <p:cNvPr id="11" name="TextBox 10"/>
           <p:cNvSpPr txBox="1"/>
           <p:nvPr/>
         </p:nvSpPr>
@@ -11025,7 +9845,7 @@
       </p:sp>
       <p:sp>
         <p:nvSpPr>
-          <p:cNvPr id="13" name="TextBox 12"/>
+          <p:cNvPr id="12" name="TextBox 11"/>
           <p:cNvSpPr txBox="1"/>
           <p:nvPr/>
         </p:nvSpPr>
@@ -11078,7 +9898,7 @@
       </p:sp>
       <p:sp>
         <p:nvSpPr>
-          <p:cNvPr id="14" name="TextBox 13"/>
+          <p:cNvPr id="13" name="TextBox 12"/>
           <p:cNvSpPr txBox="1"/>
           <p:nvPr/>
         </p:nvSpPr>
@@ -11131,7 +9951,7 @@
       </p:sp>
       <p:sp>
         <p:nvSpPr>
-          <p:cNvPr id="15" name="TextBox 14"/>
+          <p:cNvPr id="14" name="TextBox 13"/>
           <p:cNvSpPr txBox="1"/>
           <p:nvPr/>
         </p:nvSpPr>
@@ -11287,44 +10107,9 @@
           </a:fontRef>
         </p:style>
       </p:cxnSp>
-      <p:sp>
-        <p:nvSpPr>
-          <p:cNvPr id="5" name="TextBox 4"/>
-          <p:cNvSpPr txBox="1"/>
-          <p:nvPr/>
-        </p:nvSpPr>
-        <p:spPr>
-          <a:xfrm>
-            <a:off x="777240" y="1261872"/>
-            <a:ext cx="10607040" cy="310896"/>
-          </a:xfrm>
-          <a:prstGeom prst="rect">
-            <a:avLst/>
-          </a:prstGeom>
-          <a:noFill/>
-        </p:spPr>
-        <p:txBody>
-          <a:bodyPr wrap="square" lIns="45720" rIns="45720" tIns="18288" bIns="18288" anchor="t">
-            <a:spAutoFit/>
-          </a:bodyPr>
-          <a:lstStyle/>
-          <a:p>
-            <a:pPr algn="l"/>
-            <a:r>
-              <a:rPr sz="1700" b="0" i="1">
-                <a:solidFill>
-                  <a:srgbClr val="6B6B6B"/>
-                </a:solidFill>
-                <a:latin typeface="Century Schoolbook"/>
-              </a:rPr>
-              <a:t>Answer.</a:t>
-            </a:r>
-          </a:p>
-        </p:txBody>
-      </p:sp>
       <p:cxnSp>
         <p:nvCxnSpPr>
-          <p:cNvPr id="6" name="Connector 5"/>
+          <p:cNvPr id="5" name="Connector 4"/>
           <p:cNvCxnSpPr/>
           <p:nvPr/>
         </p:nvCxnSpPr>
@@ -11359,7 +10144,7 @@
       </p:cxnSp>
       <p:sp>
         <p:nvSpPr>
-          <p:cNvPr id="7" name="TextBox 6"/>
+          <p:cNvPr id="6" name="TextBox 5"/>
           <p:cNvSpPr txBox="1"/>
           <p:nvPr/>
         </p:nvSpPr>
@@ -11394,7 +10179,7 @@
       </p:sp>
       <p:sp>
         <p:nvSpPr>
-          <p:cNvPr id="8" name="TextBox 7"/>
+          <p:cNvPr id="7" name="TextBox 6"/>
           <p:cNvSpPr txBox="1"/>
           <p:nvPr/>
         </p:nvSpPr>
@@ -11429,7 +10214,7 @@
       </p:sp>
       <p:pic>
         <p:nvPicPr>
-          <p:cNvPr id="9" name="Picture 8" descr="1768e3b0aaa3b8d0.png"/>
+          <p:cNvPr id="8" name="Picture 7" descr="1768e3b0aaa3b8d0.png"/>
           <p:cNvPicPr>
             <a:picLocks noChangeAspect="1"/>
           </p:cNvPicPr>
@@ -11453,7 +10238,7 @@
       </p:pic>
       <p:sp>
         <p:nvSpPr>
-          <p:cNvPr id="10" name="TextBox 9"/>
+          <p:cNvPr id="9" name="TextBox 8"/>
           <p:cNvSpPr txBox="1"/>
           <p:nvPr/>
         </p:nvSpPr>
@@ -11488,7 +10273,7 @@
       </p:sp>
       <p:sp>
         <p:nvSpPr>
-          <p:cNvPr id="11" name="TextBox 10"/>
+          <p:cNvPr id="10" name="TextBox 9"/>
           <p:cNvSpPr txBox="1"/>
           <p:nvPr/>
         </p:nvSpPr>
@@ -11532,7 +10317,7 @@
       </p:sp>
       <p:sp>
         <p:nvSpPr>
-          <p:cNvPr id="12" name="TextBox 11"/>
+          <p:cNvPr id="11" name="TextBox 10"/>
           <p:cNvSpPr txBox="1"/>
           <p:nvPr/>
         </p:nvSpPr>
@@ -11594,7 +10379,7 @@
       </p:sp>
       <p:sp>
         <p:nvSpPr>
-          <p:cNvPr id="13" name="TextBox 12"/>
+          <p:cNvPr id="12" name="TextBox 11"/>
           <p:cNvSpPr txBox="1"/>
           <p:nvPr/>
         </p:nvSpPr>
@@ -11647,7 +10432,7 @@
       </p:sp>
       <p:sp>
         <p:nvSpPr>
-          <p:cNvPr id="14" name="TextBox 13"/>
+          <p:cNvPr id="13" name="TextBox 12"/>
           <p:cNvSpPr txBox="1"/>
           <p:nvPr/>
         </p:nvSpPr>
@@ -11700,7 +10485,7 @@
       </p:sp>
       <p:sp>
         <p:nvSpPr>
-          <p:cNvPr id="15" name="TextBox 14"/>
+          <p:cNvPr id="14" name="TextBox 13"/>
           <p:cNvSpPr txBox="1"/>
           <p:nvPr/>
         </p:nvSpPr>
@@ -11865,44 +10650,9 @@
           </a:fontRef>
         </p:style>
       </p:cxnSp>
-      <p:sp>
-        <p:nvSpPr>
-          <p:cNvPr id="5" name="TextBox 4"/>
-          <p:cNvSpPr txBox="1"/>
-          <p:nvPr/>
-        </p:nvSpPr>
-        <p:spPr>
-          <a:xfrm>
-            <a:off x="777240" y="1261872"/>
-            <a:ext cx="10607040" cy="310896"/>
-          </a:xfrm>
-          <a:prstGeom prst="rect">
-            <a:avLst/>
-          </a:prstGeom>
-          <a:noFill/>
-        </p:spPr>
-        <p:txBody>
-          <a:bodyPr wrap="square" lIns="45720" rIns="45720" tIns="18288" bIns="18288" anchor="t">
-            <a:spAutoFit/>
-          </a:bodyPr>
-          <a:lstStyle/>
-          <a:p>
-            <a:pPr algn="l"/>
-            <a:r>
-              <a:rPr sz="1700" b="0" i="1">
-                <a:solidFill>
-                  <a:srgbClr val="6B6B6B"/>
-                </a:solidFill>
-                <a:latin typeface="Century Schoolbook"/>
-              </a:rPr>
-              <a:t>Boards up on three.</a:t>
-            </a:r>
-          </a:p>
-        </p:txBody>
-      </p:sp>
       <p:cxnSp>
         <p:nvCxnSpPr>
-          <p:cNvPr id="6" name="Connector 5"/>
+          <p:cNvPr id="5" name="Connector 4"/>
           <p:cNvCxnSpPr/>
           <p:nvPr/>
         </p:nvCxnSpPr>
@@ -11937,7 +10687,7 @@
       </p:cxnSp>
       <p:sp>
         <p:nvSpPr>
-          <p:cNvPr id="7" name="TextBox 6"/>
+          <p:cNvPr id="6" name="TextBox 5"/>
           <p:cNvSpPr txBox="1"/>
           <p:nvPr/>
         </p:nvSpPr>
@@ -11972,7 +10722,7 @@
       </p:sp>
       <p:sp>
         <p:nvSpPr>
-          <p:cNvPr id="8" name="TextBox 7"/>
+          <p:cNvPr id="7" name="TextBox 6"/>
           <p:cNvSpPr txBox="1"/>
           <p:nvPr/>
         </p:nvSpPr>
@@ -12007,7 +10757,7 @@
       </p:sp>
       <p:pic>
         <p:nvPicPr>
-          <p:cNvPr id="9" name="Picture 8" descr="61aec65184b6beb1.png"/>
+          <p:cNvPr id="8" name="Picture 7" descr="61aec65184b6beb1.png"/>
           <p:cNvPicPr>
             <a:picLocks noChangeAspect="1"/>
           </p:cNvPicPr>
@@ -12031,7 +10781,7 @@
       </p:pic>
       <p:sp>
         <p:nvSpPr>
-          <p:cNvPr id="10" name="TextBox 9"/>
+          <p:cNvPr id="9" name="TextBox 8"/>
           <p:cNvSpPr txBox="1"/>
           <p:nvPr/>
         </p:nvSpPr>
@@ -12060,41 +10810,6 @@
                 <a:latin typeface="Century Schoolbook"/>
               </a:rPr>
               <a:t>Answer it.</a:t>
-            </a:r>
-          </a:p>
-        </p:txBody>
-      </p:sp>
-      <p:sp>
-        <p:nvSpPr>
-          <p:cNvPr id="11" name="TextBox 10"/>
-          <p:cNvSpPr txBox="1"/>
-          <p:nvPr/>
-        </p:nvSpPr>
-        <p:spPr>
-          <a:xfrm>
-            <a:off x="777240" y="4828032"/>
-            <a:ext cx="10607040" cy="365760"/>
-          </a:xfrm>
-          <a:prstGeom prst="rect">
-            <a:avLst/>
-          </a:prstGeom>
-          <a:noFill/>
-        </p:spPr>
-        <p:txBody>
-          <a:bodyPr wrap="square" lIns="45720" rIns="45720" tIns="18288" bIns="18288" anchor="t">
-            <a:spAutoFit/>
-          </a:bodyPr>
-          <a:lstStyle/>
-          <a:p>
-            <a:pPr algn="ctr"/>
-            <a:r>
-              <a:rPr sz="1900" b="0" i="1">
-                <a:solidFill>
-                  <a:srgbClr val="6B6B6B"/>
-                </a:solidFill>
-                <a:latin typeface="Century Schoolbook"/>
-              </a:rPr>
-              <a:t>Write with a positive exponent.</a:t>
             </a:r>
           </a:p>
         </p:txBody>
@@ -12222,44 +10937,9 @@
           </a:fontRef>
         </p:style>
       </p:cxnSp>
-      <p:sp>
-        <p:nvSpPr>
-          <p:cNvPr id="5" name="TextBox 4"/>
-          <p:cNvSpPr txBox="1"/>
-          <p:nvPr/>
-        </p:nvSpPr>
-        <p:spPr>
-          <a:xfrm>
-            <a:off x="777240" y="1261872"/>
-            <a:ext cx="10607040" cy="310896"/>
-          </a:xfrm>
-          <a:prstGeom prst="rect">
-            <a:avLst/>
-          </a:prstGeom>
-          <a:noFill/>
-        </p:spPr>
-        <p:txBody>
-          <a:bodyPr wrap="square" lIns="45720" rIns="45720" tIns="18288" bIns="18288" anchor="t">
-            <a:spAutoFit/>
-          </a:bodyPr>
-          <a:lstStyle/>
-          <a:p>
-            <a:pPr algn="l"/>
-            <a:r>
-              <a:rPr sz="1700" b="0" i="1">
-                <a:solidFill>
-                  <a:srgbClr val="6B6B6B"/>
-                </a:solidFill>
-                <a:latin typeface="Century Schoolbook"/>
-              </a:rPr>
-              <a:t>Answer.</a:t>
-            </a:r>
-          </a:p>
-        </p:txBody>
-      </p:sp>
       <p:cxnSp>
         <p:nvCxnSpPr>
-          <p:cNvPr id="6" name="Connector 5"/>
+          <p:cNvPr id="5" name="Connector 4"/>
           <p:cNvCxnSpPr/>
           <p:nvPr/>
         </p:nvCxnSpPr>
@@ -12294,7 +10974,7 @@
       </p:cxnSp>
       <p:sp>
         <p:nvSpPr>
-          <p:cNvPr id="7" name="TextBox 6"/>
+          <p:cNvPr id="6" name="TextBox 5"/>
           <p:cNvSpPr txBox="1"/>
           <p:nvPr/>
         </p:nvSpPr>
@@ -12329,7 +11009,7 @@
       </p:sp>
       <p:sp>
         <p:nvSpPr>
-          <p:cNvPr id="8" name="TextBox 7"/>
+          <p:cNvPr id="7" name="TextBox 6"/>
           <p:cNvSpPr txBox="1"/>
           <p:nvPr/>
         </p:nvSpPr>
@@ -12364,7 +11044,7 @@
       </p:sp>
       <p:pic>
         <p:nvPicPr>
-          <p:cNvPr id="9" name="Picture 8" descr="00d9c35b01c5d10a.png"/>
+          <p:cNvPr id="8" name="Picture 7" descr="00d9c35b01c5d10a.png"/>
           <p:cNvPicPr>
             <a:picLocks noChangeAspect="1"/>
           </p:cNvPicPr>
@@ -12388,60 +11068,7 @@
       </p:pic>
       <p:sp>
         <p:nvSpPr>
-          <p:cNvPr id="10" name="TextBox 9"/>
-          <p:cNvSpPr txBox="1"/>
-          <p:nvPr/>
-        </p:nvSpPr>
-        <p:spPr>
-          <a:xfrm>
-            <a:off x="1828800" y="3383279"/>
-            <a:ext cx="8503920" cy="548640"/>
-          </a:xfrm>
-          <a:prstGeom prst="rect">
-            <a:avLst/>
-          </a:prstGeom>
-          <a:noFill/>
-        </p:spPr>
-        <p:txBody>
-          <a:bodyPr wrap="square" lIns="45720" rIns="45720" tIns="18288" bIns="18288" anchor="t">
-            <a:spAutoFit/>
-          </a:bodyPr>
-          <a:lstStyle/>
-          <a:p>
-            <a:pPr algn="ctr"/>
-            <a:r>
-              <a:rPr sz="2400" b="0" i="0">
-                <a:solidFill>
-                  <a:srgbClr val="6B6B6B"/>
-                </a:solidFill>
-                <a:latin typeface="Century Schoolbook"/>
-              </a:rPr>
-              <a:t>m</a:t>
-            </a:r>
-            <a:r>
-              <a:rPr sz="2400" b="0" i="0" baseline="30000">
-                <a:solidFill>
-                  <a:srgbClr val="6B6B6B"/>
-                </a:solidFill>
-                <a:latin typeface="Century Schoolbook"/>
-              </a:rPr>
-              <a:t>-4</a:t>
-            </a:r>
-            <a:r>
-              <a:rPr sz="2400" b="0" i="0">
-                <a:solidFill>
-                  <a:srgbClr val="6B6B6B"/>
-                </a:solidFill>
-                <a:latin typeface="Century Schoolbook"/>
-              </a:rPr>
-              <a:t> — then rewrite</a:t>
-            </a:r>
-          </a:p>
-        </p:txBody>
-      </p:sp>
-      <p:sp>
-        <p:nvSpPr>
-          <p:cNvPr id="11" name="TextBox 10"/>
+          <p:cNvPr id="9" name="TextBox 8"/>
           <p:cNvSpPr txBox="1"/>
           <p:nvPr/>
         </p:nvSpPr>
@@ -12476,7 +11103,7 @@
       </p:sp>
       <p:pic>
         <p:nvPicPr>
-          <p:cNvPr id="12" name="Picture 11" descr="a74f00062d590b9f.png"/>
+          <p:cNvPr id="10" name="Picture 9" descr="a74f00062d590b9f.png"/>
           <p:cNvPicPr>
             <a:picLocks noChangeAspect="1"/>
           </p:cNvPicPr>
@@ -12621,44 +11248,9 @@
           </a:fontRef>
         </p:style>
       </p:cxnSp>
-      <p:sp>
-        <p:nvSpPr>
-          <p:cNvPr id="5" name="TextBox 4"/>
-          <p:cNvSpPr txBox="1"/>
-          <p:nvPr/>
-        </p:nvSpPr>
-        <p:spPr>
-          <a:xfrm>
-            <a:off x="777240" y="1261872"/>
-            <a:ext cx="10607040" cy="310896"/>
-          </a:xfrm>
-          <a:prstGeom prst="rect">
-            <a:avLst/>
-          </a:prstGeom>
-          <a:noFill/>
-        </p:spPr>
-        <p:txBody>
-          <a:bodyPr wrap="square" lIns="45720" rIns="45720" tIns="18288" bIns="18288" anchor="t">
-            <a:spAutoFit/>
-          </a:bodyPr>
-          <a:lstStyle/>
-          <a:p>
-            <a:pPr algn="l"/>
-            <a:r>
-              <a:rPr sz="1700" b="0" i="1">
-                <a:solidFill>
-                  <a:srgbClr val="6B6B6B"/>
-                </a:solidFill>
-                <a:latin typeface="Century Schoolbook"/>
-              </a:rPr>
-              <a:t>Boards up on three.</a:t>
-            </a:r>
-          </a:p>
-        </p:txBody>
-      </p:sp>
       <p:cxnSp>
         <p:nvCxnSpPr>
-          <p:cNvPr id="6" name="Connector 5"/>
+          <p:cNvPr id="5" name="Connector 4"/>
           <p:cNvCxnSpPr/>
           <p:nvPr/>
         </p:nvCxnSpPr>
@@ -12693,7 +11285,7 @@
       </p:cxnSp>
       <p:sp>
         <p:nvSpPr>
-          <p:cNvPr id="7" name="TextBox 6"/>
+          <p:cNvPr id="6" name="TextBox 5"/>
           <p:cNvSpPr txBox="1"/>
           <p:nvPr/>
         </p:nvSpPr>
@@ -12728,7 +11320,7 @@
       </p:sp>
       <p:sp>
         <p:nvSpPr>
-          <p:cNvPr id="8" name="TextBox 7"/>
+          <p:cNvPr id="7" name="TextBox 6"/>
           <p:cNvSpPr txBox="1"/>
           <p:nvPr/>
         </p:nvSpPr>
@@ -12763,7 +11355,7 @@
       </p:sp>
       <p:sp>
         <p:nvSpPr>
-          <p:cNvPr id="9" name="TextBox 8"/>
+          <p:cNvPr id="8" name="TextBox 7"/>
           <p:cNvSpPr txBox="1"/>
           <p:nvPr/>
         </p:nvSpPr>
@@ -12798,7 +11390,7 @@
       </p:sp>
       <p:pic>
         <p:nvPicPr>
-          <p:cNvPr id="10" name="Picture 9" descr="ce9b607ea85ce740.png"/>
+          <p:cNvPr id="9" name="Picture 8" descr="ce9b607ea85ce740.png"/>
           <p:cNvPicPr>
             <a:picLocks noChangeAspect="1"/>
           </p:cNvPicPr>
@@ -12822,7 +11414,7 @@
       </p:pic>
       <p:sp>
         <p:nvSpPr>
-          <p:cNvPr id="11" name="TextBox 10"/>
+          <p:cNvPr id="10" name="TextBox 9"/>
           <p:cNvSpPr txBox="1"/>
           <p:nvPr/>
         </p:nvSpPr>
@@ -12857,7 +11449,7 @@
       </p:sp>
       <p:pic>
         <p:nvPicPr>
-          <p:cNvPr id="12" name="Picture 11" descr="768d523c6bd8c018.png"/>
+          <p:cNvPr id="11" name="Picture 10" descr="768d523c6bd8c018.png"/>
           <p:cNvPicPr>
             <a:picLocks noChangeAspect="1"/>
           </p:cNvPicPr>
@@ -12881,7 +11473,7 @@
       </p:pic>
       <p:sp>
         <p:nvSpPr>
-          <p:cNvPr id="13" name="TextBox 12"/>
+          <p:cNvPr id="12" name="TextBox 11"/>
           <p:cNvSpPr txBox="1"/>
           <p:nvPr/>
         </p:nvSpPr>
@@ -12910,41 +11502,6 @@
                 <a:latin typeface="Century Schoolbook"/>
               </a:rPr>
               <a:t>Answer it.</a:t>
-            </a:r>
-          </a:p>
-        </p:txBody>
-      </p:sp>
-      <p:sp>
-        <p:nvSpPr>
-          <p:cNvPr id="14" name="TextBox 13"/>
-          <p:cNvSpPr txBox="1"/>
-          <p:nvPr/>
-        </p:nvSpPr>
-        <p:spPr>
-          <a:xfrm>
-            <a:off x="777240" y="4828032"/>
-            <a:ext cx="10607040" cy="365760"/>
-          </a:xfrm>
-          <a:prstGeom prst="rect">
-            <a:avLst/>
-          </a:prstGeom>
-          <a:noFill/>
-        </p:spPr>
-        <p:txBody>
-          <a:bodyPr wrap="square" lIns="45720" rIns="45720" tIns="18288" bIns="18288" anchor="t">
-            <a:spAutoFit/>
-          </a:bodyPr>
-          <a:lstStyle/>
-          <a:p>
-            <a:pPr algn="ctr"/>
-            <a:r>
-              <a:rPr sz="1900" b="0" i="1">
-                <a:solidFill>
-                  <a:srgbClr val="6B6B6B"/>
-                </a:solidFill>
-                <a:latin typeface="Century Schoolbook"/>
-              </a:rPr>
-              <a:t>Which law applies?</a:t>
             </a:r>
           </a:p>
         </p:txBody>
@@ -13072,44 +11629,9 @@
           </a:fontRef>
         </p:style>
       </p:cxnSp>
-      <p:sp>
-        <p:nvSpPr>
-          <p:cNvPr id="5" name="TextBox 4"/>
-          <p:cNvSpPr txBox="1"/>
-          <p:nvPr/>
-        </p:nvSpPr>
-        <p:spPr>
-          <a:xfrm>
-            <a:off x="777240" y="1261872"/>
-            <a:ext cx="10607040" cy="310896"/>
-          </a:xfrm>
-          <a:prstGeom prst="rect">
-            <a:avLst/>
-          </a:prstGeom>
-          <a:noFill/>
-        </p:spPr>
-        <p:txBody>
-          <a:bodyPr wrap="square" lIns="45720" rIns="45720" tIns="18288" bIns="18288" anchor="t">
-            <a:spAutoFit/>
-          </a:bodyPr>
-          <a:lstStyle/>
-          <a:p>
-            <a:pPr algn="l"/>
-            <a:r>
-              <a:rPr sz="1700" b="0" i="1">
-                <a:solidFill>
-                  <a:srgbClr val="6B6B6B"/>
-                </a:solidFill>
-                <a:latin typeface="Century Schoolbook"/>
-              </a:rPr>
-              <a:t>Answers.</a:t>
-            </a:r>
-          </a:p>
-        </p:txBody>
-      </p:sp>
       <p:cxnSp>
         <p:nvCxnSpPr>
-          <p:cNvPr id="6" name="Connector 5"/>
+          <p:cNvPr id="5" name="Connector 4"/>
           <p:cNvCxnSpPr/>
           <p:nvPr/>
         </p:nvCxnSpPr>
@@ -13144,7 +11666,7 @@
       </p:cxnSp>
       <p:sp>
         <p:nvSpPr>
-          <p:cNvPr id="7" name="TextBox 6"/>
+          <p:cNvPr id="6" name="TextBox 5"/>
           <p:cNvSpPr txBox="1"/>
           <p:nvPr/>
         </p:nvSpPr>
@@ -13179,7 +11701,7 @@
       </p:sp>
       <p:sp>
         <p:nvSpPr>
-          <p:cNvPr id="8" name="TextBox 7"/>
+          <p:cNvPr id="7" name="TextBox 6"/>
           <p:cNvSpPr txBox="1"/>
           <p:nvPr/>
         </p:nvSpPr>
@@ -13214,13 +11736,13 @@
       </p:sp>
       <p:sp>
         <p:nvSpPr>
-          <p:cNvPr id="9" name="TextBox 8"/>
-          <p:cNvSpPr txBox="1"/>
-          <p:nvPr/>
-        </p:nvSpPr>
-        <p:spPr>
-          <a:xfrm>
-            <a:off x="1874519" y="1760220"/>
+          <p:cNvPr id="8" name="TextBox 7"/>
+          <p:cNvSpPr txBox="1"/>
+          <p:nvPr/>
+        </p:nvSpPr>
+        <p:spPr>
+          <a:xfrm>
+            <a:off x="1874519" y="1440180"/>
             <a:ext cx="4874632" cy="457200"/>
           </a:xfrm>
           <a:prstGeom prst="rect">
@@ -13249,7 +11771,7 @@
       </p:sp>
       <p:pic>
         <p:nvPicPr>
-          <p:cNvPr id="10" name="Picture 9" descr="c0ecde76b6542cae.png"/>
+          <p:cNvPr id="9" name="Picture 8" descr="c0ecde76b6542cae.png"/>
           <p:cNvPicPr>
             <a:picLocks noChangeAspect="1"/>
           </p:cNvPicPr>
@@ -13263,7 +11785,7 @@
         </p:blipFill>
         <p:spPr>
           <a:xfrm>
-            <a:off x="6611992" y="1821180"/>
+            <a:off x="6611992" y="1501140"/>
             <a:ext cx="771144" cy="335280"/>
           </a:xfrm>
           <a:prstGeom prst="rect">
@@ -13273,13 +11795,13 @@
       </p:pic>
       <p:sp>
         <p:nvSpPr>
-          <p:cNvPr id="11" name="TextBox 10"/>
-          <p:cNvSpPr txBox="1"/>
-          <p:nvPr/>
-        </p:nvSpPr>
-        <p:spPr>
-          <a:xfrm>
-            <a:off x="7931776" y="1760220"/>
+          <p:cNvPr id="10" name="TextBox 9"/>
+          <p:cNvSpPr txBox="1"/>
+          <p:nvPr/>
+        </p:nvSpPr>
+        <p:spPr>
+          <a:xfrm>
+            <a:off x="7931776" y="1440180"/>
             <a:ext cx="841711" cy="457200"/>
           </a:xfrm>
           <a:prstGeom prst="rect">
@@ -13317,13 +11839,13 @@
       </p:sp>
       <p:sp>
         <p:nvSpPr>
-          <p:cNvPr id="12" name="TextBox 11"/>
-          <p:cNvSpPr txBox="1"/>
-          <p:nvPr/>
-        </p:nvSpPr>
-        <p:spPr>
-          <a:xfrm>
-            <a:off x="1874519" y="2372868"/>
+          <p:cNvPr id="11" name="TextBox 10"/>
+          <p:cNvSpPr txBox="1"/>
+          <p:nvPr/>
+        </p:nvSpPr>
+        <p:spPr>
+          <a:xfrm>
+            <a:off x="1874519" y="2052828"/>
             <a:ext cx="3064939" cy="457200"/>
           </a:xfrm>
           <a:prstGeom prst="rect">
@@ -13352,7 +11874,7 @@
       </p:sp>
       <p:pic>
         <p:nvPicPr>
-          <p:cNvPr id="13" name="Picture 12" descr="baf21e0fadb8b9e2.png"/>
+          <p:cNvPr id="12" name="Picture 11" descr="baf21e0fadb8b9e2.png"/>
           <p:cNvPicPr>
             <a:picLocks noChangeAspect="1"/>
           </p:cNvPicPr>
@@ -13366,7 +11888,7 @@
         </p:blipFill>
         <p:spPr>
           <a:xfrm>
-            <a:off x="4802299" y="2461260"/>
+            <a:off x="4802299" y="2141220"/>
             <a:ext cx="426720" cy="280416"/>
           </a:xfrm>
           <a:prstGeom prst="rect">
@@ -13376,13 +11898,13 @@
       </p:pic>
       <p:sp>
         <p:nvSpPr>
-          <p:cNvPr id="14" name="TextBox 13"/>
-          <p:cNvSpPr txBox="1"/>
-          <p:nvPr/>
-        </p:nvSpPr>
-        <p:spPr>
-          <a:xfrm>
-            <a:off x="5777659" y="2372868"/>
+          <p:cNvPr id="13" name="TextBox 12"/>
+          <p:cNvSpPr txBox="1"/>
+          <p:nvPr/>
+        </p:nvSpPr>
+        <p:spPr>
+          <a:xfrm>
+            <a:off x="5777659" y="2052828"/>
             <a:ext cx="829616" cy="457200"/>
           </a:xfrm>
           <a:prstGeom prst="rect">
@@ -13411,13 +11933,13 @@
       </p:sp>
       <p:sp>
         <p:nvSpPr>
-          <p:cNvPr id="15" name="TextBox 14"/>
-          <p:cNvSpPr txBox="1"/>
-          <p:nvPr/>
-        </p:nvSpPr>
-        <p:spPr>
-          <a:xfrm>
-            <a:off x="1874519" y="2985516"/>
+          <p:cNvPr id="14" name="TextBox 13"/>
+          <p:cNvSpPr txBox="1"/>
+          <p:nvPr/>
+        </p:nvSpPr>
+        <p:spPr>
+          <a:xfrm>
+            <a:off x="1874519" y="2665476"/>
             <a:ext cx="3341646" cy="457200"/>
           </a:xfrm>
           <a:prstGeom prst="rect">
@@ -13446,7 +11968,7 @@
       </p:sp>
       <p:pic>
         <p:nvPicPr>
-          <p:cNvPr id="16" name="Picture 15" descr="57c771350ef6ea07.png"/>
+          <p:cNvPr id="15" name="Picture 14" descr="57c771350ef6ea07.png"/>
           <p:cNvPicPr>
             <a:picLocks noChangeAspect="1"/>
           </p:cNvPicPr>
@@ -13460,7 +11982,7 @@
         </p:blipFill>
         <p:spPr>
           <a:xfrm>
-            <a:off x="5079006" y="3009900"/>
+            <a:off x="5079006" y="2689860"/>
             <a:ext cx="688848" cy="408432"/>
           </a:xfrm>
           <a:prstGeom prst="rect">
@@ -13470,13 +11992,13 @@
       </p:pic>
       <p:sp>
         <p:nvSpPr>
-          <p:cNvPr id="17" name="TextBox 16"/>
-          <p:cNvSpPr txBox="1"/>
-          <p:nvPr/>
-        </p:nvSpPr>
-        <p:spPr>
-          <a:xfrm>
-            <a:off x="5767854" y="2985516"/>
+          <p:cNvPr id="16" name="TextBox 15"/>
+          <p:cNvSpPr txBox="1"/>
+          <p:nvPr/>
+        </p:nvSpPr>
+        <p:spPr>
+          <a:xfrm>
+            <a:off x="5767854" y="2665476"/>
             <a:ext cx="1156543" cy="457200"/>
           </a:xfrm>
           <a:prstGeom prst="rect">
@@ -13505,13 +12027,13 @@
       </p:sp>
       <p:sp>
         <p:nvSpPr>
-          <p:cNvPr id="18" name="TextBox 17"/>
-          <p:cNvSpPr txBox="1"/>
-          <p:nvPr/>
-        </p:nvSpPr>
-        <p:spPr>
-          <a:xfrm>
-            <a:off x="7335878" y="2985516"/>
+          <p:cNvPr id="17" name="TextBox 16"/>
+          <p:cNvSpPr txBox="1"/>
+          <p:nvPr/>
+        </p:nvSpPr>
+        <p:spPr>
+          <a:xfrm>
+            <a:off x="7335878" y="2665476"/>
             <a:ext cx="388052" cy="457200"/>
           </a:xfrm>
           <a:prstGeom prst="rect">
@@ -13540,13 +12062,13 @@
       </p:sp>
       <p:sp>
         <p:nvSpPr>
-          <p:cNvPr id="19" name="TextBox 18"/>
-          <p:cNvSpPr txBox="1"/>
-          <p:nvPr/>
-        </p:nvSpPr>
-        <p:spPr>
-          <a:xfrm>
-            <a:off x="1874519" y="3668268"/>
+          <p:cNvPr id="18" name="TextBox 17"/>
+          <p:cNvSpPr txBox="1"/>
+          <p:nvPr/>
+        </p:nvSpPr>
+        <p:spPr>
+          <a:xfrm>
+            <a:off x="1874519" y="3348228"/>
             <a:ext cx="4395048" cy="457200"/>
           </a:xfrm>
           <a:prstGeom prst="rect">
@@ -13575,7 +12097,7 @@
       </p:sp>
       <p:pic>
         <p:nvPicPr>
-          <p:cNvPr id="20" name="Picture 19" descr="e8022fa09c25c018.png"/>
+          <p:cNvPr id="19" name="Picture 18" descr="e8022fa09c25c018.png"/>
           <p:cNvPicPr>
             <a:picLocks noChangeAspect="1"/>
           </p:cNvPicPr>
@@ -13589,7 +12111,7 @@
         </p:blipFill>
         <p:spPr>
           <a:xfrm>
-            <a:off x="6132408" y="3621024"/>
+            <a:off x="6132408" y="3300984"/>
             <a:ext cx="170688" cy="551688"/>
           </a:xfrm>
           <a:prstGeom prst="rect">
@@ -13599,13 +12121,13 @@
       </p:pic>
       <p:sp>
         <p:nvSpPr>
-          <p:cNvPr id="21" name="TextBox 20"/>
-          <p:cNvSpPr txBox="1"/>
-          <p:nvPr/>
-        </p:nvSpPr>
-        <p:spPr>
-          <a:xfrm>
-            <a:off x="6303096" y="3668268"/>
+          <p:cNvPr id="20" name="TextBox 19"/>
+          <p:cNvSpPr txBox="1"/>
+          <p:nvPr/>
+        </p:nvSpPr>
+        <p:spPr>
+          <a:xfrm>
+            <a:off x="6303096" y="3348228"/>
             <a:ext cx="433854" cy="457200"/>
           </a:xfrm>
           <a:prstGeom prst="rect">
@@ -13634,7 +12156,7 @@
       </p:sp>
       <p:pic>
         <p:nvPicPr>
-          <p:cNvPr id="22" name="Picture 21" descr="0ea9c861f6451dd4.png"/>
+          <p:cNvPr id="21" name="Picture 20" descr="0ea9c861f6451dd4.png"/>
           <p:cNvPicPr>
             <a:picLocks noChangeAspect="1"/>
           </p:cNvPicPr>
@@ -13648,7 +12170,7 @@
         </p:blipFill>
         <p:spPr>
           <a:xfrm>
-            <a:off x="7148431" y="3621024"/>
+            <a:off x="7148431" y="3300984"/>
             <a:ext cx="170688" cy="551688"/>
           </a:xfrm>
           <a:prstGeom prst="rect">
@@ -13779,44 +12301,9 @@
           </a:fontRef>
         </p:style>
       </p:cxnSp>
-      <p:sp>
-        <p:nvSpPr>
-          <p:cNvPr id="5" name="TextBox 4"/>
-          <p:cNvSpPr txBox="1"/>
-          <p:nvPr/>
-        </p:nvSpPr>
-        <p:spPr>
-          <a:xfrm>
-            <a:off x="777240" y="1261872"/>
-            <a:ext cx="10607040" cy="310896"/>
-          </a:xfrm>
-          <a:prstGeom prst="rect">
-            <a:avLst/>
-          </a:prstGeom>
-          <a:noFill/>
-        </p:spPr>
-        <p:txBody>
-          <a:bodyPr wrap="square" lIns="45720" rIns="45720" tIns="18288" bIns="18288" anchor="t">
-            <a:spAutoFit/>
-          </a:bodyPr>
-          <a:lstStyle/>
-          <a:p>
-            <a:pPr algn="l"/>
-            <a:r>
-              <a:rPr sz="1700" b="0" i="1">
-                <a:solidFill>
-                  <a:srgbClr val="6B6B6B"/>
-                </a:solidFill>
-                <a:latin typeface="Century Schoolbook"/>
-              </a:rPr>
-              <a:t>Answer.</a:t>
-            </a:r>
-          </a:p>
-        </p:txBody>
-      </p:sp>
       <p:cxnSp>
         <p:nvCxnSpPr>
-          <p:cNvPr id="6" name="Connector 5"/>
+          <p:cNvPr id="5" name="Connector 4"/>
           <p:cNvCxnSpPr/>
           <p:nvPr/>
         </p:nvCxnSpPr>
@@ -13851,7 +12338,7 @@
       </p:cxnSp>
       <p:sp>
         <p:nvSpPr>
-          <p:cNvPr id="7" name="TextBox 6"/>
+          <p:cNvPr id="6" name="TextBox 5"/>
           <p:cNvSpPr txBox="1"/>
           <p:nvPr/>
         </p:nvSpPr>
@@ -13886,7 +12373,7 @@
       </p:sp>
       <p:sp>
         <p:nvSpPr>
-          <p:cNvPr id="8" name="TextBox 7"/>
+          <p:cNvPr id="7" name="TextBox 6"/>
           <p:cNvSpPr txBox="1"/>
           <p:nvPr/>
         </p:nvSpPr>
@@ -13921,7 +12408,7 @@
       </p:sp>
       <p:sp>
         <p:nvSpPr>
-          <p:cNvPr id="9" name="TextBox 8"/>
+          <p:cNvPr id="8" name="TextBox 7"/>
           <p:cNvSpPr txBox="1"/>
           <p:nvPr/>
         </p:nvSpPr>
@@ -13956,7 +12443,7 @@
       </p:sp>
       <p:pic>
         <p:nvPicPr>
-          <p:cNvPr id="10" name="Picture 9" descr="ce9b607ea85ce740.png"/>
+          <p:cNvPr id="9" name="Picture 8" descr="ce9b607ea85ce740.png"/>
           <p:cNvPicPr>
             <a:picLocks noChangeAspect="1"/>
           </p:cNvPicPr>
@@ -13980,7 +12467,7 @@
       </p:pic>
       <p:sp>
         <p:nvSpPr>
-          <p:cNvPr id="11" name="TextBox 10"/>
+          <p:cNvPr id="10" name="TextBox 9"/>
           <p:cNvSpPr txBox="1"/>
           <p:nvPr/>
         </p:nvSpPr>
@@ -14015,7 +12502,7 @@
       </p:sp>
       <p:pic>
         <p:nvPicPr>
-          <p:cNvPr id="12" name="Picture 11" descr="06d7fcaebeec005c.png"/>
+          <p:cNvPr id="11" name="Picture 10" descr="06d7fcaebeec005c.png"/>
           <p:cNvPicPr>
             <a:picLocks noChangeAspect="1"/>
           </p:cNvPicPr>
@@ -14039,42 +12526,7 @@
       </p:pic>
       <p:sp>
         <p:nvSpPr>
-          <p:cNvPr id="13" name="TextBox 12"/>
-          <p:cNvSpPr txBox="1"/>
-          <p:nvPr/>
-        </p:nvSpPr>
-        <p:spPr>
-          <a:xfrm>
-            <a:off x="1828800" y="3520439"/>
-            <a:ext cx="8503920" cy="548640"/>
-          </a:xfrm>
-          <a:prstGeom prst="rect">
-            <a:avLst/>
-          </a:prstGeom>
-          <a:noFill/>
-        </p:spPr>
-        <p:txBody>
-          <a:bodyPr wrap="square" lIns="45720" rIns="45720" tIns="18288" bIns="18288" anchor="t">
-            <a:spAutoFit/>
-          </a:bodyPr>
-          <a:lstStyle/>
-          <a:p>
-            <a:pPr algn="ctr"/>
-            <a:r>
-              <a:rPr sz="2400" b="0" i="0">
-                <a:solidFill>
-                  <a:srgbClr val="6B6B6B"/>
-                </a:solidFill>
-                <a:latin typeface="Century Schoolbook"/>
-              </a:rPr>
-              <a:t>−5 + n = 2</a:t>
-            </a:r>
-          </a:p>
-        </p:txBody>
-      </p:sp>
-      <p:sp>
-        <p:nvSpPr>
-          <p:cNvPr id="14" name="TextBox 13"/>
+          <p:cNvPr id="12" name="TextBox 11"/>
           <p:cNvSpPr txBox="1"/>
           <p:nvPr/>
         </p:nvSpPr>
@@ -14230,44 +12682,9 @@
           </a:fontRef>
         </p:style>
       </p:cxnSp>
-      <p:sp>
-        <p:nvSpPr>
-          <p:cNvPr id="5" name="TextBox 4"/>
-          <p:cNvSpPr txBox="1"/>
-          <p:nvPr/>
-        </p:nvSpPr>
-        <p:spPr>
-          <a:xfrm>
-            <a:off x="777240" y="1261872"/>
-            <a:ext cx="10607040" cy="310896"/>
-          </a:xfrm>
-          <a:prstGeom prst="rect">
-            <a:avLst/>
-          </a:prstGeom>
-          <a:noFill/>
-        </p:spPr>
-        <p:txBody>
-          <a:bodyPr wrap="square" lIns="45720" rIns="45720" tIns="18288" bIns="18288" anchor="t">
-            <a:spAutoFit/>
-          </a:bodyPr>
-          <a:lstStyle/>
-          <a:p>
-            <a:pPr algn="l"/>
-            <a:r>
-              <a:rPr sz="1700" b="0" i="1">
-                <a:solidFill>
-                  <a:srgbClr val="6B6B6B"/>
-                </a:solidFill>
-                <a:latin typeface="Century Schoolbook"/>
-              </a:rPr>
-              <a:t>Take your time. Boards up when you have written it.</a:t>
-            </a:r>
-          </a:p>
-        </p:txBody>
-      </p:sp>
       <p:cxnSp>
         <p:nvCxnSpPr>
-          <p:cNvPr id="6" name="Connector 5"/>
+          <p:cNvPr id="5" name="Connector 4"/>
           <p:cNvCxnSpPr/>
           <p:nvPr/>
         </p:nvCxnSpPr>
@@ -14302,7 +12719,7 @@
       </p:cxnSp>
       <p:sp>
         <p:nvSpPr>
-          <p:cNvPr id="7" name="TextBox 6"/>
+          <p:cNvPr id="6" name="TextBox 5"/>
           <p:cNvSpPr txBox="1"/>
           <p:nvPr/>
         </p:nvSpPr>
@@ -14337,7 +12754,7 @@
       </p:sp>
       <p:sp>
         <p:nvSpPr>
-          <p:cNvPr id="8" name="TextBox 7"/>
+          <p:cNvPr id="7" name="TextBox 6"/>
           <p:cNvSpPr txBox="1"/>
           <p:nvPr/>
         </p:nvSpPr>
@@ -14372,7 +12789,7 @@
       </p:sp>
       <p:sp>
         <p:nvSpPr>
-          <p:cNvPr id="9" name="TextBox 8"/>
+          <p:cNvPr id="8" name="TextBox 7"/>
           <p:cNvSpPr txBox="1"/>
           <p:nvPr/>
         </p:nvSpPr>
@@ -14407,7 +12824,7 @@
       </p:sp>
       <p:pic>
         <p:nvPicPr>
-          <p:cNvPr id="10" name="Picture 9" descr="cc078cbc81823c99.png"/>
+          <p:cNvPr id="9" name="Picture 8" descr="cc078cbc81823c99.png"/>
           <p:cNvPicPr>
             <a:picLocks noChangeAspect="1"/>
           </p:cNvPicPr>
@@ -14431,7 +12848,7 @@
       </p:pic>
       <p:sp>
         <p:nvSpPr>
-          <p:cNvPr id="11" name="TextBox 10"/>
+          <p:cNvPr id="10" name="TextBox 9"/>
           <p:cNvSpPr txBox="1"/>
           <p:nvPr/>
         </p:nvSpPr>
@@ -14466,7 +12883,7 @@
       </p:sp>
       <p:pic>
         <p:nvPicPr>
-          <p:cNvPr id="12" name="Picture 11" descr="d31e0d14216148d7.png"/>
+          <p:cNvPr id="11" name="Picture 10" descr="d31e0d14216148d7.png"/>
           <p:cNvPicPr>
             <a:picLocks noChangeAspect="1"/>
           </p:cNvPicPr>
@@ -14490,7 +12907,7 @@
       </p:pic>
       <p:sp>
         <p:nvSpPr>
-          <p:cNvPr id="13" name="TextBox 12"/>
+          <p:cNvPr id="12" name="TextBox 11"/>
           <p:cNvSpPr txBox="1"/>
           <p:nvPr/>
         </p:nvSpPr>
@@ -14525,7 +12942,7 @@
       </p:sp>
       <p:sp>
         <p:nvSpPr>
-          <p:cNvPr id="14" name="TextBox 13"/>
+          <p:cNvPr id="13" name="TextBox 12"/>
           <p:cNvSpPr txBox="1"/>
           <p:nvPr/>
         </p:nvSpPr>
@@ -14560,7 +12977,7 @@
       </p:sp>
       <p:pic>
         <p:nvPicPr>
-          <p:cNvPr id="15" name="Picture 14" descr="118dd4b796dc8502.png"/>
+          <p:cNvPr id="14" name="Picture 13" descr="118dd4b796dc8502.png"/>
           <p:cNvPicPr>
             <a:picLocks noChangeAspect="1"/>
           </p:cNvPicPr>
@@ -14584,7 +13001,7 @@
       </p:pic>
       <p:sp>
         <p:nvSpPr>
-          <p:cNvPr id="16" name="TextBox 15"/>
+          <p:cNvPr id="15" name="TextBox 14"/>
           <p:cNvSpPr txBox="1"/>
           <p:nvPr/>
         </p:nvSpPr>
@@ -14619,7 +13036,7 @@
       </p:sp>
       <p:sp>
         <p:nvSpPr>
-          <p:cNvPr id="17" name="TextBox 16"/>
+          <p:cNvPr id="16" name="TextBox 15"/>
           <p:cNvSpPr txBox="1"/>
           <p:nvPr/>
         </p:nvSpPr>
@@ -14648,41 +13065,6 @@
                 <a:latin typeface="Century Schoolbook"/>
               </a:rPr>
               <a:t>Write your answer in sentences.</a:t>
-            </a:r>
-          </a:p>
-        </p:txBody>
-      </p:sp>
-      <p:sp>
-        <p:nvSpPr>
-          <p:cNvPr id="18" name="TextBox 17"/>
-          <p:cNvSpPr txBox="1"/>
-          <p:nvPr/>
-        </p:nvSpPr>
-        <p:spPr>
-          <a:xfrm>
-            <a:off x="777240" y="4828032"/>
-            <a:ext cx="10607040" cy="365760"/>
-          </a:xfrm>
-          <a:prstGeom prst="rect">
-            <a:avLst/>
-          </a:prstGeom>
-          <a:noFill/>
-        </p:spPr>
-        <p:txBody>
-          <a:bodyPr wrap="square" lIns="45720" rIns="45720" tIns="18288" bIns="18288" anchor="t">
-            <a:spAutoFit/>
-          </a:bodyPr>
-          <a:lstStyle/>
-          <a:p>
-            <a:pPr algn="ctr"/>
-            <a:r>
-              <a:rPr sz="1900" b="0" i="1">
-                <a:solidFill>
-                  <a:srgbClr val="6B6B6B"/>
-                </a:solidFill>
-                <a:latin typeface="Century Schoolbook"/>
-              </a:rPr>
-              <a:t>Use the word reciprocal.</a:t>
             </a:r>
           </a:p>
         </p:txBody>
@@ -14810,44 +13192,9 @@
           </a:fontRef>
         </p:style>
       </p:cxnSp>
-      <p:sp>
-        <p:nvSpPr>
-          <p:cNvPr id="5" name="TextBox 4"/>
-          <p:cNvSpPr txBox="1"/>
-          <p:nvPr/>
-        </p:nvSpPr>
-        <p:spPr>
-          <a:xfrm>
-            <a:off x="777240" y="1261872"/>
-            <a:ext cx="10607040" cy="310896"/>
-          </a:xfrm>
-          <a:prstGeom prst="rect">
-            <a:avLst/>
-          </a:prstGeom>
-          <a:noFill/>
-        </p:spPr>
-        <p:txBody>
-          <a:bodyPr wrap="square" lIns="45720" rIns="45720" tIns="18288" bIns="18288" anchor="t">
-            <a:spAutoFit/>
-          </a:bodyPr>
-          <a:lstStyle/>
-          <a:p>
-            <a:pPr algn="l"/>
-            <a:r>
-              <a:rPr sz="1700" b="0" i="1">
-                <a:solidFill>
-                  <a:srgbClr val="6B6B6B"/>
-                </a:solidFill>
-                <a:latin typeface="Century Schoolbook"/>
-              </a:rPr>
-              <a:t>Answer.</a:t>
-            </a:r>
-          </a:p>
-        </p:txBody>
-      </p:sp>
       <p:cxnSp>
         <p:nvCxnSpPr>
-          <p:cNvPr id="6" name="Connector 5"/>
+          <p:cNvPr id="5" name="Connector 4"/>
           <p:cNvCxnSpPr/>
           <p:nvPr/>
         </p:nvCxnSpPr>
@@ -14882,7 +13229,7 @@
       </p:cxnSp>
       <p:sp>
         <p:nvSpPr>
-          <p:cNvPr id="7" name="TextBox 6"/>
+          <p:cNvPr id="6" name="TextBox 5"/>
           <p:cNvSpPr txBox="1"/>
           <p:nvPr/>
         </p:nvSpPr>
@@ -14917,7 +13264,7 @@
       </p:sp>
       <p:sp>
         <p:nvSpPr>
-          <p:cNvPr id="8" name="TextBox 7"/>
+          <p:cNvPr id="7" name="TextBox 6"/>
           <p:cNvSpPr txBox="1"/>
           <p:nvPr/>
         </p:nvSpPr>
@@ -14952,7 +13299,7 @@
       </p:sp>
       <p:sp>
         <p:nvSpPr>
-          <p:cNvPr id="9" name="TextBox 8"/>
+          <p:cNvPr id="8" name="TextBox 7"/>
           <p:cNvSpPr txBox="1"/>
           <p:nvPr/>
         </p:nvSpPr>
@@ -14987,7 +13334,7 @@
       </p:sp>
       <p:pic>
         <p:nvPicPr>
-          <p:cNvPr id="10" name="Picture 9" descr="3da309422df21aa5.png"/>
+          <p:cNvPr id="9" name="Picture 8" descr="3da309422df21aa5.png"/>
           <p:cNvPicPr>
             <a:picLocks noChangeAspect="1"/>
           </p:cNvPicPr>
@@ -15011,7 +13358,7 @@
       </p:pic>
       <p:sp>
         <p:nvSpPr>
-          <p:cNvPr id="11" name="TextBox 10"/>
+          <p:cNvPr id="10" name="TextBox 9"/>
           <p:cNvSpPr txBox="1"/>
           <p:nvPr/>
         </p:nvSpPr>
@@ -15046,7 +13393,7 @@
       </p:sp>
       <p:pic>
         <p:nvPicPr>
-          <p:cNvPr id="12" name="Picture 11" descr="50a3dff9085ab532.png"/>
+          <p:cNvPr id="11" name="Picture 10" descr="50a3dff9085ab532.png"/>
           <p:cNvPicPr>
             <a:picLocks noChangeAspect="1"/>
           </p:cNvPicPr>
@@ -15070,7 +13417,7 @@
       </p:pic>
       <p:sp>
         <p:nvSpPr>
-          <p:cNvPr id="13" name="TextBox 12"/>
+          <p:cNvPr id="12" name="TextBox 11"/>
           <p:cNvSpPr txBox="1"/>
           <p:nvPr/>
         </p:nvSpPr>
@@ -15105,7 +13452,7 @@
       </p:sp>
       <p:sp>
         <p:nvSpPr>
-          <p:cNvPr id="14" name="TextBox 13"/>
+          <p:cNvPr id="13" name="TextBox 12"/>
           <p:cNvSpPr txBox="1"/>
           <p:nvPr/>
         </p:nvSpPr>
@@ -15140,7 +13487,7 @@
       </p:sp>
       <p:pic>
         <p:nvPicPr>
-          <p:cNvPr id="15" name="Picture 14" descr="2cebf16dedade385.png"/>
+          <p:cNvPr id="14" name="Picture 13" descr="2cebf16dedade385.png"/>
           <p:cNvPicPr>
             <a:picLocks noChangeAspect="1"/>
           </p:cNvPicPr>
@@ -15164,7 +13511,7 @@
       </p:pic>
       <p:sp>
         <p:nvSpPr>
-          <p:cNvPr id="16" name="TextBox 15"/>
+          <p:cNvPr id="15" name="TextBox 14"/>
           <p:cNvSpPr txBox="1"/>
           <p:nvPr/>
         </p:nvSpPr>
@@ -15199,42 +13546,7 @@
       </p:sp>
       <p:sp>
         <p:nvSpPr>
-          <p:cNvPr id="17" name="TextBox 16"/>
-          <p:cNvSpPr txBox="1"/>
-          <p:nvPr/>
-        </p:nvSpPr>
-        <p:spPr>
-          <a:xfrm>
-            <a:off x="1828800" y="3520439"/>
-            <a:ext cx="8503920" cy="548640"/>
-          </a:xfrm>
-          <a:prstGeom prst="rect">
-            <a:avLst/>
-          </a:prstGeom>
-          <a:noFill/>
-        </p:spPr>
-        <p:txBody>
-          <a:bodyPr wrap="square" lIns="45720" rIns="45720" tIns="18288" bIns="18288" anchor="t">
-            <a:spAutoFit/>
-          </a:bodyPr>
-          <a:lstStyle/>
-          <a:p>
-            <a:pPr algn="ctr"/>
-            <a:r>
-              <a:rPr sz="2400" b="0" i="0">
-                <a:solidFill>
-                  <a:srgbClr val="6B6B6B"/>
-                </a:solidFill>
-                <a:latin typeface="Century Schoolbook"/>
-              </a:rPr>
-              <a:t>reciprocals: 8 and 1/8</a:t>
-            </a:r>
-          </a:p>
-        </p:txBody>
-      </p:sp>
-      <p:sp>
-        <p:nvSpPr>
-          <p:cNvPr id="18" name="TextBox 17"/>
+          <p:cNvPr id="16" name="TextBox 15"/>
           <p:cNvSpPr txBox="1"/>
           <p:nvPr/>
         </p:nvSpPr>
@@ -15462,44 +13774,9 @@
           </a:fontRef>
         </p:style>
       </p:cxnSp>
-      <p:sp>
-        <p:nvSpPr>
-          <p:cNvPr id="5" name="TextBox 4"/>
-          <p:cNvSpPr txBox="1"/>
-          <p:nvPr/>
-        </p:nvSpPr>
-        <p:spPr>
-          <a:xfrm>
-            <a:off x="777240" y="1261872"/>
-            <a:ext cx="10607040" cy="310896"/>
-          </a:xfrm>
-          <a:prstGeom prst="rect">
-            <a:avLst/>
-          </a:prstGeom>
-          <a:noFill/>
-        </p:spPr>
-        <p:txBody>
-          <a:bodyPr wrap="square" lIns="45720" rIns="45720" tIns="18288" bIns="18288" anchor="t">
-            <a:spAutoFit/>
-          </a:bodyPr>
-          <a:lstStyle/>
-          <a:p>
-            <a:pPr algn="l"/>
-            <a:r>
-              <a:rPr sz="1700" b="0" i="1">
-                <a:solidFill>
-                  <a:srgbClr val="6B6B6B"/>
-                </a:solidFill>
-                <a:latin typeface="Century Schoolbook"/>
-              </a:rPr>
-              <a:t>Six questions. On your own, in silence.</a:t>
-            </a:r>
-          </a:p>
-        </p:txBody>
-      </p:sp>
       <p:cxnSp>
         <p:nvCxnSpPr>
-          <p:cNvPr id="6" name="Connector 5"/>
+          <p:cNvPr id="5" name="Connector 4"/>
           <p:cNvCxnSpPr/>
           <p:nvPr/>
         </p:nvCxnSpPr>
@@ -15534,7 +13811,7 @@
       </p:cxnSp>
       <p:sp>
         <p:nvSpPr>
-          <p:cNvPr id="7" name="TextBox 6"/>
+          <p:cNvPr id="6" name="TextBox 5"/>
           <p:cNvSpPr txBox="1"/>
           <p:nvPr/>
         </p:nvSpPr>
@@ -15569,7 +13846,7 @@
       </p:sp>
       <p:sp>
         <p:nvSpPr>
-          <p:cNvPr id="8" name="TextBox 7"/>
+          <p:cNvPr id="7" name="TextBox 6"/>
           <p:cNvSpPr txBox="1"/>
           <p:nvPr/>
         </p:nvSpPr>
@@ -15604,7 +13881,7 @@
       </p:sp>
       <p:sp>
         <p:nvSpPr>
-          <p:cNvPr id="9" name="TextBox 8"/>
+          <p:cNvPr id="8" name="TextBox 7"/>
           <p:cNvSpPr txBox="1"/>
           <p:nvPr/>
         </p:nvSpPr>
@@ -15639,7 +13916,7 @@
       </p:sp>
       <p:sp>
         <p:nvSpPr>
-          <p:cNvPr id="10" name="TextBox 9"/>
+          <p:cNvPr id="9" name="TextBox 8"/>
           <p:cNvSpPr txBox="1"/>
           <p:nvPr/>
         </p:nvSpPr>
@@ -15674,7 +13951,7 @@
       </p:sp>
       <p:sp>
         <p:nvSpPr>
-          <p:cNvPr id="11" name="TextBox 10"/>
+          <p:cNvPr id="10" name="TextBox 9"/>
           <p:cNvSpPr txBox="1"/>
           <p:nvPr/>
         </p:nvSpPr>
@@ -15709,7 +13986,7 @@
       </p:sp>
       <p:sp>
         <p:nvSpPr>
-          <p:cNvPr id="12" name="TextBox 11"/>
+          <p:cNvPr id="11" name="TextBox 10"/>
           <p:cNvSpPr txBox="1"/>
           <p:nvPr/>
         </p:nvSpPr>
@@ -15744,7 +14021,7 @@
       </p:sp>
       <p:sp>
         <p:nvSpPr>
-          <p:cNvPr id="13" name="TextBox 12"/>
+          <p:cNvPr id="12" name="TextBox 11"/>
           <p:cNvSpPr txBox="1"/>
           <p:nvPr/>
         </p:nvSpPr>
@@ -15779,7 +14056,7 @@
       </p:sp>
       <p:sp>
         <p:nvSpPr>
-          <p:cNvPr id="14" name="TextBox 13"/>
+          <p:cNvPr id="13" name="TextBox 12"/>
           <p:cNvSpPr txBox="1"/>
           <p:nvPr/>
         </p:nvSpPr>
@@ -15935,44 +14212,9 @@
           </a:fontRef>
         </p:style>
       </p:cxnSp>
-      <p:sp>
-        <p:nvSpPr>
-          <p:cNvPr id="5" name="TextBox 4"/>
-          <p:cNvSpPr txBox="1"/>
-          <p:nvPr/>
-        </p:nvSpPr>
-        <p:spPr>
-          <a:xfrm>
-            <a:off x="777240" y="1261872"/>
-            <a:ext cx="10607040" cy="310896"/>
-          </a:xfrm>
-          <a:prstGeom prst="rect">
-            <a:avLst/>
-          </a:prstGeom>
-          <a:noFill/>
-        </p:spPr>
-        <p:txBody>
-          <a:bodyPr wrap="square" lIns="45720" rIns="45720" tIns="18288" bIns="18288" anchor="t">
-            <a:spAutoFit/>
-          </a:bodyPr>
-          <a:lstStyle/>
-          <a:p>
-            <a:pPr algn="l"/>
-            <a:r>
-              <a:rPr sz="1700" b="0" i="1">
-                <a:solidFill>
-                  <a:srgbClr val="6B6B6B"/>
-                </a:solidFill>
-                <a:latin typeface="Century Schoolbook"/>
-              </a:rPr>
-              <a:t>Last five minutes.</a:t>
-            </a:r>
-          </a:p>
-        </p:txBody>
-      </p:sp>
       <p:cxnSp>
         <p:nvCxnSpPr>
-          <p:cNvPr id="6" name="Connector 5"/>
+          <p:cNvPr id="5" name="Connector 4"/>
           <p:cNvCxnSpPr/>
           <p:nvPr/>
         </p:nvCxnSpPr>
@@ -16007,7 +14249,7 @@
       </p:cxnSp>
       <p:sp>
         <p:nvSpPr>
-          <p:cNvPr id="7" name="TextBox 6"/>
+          <p:cNvPr id="6" name="TextBox 5"/>
           <p:cNvSpPr txBox="1"/>
           <p:nvPr/>
         </p:nvSpPr>
@@ -16042,7 +14284,7 @@
       </p:sp>
       <p:sp>
         <p:nvSpPr>
-          <p:cNvPr id="8" name="TextBox 7"/>
+          <p:cNvPr id="7" name="TextBox 6"/>
           <p:cNvSpPr txBox="1"/>
           <p:nvPr/>
         </p:nvSpPr>
@@ -16077,7 +14319,7 @@
       </p:sp>
       <p:sp>
         <p:nvSpPr>
-          <p:cNvPr id="9" name="TextBox 8"/>
+          <p:cNvPr id="8" name="TextBox 7"/>
           <p:cNvSpPr txBox="1"/>
           <p:nvPr/>
         </p:nvSpPr>
@@ -16112,7 +14354,7 @@
       </p:sp>
       <p:sp>
         <p:nvSpPr>
-          <p:cNvPr id="10" name="TextBox 9"/>
+          <p:cNvPr id="9" name="TextBox 8"/>
           <p:cNvSpPr txBox="1"/>
           <p:nvPr/>
         </p:nvSpPr>
@@ -16147,7 +14389,7 @@
       </p:sp>
       <p:sp>
         <p:nvSpPr>
-          <p:cNvPr id="11" name="TextBox 10"/>
+          <p:cNvPr id="10" name="TextBox 9"/>
           <p:cNvSpPr txBox="1"/>
           <p:nvPr/>
         </p:nvSpPr>
@@ -16182,7 +14424,7 @@
       </p:sp>
       <p:sp>
         <p:nvSpPr>
-          <p:cNvPr id="12" name="TextBox 11"/>
+          <p:cNvPr id="11" name="TextBox 10"/>
           <p:cNvSpPr txBox="1"/>
           <p:nvPr/>
         </p:nvSpPr>
@@ -16217,7 +14459,7 @@
       </p:sp>
       <p:sp>
         <p:nvSpPr>
-          <p:cNvPr id="13" name="TextBox 12"/>
+          <p:cNvPr id="12" name="TextBox 11"/>
           <p:cNvSpPr txBox="1"/>
           <p:nvPr/>
         </p:nvSpPr>
@@ -16252,7 +14494,7 @@
       </p:sp>
       <p:sp>
         <p:nvSpPr>
-          <p:cNvPr id="14" name="TextBox 13"/>
+          <p:cNvPr id="13" name="TextBox 12"/>
           <p:cNvSpPr txBox="1"/>
           <p:nvPr/>
         </p:nvSpPr>
@@ -16287,7 +14529,7 @@
       </p:sp>
       <p:sp>
         <p:nvSpPr>
-          <p:cNvPr id="15" name="TextBox 14"/>
+          <p:cNvPr id="14" name="TextBox 13"/>
           <p:cNvSpPr txBox="1"/>
           <p:nvPr/>
         </p:nvSpPr>
@@ -16322,7 +14564,7 @@
       </p:sp>
       <p:sp>
         <p:nvSpPr>
-          <p:cNvPr id="16" name="TextBox 15"/>
+          <p:cNvPr id="15" name="TextBox 14"/>
           <p:cNvSpPr txBox="1"/>
           <p:nvPr/>
         </p:nvSpPr>
@@ -16357,7 +14599,7 @@
       </p:sp>
       <p:sp>
         <p:nvSpPr>
-          <p:cNvPr id="17" name="TextBox 16"/>
+          <p:cNvPr id="16" name="TextBox 15"/>
           <p:cNvSpPr txBox="1"/>
           <p:nvPr/>
         </p:nvSpPr>
@@ -16513,44 +14755,9 @@
           </a:fontRef>
         </p:style>
       </p:cxnSp>
-      <p:sp>
-        <p:nvSpPr>
-          <p:cNvPr id="5" name="TextBox 4"/>
-          <p:cNvSpPr txBox="1"/>
-          <p:nvPr/>
-        </p:nvSpPr>
-        <p:spPr>
-          <a:xfrm>
-            <a:off x="777240" y="1261872"/>
-            <a:ext cx="10607040" cy="310896"/>
-          </a:xfrm>
-          <a:prstGeom prst="rect">
-            <a:avLst/>
-          </a:prstGeom>
-          <a:noFill/>
-        </p:spPr>
-        <p:txBody>
-          <a:bodyPr wrap="square" lIns="45720" rIns="45720" tIns="18288" bIns="18288" anchor="t">
-            <a:spAutoFit/>
-          </a:bodyPr>
-          <a:lstStyle/>
-          <a:p>
-            <a:pPr algn="l"/>
-            <a:r>
-              <a:rPr sz="1700" b="0" i="1">
-                <a:solidFill>
-                  <a:srgbClr val="6B6B6B"/>
-                </a:solidFill>
-                <a:latin typeface="Century Schoolbook"/>
-              </a:rPr>
-              <a:t>Copy the table.</a:t>
-            </a:r>
-          </a:p>
-        </p:txBody>
-      </p:sp>
       <p:cxnSp>
         <p:nvCxnSpPr>
-          <p:cNvPr id="6" name="Connector 5"/>
+          <p:cNvPr id="5" name="Connector 4"/>
           <p:cNvCxnSpPr/>
           <p:nvPr/>
         </p:nvCxnSpPr>
@@ -16585,7 +14792,7 @@
       </p:cxnSp>
       <p:sp>
         <p:nvSpPr>
-          <p:cNvPr id="7" name="TextBox 6"/>
+          <p:cNvPr id="6" name="TextBox 5"/>
           <p:cNvSpPr txBox="1"/>
           <p:nvPr/>
         </p:nvSpPr>
@@ -16620,7 +14827,7 @@
       </p:sp>
       <p:sp>
         <p:nvSpPr>
-          <p:cNvPr id="8" name="TextBox 7"/>
+          <p:cNvPr id="7" name="TextBox 6"/>
           <p:cNvSpPr txBox="1"/>
           <p:nvPr/>
         </p:nvSpPr>
@@ -16655,13 +14862,13 @@
       </p:sp>
       <p:sp>
         <p:nvSpPr>
-          <p:cNvPr id="9" name="TextBox 8"/>
-          <p:cNvSpPr txBox="1"/>
-          <p:nvPr/>
-        </p:nvSpPr>
-        <p:spPr>
-          <a:xfrm>
-            <a:off x="777240" y="1737360"/>
+          <p:cNvPr id="8" name="TextBox 7"/>
+          <p:cNvSpPr txBox="1"/>
+          <p:nvPr/>
+        </p:nvSpPr>
+        <p:spPr>
+          <a:xfrm>
+            <a:off x="777240" y="1389888"/>
             <a:ext cx="10607040" cy="402336"/>
           </a:xfrm>
           <a:prstGeom prst="rect">
@@ -16690,13 +14897,13 @@
       </p:sp>
       <p:cxnSp>
         <p:nvCxnSpPr>
-          <p:cNvPr id="10" name="Connector 9"/>
+          <p:cNvPr id="9" name="Connector 8"/>
           <p:cNvCxnSpPr/>
           <p:nvPr/>
         </p:nvCxnSpPr>
         <p:spPr>
           <a:xfrm>
-            <a:off x="777240" y="2176272"/>
+            <a:off x="777240" y="1828800"/>
             <a:ext cx="10607040" cy="0"/>
           </a:xfrm>
           <a:prstGeom prst="line">
@@ -16725,14 +14932,14 @@
       </p:cxnSp>
       <p:graphicFrame>
         <p:nvGraphicFramePr>
-          <p:cNvPr id="11" name="Table 10"/>
+          <p:cNvPr id="10" name="Table 9"/>
           <p:cNvGraphicFramePr>
             <a:graphicFrameLocks noGrp="1"/>
           </p:cNvGraphicFramePr>
           <p:nvPr/>
         </p:nvGraphicFramePr>
         <p:xfrm>
-          <a:off x="777240" y="2340864"/>
+          <a:off x="777240" y="1993392"/>
           <a:ext cx="10607040" cy="768096"/>
         </p:xfrm>
         <a:graphic>
@@ -17603,7 +15810,7 @@
       </p:graphicFrame>
       <p:pic>
         <p:nvPicPr>
-          <p:cNvPr id="12" name="Picture 11" descr="566883ffdb25670b.png"/>
+          <p:cNvPr id="11" name="Picture 10" descr="566883ffdb25670b.png"/>
           <p:cNvPicPr>
             <a:picLocks noChangeAspect="1"/>
           </p:cNvPicPr>
@@ -17617,7 +15824,7 @@
         </p:blipFill>
         <p:spPr>
           <a:xfrm>
-            <a:off x="3141253" y="3337560"/>
+            <a:off x="3141253" y="2990088"/>
             <a:ext cx="1335024" cy="676656"/>
           </a:xfrm>
           <a:prstGeom prst="rect">
@@ -17627,13 +15834,13 @@
       </p:pic>
       <p:sp>
         <p:nvSpPr>
-          <p:cNvPr id="13" name="TextBox 12"/>
-          <p:cNvSpPr txBox="1"/>
-          <p:nvPr/>
-        </p:nvSpPr>
-        <p:spPr>
-          <a:xfrm>
-            <a:off x="4476277" y="3447288"/>
+          <p:cNvPr id="12" name="TextBox 11"/>
+          <p:cNvSpPr txBox="1"/>
+          <p:nvPr/>
+        </p:nvSpPr>
+        <p:spPr>
+          <a:xfrm>
+            <a:off x="4476277" y="3099816"/>
             <a:ext cx="1183151" cy="457200"/>
           </a:xfrm>
           <a:prstGeom prst="rect">
@@ -17662,7 +15869,7 @@
       </p:sp>
       <p:pic>
         <p:nvPicPr>
-          <p:cNvPr id="14" name="Picture 13" descr="bdac5bab61ffd0ec.png"/>
+          <p:cNvPr id="13" name="Picture 12" descr="bdac5bab61ffd0ec.png"/>
           <p:cNvPicPr>
             <a:picLocks noChangeAspect="1"/>
           </p:cNvPicPr>
@@ -17676,7 +15883,7 @@
         </p:blipFill>
         <p:spPr>
           <a:xfrm>
-            <a:off x="5522269" y="3337560"/>
+            <a:off x="5522269" y="2990088"/>
             <a:ext cx="1362456" cy="676656"/>
           </a:xfrm>
           <a:prstGeom prst="rect">
@@ -17686,13 +15893,13 @@
       </p:pic>
       <p:sp>
         <p:nvSpPr>
-          <p:cNvPr id="15" name="TextBox 14"/>
-          <p:cNvSpPr txBox="1"/>
-          <p:nvPr/>
-        </p:nvSpPr>
-        <p:spPr>
-          <a:xfrm>
-            <a:off x="6884725" y="3447288"/>
+          <p:cNvPr id="14" name="TextBox 13"/>
+          <p:cNvSpPr txBox="1"/>
+          <p:nvPr/>
+        </p:nvSpPr>
+        <p:spPr>
+          <a:xfrm>
+            <a:off x="6884725" y="3099816"/>
             <a:ext cx="1299682" cy="457200"/>
           </a:xfrm>
           <a:prstGeom prst="rect">
@@ -17721,7 +15928,7 @@
       </p:sp>
       <p:pic>
         <p:nvPicPr>
-          <p:cNvPr id="16" name="Picture 15" descr="3202774bcb053046.png"/>
+          <p:cNvPr id="15" name="Picture 14" descr="3202774bcb053046.png"/>
           <p:cNvPicPr>
             <a:picLocks noChangeAspect="1"/>
           </p:cNvPicPr>
@@ -17735,7 +15942,7 @@
         </p:blipFill>
         <p:spPr>
           <a:xfrm>
-            <a:off x="8047247" y="3506724"/>
+            <a:off x="8047247" y="3159252"/>
             <a:ext cx="783336" cy="338328"/>
           </a:xfrm>
           <a:prstGeom prst="rect">
@@ -17745,13 +15952,13 @@
       </p:pic>
       <p:sp>
         <p:nvSpPr>
-          <p:cNvPr id="17" name="TextBox 16"/>
-          <p:cNvSpPr txBox="1"/>
-          <p:nvPr/>
-        </p:nvSpPr>
-        <p:spPr>
-          <a:xfrm>
-            <a:off x="8830583" y="3447288"/>
+          <p:cNvPr id="16" name="TextBox 15"/>
+          <p:cNvSpPr txBox="1"/>
+          <p:nvPr/>
+        </p:nvSpPr>
+        <p:spPr>
+          <a:xfrm>
+            <a:off x="8830583" y="3099816"/>
             <a:ext cx="326842" cy="457200"/>
           </a:xfrm>
           <a:prstGeom prst="rect">
@@ -18014,7 +16221,7 @@
         </p:nvSpPr>
         <p:spPr>
           <a:xfrm>
-            <a:off x="777240" y="1737360"/>
+            <a:off x="777240" y="1389888"/>
             <a:ext cx="10607040" cy="402336"/>
           </a:xfrm>
           <a:prstGeom prst="rect">
@@ -18049,7 +16256,7 @@
         </p:nvCxnSpPr>
         <p:spPr>
           <a:xfrm>
-            <a:off x="777240" y="2176272"/>
+            <a:off x="777240" y="1828800"/>
             <a:ext cx="10607040" cy="0"/>
           </a:xfrm>
           <a:prstGeom prst="line">
@@ -18092,7 +16299,7 @@
         </p:blipFill>
         <p:spPr>
           <a:xfrm>
-            <a:off x="2267184" y="2377440"/>
+            <a:off x="2267184" y="2029968"/>
             <a:ext cx="1508760" cy="743712"/>
           </a:xfrm>
           <a:prstGeom prst="rect">
@@ -18108,7 +16315,7 @@
         </p:nvSpPr>
         <p:spPr>
           <a:xfrm>
-            <a:off x="3775944" y="2520696"/>
+            <a:off x="3775944" y="2173224"/>
             <a:ext cx="1183151" cy="457200"/>
           </a:xfrm>
           <a:prstGeom prst="rect">
@@ -18151,7 +16358,7 @@
         </p:blipFill>
         <p:spPr>
           <a:xfrm>
-            <a:off x="4821935" y="2340864"/>
+            <a:off x="4821935" y="1993392"/>
             <a:ext cx="2209800" cy="816864"/>
           </a:xfrm>
           <a:prstGeom prst="rect">
@@ -18167,7 +16374,7 @@
         </p:nvSpPr>
         <p:spPr>
           <a:xfrm>
-            <a:off x="7031736" y="2520696"/>
+            <a:off x="7031736" y="2173224"/>
             <a:ext cx="1183151" cy="457200"/>
           </a:xfrm>
           <a:prstGeom prst="rect">
@@ -18210,7 +16417,7 @@
         </p:blipFill>
         <p:spPr>
           <a:xfrm>
-            <a:off x="8077727" y="2345436"/>
+            <a:off x="8077727" y="1997964"/>
             <a:ext cx="1816608" cy="807720"/>
           </a:xfrm>
           <a:prstGeom prst="rect">
@@ -18234,7 +16441,7 @@
         </p:blipFill>
         <p:spPr>
           <a:xfrm>
-            <a:off x="4928616" y="3432047"/>
+            <a:off x="4928616" y="3084575"/>
             <a:ext cx="2304288" cy="920495"/>
           </a:xfrm>
           <a:prstGeom prst="rect">
@@ -18250,7 +16457,7 @@
         </p:nvSpPr>
         <p:spPr>
           <a:xfrm>
-            <a:off x="987552" y="4690872"/>
+            <a:off x="987552" y="4343400"/>
             <a:ext cx="10131551" cy="475488"/>
           </a:xfrm>
           <a:prstGeom prst="rect">
@@ -18513,7 +16720,7 @@
         </p:nvSpPr>
         <p:spPr>
           <a:xfrm>
-            <a:off x="777240" y="1737360"/>
+            <a:off x="777240" y="1389888"/>
             <a:ext cx="10607040" cy="402336"/>
           </a:xfrm>
           <a:prstGeom prst="rect">
@@ -18548,7 +16755,7 @@
         </p:nvCxnSpPr>
         <p:spPr>
           <a:xfrm>
-            <a:off x="777240" y="2176272"/>
+            <a:off x="777240" y="1828800"/>
             <a:ext cx="10607040" cy="0"/>
           </a:xfrm>
           <a:prstGeom prst="line">
@@ -18591,7 +16798,7 @@
         </p:blipFill>
         <p:spPr>
           <a:xfrm>
-            <a:off x="1446012" y="2374392"/>
+            <a:off x="1446012" y="2026920"/>
             <a:ext cx="4456176" cy="740664"/>
           </a:xfrm>
           <a:prstGeom prst="rect">
@@ -18607,7 +16814,7 @@
         </p:nvSpPr>
         <p:spPr>
           <a:xfrm>
-            <a:off x="5902188" y="2516124"/>
+            <a:off x="5902188" y="2168652"/>
             <a:ext cx="1183151" cy="457200"/>
           </a:xfrm>
           <a:prstGeom prst="rect">
@@ -18650,7 +16857,7 @@
         </p:blipFill>
         <p:spPr>
           <a:xfrm>
-            <a:off x="6948179" y="2340864"/>
+            <a:off x="6948179" y="1993392"/>
             <a:ext cx="3767328" cy="807720"/>
           </a:xfrm>
           <a:prstGeom prst="rect">
@@ -18674,7 +16881,7 @@
         </p:blipFill>
         <p:spPr>
           <a:xfrm>
-            <a:off x="4328159" y="3422904"/>
+            <a:off x="4328159" y="3075432"/>
             <a:ext cx="3505200" cy="819912"/>
           </a:xfrm>
           <a:prstGeom prst="rect">
@@ -18690,7 +16897,7 @@
         </p:nvSpPr>
         <p:spPr>
           <a:xfrm>
-            <a:off x="987552" y="4581144"/>
+            <a:off x="987552" y="4233672"/>
             <a:ext cx="10131551" cy="475488"/>
           </a:xfrm>
           <a:prstGeom prst="rect">
@@ -18840,44 +17047,9 @@
           </a:fontRef>
         </p:style>
       </p:cxnSp>
-      <p:sp>
-        <p:nvSpPr>
-          <p:cNvPr id="5" name="TextBox 4"/>
-          <p:cNvSpPr txBox="1"/>
-          <p:nvPr/>
-        </p:nvSpPr>
-        <p:spPr>
-          <a:xfrm>
-            <a:off x="777240" y="1261872"/>
-            <a:ext cx="10607040" cy="310896"/>
-          </a:xfrm>
-          <a:prstGeom prst="rect">
-            <a:avLst/>
-          </a:prstGeom>
-          <a:noFill/>
-        </p:spPr>
-        <p:txBody>
-          <a:bodyPr wrap="square" lIns="45720" rIns="45720" tIns="18288" bIns="18288" anchor="t">
-            <a:spAutoFit/>
-          </a:bodyPr>
-          <a:lstStyle/>
-          <a:p>
-            <a:pPr algn="l"/>
-            <a:r>
-              <a:rPr sz="1700" b="0" i="1">
-                <a:solidFill>
-                  <a:srgbClr val="6B6B6B"/>
-                </a:solidFill>
-                <a:latin typeface="Century Schoolbook"/>
-              </a:rPr>
-              <a:t>Multiplying monomials with negative exponents.</a:t>
-            </a:r>
-          </a:p>
-        </p:txBody>
-      </p:sp>
       <p:cxnSp>
         <p:nvCxnSpPr>
-          <p:cNvPr id="6" name="Connector 5"/>
+          <p:cNvPr id="5" name="Connector 4"/>
           <p:cNvCxnSpPr/>
           <p:nvPr/>
         </p:nvCxnSpPr>
@@ -18912,7 +17084,7 @@
       </p:cxnSp>
       <p:sp>
         <p:nvSpPr>
-          <p:cNvPr id="7" name="TextBox 6"/>
+          <p:cNvPr id="6" name="TextBox 5"/>
           <p:cNvSpPr txBox="1"/>
           <p:nvPr/>
         </p:nvSpPr>
@@ -18947,7 +17119,7 @@
       </p:sp>
       <p:sp>
         <p:nvSpPr>
-          <p:cNvPr id="8" name="TextBox 7"/>
+          <p:cNvPr id="7" name="TextBox 6"/>
           <p:cNvSpPr txBox="1"/>
           <p:nvPr/>
         </p:nvSpPr>
@@ -18982,7 +17154,7 @@
       </p:sp>
       <p:pic>
         <p:nvPicPr>
-          <p:cNvPr id="9" name="Picture 8" descr="284a92747d139ebf.png"/>
+          <p:cNvPr id="8" name="Picture 7" descr="284a92747d139ebf.png"/>
           <p:cNvPicPr>
             <a:picLocks noChangeAspect="1"/>
           </p:cNvPicPr>
@@ -19006,7 +17178,7 @@
       </p:pic>
       <p:sp>
         <p:nvSpPr>
-          <p:cNvPr id="10" name="TextBox 9"/>
+          <p:cNvPr id="9" name="TextBox 8"/>
           <p:cNvSpPr txBox="1"/>
           <p:nvPr/>
         </p:nvSpPr>
@@ -19162,44 +17334,9 @@
           </a:fontRef>
         </p:style>
       </p:cxnSp>
-      <p:sp>
-        <p:nvSpPr>
-          <p:cNvPr id="5" name="TextBox 4"/>
-          <p:cNvSpPr txBox="1"/>
-          <p:nvPr/>
-        </p:nvSpPr>
-        <p:spPr>
-          <a:xfrm>
-            <a:off x="777240" y="1261872"/>
-            <a:ext cx="10607040" cy="310896"/>
-          </a:xfrm>
-          <a:prstGeom prst="rect">
-            <a:avLst/>
-          </a:prstGeom>
-          <a:noFill/>
-        </p:spPr>
-        <p:txBody>
-          <a:bodyPr wrap="square" lIns="45720" rIns="45720" tIns="18288" bIns="18288" anchor="t">
-            <a:spAutoFit/>
-          </a:bodyPr>
-          <a:lstStyle/>
-          <a:p>
-            <a:pPr algn="l"/>
-            <a:r>
-              <a:rPr sz="1700" b="0" i="1">
-                <a:solidFill>
-                  <a:srgbClr val="6B6B6B"/>
-                </a:solidFill>
-                <a:latin typeface="Century Schoolbook"/>
-              </a:rPr>
-              <a:t>Worked.</a:t>
-            </a:r>
-          </a:p>
-        </p:txBody>
-      </p:sp>
       <p:cxnSp>
         <p:nvCxnSpPr>
-          <p:cNvPr id="6" name="Connector 5"/>
+          <p:cNvPr id="5" name="Connector 4"/>
           <p:cNvCxnSpPr/>
           <p:nvPr/>
         </p:nvCxnSpPr>
@@ -19234,7 +17371,7 @@
       </p:cxnSp>
       <p:sp>
         <p:nvSpPr>
-          <p:cNvPr id="7" name="TextBox 6"/>
+          <p:cNvPr id="6" name="TextBox 5"/>
           <p:cNvSpPr txBox="1"/>
           <p:nvPr/>
         </p:nvSpPr>
@@ -19269,7 +17406,7 @@
       </p:sp>
       <p:sp>
         <p:nvSpPr>
-          <p:cNvPr id="8" name="TextBox 7"/>
+          <p:cNvPr id="7" name="TextBox 6"/>
           <p:cNvSpPr txBox="1"/>
           <p:nvPr/>
         </p:nvSpPr>
@@ -19304,7 +17441,7 @@
       </p:sp>
       <p:pic>
         <p:nvPicPr>
-          <p:cNvPr id="9" name="Picture 8" descr="99ce65e5c8ec578d.png"/>
+          <p:cNvPr id="8" name="Picture 7" descr="99ce65e5c8ec578d.png"/>
           <p:cNvPicPr>
             <a:picLocks noChangeAspect="1"/>
           </p:cNvPicPr>
@@ -19326,44 +17463,9 @@
           </a:prstGeom>
         </p:spPr>
       </p:pic>
-      <p:sp>
-        <p:nvSpPr>
-          <p:cNvPr id="10" name="TextBox 9"/>
-          <p:cNvSpPr txBox="1"/>
-          <p:nvPr/>
-        </p:nvSpPr>
-        <p:spPr>
-          <a:xfrm>
-            <a:off x="8458200" y="1903476"/>
-            <a:ext cx="2926079" cy="502920"/>
-          </a:xfrm>
-          <a:prstGeom prst="rect">
-            <a:avLst/>
-          </a:prstGeom>
-          <a:noFill/>
-        </p:spPr>
-        <p:txBody>
-          <a:bodyPr wrap="square" lIns="45720" rIns="45720" tIns="18288" bIns="18288" anchor="ctr">
-            <a:spAutoFit/>
-          </a:bodyPr>
-          <a:lstStyle/>
-          <a:p>
-            <a:pPr algn="l"/>
-            <a:r>
-              <a:rPr sz="2100" b="0" i="1">
-                <a:solidFill>
-                  <a:srgbClr val="6B6B6B"/>
-                </a:solidFill>
-                <a:latin typeface="Century Schoolbook"/>
-              </a:rPr>
-              <a:t>multiply coefficients; add exponents</a:t>
-            </a:r>
-          </a:p>
-        </p:txBody>
-      </p:sp>
       <p:pic>
         <p:nvPicPr>
-          <p:cNvPr id="11" name="Picture 10" descr="52caabd3337864a9.png"/>
+          <p:cNvPr id="9" name="Picture 8" descr="52caabd3337864a9.png"/>
           <p:cNvPicPr>
             <a:picLocks noChangeAspect="1"/>
           </p:cNvPicPr>
@@ -19387,78 +17489,7 @@
       </p:pic>
       <p:sp>
         <p:nvSpPr>
-          <p:cNvPr id="12" name="TextBox 11"/>
-          <p:cNvSpPr txBox="1"/>
-          <p:nvPr/>
-        </p:nvSpPr>
-        <p:spPr>
-          <a:xfrm>
-            <a:off x="5102352" y="2831592"/>
-            <a:ext cx="6281927" cy="502920"/>
-          </a:xfrm>
-          <a:prstGeom prst="rect">
-            <a:avLst/>
-          </a:prstGeom>
-          <a:noFill/>
-        </p:spPr>
-        <p:txBody>
-          <a:bodyPr wrap="square" lIns="45720" rIns="45720" tIns="18288" bIns="18288" anchor="ctr">
-            <a:spAutoFit/>
-          </a:bodyPr>
-          <a:lstStyle/>
-          <a:p>
-            <a:pPr algn="l"/>
-            <a:r>
-              <a:rPr sz="2100" b="0" i="1">
-                <a:solidFill>
-                  <a:srgbClr val="6B6B6B"/>
-                </a:solidFill>
-                <a:latin typeface="Century Schoolbook"/>
-              </a:rPr>
-              <a:t>move y</a:t>
-            </a:r>
-            <a:r>
-              <a:rPr sz="2100" b="0" i="1" baseline="30000">
-                <a:solidFill>
-                  <a:srgbClr val="6B6B6B"/>
-                </a:solidFill>
-                <a:latin typeface="Century Schoolbook"/>
-              </a:rPr>
-              <a:t>-2</a:t>
-            </a:r>
-            <a:r>
-              <a:rPr sz="2100" b="0" i="1">
-                <a:solidFill>
-                  <a:srgbClr val="6B6B6B"/>
-                </a:solidFill>
-                <a:latin typeface="Century Schoolbook"/>
-              </a:rPr>
-              <a:t> down; the 12 and the x</a:t>
-            </a:r>
-            <a:r>
-              <a:rPr sz="2100" b="0" i="1" baseline="30000">
-                <a:solidFill>
-                  <a:srgbClr val="6B6B6B"/>
-                </a:solidFill>
-                <a:latin typeface="Century Schoolbook"/>
-              </a:rPr>
-              <a:t>2</a:t>
-            </a:r>
-            <a:r>
-              <a:rPr sz="2100" b="0" i="1">
-                <a:solidFill>
-                  <a:srgbClr val="6B6B6B"/>
-                </a:solidFill>
-                <a:latin typeface="Century Schoolbook"/>
-              </a:rPr>
-              <a:t> stay up</a:t>
-            </a:r>
-          </a:p>
-        </p:txBody>
-      </p:sp>
-      <p:sp>
-        <p:nvSpPr>
-          <p:cNvPr id="13" name="TextBox 12"/>
+          <p:cNvPr id="10" name="TextBox 9"/>
           <p:cNvSpPr txBox="1"/>
           <p:nvPr/>
         </p:nvSpPr>
@@ -19641,44 +17672,9 @@
           </a:fontRef>
         </p:style>
       </p:cxnSp>
-      <p:sp>
-        <p:nvSpPr>
-          <p:cNvPr id="5" name="TextBox 4"/>
-          <p:cNvSpPr txBox="1"/>
-          <p:nvPr/>
-        </p:nvSpPr>
-        <p:spPr>
-          <a:xfrm>
-            <a:off x="777240" y="1261872"/>
-            <a:ext cx="10607040" cy="310896"/>
-          </a:xfrm>
-          <a:prstGeom prst="rect">
-            <a:avLst/>
-          </a:prstGeom>
-          <a:noFill/>
-        </p:spPr>
-        <p:txBody>
-          <a:bodyPr wrap="square" lIns="45720" rIns="45720" tIns="18288" bIns="18288" anchor="t">
-            <a:spAutoFit/>
-          </a:bodyPr>
-          <a:lstStyle/>
-          <a:p>
-            <a:pPr algn="l"/>
-            <a:r>
-              <a:rPr sz="1700" b="0" i="1">
-                <a:solidFill>
-                  <a:srgbClr val="6B6B6B"/>
-                </a:solidFill>
-                <a:latin typeface="Century Schoolbook"/>
-              </a:rPr>
-              <a:t>Same steps, your numbers. Boards up when done.</a:t>
-            </a:r>
-          </a:p>
-        </p:txBody>
-      </p:sp>
       <p:cxnSp>
         <p:nvCxnSpPr>
-          <p:cNvPr id="6" name="Connector 5"/>
+          <p:cNvPr id="5" name="Connector 4"/>
           <p:cNvCxnSpPr/>
           <p:nvPr/>
         </p:nvCxnSpPr>
@@ -19713,7 +17709,7 @@
       </p:cxnSp>
       <p:sp>
         <p:nvSpPr>
-          <p:cNvPr id="7" name="TextBox 6"/>
+          <p:cNvPr id="6" name="TextBox 5"/>
           <p:cNvSpPr txBox="1"/>
           <p:nvPr/>
         </p:nvSpPr>
@@ -19748,7 +17744,7 @@
       </p:sp>
       <p:sp>
         <p:nvSpPr>
-          <p:cNvPr id="8" name="TextBox 7"/>
+          <p:cNvPr id="7" name="TextBox 6"/>
           <p:cNvSpPr txBox="1"/>
           <p:nvPr/>
         </p:nvSpPr>
@@ -19783,7 +17779,7 @@
       </p:sp>
       <p:pic>
         <p:nvPicPr>
-          <p:cNvPr id="9" name="Picture 8" descr="26181856cce005b5.png"/>
+          <p:cNvPr id="8" name="Picture 7" descr="26181856cce005b5.png"/>
           <p:cNvPicPr>
             <a:picLocks noChangeAspect="1"/>
           </p:cNvPicPr>
@@ -19805,6 +17801,41 @@
           </a:prstGeom>
         </p:spPr>
       </p:pic>
+      <p:sp>
+        <p:nvSpPr>
+          <p:cNvPr id="9" name="TextBox 8"/>
+          <p:cNvSpPr txBox="1"/>
+          <p:nvPr/>
+        </p:nvSpPr>
+        <p:spPr>
+          <a:xfrm>
+            <a:off x="777240" y="3212592"/>
+            <a:ext cx="10607040" cy="429370"/>
+          </a:xfrm>
+          <a:prstGeom prst="rect">
+            <a:avLst/>
+          </a:prstGeom>
+          <a:noFill/>
+        </p:spPr>
+        <p:txBody>
+          <a:bodyPr wrap="square" lIns="45720" rIns="45720" tIns="18288" bIns="18288" anchor="t">
+            <a:spAutoFit/>
+          </a:bodyPr>
+          <a:lstStyle/>
+          <a:p>
+            <a:pPr algn="ctr"/>
+            <a:r>
+              <a:rPr sz="2400" b="1" i="0">
+                <a:solidFill>
+                  <a:srgbClr val="1A1A1A"/>
+                </a:solidFill>
+                <a:latin typeface="Century Schoolbook"/>
+              </a:rPr>
+              <a:t>Write an equivalent expression with positive exponents only.</a:t>
+            </a:r>
+          </a:p>
+        </p:txBody>
+      </p:sp>
     </p:spTree>
   </p:cSld>
   <p:clrMapOvr>

--- a/a7/build/out/u3/A7 3.T2 Negative Exponents with Variable Bases - Slides.pptx
+++ b/a7/build/out/u3/A7 3.T2 Negative Exponents with Variable Bases - Slides.pptx
@@ -13887,23 +13887,23 @@
         </p:nvSpPr>
         <p:spPr>
           <a:xfrm>
-            <a:off x="960120" y="2011680"/>
-            <a:ext cx="548640" cy="356616"/>
-          </a:xfrm>
-          <a:prstGeom prst="rect">
-            <a:avLst/>
-          </a:prstGeom>
-          <a:noFill/>
-        </p:spPr>
-        <p:txBody>
-          <a:bodyPr wrap="square" lIns="45720" rIns="45720" tIns="18288" bIns="18288" anchor="t">
+            <a:off x="960120" y="1495043"/>
+            <a:ext cx="548640" cy="457200"/>
+          </a:xfrm>
+          <a:prstGeom prst="rect">
+            <a:avLst/>
+          </a:prstGeom>
+          <a:noFill/>
+        </p:spPr>
+        <p:txBody>
+          <a:bodyPr wrap="square" lIns="45720" rIns="45720" tIns="18288" bIns="18288" anchor="ctr">
             <a:spAutoFit/>
           </a:bodyPr>
           <a:lstStyle/>
           <a:p>
             <a:pPr algn="l"/>
             <a:r>
-              <a:rPr sz="2100" b="1" i="0">
+              <a:rPr sz="2300" b="1" i="0">
                 <a:solidFill>
                   <a:srgbClr val="0B5394"/>
                 </a:solidFill>
@@ -13922,173 +13922,586 @@
         </p:nvSpPr>
         <p:spPr>
           <a:xfrm>
-            <a:off x="1554480" y="2011680"/>
-            <a:ext cx="9829800" cy="411480"/>
-          </a:xfrm>
-          <a:prstGeom prst="rect">
-            <a:avLst/>
-          </a:prstGeom>
-          <a:noFill/>
-        </p:spPr>
-        <p:txBody>
-          <a:bodyPr wrap="square" lIns="45720" rIns="45720" tIns="18288" bIns="18288" anchor="t">
+            <a:off x="1554480" y="1495044"/>
+            <a:ext cx="5875657" cy="457200"/>
+          </a:xfrm>
+          <a:prstGeom prst="rect">
+            <a:avLst/>
+          </a:prstGeom>
+          <a:noFill/>
+        </p:spPr>
+        <p:txBody>
+          <a:bodyPr wrap="none" lIns="45720" rIns="45720" tIns="18288" bIns="18288" anchor="ctr">
+            <a:noAutofit/>
+          </a:bodyPr>
+          <a:lstStyle/>
+          <a:p>
+            <a:pPr algn="l"/>
+            <a:r>
+              <a:rPr sz="2300" b="0" i="0">
+                <a:solidFill>
+                  <a:srgbClr val="1A1A1A"/>
+                </a:solidFill>
+                <a:latin typeface="Century Schoolbook"/>
+              </a:rPr>
+              <a:t>Rewrite using only positive exponents.  </a:t>
+            </a:r>
+          </a:p>
+        </p:txBody>
+      </p:sp>
+      <p:pic>
+        <p:nvPicPr>
+          <p:cNvPr id="10" name="Picture 9" descr="ba5843684750475f.png"/>
+          <p:cNvPicPr>
+            <a:picLocks noChangeAspect="1"/>
+          </p:cNvPicPr>
+          <p:nvPr/>
+        </p:nvPicPr>
+        <p:blipFill>
+          <a:blip r:embed="rId2"/>
+          <a:stretch>
+            <a:fillRect/>
+          </a:stretch>
+        </p:blipFill>
+        <p:spPr>
+          <a:xfrm>
+            <a:off x="7292977" y="1584959"/>
+            <a:ext cx="521207" cy="277368"/>
+          </a:xfrm>
+          <a:prstGeom prst="rect">
+            <a:avLst/>
+          </a:prstGeom>
+        </p:spPr>
+      </p:pic>
+      <p:sp>
+        <p:nvSpPr>
+          <p:cNvPr id="11" name="TextBox 10"/>
+          <p:cNvSpPr txBox="1"/>
+          <p:nvPr/>
+        </p:nvSpPr>
+        <p:spPr>
+          <a:xfrm>
+            <a:off x="960120" y="2089403"/>
+            <a:ext cx="548640" cy="457200"/>
+          </a:xfrm>
+          <a:prstGeom prst="rect">
+            <a:avLst/>
+          </a:prstGeom>
+          <a:noFill/>
+        </p:spPr>
+        <p:txBody>
+          <a:bodyPr wrap="square" lIns="45720" rIns="45720" tIns="18288" bIns="18288" anchor="ctr">
             <a:spAutoFit/>
           </a:bodyPr>
           <a:lstStyle/>
           <a:p>
             <a:pPr algn="l"/>
             <a:r>
-              <a:rPr sz="2100" b="0" i="0">
+              <a:rPr sz="2300" b="1" i="0">
+                <a:solidFill>
+                  <a:srgbClr val="0B5394"/>
+                </a:solidFill>
+                <a:latin typeface="Century Schoolbook"/>
+              </a:rPr>
+              <a:t>2.</a:t>
+            </a:r>
+          </a:p>
+        </p:txBody>
+      </p:sp>
+      <p:sp>
+        <p:nvSpPr>
+          <p:cNvPr id="12" name="TextBox 11"/>
+          <p:cNvSpPr txBox="1"/>
+          <p:nvPr/>
+        </p:nvSpPr>
+        <p:spPr>
+          <a:xfrm>
+            <a:off x="1554480" y="2089403"/>
+            <a:ext cx="5875657" cy="457200"/>
+          </a:xfrm>
+          <a:prstGeom prst="rect">
+            <a:avLst/>
+          </a:prstGeom>
+          <a:noFill/>
+        </p:spPr>
+        <p:txBody>
+          <a:bodyPr wrap="none" lIns="45720" rIns="45720" tIns="18288" bIns="18288" anchor="ctr">
+            <a:noAutofit/>
+          </a:bodyPr>
+          <a:lstStyle/>
+          <a:p>
+            <a:pPr algn="l"/>
+            <a:r>
+              <a:rPr sz="2300" b="0" i="0">
                 <a:solidFill>
                   <a:srgbClr val="1A1A1A"/>
                 </a:solidFill>
                 <a:latin typeface="Century Schoolbook"/>
               </a:rPr>
-              <a:t>Six questions. Work down the page.</a:t>
-            </a:r>
-          </a:p>
-        </p:txBody>
-      </p:sp>
-      <p:sp>
-        <p:nvSpPr>
-          <p:cNvPr id="10" name="TextBox 9"/>
-          <p:cNvSpPr txBox="1"/>
-          <p:nvPr/>
-        </p:nvSpPr>
-        <p:spPr>
-          <a:xfrm>
-            <a:off x="960120" y="2551176"/>
-            <a:ext cx="548640" cy="356616"/>
-          </a:xfrm>
-          <a:prstGeom prst="rect">
-            <a:avLst/>
-          </a:prstGeom>
-          <a:noFill/>
-        </p:spPr>
-        <p:txBody>
-          <a:bodyPr wrap="square" lIns="45720" rIns="45720" tIns="18288" bIns="18288" anchor="t">
+              <a:t>Rewrite using only positive exponents.  </a:t>
+            </a:r>
+          </a:p>
+        </p:txBody>
+      </p:sp>
+      <p:pic>
+        <p:nvPicPr>
+          <p:cNvPr id="13" name="Picture 12" descr="e1af689e41d8f915.png"/>
+          <p:cNvPicPr>
+            <a:picLocks noChangeAspect="1"/>
+          </p:cNvPicPr>
+          <p:nvPr/>
+        </p:nvPicPr>
+        <p:blipFill>
+          <a:blip r:embed="rId3"/>
+          <a:stretch>
+            <a:fillRect/>
+          </a:stretch>
+        </p:blipFill>
+        <p:spPr>
+          <a:xfrm>
+            <a:off x="7292977" y="2147315"/>
+            <a:ext cx="579120" cy="341376"/>
+          </a:xfrm>
+          <a:prstGeom prst="rect">
+            <a:avLst/>
+          </a:prstGeom>
+        </p:spPr>
+      </p:pic>
+      <p:sp>
+        <p:nvSpPr>
+          <p:cNvPr id="14" name="TextBox 13"/>
+          <p:cNvSpPr txBox="1"/>
+          <p:nvPr/>
+        </p:nvSpPr>
+        <p:spPr>
+          <a:xfrm>
+            <a:off x="960120" y="2778251"/>
+            <a:ext cx="548640" cy="457200"/>
+          </a:xfrm>
+          <a:prstGeom prst="rect">
+            <a:avLst/>
+          </a:prstGeom>
+          <a:noFill/>
+        </p:spPr>
+        <p:txBody>
+          <a:bodyPr wrap="square" lIns="45720" rIns="45720" tIns="18288" bIns="18288" anchor="ctr">
             <a:spAutoFit/>
           </a:bodyPr>
           <a:lstStyle/>
           <a:p>
             <a:pPr algn="l"/>
             <a:r>
-              <a:rPr sz="2100" b="1" i="0">
+              <a:rPr sz="2300" b="1" i="0">
                 <a:solidFill>
                   <a:srgbClr val="0B5394"/>
                 </a:solidFill>
                 <a:latin typeface="Century Schoolbook"/>
               </a:rPr>
-              <a:t>2.</a:t>
-            </a:r>
-          </a:p>
-        </p:txBody>
-      </p:sp>
-      <p:sp>
-        <p:nvSpPr>
-          <p:cNvPr id="11" name="TextBox 10"/>
-          <p:cNvSpPr txBox="1"/>
-          <p:nvPr/>
-        </p:nvSpPr>
-        <p:spPr>
-          <a:xfrm>
-            <a:off x="1554480" y="2551176"/>
-            <a:ext cx="9829800" cy="411480"/>
-          </a:xfrm>
-          <a:prstGeom prst="rect">
-            <a:avLst/>
-          </a:prstGeom>
-          <a:noFill/>
-        </p:spPr>
-        <p:txBody>
-          <a:bodyPr wrap="square" lIns="45720" rIns="45720" tIns="18288" bIns="18288" anchor="t">
+              <a:t>3.</a:t>
+            </a:r>
+          </a:p>
+        </p:txBody>
+      </p:sp>
+      <p:sp>
+        <p:nvSpPr>
+          <p:cNvPr id="15" name="TextBox 14"/>
+          <p:cNvSpPr txBox="1"/>
+          <p:nvPr/>
+        </p:nvSpPr>
+        <p:spPr>
+          <a:xfrm>
+            <a:off x="1554480" y="2778251"/>
+            <a:ext cx="5875657" cy="457200"/>
+          </a:xfrm>
+          <a:prstGeom prst="rect">
+            <a:avLst/>
+          </a:prstGeom>
+          <a:noFill/>
+        </p:spPr>
+        <p:txBody>
+          <a:bodyPr wrap="none" lIns="45720" rIns="45720" tIns="18288" bIns="18288" anchor="ctr">
+            <a:noAutofit/>
+          </a:bodyPr>
+          <a:lstStyle/>
+          <a:p>
+            <a:pPr algn="l"/>
+            <a:r>
+              <a:rPr sz="2300" b="0" i="0">
+                <a:solidFill>
+                  <a:srgbClr val="1A1A1A"/>
+                </a:solidFill>
+                <a:latin typeface="Century Schoolbook"/>
+              </a:rPr>
+              <a:t>Rewrite using only positive exponents.  </a:t>
+            </a:r>
+          </a:p>
+        </p:txBody>
+      </p:sp>
+      <p:pic>
+        <p:nvPicPr>
+          <p:cNvPr id="16" name="Picture 15" descr="0c2d1dd467193a91.png"/>
+          <p:cNvPicPr>
+            <a:picLocks noChangeAspect="1"/>
+          </p:cNvPicPr>
+          <p:nvPr/>
+        </p:nvPicPr>
+        <p:blipFill>
+          <a:blip r:embed="rId4"/>
+          <a:stretch>
+            <a:fillRect/>
+          </a:stretch>
+        </p:blipFill>
+        <p:spPr>
+          <a:xfrm>
+            <a:off x="7292977" y="2706623"/>
+            <a:ext cx="472440" cy="600456"/>
+          </a:xfrm>
+          <a:prstGeom prst="rect">
+            <a:avLst/>
+          </a:prstGeom>
+        </p:spPr>
+      </p:pic>
+      <p:sp>
+        <p:nvSpPr>
+          <p:cNvPr id="17" name="TextBox 16"/>
+          <p:cNvSpPr txBox="1"/>
+          <p:nvPr/>
+        </p:nvSpPr>
+        <p:spPr>
+          <a:xfrm>
+            <a:off x="960120" y="3467100"/>
+            <a:ext cx="548640" cy="457200"/>
+          </a:xfrm>
+          <a:prstGeom prst="rect">
+            <a:avLst/>
+          </a:prstGeom>
+          <a:noFill/>
+        </p:spPr>
+        <p:txBody>
+          <a:bodyPr wrap="square" lIns="45720" rIns="45720" tIns="18288" bIns="18288" anchor="ctr">
             <a:spAutoFit/>
           </a:bodyPr>
           <a:lstStyle/>
           <a:p>
             <a:pPr algn="l"/>
             <a:r>
-              <a:rPr sz="2100" b="0" i="0">
+              <a:rPr sz="2300" b="1" i="0">
+                <a:solidFill>
+                  <a:srgbClr val="0B5394"/>
+                </a:solidFill>
+                <a:latin typeface="Century Schoolbook"/>
+              </a:rPr>
+              <a:t>4.</a:t>
+            </a:r>
+          </a:p>
+        </p:txBody>
+      </p:sp>
+      <p:sp>
+        <p:nvSpPr>
+          <p:cNvPr id="18" name="TextBox 17"/>
+          <p:cNvSpPr txBox="1"/>
+          <p:nvPr/>
+        </p:nvSpPr>
+        <p:spPr>
+          <a:xfrm>
+            <a:off x="1554480" y="3467100"/>
+            <a:ext cx="5748452" cy="457200"/>
+          </a:xfrm>
+          <a:prstGeom prst="rect">
+            <a:avLst/>
+          </a:prstGeom>
+          <a:noFill/>
+        </p:spPr>
+        <p:txBody>
+          <a:bodyPr wrap="none" lIns="45720" rIns="45720" tIns="18288" bIns="18288" anchor="ctr">
+            <a:noAutofit/>
+          </a:bodyPr>
+          <a:lstStyle/>
+          <a:p>
+            <a:pPr algn="l"/>
+            <a:r>
+              <a:rPr sz="2300" b="0" i="0">
                 <a:solidFill>
                   <a:srgbClr val="1A1A1A"/>
                 </a:solidFill>
                 <a:latin typeface="Century Schoolbook"/>
               </a:rPr>
-              <a:t>Show the step that does the work, not just the answer.</a:t>
-            </a:r>
-          </a:p>
-        </p:txBody>
-      </p:sp>
-      <p:sp>
-        <p:nvSpPr>
-          <p:cNvPr id="12" name="TextBox 11"/>
-          <p:cNvSpPr txBox="1"/>
-          <p:nvPr/>
-        </p:nvSpPr>
-        <p:spPr>
-          <a:xfrm>
-            <a:off x="960120" y="3090672"/>
-            <a:ext cx="548640" cy="356616"/>
-          </a:xfrm>
-          <a:prstGeom prst="rect">
-            <a:avLst/>
-          </a:prstGeom>
-          <a:noFill/>
-        </p:spPr>
-        <p:txBody>
-          <a:bodyPr wrap="square" lIns="45720" rIns="45720" tIns="18288" bIns="18288" anchor="t">
+              <a:t>Simplify. Use positive exponents only.  </a:t>
+            </a:r>
+          </a:p>
+        </p:txBody>
+      </p:sp>
+      <p:pic>
+        <p:nvPicPr>
+          <p:cNvPr id="19" name="Picture 18" descr="c5f7759a92eb2630.png"/>
+          <p:cNvPicPr>
+            <a:picLocks noChangeAspect="1"/>
+          </p:cNvPicPr>
+          <p:nvPr/>
+        </p:nvPicPr>
+        <p:blipFill>
+          <a:blip r:embed="rId5"/>
+          <a:stretch>
+            <a:fillRect/>
+          </a:stretch>
+        </p:blipFill>
+        <p:spPr>
+          <a:xfrm>
+            <a:off x="7165772" y="3557015"/>
+            <a:ext cx="929640" cy="277368"/>
+          </a:xfrm>
+          <a:prstGeom prst="rect">
+            <a:avLst/>
+          </a:prstGeom>
+        </p:spPr>
+      </p:pic>
+      <p:sp>
+        <p:nvSpPr>
+          <p:cNvPr id="20" name="TextBox 19"/>
+          <p:cNvSpPr txBox="1"/>
+          <p:nvPr/>
+        </p:nvSpPr>
+        <p:spPr>
+          <a:xfrm>
+            <a:off x="960120" y="4061460"/>
+            <a:ext cx="548640" cy="457200"/>
+          </a:xfrm>
+          <a:prstGeom prst="rect">
+            <a:avLst/>
+          </a:prstGeom>
+          <a:noFill/>
+        </p:spPr>
+        <p:txBody>
+          <a:bodyPr wrap="square" lIns="45720" rIns="45720" tIns="18288" bIns="18288" anchor="ctr">
             <a:spAutoFit/>
           </a:bodyPr>
           <a:lstStyle/>
           <a:p>
             <a:pPr algn="l"/>
             <a:r>
-              <a:rPr sz="2100" b="1" i="0">
+              <a:rPr sz="2300" b="1" i="0">
                 <a:solidFill>
                   <a:srgbClr val="0B5394"/>
                 </a:solidFill>
                 <a:latin typeface="Century Schoolbook"/>
               </a:rPr>
-              <a:t>3.</a:t>
-            </a:r>
-          </a:p>
-        </p:txBody>
-      </p:sp>
-      <p:sp>
-        <p:nvSpPr>
-          <p:cNvPr id="13" name="TextBox 12"/>
-          <p:cNvSpPr txBox="1"/>
-          <p:nvPr/>
-        </p:nvSpPr>
-        <p:spPr>
-          <a:xfrm>
-            <a:off x="1554480" y="3090672"/>
-            <a:ext cx="9829800" cy="411480"/>
-          </a:xfrm>
-          <a:prstGeom prst="rect">
-            <a:avLst/>
-          </a:prstGeom>
-          <a:noFill/>
-        </p:spPr>
-        <p:txBody>
-          <a:bodyPr wrap="square" lIns="45720" rIns="45720" tIns="18288" bIns="18288" anchor="t">
+              <a:t>5.</a:t>
+            </a:r>
+          </a:p>
+        </p:txBody>
+      </p:sp>
+      <p:sp>
+        <p:nvSpPr>
+          <p:cNvPr id="21" name="TextBox 20"/>
+          <p:cNvSpPr txBox="1"/>
+          <p:nvPr/>
+        </p:nvSpPr>
+        <p:spPr>
+          <a:xfrm>
+            <a:off x="1554480" y="4061460"/>
+            <a:ext cx="5748452" cy="457200"/>
+          </a:xfrm>
+          <a:prstGeom prst="rect">
+            <a:avLst/>
+          </a:prstGeom>
+          <a:noFill/>
+        </p:spPr>
+        <p:txBody>
+          <a:bodyPr wrap="none" lIns="45720" rIns="45720" tIns="18288" bIns="18288" anchor="ctr">
+            <a:noAutofit/>
+          </a:bodyPr>
+          <a:lstStyle/>
+          <a:p>
+            <a:pPr algn="l"/>
+            <a:r>
+              <a:rPr sz="2300" b="0" i="0">
+                <a:solidFill>
+                  <a:srgbClr val="1A1A1A"/>
+                </a:solidFill>
+                <a:latin typeface="Century Schoolbook"/>
+              </a:rPr>
+              <a:t>Simplify. Use positive exponents only.  </a:t>
+            </a:r>
+          </a:p>
+        </p:txBody>
+      </p:sp>
+      <p:pic>
+        <p:nvPicPr>
+          <p:cNvPr id="22" name="Picture 21" descr="60d888c7ce1f9850.png"/>
+          <p:cNvPicPr>
+            <a:picLocks noChangeAspect="1"/>
+          </p:cNvPicPr>
+          <p:nvPr/>
+        </p:nvPicPr>
+        <p:blipFill>
+          <a:blip r:embed="rId6"/>
+          <a:stretch>
+            <a:fillRect/>
+          </a:stretch>
+        </p:blipFill>
+        <p:spPr>
+          <a:xfrm>
+            <a:off x="7165772" y="4122420"/>
+            <a:ext cx="1021080" cy="335280"/>
+          </a:xfrm>
+          <a:prstGeom prst="rect">
+            <a:avLst/>
+          </a:prstGeom>
+        </p:spPr>
+      </p:pic>
+      <p:sp>
+        <p:nvSpPr>
+          <p:cNvPr id="23" name="TextBox 22"/>
+          <p:cNvSpPr txBox="1"/>
+          <p:nvPr/>
+        </p:nvSpPr>
+        <p:spPr>
+          <a:xfrm>
+            <a:off x="960120" y="4655820"/>
+            <a:ext cx="548640" cy="457200"/>
+          </a:xfrm>
+          <a:prstGeom prst="rect">
+            <a:avLst/>
+          </a:prstGeom>
+          <a:noFill/>
+        </p:spPr>
+        <p:txBody>
+          <a:bodyPr wrap="square" lIns="45720" rIns="45720" tIns="18288" bIns="18288" anchor="ctr">
             <a:spAutoFit/>
           </a:bodyPr>
           <a:lstStyle/>
           <a:p>
             <a:pPr algn="l"/>
             <a:r>
-              <a:rPr sz="2100" b="0" i="0">
+              <a:rPr sz="2300" b="1" i="0">
+                <a:solidFill>
+                  <a:srgbClr val="0B5394"/>
+                </a:solidFill>
+                <a:latin typeface="Century Schoolbook"/>
+              </a:rPr>
+              <a:t>6.</a:t>
+            </a:r>
+          </a:p>
+        </p:txBody>
+      </p:sp>
+      <p:sp>
+        <p:nvSpPr>
+          <p:cNvPr id="24" name="TextBox 23"/>
+          <p:cNvSpPr txBox="1"/>
+          <p:nvPr/>
+        </p:nvSpPr>
+        <p:spPr>
+          <a:xfrm>
+            <a:off x="1554480" y="4655820"/>
+            <a:ext cx="2720291" cy="457200"/>
+          </a:xfrm>
+          <a:prstGeom prst="rect">
+            <a:avLst/>
+          </a:prstGeom>
+          <a:noFill/>
+        </p:spPr>
+        <p:txBody>
+          <a:bodyPr wrap="none" lIns="45720" rIns="45720" tIns="18288" bIns="18288" anchor="ctr">
+            <a:noAutofit/>
+          </a:bodyPr>
+          <a:lstStyle/>
+          <a:p>
+            <a:pPr algn="l"/>
+            <a:r>
+              <a:rPr sz="2300" b="0" i="0">
                 <a:solidFill>
                   <a:srgbClr val="1A1A1A"/>
                 </a:solidFill>
                 <a:latin typeface="Century Schoolbook"/>
               </a:rPr>
-              <a:t>Silence until the six minutes are up.</a:t>
-            </a:r>
-          </a:p>
-        </p:txBody>
-      </p:sp>
+              <a:t>Find the value of </a:t>
+            </a:r>
+          </a:p>
+        </p:txBody>
+      </p:sp>
+      <p:pic>
+        <p:nvPicPr>
+          <p:cNvPr id="25" name="Picture 24" descr="0afe177f69dd5e06.png"/>
+          <p:cNvPicPr>
+            <a:picLocks noChangeAspect="1"/>
+          </p:cNvPicPr>
+          <p:nvPr/>
+        </p:nvPicPr>
+        <p:blipFill>
+          <a:blip r:embed="rId7"/>
+          <a:stretch>
+            <a:fillRect/>
+          </a:stretch>
+        </p:blipFill>
+        <p:spPr>
+          <a:xfrm>
+            <a:off x="4137611" y="4809744"/>
+            <a:ext cx="155448" cy="149352"/>
+          </a:xfrm>
+          <a:prstGeom prst="rect">
+            <a:avLst/>
+          </a:prstGeom>
+        </p:spPr>
+      </p:pic>
+      <p:sp>
+        <p:nvSpPr>
+          <p:cNvPr id="26" name="TextBox 25"/>
+          <p:cNvSpPr txBox="1"/>
+          <p:nvPr/>
+        </p:nvSpPr>
+        <p:spPr>
+          <a:xfrm>
+            <a:off x="4293059" y="4655820"/>
+            <a:ext cx="468561" cy="457200"/>
+          </a:xfrm>
+          <a:prstGeom prst="rect">
+            <a:avLst/>
+          </a:prstGeom>
+          <a:noFill/>
+        </p:spPr>
+        <p:txBody>
+          <a:bodyPr wrap="none" lIns="45720" rIns="45720" tIns="18288" bIns="18288" anchor="ctr">
+            <a:noAutofit/>
+          </a:bodyPr>
+          <a:lstStyle/>
+          <a:p>
+            <a:pPr algn="l"/>
+            <a:r>
+              <a:rPr sz="2300" b="0" i="0">
+                <a:solidFill>
+                  <a:srgbClr val="1A1A1A"/>
+                </a:solidFill>
+                <a:latin typeface="Century Schoolbook"/>
+              </a:rPr>
+              <a:t>.  </a:t>
+            </a:r>
+          </a:p>
+        </p:txBody>
+      </p:sp>
+      <p:pic>
+        <p:nvPicPr>
+          <p:cNvPr id="27" name="Picture 26" descr="6cb3df3e64f6e06f.png"/>
+          <p:cNvPicPr>
+            <a:picLocks noChangeAspect="1"/>
+          </p:cNvPicPr>
+          <p:nvPr/>
+        </p:nvPicPr>
+        <p:blipFill>
+          <a:blip r:embed="rId8"/>
+          <a:stretch>
+            <a:fillRect/>
+          </a:stretch>
+        </p:blipFill>
+        <p:spPr>
+          <a:xfrm>
+            <a:off x="4624460" y="4713732"/>
+            <a:ext cx="1551432" cy="341376"/>
+          </a:xfrm>
+          <a:prstGeom prst="rect">
+            <a:avLst/>
+          </a:prstGeom>
+        </p:spPr>
+      </p:pic>
     </p:spTree>
   </p:cSld>
   <p:clrMapOvr>

--- a/a7/build/out/u3/A7 3.T2 Negative Exponents with Variable Bases - Slides.pptx
+++ b/a7/build/out/u3/A7 3.T2 Negative Exponents with Variable Bases - Slides.pptx
@@ -3145,11 +3145,11 @@
           <a:p>
             <a:pPr algn="ctr"/>
             <a:r>
-              <a:rPr sz="1500" b="0" i="0">
+              <a:rPr sz="1420" b="0" i="0">
                 <a:solidFill>
                   <a:srgbClr val="6B6B6B"/>
                 </a:solidFill>
-                <a:latin typeface="Century Schoolbook"/>
+                <a:latin typeface="Lexend"/>
               </a:rPr>
               <a:t>GRADE 7 ACCELERATED  ·  UNIT 3  ·  THREAD A · DAY 2</a:t>
             </a:r>
@@ -3180,11 +3180,11 @@
           <a:p>
             <a:pPr algn="ctr"/>
             <a:r>
-              <a:rPr sz="3400" b="1" i="0">
+              <a:rPr sz="3229" b="1" i="0">
                 <a:solidFill>
                   <a:srgbClr val="1A1A1A"/>
                 </a:solidFill>
-                <a:latin typeface="Century Schoolbook"/>
+                <a:latin typeface="Lexend"/>
               </a:rPr>
               <a:t>Negative Exponents with Variable Bases</a:t>
             </a:r>
@@ -3285,11 +3285,11 @@
           <a:p>
             <a:pPr algn="ctr"/>
             <a:r>
-              <a:rPr sz="1600" b="1" i="0">
+              <a:rPr sz="1520" b="1" i="0">
                 <a:solidFill>
                   <a:srgbClr val="1A1A1A"/>
                 </a:solidFill>
-                <a:latin typeface="Century Schoolbook"/>
+                <a:latin typeface="Lexend"/>
               </a:rPr>
               <a:t>MA.8.AR.1.1</a:t>
             </a:r>
@@ -3320,11 +3320,11 @@
           <a:p>
             <a:pPr algn="ctr"/>
             <a:r>
-              <a:rPr sz="1900" b="0" i="1">
+              <a:rPr sz="1810" b="0" i="0">
                 <a:solidFill>
                   <a:srgbClr val="1A1A1A"/>
                 </a:solidFill>
-                <a:latin typeface="Century Schoolbook"/>
+                <a:latin typeface="Lexend"/>
               </a:rPr>
               <a:t>I can rewrite an algebraic expression with negative exponents using only positive exponents, and apply several laws of exponents to a monomial expression.</a:t>
             </a:r>
@@ -3390,11 +3390,11 @@
           <a:p>
             <a:pPr algn="l"/>
             <a:r>
-              <a:rPr sz="1100" b="0" i="1">
+              <a:rPr sz="1040" b="0" i="0">
                 <a:solidFill>
                   <a:srgbClr val="6B6B6B"/>
                 </a:solidFill>
-                <a:latin typeface="Century Schoolbook"/>
+                <a:latin typeface="Lexend"/>
               </a:rPr>
               <a:t>Grade 7 Accelerated · Unit 3 · Thread A · Day 2 — Negative Exponents with Variable Bases</a:t>
             </a:r>
@@ -3425,11 +3425,11 @@
           <a:p>
             <a:pPr algn="r"/>
             <a:r>
-              <a:rPr sz="1100" b="0" i="0">
+              <a:rPr sz="1040" b="0" i="0">
                 <a:solidFill>
                   <a:srgbClr val="6B6B6B"/>
                 </a:solidFill>
-                <a:latin typeface="Century Schoolbook"/>
+                <a:latin typeface="Lexend"/>
               </a:rPr>
               <a:t>1</a:t>
             </a:r>
@@ -3478,11 +3478,11 @@
           <a:p>
             <a:pPr algn="l"/>
             <a:r>
-              <a:rPr sz="3600" b="1" i="0">
+              <a:rPr sz="3420" b="1" i="0">
                 <a:solidFill>
                   <a:srgbClr val="1A1A1A"/>
                 </a:solidFill>
-                <a:latin typeface="Century Schoolbook"/>
+                <a:latin typeface="Lexend"/>
               </a:rPr>
               <a:t>Your Turn</a:t>
             </a:r>
@@ -3618,11 +3618,11 @@
           <a:p>
             <a:pPr algn="l"/>
             <a:r>
-              <a:rPr sz="1100" b="0" i="1">
+              <a:rPr sz="1040" b="0" i="0">
                 <a:solidFill>
                   <a:srgbClr val="6B6B6B"/>
                 </a:solidFill>
-                <a:latin typeface="Century Schoolbook"/>
+                <a:latin typeface="Lexend"/>
               </a:rPr>
               <a:t>Grade 7 Accelerated · Unit 3 · Thread A · Day 2 — Negative Exponents with Variable Bases</a:t>
             </a:r>
@@ -3653,11 +3653,11 @@
           <a:p>
             <a:pPr algn="r"/>
             <a:r>
-              <a:rPr sz="1100" b="0" i="0">
+              <a:rPr sz="1040" b="0" i="0">
                 <a:solidFill>
                   <a:srgbClr val="6B6B6B"/>
                 </a:solidFill>
-                <a:latin typeface="Century Schoolbook"/>
+                <a:latin typeface="Lexend"/>
               </a:rPr>
               <a:t>10</a:t>
             </a:r>
@@ -3666,7 +3666,7 @@
       </p:sp>
       <p:pic>
         <p:nvPicPr>
-          <p:cNvPr id="8" name="Picture 7" descr="6f4e119bf12e311e.png"/>
+          <p:cNvPr id="8" name="Picture 7" descr="43519e6fe93bd6d3.png"/>
           <p:cNvPicPr>
             <a:picLocks noChangeAspect="1"/>
           </p:cNvPicPr>
@@ -3680,8 +3680,8 @@
         </p:blipFill>
         <p:spPr>
           <a:xfrm>
-            <a:off x="4526279" y="2194560"/>
-            <a:ext cx="3108960" cy="518160"/>
+            <a:off x="4454651" y="1600200"/>
+            <a:ext cx="3252216" cy="509016"/>
           </a:xfrm>
           <a:prstGeom prst="rect">
             <a:avLst/>
@@ -3696,7 +3696,7 @@
         </p:nvSpPr>
         <p:spPr>
           <a:xfrm>
-            <a:off x="777240" y="3215640"/>
+            <a:off x="777240" y="2612136"/>
             <a:ext cx="10607040" cy="429370"/>
           </a:xfrm>
           <a:prstGeom prst="rect">
@@ -3712,11 +3712,11 @@
           <a:p>
             <a:pPr algn="ctr"/>
             <a:r>
-              <a:rPr sz="2400" b="1" i="0">
+              <a:rPr sz="2280" b="1" i="0">
                 <a:solidFill>
                   <a:srgbClr val="1A1A1A"/>
                 </a:solidFill>
-                <a:latin typeface="Century Schoolbook"/>
+                <a:latin typeface="Lexend"/>
               </a:rPr>
               <a:t>Write an equivalent expression with positive exponents only.</a:t>
             </a:r>
@@ -3731,36 +3731,36 @@
         </p:nvSpPr>
         <p:spPr>
           <a:xfrm>
-            <a:off x="4747260" y="4712208"/>
-            <a:ext cx="1920240" cy="548640"/>
-          </a:xfrm>
-          <a:prstGeom prst="rect">
-            <a:avLst/>
-          </a:prstGeom>
-          <a:noFill/>
-        </p:spPr>
-        <p:txBody>
-          <a:bodyPr wrap="square" lIns="45720" rIns="45720" tIns="18288" bIns="18288" anchor="ctr">
-            <a:spAutoFit/>
+            <a:off x="3678223" y="3201526"/>
+            <a:ext cx="1508085" cy="457200"/>
+          </a:xfrm>
+          <a:prstGeom prst="rect">
+            <a:avLst/>
+          </a:prstGeom>
+          <a:noFill/>
+        </p:spPr>
+        <p:txBody>
+          <a:bodyPr wrap="none" lIns="45720" rIns="45720" tIns="18288" bIns="18288" anchor="ctr">
+            <a:noAutofit/>
           </a:bodyPr>
           <a:lstStyle/>
           <a:p>
             <a:pPr algn="l"/>
             <a:r>
-              <a:rPr sz="3200" b="1" i="0">
-                <a:solidFill>
-                  <a:srgbClr val="9E1B32"/>
-                </a:solidFill>
-                <a:latin typeface="Century Schoolbook"/>
-              </a:rPr>
-              <a:t>Answer:</a:t>
+              <a:rPr sz="2330" b="0" i="0">
+                <a:solidFill>
+                  <a:srgbClr val="1A1A1A"/>
+                </a:solidFill>
+                <a:latin typeface="Lexend"/>
+              </a:rPr>
+              <a:t>The a's:  </a:t>
             </a:r>
           </a:p>
         </p:txBody>
       </p:sp>
       <p:pic>
         <p:nvPicPr>
-          <p:cNvPr id="11" name="Picture 10" descr="5fcfdcd223fa6117.png"/>
+          <p:cNvPr id="11" name="Picture 10" descr="5cce26f9814b90e0.png"/>
           <p:cNvPicPr>
             <a:picLocks noChangeAspect="1"/>
           </p:cNvPicPr>
@@ -3774,8 +3774,150 @@
         </p:blipFill>
         <p:spPr>
           <a:xfrm>
-            <a:off x="6667499" y="4480560"/>
-            <a:ext cx="746760" cy="1011936"/>
+            <a:off x="5049149" y="3299062"/>
+            <a:ext cx="2551176" cy="262128"/>
+          </a:xfrm>
+          <a:prstGeom prst="rect">
+            <a:avLst/>
+          </a:prstGeom>
+        </p:spPr>
+      </p:pic>
+      <p:sp>
+        <p:nvSpPr>
+          <p:cNvPr id="12" name="TextBox 11"/>
+          <p:cNvSpPr txBox="1"/>
+          <p:nvPr/>
+        </p:nvSpPr>
+        <p:spPr>
+          <a:xfrm>
+            <a:off x="3678223" y="3779122"/>
+            <a:ext cx="1507136" cy="457200"/>
+          </a:xfrm>
+          <a:prstGeom prst="rect">
+            <a:avLst/>
+          </a:prstGeom>
+          <a:noFill/>
+        </p:spPr>
+        <p:txBody>
+          <a:bodyPr wrap="none" lIns="45720" rIns="45720" tIns="18288" bIns="18288" anchor="ctr">
+            <a:noAutofit/>
+          </a:bodyPr>
+          <a:lstStyle/>
+          <a:p>
+            <a:pPr algn="l"/>
+            <a:r>
+              <a:rPr sz="2330" b="0" i="0">
+                <a:solidFill>
+                  <a:srgbClr val="1A1A1A"/>
+                </a:solidFill>
+                <a:latin typeface="Lexend"/>
+              </a:rPr>
+              <a:t>The b's:  </a:t>
+            </a:r>
+          </a:p>
+        </p:txBody>
+      </p:sp>
+      <p:pic>
+        <p:nvPicPr>
+          <p:cNvPr id="13" name="Picture 12" descr="455b440955e368df.png"/>
+          <p:cNvPicPr>
+            <a:picLocks noChangeAspect="1"/>
+          </p:cNvPicPr>
+          <p:nvPr/>
+        </p:nvPicPr>
+        <p:blipFill>
+          <a:blip r:embed="rId4"/>
+          <a:stretch>
+            <a:fillRect/>
+          </a:stretch>
+        </p:blipFill>
+        <p:spPr>
+          <a:xfrm>
+            <a:off x="5048200" y="3727306"/>
+            <a:ext cx="3429000" cy="560832"/>
+          </a:xfrm>
+          <a:prstGeom prst="rect">
+            <a:avLst/>
+          </a:prstGeom>
+        </p:spPr>
+      </p:pic>
+      <p:pic>
+        <p:nvPicPr>
+          <p:cNvPr id="14" name="Picture 13" descr="153f36a6e043485d.png"/>
+          <p:cNvPicPr>
+            <a:picLocks noChangeAspect="1"/>
+          </p:cNvPicPr>
+          <p:nvPr/>
+        </p:nvPicPr>
+        <p:blipFill>
+          <a:blip r:embed="rId5"/>
+          <a:stretch>
+            <a:fillRect/>
+          </a:stretch>
+        </p:blipFill>
+        <p:spPr>
+          <a:xfrm>
+            <a:off x="3733087" y="4379578"/>
+            <a:ext cx="1996439" cy="606552"/>
+          </a:xfrm>
+          <a:prstGeom prst="rect">
+            <a:avLst/>
+          </a:prstGeom>
+        </p:spPr>
+      </p:pic>
+      <p:sp>
+        <p:nvSpPr>
+          <p:cNvPr id="15" name="TextBox 14"/>
+          <p:cNvSpPr txBox="1"/>
+          <p:nvPr/>
+        </p:nvSpPr>
+        <p:spPr>
+          <a:xfrm>
+            <a:off x="4709159" y="5345794"/>
+            <a:ext cx="1920240" cy="548640"/>
+          </a:xfrm>
+          <a:prstGeom prst="rect">
+            <a:avLst/>
+          </a:prstGeom>
+          <a:noFill/>
+        </p:spPr>
+        <p:txBody>
+          <a:bodyPr wrap="square" lIns="45720" rIns="45720" tIns="18288" bIns="18288" anchor="ctr">
+            <a:spAutoFit/>
+          </a:bodyPr>
+          <a:lstStyle/>
+          <a:p>
+            <a:pPr algn="l"/>
+            <a:r>
+              <a:rPr sz="3040" b="1" i="0">
+                <a:solidFill>
+                  <a:srgbClr val="9E1B32"/>
+                </a:solidFill>
+                <a:latin typeface="Lexend"/>
+              </a:rPr>
+              <a:t>Answer:</a:t>
+            </a:r>
+          </a:p>
+        </p:txBody>
+      </p:sp>
+      <p:pic>
+        <p:nvPicPr>
+          <p:cNvPr id="16" name="Picture 15" descr="682a312527072d3d.png"/>
+          <p:cNvPicPr>
+            <a:picLocks noChangeAspect="1"/>
+          </p:cNvPicPr>
+          <p:nvPr/>
+        </p:nvPicPr>
+        <p:blipFill>
+          <a:blip r:embed="rId6"/>
+          <a:stretch>
+            <a:fillRect/>
+          </a:stretch>
+        </p:blipFill>
+        <p:spPr>
+          <a:xfrm>
+            <a:off x="6629400" y="5123290"/>
+            <a:ext cx="822960" cy="993648"/>
           </a:xfrm>
           <a:prstGeom prst="rect">
             <a:avLst/>
@@ -3824,11 +3966,11 @@
           <a:p>
             <a:pPr algn="l"/>
             <a:r>
-              <a:rPr sz="3600" b="1" i="0">
+              <a:rPr sz="3420" b="1" i="0">
                 <a:solidFill>
                   <a:srgbClr val="1A1A1A"/>
                 </a:solidFill>
-                <a:latin typeface="Century Schoolbook"/>
+                <a:latin typeface="Lexend"/>
               </a:rPr>
               <a:t>Example 2</a:t>
             </a:r>
@@ -3964,11 +4106,11 @@
           <a:p>
             <a:pPr algn="l"/>
             <a:r>
-              <a:rPr sz="1100" b="0" i="1">
+              <a:rPr sz="1040" b="0" i="0">
                 <a:solidFill>
                   <a:srgbClr val="6B6B6B"/>
                 </a:solidFill>
-                <a:latin typeface="Century Schoolbook"/>
+                <a:latin typeface="Lexend"/>
               </a:rPr>
               <a:t>Grade 7 Accelerated · Unit 3 · Thread A · Day 2 — Negative Exponents with Variable Bases</a:t>
             </a:r>
@@ -3999,11 +4141,11 @@
           <a:p>
             <a:pPr algn="r"/>
             <a:r>
-              <a:rPr sz="1100" b="0" i="0">
+              <a:rPr sz="1040" b="0" i="0">
                 <a:solidFill>
                   <a:srgbClr val="6B6B6B"/>
                 </a:solidFill>
-                <a:latin typeface="Century Schoolbook"/>
+                <a:latin typeface="Lexend"/>
               </a:rPr>
               <a:t>11</a:t>
             </a:r>
@@ -4012,7 +4154,7 @@
       </p:sp>
       <p:pic>
         <p:nvPicPr>
-          <p:cNvPr id="8" name="Picture 7" descr="061639b8c49f6a31.png"/>
+          <p:cNvPr id="8" name="Picture 7" descr="7f7328112e67c3ce.png"/>
           <p:cNvPicPr>
             <a:picLocks noChangeAspect="1"/>
           </p:cNvPicPr>
@@ -4026,8 +4168,8 @@
         </p:blipFill>
         <p:spPr>
           <a:xfrm>
-            <a:off x="5372099" y="2103120"/>
-            <a:ext cx="1417320" cy="807720"/>
+            <a:off x="5364480" y="2103120"/>
+            <a:ext cx="1432560" cy="795528"/>
           </a:xfrm>
           <a:prstGeom prst="rect">
             <a:avLst/>
@@ -4042,7 +4184,7 @@
         </p:nvSpPr>
         <p:spPr>
           <a:xfrm>
-            <a:off x="777240" y="3413760"/>
+            <a:off x="777240" y="3401568"/>
             <a:ext cx="10607040" cy="429370"/>
           </a:xfrm>
           <a:prstGeom prst="rect">
@@ -4058,11 +4200,11 @@
           <a:p>
             <a:pPr algn="ctr"/>
             <a:r>
-              <a:rPr sz="2400" b="1" i="0">
+              <a:rPr sz="2280" b="1" i="0">
                 <a:solidFill>
                   <a:srgbClr val="1A1A1A"/>
                 </a:solidFill>
-                <a:latin typeface="Century Schoolbook"/>
+                <a:latin typeface="Lexend"/>
               </a:rPr>
               <a:t>Write an equivalent expression with positive exponents only.</a:t>
             </a:r>
@@ -4111,11 +4253,11 @@
           <a:p>
             <a:pPr algn="l"/>
             <a:r>
-              <a:rPr sz="3600" b="1" i="0">
+              <a:rPr sz="3420" b="1" i="0">
                 <a:solidFill>
                   <a:srgbClr val="1A1A1A"/>
                 </a:solidFill>
-                <a:latin typeface="Century Schoolbook"/>
+                <a:latin typeface="Lexend"/>
               </a:rPr>
               <a:t>Example 2</a:t>
             </a:r>
@@ -4251,11 +4393,11 @@
           <a:p>
             <a:pPr algn="l"/>
             <a:r>
-              <a:rPr sz="1100" b="0" i="1">
+              <a:rPr sz="1040" b="0" i="0">
                 <a:solidFill>
                   <a:srgbClr val="6B6B6B"/>
                 </a:solidFill>
-                <a:latin typeface="Century Schoolbook"/>
+                <a:latin typeface="Lexend"/>
               </a:rPr>
               <a:t>Grade 7 Accelerated · Unit 3 · Thread A · Day 2 — Negative Exponents with Variable Bases</a:t>
             </a:r>
@@ -4286,11 +4428,11 @@
           <a:p>
             <a:pPr algn="r"/>
             <a:r>
-              <a:rPr sz="1100" b="0" i="0">
+              <a:rPr sz="1040" b="0" i="0">
                 <a:solidFill>
                   <a:srgbClr val="6B6B6B"/>
                 </a:solidFill>
-                <a:latin typeface="Century Schoolbook"/>
+                <a:latin typeface="Lexend"/>
               </a:rPr>
               <a:t>12</a:t>
             </a:r>
@@ -4299,7 +4441,7 @@
       </p:sp>
       <p:pic>
         <p:nvPicPr>
-          <p:cNvPr id="8" name="Picture 7" descr="dc62f1bbbc7a81f8.png"/>
+          <p:cNvPr id="8" name="Picture 7" descr="855def8551484ae7.png"/>
           <p:cNvPicPr>
             <a:picLocks noChangeAspect="1"/>
           </p:cNvPicPr>
@@ -4314,7 +4456,7 @@
         <p:spPr>
           <a:xfrm>
             <a:off x="1828800" y="1920240"/>
-            <a:ext cx="2965704" cy="816864"/>
+            <a:ext cx="2965704" cy="798576"/>
           </a:xfrm>
           <a:prstGeom prst="rect">
             <a:avLst/>
@@ -4323,7 +4465,7 @@
       </p:pic>
       <p:pic>
         <p:nvPicPr>
-          <p:cNvPr id="9" name="Picture 8" descr="d55cada8037b336a.png"/>
+          <p:cNvPr id="9" name="Picture 8" descr="44c539f0c5b2a638.png"/>
           <p:cNvPicPr>
             <a:picLocks noChangeAspect="1"/>
           </p:cNvPicPr>
@@ -4337,8 +4479,8 @@
         </p:blipFill>
         <p:spPr>
           <a:xfrm>
-            <a:off x="1828800" y="3011423"/>
-            <a:ext cx="1399032" cy="807720"/>
+            <a:off x="1828800" y="2993136"/>
+            <a:ext cx="1408176" cy="807720"/>
           </a:xfrm>
           <a:prstGeom prst="rect">
             <a:avLst/>
@@ -4369,47 +4511,47 @@
           <a:p>
             <a:pPr algn="ctr"/>
             <a:r>
-              <a:rPr sz="3200" b="1" i="0">
+              <a:rPr sz="3040" b="1" i="0">
                 <a:solidFill>
                   <a:srgbClr val="9E1B32"/>
                 </a:solidFill>
-                <a:latin typeface="Century Schoolbook"/>
+                <a:latin typeface="Lexend"/>
               </a:rPr>
               <a:t>Answer:   a</a:t>
             </a:r>
             <a:r>
-              <a:rPr sz="3200" b="1" i="0" baseline="30000">
+              <a:rPr sz="3040" b="1" i="0" baseline="30000">
                 <a:solidFill>
                   <a:srgbClr val="9E1B32"/>
                 </a:solidFill>
-                <a:latin typeface="Century Schoolbook"/>
+                <a:latin typeface="Lexend"/>
               </a:rPr>
               <a:t>15</a:t>
             </a:r>
             <a:r>
-              <a:rPr sz="3200" b="1" i="0">
+              <a:rPr sz="3040" b="1" i="0">
                 <a:solidFill>
                   <a:srgbClr val="9E1B32"/>
                 </a:solidFill>
-                <a:latin typeface="Century Schoolbook"/>
+                <a:latin typeface="Lexend"/>
               </a:rPr>
               <a:t>b</a:t>
             </a:r>
             <a:r>
-              <a:rPr sz="3200" b="1" i="0" baseline="30000">
+              <a:rPr sz="3040" b="1" i="0" baseline="30000">
                 <a:solidFill>
                   <a:srgbClr val="9E1B32"/>
                 </a:solidFill>
-                <a:latin typeface="Century Schoolbook"/>
+                <a:latin typeface="Lexend"/>
               </a:rPr>
               <a:t>35</a:t>
             </a:r>
             <a:r>
-              <a:rPr sz="3200" b="1" i="0">
+              <a:rPr sz="3040" b="1" i="0">
                 <a:solidFill>
                   <a:srgbClr val="9E1B32"/>
                 </a:solidFill>
-                <a:latin typeface="Century Schoolbook"/>
+                <a:latin typeface="Lexend"/>
               </a:rPr>
               <a:t>/1,024</a:t>
             </a:r>
@@ -4458,11 +4600,11 @@
           <a:p>
             <a:pPr algn="l"/>
             <a:r>
-              <a:rPr sz="3600" b="1" i="0">
+              <a:rPr sz="3420" b="1" i="0">
                 <a:solidFill>
                   <a:srgbClr val="1A1A1A"/>
                 </a:solidFill>
-                <a:latin typeface="Century Schoolbook"/>
+                <a:latin typeface="Lexend"/>
               </a:rPr>
               <a:t>Your Turn</a:t>
             </a:r>
@@ -4598,11 +4740,11 @@
           <a:p>
             <a:pPr algn="l"/>
             <a:r>
-              <a:rPr sz="1100" b="0" i="1">
+              <a:rPr sz="1040" b="0" i="0">
                 <a:solidFill>
                   <a:srgbClr val="6B6B6B"/>
                 </a:solidFill>
-                <a:latin typeface="Century Schoolbook"/>
+                <a:latin typeface="Lexend"/>
               </a:rPr>
               <a:t>Grade 7 Accelerated · Unit 3 · Thread A · Day 2 — Negative Exponents with Variable Bases</a:t>
             </a:r>
@@ -4633,11 +4775,11 @@
           <a:p>
             <a:pPr algn="r"/>
             <a:r>
-              <a:rPr sz="1100" b="0" i="0">
+              <a:rPr sz="1040" b="0" i="0">
                 <a:solidFill>
                   <a:srgbClr val="6B6B6B"/>
                 </a:solidFill>
-                <a:latin typeface="Century Schoolbook"/>
+                <a:latin typeface="Lexend"/>
               </a:rPr>
               <a:t>13</a:t>
             </a:r>
@@ -4646,7 +4788,7 @@
       </p:sp>
       <p:pic>
         <p:nvPicPr>
-          <p:cNvPr id="8" name="Picture 7" descr="c42f4571630d5047.png"/>
+          <p:cNvPr id="8" name="Picture 7" descr="c43798c2465e5d16.png"/>
           <p:cNvPicPr>
             <a:picLocks noChangeAspect="1"/>
           </p:cNvPicPr>
@@ -4660,8 +4802,8 @@
         </p:blipFill>
         <p:spPr>
           <a:xfrm>
-            <a:off x="5193792" y="2194560"/>
-            <a:ext cx="1773936" cy="1112520"/>
+            <a:off x="5375148" y="1481328"/>
+            <a:ext cx="1411224" cy="880872"/>
           </a:xfrm>
           <a:prstGeom prst="rect">
             <a:avLst/>
@@ -4676,7 +4818,7 @@
         </p:nvSpPr>
         <p:spPr>
           <a:xfrm>
-            <a:off x="777240" y="3809999"/>
+            <a:off x="777240" y="2865120"/>
             <a:ext cx="10607040" cy="429370"/>
           </a:xfrm>
           <a:prstGeom prst="rect">
@@ -4692,11 +4834,11 @@
           <a:p>
             <a:pPr algn="ctr"/>
             <a:r>
-              <a:rPr sz="2400" b="1" i="0">
+              <a:rPr sz="2280" b="1" i="0">
                 <a:solidFill>
                   <a:srgbClr val="1A1A1A"/>
                 </a:solidFill>
-                <a:latin typeface="Century Schoolbook"/>
+                <a:latin typeface="Lexend"/>
               </a:rPr>
               <a:t>Write an equivalent expression with positive exponents only.</a:t>
             </a:r>
@@ -4745,11 +4887,11 @@
           <a:p>
             <a:pPr algn="l"/>
             <a:r>
-              <a:rPr sz="3600" b="1" i="0">
+              <a:rPr sz="3420" b="1" i="0">
                 <a:solidFill>
                   <a:srgbClr val="1A1A1A"/>
                 </a:solidFill>
-                <a:latin typeface="Century Schoolbook"/>
+                <a:latin typeface="Lexend"/>
               </a:rPr>
               <a:t>Your Turn</a:t>
             </a:r>
@@ -4885,11 +5027,11 @@
           <a:p>
             <a:pPr algn="l"/>
             <a:r>
-              <a:rPr sz="1100" b="0" i="1">
+              <a:rPr sz="1040" b="0" i="0">
                 <a:solidFill>
                   <a:srgbClr val="6B6B6B"/>
                 </a:solidFill>
-                <a:latin typeface="Century Schoolbook"/>
+                <a:latin typeface="Lexend"/>
               </a:rPr>
               <a:t>Grade 7 Accelerated · Unit 3 · Thread A · Day 2 — Negative Exponents with Variable Bases</a:t>
             </a:r>
@@ -4920,11 +5062,11 @@
           <a:p>
             <a:pPr algn="r"/>
             <a:r>
-              <a:rPr sz="1100" b="0" i="0">
+              <a:rPr sz="1040" b="0" i="0">
                 <a:solidFill>
                   <a:srgbClr val="6B6B6B"/>
                 </a:solidFill>
-                <a:latin typeface="Century Schoolbook"/>
+                <a:latin typeface="Lexend"/>
               </a:rPr>
               <a:t>14</a:t>
             </a:r>
@@ -4933,7 +5075,7 @@
       </p:sp>
       <p:pic>
         <p:nvPicPr>
-          <p:cNvPr id="8" name="Picture 7" descr="195018b9c2dda353.png"/>
+          <p:cNvPr id="8" name="Picture 7" descr="03a681fbad5650c5.png"/>
           <p:cNvPicPr>
             <a:picLocks noChangeAspect="1"/>
           </p:cNvPicPr>
@@ -4947,8 +5089,8 @@
         </p:blipFill>
         <p:spPr>
           <a:xfrm>
-            <a:off x="5192267" y="2194560"/>
-            <a:ext cx="1776984" cy="1112520"/>
+            <a:off x="5372099" y="1481328"/>
+            <a:ext cx="1417320" cy="883920"/>
           </a:xfrm>
           <a:prstGeom prst="rect">
             <a:avLst/>
@@ -4963,7 +5105,7 @@
         </p:nvSpPr>
         <p:spPr>
           <a:xfrm>
-            <a:off x="777240" y="3809999"/>
+            <a:off x="777240" y="2868168"/>
             <a:ext cx="10607040" cy="429370"/>
           </a:xfrm>
           <a:prstGeom prst="rect">
@@ -4979,11 +5121,11 @@
           <a:p>
             <a:pPr algn="ctr"/>
             <a:r>
-              <a:rPr sz="2400" b="1" i="0">
+              <a:rPr sz="2280" b="1" i="0">
                 <a:solidFill>
                   <a:srgbClr val="1A1A1A"/>
                 </a:solidFill>
-                <a:latin typeface="Century Schoolbook"/>
+                <a:latin typeface="Lexend"/>
               </a:rPr>
               <a:t>Write an equivalent expression with positive exponents only.</a:t>
             </a:r>
@@ -4998,36 +5140,36 @@
         </p:nvSpPr>
         <p:spPr>
           <a:xfrm>
-            <a:off x="4652772" y="4777342"/>
-            <a:ext cx="1920240" cy="548640"/>
-          </a:xfrm>
-          <a:prstGeom prst="rect">
-            <a:avLst/>
-          </a:prstGeom>
-          <a:noFill/>
-        </p:spPr>
-        <p:txBody>
-          <a:bodyPr wrap="square" lIns="45720" rIns="45720" tIns="18288" bIns="18288" anchor="ctr">
-            <a:spAutoFit/>
+            <a:off x="2721617" y="3457558"/>
+            <a:ext cx="6855444" cy="457200"/>
+          </a:xfrm>
+          <a:prstGeom prst="rect">
+            <a:avLst/>
+          </a:prstGeom>
+          <a:noFill/>
+        </p:spPr>
+        <p:txBody>
+          <a:bodyPr wrap="none" lIns="45720" rIns="45720" tIns="18288" bIns="18288" anchor="ctr">
+            <a:noAutofit/>
           </a:bodyPr>
           <a:lstStyle/>
           <a:p>
             <a:pPr algn="l"/>
             <a:r>
-              <a:rPr sz="3200" b="1" i="0">
-                <a:solidFill>
-                  <a:srgbClr val="9E1B32"/>
-                </a:solidFill>
-                <a:latin typeface="Century Schoolbook"/>
-              </a:rPr>
-              <a:t>Answer:</a:t>
+              <a:rPr sz="2750" b="0" i="0">
+                <a:solidFill>
+                  <a:srgbClr val="1A1A1A"/>
+                </a:solidFill>
+                <a:latin typeface="Lexend"/>
+              </a:rPr>
+              <a:t>Cube every part, then move the y up:</a:t>
             </a:r>
           </a:p>
         </p:txBody>
       </p:sp>
       <p:pic>
         <p:nvPicPr>
-          <p:cNvPr id="11" name="Picture 10" descr="3636f909b16359db.png"/>
+          <p:cNvPr id="11" name="Picture 10" descr="0c8a8ac9e9217b89.png"/>
           <p:cNvPicPr>
             <a:picLocks noChangeAspect="1"/>
           </p:cNvPicPr>
@@ -5041,8 +5183,67 @@
         </p:blipFill>
         <p:spPr>
           <a:xfrm>
-            <a:off x="6573011" y="4531978"/>
-            <a:ext cx="935736" cy="1039368"/>
+            <a:off x="2776481" y="4019914"/>
+            <a:ext cx="3605784" cy="880872"/>
+          </a:xfrm>
+          <a:prstGeom prst="rect">
+            <a:avLst/>
+          </a:prstGeom>
+        </p:spPr>
+      </p:pic>
+      <p:sp>
+        <p:nvSpPr>
+          <p:cNvPr id="12" name="TextBox 11"/>
+          <p:cNvSpPr txBox="1"/>
+          <p:nvPr/>
+        </p:nvSpPr>
+        <p:spPr>
+          <a:xfrm>
+            <a:off x="4620767" y="5277214"/>
+            <a:ext cx="1920240" cy="548640"/>
+          </a:xfrm>
+          <a:prstGeom prst="rect">
+            <a:avLst/>
+          </a:prstGeom>
+          <a:noFill/>
+        </p:spPr>
+        <p:txBody>
+          <a:bodyPr wrap="square" lIns="45720" rIns="45720" tIns="18288" bIns="18288" anchor="ctr">
+            <a:spAutoFit/>
+          </a:bodyPr>
+          <a:lstStyle/>
+          <a:p>
+            <a:pPr algn="l"/>
+            <a:r>
+              <a:rPr sz="3040" b="1" i="0">
+                <a:solidFill>
+                  <a:srgbClr val="9E1B32"/>
+                </a:solidFill>
+                <a:latin typeface="Lexend"/>
+              </a:rPr>
+              <a:t>Answer:</a:t>
+            </a:r>
+          </a:p>
+        </p:txBody>
+      </p:sp>
+      <p:pic>
+        <p:nvPicPr>
+          <p:cNvPr id="13" name="Picture 12" descr="f55882cbb9feaf65.png"/>
+          <p:cNvPicPr>
+            <a:picLocks noChangeAspect="1"/>
+          </p:cNvPicPr>
+          <p:nvPr/>
+        </p:nvPicPr>
+        <p:blipFill>
+          <a:blip r:embed="rId4"/>
+          <a:stretch>
+            <a:fillRect/>
+          </a:stretch>
+        </p:blipFill>
+        <p:spPr>
+          <a:xfrm>
+            <a:off x="6541007" y="5037946"/>
+            <a:ext cx="999743" cy="1027176"/>
           </a:xfrm>
           <a:prstGeom prst="rect">
             <a:avLst/>
@@ -5091,11 +5292,11 @@
           <a:p>
             <a:pPr algn="l"/>
             <a:r>
-              <a:rPr sz="3400" b="1" i="0">
+              <a:rPr sz="3229" b="1" i="0">
                 <a:solidFill>
                   <a:srgbClr val="1A1A1A"/>
                 </a:solidFill>
-                <a:latin typeface="Century Schoolbook"/>
+                <a:latin typeface="Lexend"/>
               </a:rPr>
               <a:t>Whiteboards   ·   Question 1 of 9</a:t>
             </a:r>
@@ -5231,11 +5432,11 @@
           <a:p>
             <a:pPr algn="l"/>
             <a:r>
-              <a:rPr sz="1100" b="0" i="1">
+              <a:rPr sz="1040" b="0" i="0">
                 <a:solidFill>
                   <a:srgbClr val="6B6B6B"/>
                 </a:solidFill>
-                <a:latin typeface="Century Schoolbook"/>
+                <a:latin typeface="Lexend"/>
               </a:rPr>
               <a:t>Grade 7 Accelerated · Unit 3 · Thread A · Day 2 — Negative Exponents with Variable Bases</a:t>
             </a:r>
@@ -5266,11 +5467,11 @@
           <a:p>
             <a:pPr algn="r"/>
             <a:r>
-              <a:rPr sz="1100" b="0" i="0">
+              <a:rPr sz="1040" b="0" i="0">
                 <a:solidFill>
                   <a:srgbClr val="6B6B6B"/>
                 </a:solidFill>
-                <a:latin typeface="Century Schoolbook"/>
+                <a:latin typeface="Lexend"/>
               </a:rPr>
               <a:t>15</a:t>
             </a:r>
@@ -5279,7 +5480,7 @@
       </p:sp>
       <p:pic>
         <p:nvPicPr>
-          <p:cNvPr id="8" name="Picture 7" descr="49cdf5a8f688d8ec.png"/>
+          <p:cNvPr id="8" name="Picture 7" descr="ec408266b0457393.png"/>
           <p:cNvPicPr>
             <a:picLocks noChangeAspect="1"/>
           </p:cNvPicPr>
@@ -5293,8 +5494,8 @@
         </p:blipFill>
         <p:spPr>
           <a:xfrm>
-            <a:off x="5737859" y="2194560"/>
-            <a:ext cx="685800" cy="429768"/>
+            <a:off x="5742431" y="2194560"/>
+            <a:ext cx="676656" cy="414528"/>
           </a:xfrm>
           <a:prstGeom prst="rect">
             <a:avLst/>
@@ -5325,11 +5526,11 @@
           <a:p>
             <a:pPr algn="ctr"/>
             <a:r>
-              <a:rPr sz="2600" b="1" i="0">
+              <a:rPr sz="2470" b="1" i="0">
                 <a:solidFill>
                   <a:srgbClr val="1A1A1A"/>
                 </a:solidFill>
-                <a:latin typeface="Century Schoolbook"/>
+                <a:latin typeface="Lexend"/>
               </a:rPr>
               <a:t>Answer it.</a:t>
             </a:r>
@@ -5378,11 +5579,11 @@
           <a:p>
             <a:pPr algn="l"/>
             <a:r>
-              <a:rPr sz="3400" b="1" i="0">
+              <a:rPr sz="3229" b="1" i="0">
                 <a:solidFill>
                   <a:srgbClr val="1A1A1A"/>
                 </a:solidFill>
-                <a:latin typeface="Century Schoolbook"/>
+                <a:latin typeface="Lexend"/>
               </a:rPr>
               <a:t>Whiteboards   ·   Question 1 of 9</a:t>
             </a:r>
@@ -5518,11 +5719,11 @@
           <a:p>
             <a:pPr algn="l"/>
             <a:r>
-              <a:rPr sz="1100" b="0" i="1">
+              <a:rPr sz="1040" b="0" i="0">
                 <a:solidFill>
                   <a:srgbClr val="6B6B6B"/>
                 </a:solidFill>
-                <a:latin typeface="Century Schoolbook"/>
+                <a:latin typeface="Lexend"/>
               </a:rPr>
               <a:t>Grade 7 Accelerated · Unit 3 · Thread A · Day 2 — Negative Exponents with Variable Bases</a:t>
             </a:r>
@@ -5553,11 +5754,11 @@
           <a:p>
             <a:pPr algn="r"/>
             <a:r>
-              <a:rPr sz="1100" b="0" i="0">
+              <a:rPr sz="1040" b="0" i="0">
                 <a:solidFill>
                   <a:srgbClr val="6B6B6B"/>
                 </a:solidFill>
-                <a:latin typeface="Century Schoolbook"/>
+                <a:latin typeface="Lexend"/>
               </a:rPr>
               <a:t>16</a:t>
             </a:r>
@@ -5566,7 +5767,7 @@
       </p:sp>
       <p:pic>
         <p:nvPicPr>
-          <p:cNvPr id="8" name="Picture 7" descr="6299b72688be4fad.png"/>
+          <p:cNvPr id="8" name="Picture 7" descr="d0e787fdcb7c6f21.png"/>
           <p:cNvPicPr>
             <a:picLocks noChangeAspect="1"/>
           </p:cNvPicPr>
@@ -5580,52 +5781,17 @@
         </p:blipFill>
         <p:spPr>
           <a:xfrm>
-            <a:off x="5737859" y="2103120"/>
-            <a:ext cx="685800" cy="423672"/>
+            <a:off x="5742431" y="2103120"/>
+            <a:ext cx="676656" cy="414528"/>
           </a:xfrm>
           <a:prstGeom prst="rect">
             <a:avLst/>
           </a:prstGeom>
         </p:spPr>
       </p:pic>
-      <p:sp>
-        <p:nvSpPr>
-          <p:cNvPr id="9" name="TextBox 8"/>
-          <p:cNvSpPr txBox="1"/>
-          <p:nvPr/>
-        </p:nvSpPr>
-        <p:spPr>
-          <a:xfrm>
-            <a:off x="4881372" y="4853939"/>
-            <a:ext cx="1920240" cy="548640"/>
-          </a:xfrm>
-          <a:prstGeom prst="rect">
-            <a:avLst/>
-          </a:prstGeom>
-          <a:noFill/>
-        </p:spPr>
-        <p:txBody>
-          <a:bodyPr wrap="square" lIns="45720" rIns="45720" tIns="18288" bIns="18288" anchor="ctr">
-            <a:spAutoFit/>
-          </a:bodyPr>
-          <a:lstStyle/>
-          <a:p>
-            <a:pPr algn="l"/>
-            <a:r>
-              <a:rPr sz="3200" b="1" i="0">
-                <a:solidFill>
-                  <a:srgbClr val="9E1B32"/>
-                </a:solidFill>
-                <a:latin typeface="Century Schoolbook"/>
-              </a:rPr>
-              <a:t>Answer:</a:t>
-            </a:r>
-          </a:p>
-        </p:txBody>
-      </p:sp>
       <p:pic>
         <p:nvPicPr>
-          <p:cNvPr id="10" name="Picture 9" descr="f4033d6f9e46bb18.png"/>
+          <p:cNvPr id="9" name="Picture 8" descr="120fc012f8affb54.png"/>
           <p:cNvPicPr>
             <a:picLocks noChangeAspect="1"/>
           </p:cNvPicPr>
@@ -5639,8 +5805,67 @@
         </p:blipFill>
         <p:spPr>
           <a:xfrm>
-            <a:off x="6801611" y="4663440"/>
-            <a:ext cx="478536" cy="929640"/>
+            <a:off x="5527547" y="2819399"/>
+            <a:ext cx="1207008" cy="658368"/>
+          </a:xfrm>
+          <a:prstGeom prst="rect">
+            <a:avLst/>
+          </a:prstGeom>
+        </p:spPr>
+      </p:pic>
+      <p:sp>
+        <p:nvSpPr>
+          <p:cNvPr id="10" name="TextBox 9"/>
+          <p:cNvSpPr txBox="1"/>
+          <p:nvPr/>
+        </p:nvSpPr>
+        <p:spPr>
+          <a:xfrm>
+            <a:off x="4861560" y="4843271"/>
+            <a:ext cx="1920240" cy="548640"/>
+          </a:xfrm>
+          <a:prstGeom prst="rect">
+            <a:avLst/>
+          </a:prstGeom>
+          <a:noFill/>
+        </p:spPr>
+        <p:txBody>
+          <a:bodyPr wrap="square" lIns="45720" rIns="45720" tIns="18288" bIns="18288" anchor="ctr">
+            <a:spAutoFit/>
+          </a:bodyPr>
+          <a:lstStyle/>
+          <a:p>
+            <a:pPr algn="l"/>
+            <a:r>
+              <a:rPr sz="3040" b="1" i="0">
+                <a:solidFill>
+                  <a:srgbClr val="9E1B32"/>
+                </a:solidFill>
+                <a:latin typeface="Lexend"/>
+              </a:rPr>
+              <a:t>Answer:</a:t>
+            </a:r>
+          </a:p>
+        </p:txBody>
+      </p:sp>
+      <p:pic>
+        <p:nvPicPr>
+          <p:cNvPr id="11" name="Picture 10" descr="fb1ddbcef519bcae.png"/>
+          <p:cNvPicPr>
+            <a:picLocks noChangeAspect="1"/>
+          </p:cNvPicPr>
+          <p:nvPr/>
+        </p:nvPicPr>
+        <p:blipFill>
+          <a:blip r:embed="rId4"/>
+          <a:stretch>
+            <a:fillRect/>
+          </a:stretch>
+        </p:blipFill>
+        <p:spPr>
+          <a:xfrm>
+            <a:off x="6781799" y="4663440"/>
+            <a:ext cx="518160" cy="908304"/>
           </a:xfrm>
           <a:prstGeom prst="rect">
             <a:avLst/>
@@ -5689,11 +5914,11 @@
           <a:p>
             <a:pPr algn="l"/>
             <a:r>
-              <a:rPr sz="3400" b="1" i="0">
+              <a:rPr sz="3229" b="1" i="0">
                 <a:solidFill>
                   <a:srgbClr val="1A1A1A"/>
                 </a:solidFill>
-                <a:latin typeface="Century Schoolbook"/>
+                <a:latin typeface="Lexend"/>
               </a:rPr>
               <a:t>Whiteboards   ·   Question 2 of 9</a:t>
             </a:r>
@@ -5829,11 +6054,11 @@
           <a:p>
             <a:pPr algn="l"/>
             <a:r>
-              <a:rPr sz="1100" b="0" i="1">
+              <a:rPr sz="1040" b="0" i="0">
                 <a:solidFill>
                   <a:srgbClr val="6B6B6B"/>
                 </a:solidFill>
-                <a:latin typeface="Century Schoolbook"/>
+                <a:latin typeface="Lexend"/>
               </a:rPr>
               <a:t>Grade 7 Accelerated · Unit 3 · Thread A · Day 2 — Negative Exponents with Variable Bases</a:t>
             </a:r>
@@ -5864,11 +6089,11 @@
           <a:p>
             <a:pPr algn="r"/>
             <a:r>
-              <a:rPr sz="1100" b="0" i="0">
+              <a:rPr sz="1040" b="0" i="0">
                 <a:solidFill>
                   <a:srgbClr val="6B6B6B"/>
                 </a:solidFill>
-                <a:latin typeface="Century Schoolbook"/>
+                <a:latin typeface="Lexend"/>
               </a:rPr>
               <a:t>17</a:t>
             </a:r>
@@ -5877,7 +6102,7 @@
       </p:sp>
       <p:pic>
         <p:nvPicPr>
-          <p:cNvPr id="8" name="Picture 7" descr="70a7739fb7946438.png"/>
+          <p:cNvPr id="8" name="Picture 7" descr="1b13ec9f58c1824c.png"/>
           <p:cNvPicPr>
             <a:picLocks noChangeAspect="1"/>
           </p:cNvPicPr>
@@ -5891,8 +6116,8 @@
         </p:blipFill>
         <p:spPr>
           <a:xfrm>
-            <a:off x="5722620" y="2194560"/>
-            <a:ext cx="716280" cy="1036320"/>
+            <a:off x="5727191" y="2194560"/>
+            <a:ext cx="707136" cy="1018032"/>
           </a:xfrm>
           <a:prstGeom prst="rect">
             <a:avLst/>
@@ -5923,11 +6148,11 @@
           <a:p>
             <a:pPr algn="ctr"/>
             <a:r>
-              <a:rPr sz="2600" b="1" i="0">
+              <a:rPr sz="2470" b="1" i="0">
                 <a:solidFill>
                   <a:srgbClr val="1A1A1A"/>
                 </a:solidFill>
-                <a:latin typeface="Century Schoolbook"/>
+                <a:latin typeface="Lexend"/>
               </a:rPr>
               <a:t>Answer it.</a:t>
             </a:r>
@@ -5976,11 +6201,11 @@
           <a:p>
             <a:pPr algn="l"/>
             <a:r>
-              <a:rPr sz="3400" b="1" i="0">
+              <a:rPr sz="3229" b="1" i="0">
                 <a:solidFill>
                   <a:srgbClr val="1A1A1A"/>
                 </a:solidFill>
-                <a:latin typeface="Century Schoolbook"/>
+                <a:latin typeface="Lexend"/>
               </a:rPr>
               <a:t>Whiteboards   ·   Question 2 of 9</a:t>
             </a:r>
@@ -6116,11 +6341,11 @@
           <a:p>
             <a:pPr algn="l"/>
             <a:r>
-              <a:rPr sz="1100" b="0" i="1">
+              <a:rPr sz="1040" b="0" i="0">
                 <a:solidFill>
                   <a:srgbClr val="6B6B6B"/>
                 </a:solidFill>
-                <a:latin typeface="Century Schoolbook"/>
+                <a:latin typeface="Lexend"/>
               </a:rPr>
               <a:t>Grade 7 Accelerated · Unit 3 · Thread A · Day 2 — Negative Exponents with Variable Bases</a:t>
             </a:r>
@@ -6151,11 +6376,11 @@
           <a:p>
             <a:pPr algn="r"/>
             <a:r>
-              <a:rPr sz="1100" b="0" i="0">
+              <a:rPr sz="1040" b="0" i="0">
                 <a:solidFill>
                   <a:srgbClr val="6B6B6B"/>
                 </a:solidFill>
-                <a:latin typeface="Century Schoolbook"/>
+                <a:latin typeface="Lexend"/>
               </a:rPr>
               <a:t>18</a:t>
             </a:r>
@@ -6164,7 +6389,7 @@
       </p:sp>
       <p:pic>
         <p:nvPicPr>
-          <p:cNvPr id="8" name="Picture 7" descr="1b19adcea2f05b41.png"/>
+          <p:cNvPr id="8" name="Picture 7" descr="7eacf3d693b1d7f9.png"/>
           <p:cNvPicPr>
             <a:picLocks noChangeAspect="1"/>
           </p:cNvPicPr>
@@ -6178,52 +6403,17 @@
         </p:blipFill>
         <p:spPr>
           <a:xfrm>
-            <a:off x="5724144" y="2103120"/>
-            <a:ext cx="713232" cy="1033271"/>
+            <a:off x="5730239" y="2103120"/>
+            <a:ext cx="701040" cy="1018032"/>
           </a:xfrm>
           <a:prstGeom prst="rect">
             <a:avLst/>
           </a:prstGeom>
         </p:spPr>
       </p:pic>
-      <p:sp>
-        <p:nvSpPr>
-          <p:cNvPr id="9" name="TextBox 8"/>
-          <p:cNvSpPr txBox="1"/>
-          <p:nvPr/>
-        </p:nvSpPr>
-        <p:spPr>
-          <a:xfrm>
-            <a:off x="4908804" y="4652772"/>
-            <a:ext cx="1920240" cy="548640"/>
-          </a:xfrm>
-          <a:prstGeom prst="rect">
-            <a:avLst/>
-          </a:prstGeom>
-          <a:noFill/>
-        </p:spPr>
-        <p:txBody>
-          <a:bodyPr wrap="square" lIns="45720" rIns="45720" tIns="18288" bIns="18288" anchor="ctr">
-            <a:spAutoFit/>
-          </a:bodyPr>
-          <a:lstStyle/>
-          <a:p>
-            <a:pPr algn="l"/>
-            <a:r>
-              <a:rPr sz="3200" b="1" i="0">
-                <a:solidFill>
-                  <a:srgbClr val="9E1B32"/>
-                </a:solidFill>
-                <a:latin typeface="Century Schoolbook"/>
-              </a:rPr>
-              <a:t>Answer:</a:t>
-            </a:r>
-          </a:p>
-        </p:txBody>
-      </p:sp>
       <p:pic>
         <p:nvPicPr>
-          <p:cNvPr id="10" name="Picture 9" descr="666f79c957ad2d7e.png"/>
+          <p:cNvPr id="9" name="Picture 8" descr="6b87df3e62c7c1cf.png"/>
           <p:cNvPicPr>
             <a:picLocks noChangeAspect="1"/>
           </p:cNvPicPr>
@@ -6237,8 +6427,67 @@
         </p:blipFill>
         <p:spPr>
           <a:xfrm>
-            <a:off x="6829044" y="4663440"/>
-            <a:ext cx="423672" cy="527304"/>
+            <a:off x="5524499" y="3422904"/>
+            <a:ext cx="1222248" cy="740664"/>
+          </a:xfrm>
+          <a:prstGeom prst="rect">
+            <a:avLst/>
+          </a:prstGeom>
+        </p:spPr>
+      </p:pic>
+      <p:sp>
+        <p:nvSpPr>
+          <p:cNvPr id="10" name="TextBox 9"/>
+          <p:cNvSpPr txBox="1"/>
+          <p:nvPr/>
+        </p:nvSpPr>
+        <p:spPr>
+          <a:xfrm>
+            <a:off x="4884419" y="4651247"/>
+            <a:ext cx="1920240" cy="548640"/>
+          </a:xfrm>
+          <a:prstGeom prst="rect">
+            <a:avLst/>
+          </a:prstGeom>
+          <a:noFill/>
+        </p:spPr>
+        <p:txBody>
+          <a:bodyPr wrap="square" lIns="45720" rIns="45720" tIns="18288" bIns="18288" anchor="ctr">
+            <a:spAutoFit/>
+          </a:bodyPr>
+          <a:lstStyle/>
+          <a:p>
+            <a:pPr algn="l"/>
+            <a:r>
+              <a:rPr sz="3040" b="1" i="0">
+                <a:solidFill>
+                  <a:srgbClr val="9E1B32"/>
+                </a:solidFill>
+                <a:latin typeface="Lexend"/>
+              </a:rPr>
+              <a:t>Answer:</a:t>
+            </a:r>
+          </a:p>
+        </p:txBody>
+      </p:sp>
+      <p:pic>
+        <p:nvPicPr>
+          <p:cNvPr id="11" name="Picture 10" descr="552d05db14a86453.png"/>
+          <p:cNvPicPr>
+            <a:picLocks noChangeAspect="1"/>
+          </p:cNvPicPr>
+          <p:nvPr/>
+        </p:nvPicPr>
+        <p:blipFill>
+          <a:blip r:embed="rId4"/>
+          <a:stretch>
+            <a:fillRect/>
+          </a:stretch>
+        </p:blipFill>
+        <p:spPr>
+          <a:xfrm>
+            <a:off x="6804660" y="4663440"/>
+            <a:ext cx="472440" cy="524256"/>
           </a:xfrm>
           <a:prstGeom prst="rect">
             <a:avLst/>
@@ -6287,11 +6536,11 @@
           <a:p>
             <a:pPr algn="l"/>
             <a:r>
-              <a:rPr sz="3400" b="1" i="0">
+              <a:rPr sz="3229" b="1" i="0">
                 <a:solidFill>
                   <a:srgbClr val="1A1A1A"/>
                 </a:solidFill>
-                <a:latin typeface="Century Schoolbook"/>
+                <a:latin typeface="Lexend"/>
               </a:rPr>
               <a:t>Whiteboards   ·   Question 3 of 9</a:t>
             </a:r>
@@ -6427,11 +6676,11 @@
           <a:p>
             <a:pPr algn="l"/>
             <a:r>
-              <a:rPr sz="1100" b="0" i="1">
+              <a:rPr sz="1040" b="0" i="0">
                 <a:solidFill>
                   <a:srgbClr val="6B6B6B"/>
                 </a:solidFill>
-                <a:latin typeface="Century Schoolbook"/>
+                <a:latin typeface="Lexend"/>
               </a:rPr>
               <a:t>Grade 7 Accelerated · Unit 3 · Thread A · Day 2 — Negative Exponents with Variable Bases</a:t>
             </a:r>
@@ -6462,11 +6711,11 @@
           <a:p>
             <a:pPr algn="r"/>
             <a:r>
-              <a:rPr sz="1100" b="0" i="0">
+              <a:rPr sz="1040" b="0" i="0">
                 <a:solidFill>
                   <a:srgbClr val="6B6B6B"/>
                 </a:solidFill>
-                <a:latin typeface="Century Schoolbook"/>
+                <a:latin typeface="Lexend"/>
               </a:rPr>
               <a:t>19</a:t>
             </a:r>
@@ -6482,7 +6731,7 @@
         <p:spPr>
           <a:xfrm>
             <a:off x="1234440" y="1851660"/>
-            <a:ext cx="4886043" cy="457200"/>
+            <a:ext cx="4860975" cy="457200"/>
           </a:xfrm>
           <a:prstGeom prst="rect">
             <a:avLst/>
@@ -6497,11 +6746,11 @@
           <a:p>
             <a:pPr algn="l"/>
             <a:r>
-              <a:rPr sz="2400" b="0" i="0">
+              <a:rPr sz="2280" b="0" i="0">
                 <a:solidFill>
                   <a:srgbClr val="1A1A1A"/>
                 </a:solidFill>
-                <a:latin typeface="Century Schoolbook"/>
+                <a:latin typeface="Lexend"/>
               </a:rPr>
               <a:t>The brightness of a lamp from  </a:t>
             </a:r>
@@ -6510,7 +6759,7 @@
       </p:sp>
       <p:pic>
         <p:nvPicPr>
-          <p:cNvPr id="9" name="Picture 8" descr="36ab662f01dc4d91.png"/>
+          <p:cNvPr id="9" name="Picture 8" descr="c15f87ddcb3bf354.png"/>
           <p:cNvPicPr>
             <a:picLocks noChangeAspect="1"/>
           </p:cNvPicPr>
@@ -6524,8 +6773,8 @@
         </p:blipFill>
         <p:spPr>
           <a:xfrm>
-            <a:off x="5983323" y="2005584"/>
-            <a:ext cx="158496" cy="149352"/>
+            <a:off x="5958255" y="1997963"/>
+            <a:ext cx="170688" cy="164592"/>
           </a:xfrm>
           <a:prstGeom prst="rect">
             <a:avLst/>
@@ -6540,8 +6789,8 @@
         </p:nvSpPr>
         <p:spPr>
           <a:xfrm>
-            <a:off x="6141819" y="1851660"/>
-            <a:ext cx="2778188" cy="457200"/>
+            <a:off x="6128943" y="1851660"/>
+            <a:ext cx="2789923" cy="457200"/>
           </a:xfrm>
           <a:prstGeom prst="rect">
             <a:avLst/>
@@ -6556,11 +6805,11 @@
           <a:p>
             <a:pPr algn="l"/>
             <a:r>
-              <a:rPr sz="2400" b="0" i="0">
+              <a:rPr sz="2280" b="0" i="0">
                 <a:solidFill>
                   <a:srgbClr val="1A1A1A"/>
                 </a:solidFill>
-                <a:latin typeface="Century Schoolbook"/>
+                <a:latin typeface="Lexend"/>
               </a:rPr>
               <a:t>  meters away is  </a:t>
             </a:r>
@@ -6569,7 +6818,7 @@
       </p:sp>
       <p:pic>
         <p:nvPicPr>
-          <p:cNvPr id="11" name="Picture 10" descr="47fe29c90fa7b53b.png"/>
+          <p:cNvPr id="11" name="Picture 10" descr="bea5ec65db107fb5.png"/>
           <p:cNvPicPr>
             <a:picLocks noChangeAspect="1"/>
           </p:cNvPicPr>
@@ -6583,8 +6832,8 @@
         </p:blipFill>
         <p:spPr>
           <a:xfrm>
-            <a:off x="8782847" y="1940052"/>
-            <a:ext cx="585216" cy="280416"/>
+            <a:off x="8781706" y="1941575"/>
+            <a:ext cx="591312" cy="277368"/>
           </a:xfrm>
           <a:prstGeom prst="rect">
             <a:avLst/>
@@ -6599,8 +6848,8 @@
         </p:nvSpPr>
         <p:spPr>
           <a:xfrm>
-            <a:off x="9368063" y="1851660"/>
-            <a:ext cx="1251618" cy="457200"/>
+            <a:off x="9373018" y="1851660"/>
+            <a:ext cx="1176823" cy="457200"/>
           </a:xfrm>
           <a:prstGeom prst="rect">
             <a:avLst/>
@@ -6615,11 +6864,11 @@
           <a:p>
             <a:pPr algn="l"/>
             <a:r>
-              <a:rPr sz="2400" b="0" i="0">
+              <a:rPr sz="2280" b="0" i="0">
                 <a:solidFill>
                   <a:srgbClr val="1A1A1A"/>
                 </a:solidFill>
-                <a:latin typeface="Century Schoolbook"/>
+                <a:latin typeface="Lexend"/>
               </a:rPr>
               <a:t>  units.</a:t>
             </a:r>
@@ -6650,11 +6899,11 @@
           <a:p>
             <a:pPr algn="l"/>
             <a:r>
-              <a:rPr sz="2400" b="0" i="0">
+              <a:rPr sz="2280" b="0" i="0">
                 <a:solidFill>
                   <a:srgbClr val="1A1A1A"/>
                 </a:solidFill>
-                <a:latin typeface="Century Schoolbook"/>
+                <a:latin typeface="Lexend"/>
               </a:rPr>
               <a:t>The lamp is 15 centimeters tall.</a:t>
             </a:r>
@@ -6685,11 +6934,11 @@
           <a:p>
             <a:pPr algn="l"/>
             <a:r>
-              <a:rPr sz="2400" b="1" i="0">
+              <a:rPr sz="2280" b="1" i="0">
                 <a:solidFill>
                   <a:srgbClr val="1A1A1A"/>
                 </a:solidFill>
-                <a:latin typeface="Century Schoolbook"/>
+                <a:latin typeface="Lexend"/>
               </a:rPr>
               <a:t>How bright is the lamp from 2 meters away?</a:t>
             </a:r>
@@ -6720,11 +6969,11 @@
           <a:p>
             <a:pPr algn="ctr"/>
             <a:r>
-              <a:rPr sz="2600" b="1" i="0">
+              <a:rPr sz="2470" b="1" i="0">
                 <a:solidFill>
                   <a:srgbClr val="1A1A1A"/>
                 </a:solidFill>
-                <a:latin typeface="Century Schoolbook"/>
+                <a:latin typeface="Lexend"/>
               </a:rPr>
               <a:t>Answer it.</a:t>
             </a:r>
@@ -6773,11 +7022,11 @@
           <a:p>
             <a:pPr algn="l"/>
             <a:r>
-              <a:rPr sz="3600" b="1" i="0">
+              <a:rPr sz="3420" b="1" i="0">
                 <a:solidFill>
                   <a:srgbClr val="1A1A1A"/>
                 </a:solidFill>
-                <a:latin typeface="Century Schoolbook"/>
+                <a:latin typeface="Lexend"/>
               </a:rPr>
               <a:t>Warm-Up</a:t>
             </a:r>
@@ -6913,11 +7162,11 @@
           <a:p>
             <a:pPr algn="l"/>
             <a:r>
-              <a:rPr sz="1100" b="0" i="1">
+              <a:rPr sz="1040" b="0" i="0">
                 <a:solidFill>
                   <a:srgbClr val="6B6B6B"/>
                 </a:solidFill>
-                <a:latin typeface="Century Schoolbook"/>
+                <a:latin typeface="Lexend"/>
               </a:rPr>
               <a:t>Grade 7 Accelerated · Unit 3 · Thread A · Day 2 — Negative Exponents with Variable Bases</a:t>
             </a:r>
@@ -6948,11 +7197,11 @@
           <a:p>
             <a:pPr algn="r"/>
             <a:r>
-              <a:rPr sz="1100" b="0" i="0">
+              <a:rPr sz="1040" b="0" i="0">
                 <a:solidFill>
                   <a:srgbClr val="6B6B6B"/>
                 </a:solidFill>
-                <a:latin typeface="Century Schoolbook"/>
+                <a:latin typeface="Lexend"/>
               </a:rPr>
               <a:t>2</a:t>
             </a:r>
@@ -6968,7 +7217,7 @@
         <p:spPr>
           <a:xfrm>
             <a:off x="1874519" y="1440180"/>
-            <a:ext cx="4874632" cy="457200"/>
+            <a:ext cx="4774550" cy="457200"/>
           </a:xfrm>
           <a:prstGeom prst="rect">
             <a:avLst/>
@@ -6983,11 +7232,11 @@
           <a:p>
             <a:pPr algn="l"/>
             <a:r>
-              <a:rPr sz="2300" b="0" i="0">
+              <a:rPr sz="2180" b="0" i="0">
                 <a:solidFill>
                   <a:srgbClr val="1A1A1A"/>
                 </a:solidFill>
-                <a:latin typeface="Century Schoolbook"/>
+                <a:latin typeface="Lexend"/>
               </a:rPr>
               <a:t>1.   Write as a single monomial:  </a:t>
             </a:r>
@@ -6996,7 +7245,7 @@
       </p:sp>
       <p:pic>
         <p:nvPicPr>
-          <p:cNvPr id="9" name="Picture 8" descr="c0ecde76b6542cae.png"/>
+          <p:cNvPr id="9" name="Picture 8" descr="9876647aa2adbdc4.png"/>
           <p:cNvPicPr>
             <a:picLocks noChangeAspect="1"/>
           </p:cNvPicPr>
@@ -7010,8 +7259,8 @@
         </p:blipFill>
         <p:spPr>
           <a:xfrm>
-            <a:off x="6611992" y="1501140"/>
-            <a:ext cx="771144" cy="335280"/>
+            <a:off x="6511910" y="1501140"/>
+            <a:ext cx="813816" cy="335280"/>
           </a:xfrm>
           <a:prstGeom prst="rect">
             <a:avLst/>
@@ -7027,7 +7276,7 @@
         <p:spPr>
           <a:xfrm>
             <a:off x="1874519" y="2052828"/>
-            <a:ext cx="3064939" cy="457200"/>
+            <a:ext cx="2935946" cy="457200"/>
           </a:xfrm>
           <a:prstGeom prst="rect">
             <a:avLst/>
@@ -7042,11 +7291,11 @@
           <a:p>
             <a:pPr algn="l"/>
             <a:r>
-              <a:rPr sz="2300" b="0" i="0">
+              <a:rPr sz="2180" b="0" i="0">
                 <a:solidFill>
                   <a:srgbClr val="1A1A1A"/>
                 </a:solidFill>
-                <a:latin typeface="Century Schoolbook"/>
+                <a:latin typeface="Lexend"/>
               </a:rPr>
               <a:t>2.   Find the value:  </a:t>
             </a:r>
@@ -7055,7 +7304,7 @@
       </p:sp>
       <p:pic>
         <p:nvPicPr>
-          <p:cNvPr id="11" name="Picture 10" descr="baf21e0fadb8b9e2.png"/>
+          <p:cNvPr id="11" name="Picture 10" descr="daac0ec1771ab045.png"/>
           <p:cNvPicPr>
             <a:picLocks noChangeAspect="1"/>
           </p:cNvPicPr>
@@ -7069,8 +7318,8 @@
         </p:blipFill>
         <p:spPr>
           <a:xfrm>
-            <a:off x="4802299" y="2141220"/>
-            <a:ext cx="426720" cy="280416"/>
+            <a:off x="4673306" y="2142744"/>
+            <a:ext cx="411480" cy="277368"/>
           </a:xfrm>
           <a:prstGeom prst="rect">
             <a:avLst/>
@@ -7086,7 +7335,7 @@
         <p:spPr>
           <a:xfrm>
             <a:off x="1874519" y="2665476"/>
-            <a:ext cx="3341646" cy="457200"/>
+            <a:ext cx="3236185" cy="457200"/>
           </a:xfrm>
           <a:prstGeom prst="rect">
             <a:avLst/>
@@ -7101,11 +7350,11 @@
           <a:p>
             <a:pPr algn="l"/>
             <a:r>
-              <a:rPr sz="2300" b="0" i="0">
+              <a:rPr sz="2180" b="0" i="0">
                 <a:solidFill>
                   <a:srgbClr val="1A1A1A"/>
                 </a:solidFill>
-                <a:latin typeface="Century Schoolbook"/>
+                <a:latin typeface="Lexend"/>
               </a:rPr>
               <a:t>3.   Which is greater,  </a:t>
             </a:r>
@@ -7114,7 +7363,7 @@
       </p:sp>
       <p:pic>
         <p:nvPicPr>
-          <p:cNvPr id="13" name="Picture 12" descr="57c771350ef6ea07.png"/>
+          <p:cNvPr id="13" name="Picture 12" descr="36070a9ce3916390.png"/>
           <p:cNvPicPr>
             <a:picLocks noChangeAspect="1"/>
           </p:cNvPicPr>
@@ -7128,8 +7377,8 @@
         </p:blipFill>
         <p:spPr>
           <a:xfrm>
-            <a:off x="5079006" y="2689860"/>
-            <a:ext cx="688848" cy="408432"/>
+            <a:off x="4973545" y="2699004"/>
+            <a:ext cx="713232" cy="390144"/>
           </a:xfrm>
           <a:prstGeom prst="rect">
             <a:avLst/>
@@ -7144,8 +7393,8 @@
         </p:nvSpPr>
         <p:spPr>
           <a:xfrm>
-            <a:off x="5767854" y="2665476"/>
-            <a:ext cx="1156543" cy="457200"/>
+            <a:off x="5686777" y="2665476"/>
+            <a:ext cx="1151644" cy="457200"/>
           </a:xfrm>
           <a:prstGeom prst="rect">
             <a:avLst/>
@@ -7160,11 +7409,11 @@
           <a:p>
             <a:pPr algn="l"/>
             <a:r>
-              <a:rPr sz="2300" b="0" i="0">
+              <a:rPr sz="2180" b="0" i="0">
                 <a:solidFill>
                   <a:srgbClr val="1A1A1A"/>
                 </a:solidFill>
-                <a:latin typeface="Century Schoolbook"/>
+                <a:latin typeface="Lexend"/>
               </a:rPr>
               <a:t>  or  9?</a:t>
             </a:r>
@@ -7179,8 +7428,8 @@
         </p:nvSpPr>
         <p:spPr>
           <a:xfrm>
-            <a:off x="1874519" y="3348228"/>
-            <a:ext cx="4395048" cy="457200"/>
+            <a:off x="1874519" y="3343656"/>
+            <a:ext cx="4361259" cy="457200"/>
           </a:xfrm>
           <a:prstGeom prst="rect">
             <a:avLst/>
@@ -7195,11 +7444,11 @@
           <a:p>
             <a:pPr algn="l"/>
             <a:r>
-              <a:rPr sz="2300" b="0" i="0">
+              <a:rPr sz="2180" b="0" i="0">
                 <a:solidFill>
                   <a:srgbClr val="1A1A1A"/>
                 </a:solidFill>
-                <a:latin typeface="Century Schoolbook"/>
+                <a:latin typeface="Lexend"/>
               </a:rPr>
               <a:t>4.   What is the reciprocal of  </a:t>
             </a:r>
@@ -7208,7 +7457,7 @@
       </p:sp>
       <p:pic>
         <p:nvPicPr>
-          <p:cNvPr id="16" name="Picture 15" descr="e8022fa09c25c018.png"/>
+          <p:cNvPr id="16" name="Picture 15" descr="6fa687cf29161665.png"/>
           <p:cNvPicPr>
             <a:picLocks noChangeAspect="1"/>
           </p:cNvPicPr>
@@ -7222,8 +7471,8 @@
         </p:blipFill>
         <p:spPr>
           <a:xfrm>
-            <a:off x="6132408" y="3300984"/>
-            <a:ext cx="170688" cy="551688"/>
+            <a:off x="6098619" y="3300984"/>
+            <a:ext cx="176784" cy="542544"/>
           </a:xfrm>
           <a:prstGeom prst="rect">
             <a:avLst/>
@@ -7238,8 +7487,8 @@
         </p:nvSpPr>
         <p:spPr>
           <a:xfrm>
-            <a:off x="6303096" y="3348228"/>
-            <a:ext cx="433854" cy="457200"/>
+            <a:off x="6275403" y="3343656"/>
+            <a:ext cx="443010" cy="457200"/>
           </a:xfrm>
           <a:prstGeom prst="rect">
             <a:avLst/>
@@ -7254,11 +7503,11 @@
           <a:p>
             <a:pPr algn="l"/>
             <a:r>
-              <a:rPr sz="2300" b="0" i="0">
+              <a:rPr sz="2180" b="0" i="0">
                 <a:solidFill>
                   <a:srgbClr val="1A1A1A"/>
                 </a:solidFill>
-                <a:latin typeface="Century Schoolbook"/>
+                <a:latin typeface="Lexend"/>
               </a:rPr>
               <a:t> ?</a:t>
             </a:r>
@@ -7307,11 +7556,11 @@
           <a:p>
             <a:pPr algn="l"/>
             <a:r>
-              <a:rPr sz="3400" b="1" i="0">
+              <a:rPr sz="3229" b="1" i="0">
                 <a:solidFill>
                   <a:srgbClr val="1A1A1A"/>
                 </a:solidFill>
-                <a:latin typeface="Century Schoolbook"/>
+                <a:latin typeface="Lexend"/>
               </a:rPr>
               <a:t>Whiteboards   ·   Question 3 of 9</a:t>
             </a:r>
@@ -7447,11 +7696,11 @@
           <a:p>
             <a:pPr algn="l"/>
             <a:r>
-              <a:rPr sz="1100" b="0" i="1">
+              <a:rPr sz="1040" b="0" i="0">
                 <a:solidFill>
                   <a:srgbClr val="6B6B6B"/>
                 </a:solidFill>
-                <a:latin typeface="Century Schoolbook"/>
+                <a:latin typeface="Lexend"/>
               </a:rPr>
               <a:t>Grade 7 Accelerated · Unit 3 · Thread A · Day 2 — Negative Exponents with Variable Bases</a:t>
             </a:r>
@@ -7482,11 +7731,11 @@
           <a:p>
             <a:pPr algn="r"/>
             <a:r>
-              <a:rPr sz="1100" b="0" i="0">
+              <a:rPr sz="1040" b="0" i="0">
                 <a:solidFill>
                   <a:srgbClr val="6B6B6B"/>
                 </a:solidFill>
-                <a:latin typeface="Century Schoolbook"/>
+                <a:latin typeface="Lexend"/>
               </a:rPr>
               <a:t>20</a:t>
             </a:r>
@@ -7502,7 +7751,7 @@
         <p:spPr>
           <a:xfrm>
             <a:off x="1234440" y="1851660"/>
-            <a:ext cx="4886043" cy="457200"/>
+            <a:ext cx="4860975" cy="457200"/>
           </a:xfrm>
           <a:prstGeom prst="rect">
             <a:avLst/>
@@ -7517,11 +7766,11 @@
           <a:p>
             <a:pPr algn="l"/>
             <a:r>
-              <a:rPr sz="2400" b="0" i="0">
+              <a:rPr sz="2280" b="0" i="0">
                 <a:solidFill>
                   <a:srgbClr val="1A1A1A"/>
                 </a:solidFill>
-                <a:latin typeface="Century Schoolbook"/>
+                <a:latin typeface="Lexend"/>
               </a:rPr>
               <a:t>The brightness of a lamp from  </a:t>
             </a:r>
@@ -7530,7 +7779,7 @@
       </p:sp>
       <p:pic>
         <p:nvPicPr>
-          <p:cNvPr id="9" name="Picture 8" descr="36ab662f01dc4d91.png"/>
+          <p:cNvPr id="9" name="Picture 8" descr="c15f87ddcb3bf354.png"/>
           <p:cNvPicPr>
             <a:picLocks noChangeAspect="1"/>
           </p:cNvPicPr>
@@ -7544,8 +7793,8 @@
         </p:blipFill>
         <p:spPr>
           <a:xfrm>
-            <a:off x="5983323" y="2005584"/>
-            <a:ext cx="158496" cy="149352"/>
+            <a:off x="5958255" y="1997963"/>
+            <a:ext cx="170688" cy="164592"/>
           </a:xfrm>
           <a:prstGeom prst="rect">
             <a:avLst/>
@@ -7560,8 +7809,8 @@
         </p:nvSpPr>
         <p:spPr>
           <a:xfrm>
-            <a:off x="6141819" y="1851660"/>
-            <a:ext cx="2778188" cy="457200"/>
+            <a:off x="6128943" y="1851660"/>
+            <a:ext cx="2789923" cy="457200"/>
           </a:xfrm>
           <a:prstGeom prst="rect">
             <a:avLst/>
@@ -7576,11 +7825,11 @@
           <a:p>
             <a:pPr algn="l"/>
             <a:r>
-              <a:rPr sz="2400" b="0" i="0">
+              <a:rPr sz="2280" b="0" i="0">
                 <a:solidFill>
                   <a:srgbClr val="1A1A1A"/>
                 </a:solidFill>
-                <a:latin typeface="Century Schoolbook"/>
+                <a:latin typeface="Lexend"/>
               </a:rPr>
               <a:t>  meters away is  </a:t>
             </a:r>
@@ -7589,7 +7838,7 @@
       </p:sp>
       <p:pic>
         <p:nvPicPr>
-          <p:cNvPr id="11" name="Picture 10" descr="69ad6c7cdf468fd0.png"/>
+          <p:cNvPr id="11" name="Picture 10" descr="751d7165ce0bd930.png"/>
           <p:cNvPicPr>
             <a:picLocks noChangeAspect="1"/>
           </p:cNvPicPr>
@@ -7603,8 +7852,8 @@
         </p:blipFill>
         <p:spPr>
           <a:xfrm>
-            <a:off x="8782847" y="1940052"/>
-            <a:ext cx="588264" cy="280416"/>
+            <a:off x="8781706" y="1941575"/>
+            <a:ext cx="594360" cy="277368"/>
           </a:xfrm>
           <a:prstGeom prst="rect">
             <a:avLst/>
@@ -7619,8 +7868,8 @@
         </p:nvSpPr>
         <p:spPr>
           <a:xfrm>
-            <a:off x="9371111" y="1851660"/>
-            <a:ext cx="1251618" cy="457200"/>
+            <a:off x="9376066" y="1851660"/>
+            <a:ext cx="1176823" cy="457200"/>
           </a:xfrm>
           <a:prstGeom prst="rect">
             <a:avLst/>
@@ -7635,11 +7884,11 @@
           <a:p>
             <a:pPr algn="l"/>
             <a:r>
-              <a:rPr sz="2400" b="0" i="0">
+              <a:rPr sz="2280" b="0" i="0">
                 <a:solidFill>
                   <a:srgbClr val="1A1A1A"/>
                 </a:solidFill>
-                <a:latin typeface="Century Schoolbook"/>
+                <a:latin typeface="Lexend"/>
               </a:rPr>
               <a:t>  units.</a:t>
             </a:r>
@@ -7670,11 +7919,11 @@
           <a:p>
             <a:pPr algn="l"/>
             <a:r>
-              <a:rPr sz="2400" b="0" i="0">
+              <a:rPr sz="2280" b="0" i="0">
                 <a:solidFill>
                   <a:srgbClr val="1A1A1A"/>
                 </a:solidFill>
-                <a:latin typeface="Century Schoolbook"/>
+                <a:latin typeface="Lexend"/>
               </a:rPr>
               <a:t>The lamp is 15 centimeters tall.</a:t>
             </a:r>
@@ -7705,55 +7954,20 @@
           <a:p>
             <a:pPr algn="l"/>
             <a:r>
-              <a:rPr sz="2400" b="1" i="0">
+              <a:rPr sz="2280" b="1" i="0">
                 <a:solidFill>
                   <a:srgbClr val="1A1A1A"/>
                 </a:solidFill>
-                <a:latin typeface="Century Schoolbook"/>
+                <a:latin typeface="Lexend"/>
               </a:rPr>
               <a:t>How bright is the lamp from 2 meters away?</a:t>
-            </a:r>
-          </a:p>
-        </p:txBody>
-      </p:sp>
-      <p:sp>
-        <p:nvSpPr>
-          <p:cNvPr id="15" name="TextBox 14"/>
-          <p:cNvSpPr txBox="1"/>
-          <p:nvPr/>
-        </p:nvSpPr>
-        <p:spPr>
-          <a:xfrm>
-            <a:off x="4991100" y="4815840"/>
-            <a:ext cx="1920240" cy="548640"/>
-          </a:xfrm>
-          <a:prstGeom prst="rect">
-            <a:avLst/>
-          </a:prstGeom>
-          <a:noFill/>
-        </p:spPr>
-        <p:txBody>
-          <a:bodyPr wrap="square" lIns="45720" rIns="45720" tIns="18288" bIns="18288" anchor="ctr">
-            <a:spAutoFit/>
-          </a:bodyPr>
-          <a:lstStyle/>
-          <a:p>
-            <a:pPr algn="l"/>
-            <a:r>
-              <a:rPr sz="3200" b="1" i="0">
-                <a:solidFill>
-                  <a:srgbClr val="9E1B32"/>
-                </a:solidFill>
-                <a:latin typeface="Century Schoolbook"/>
-              </a:rPr>
-              <a:t>Answer:</a:t>
             </a:r>
           </a:p>
         </p:txBody>
       </p:sp>
       <p:pic>
         <p:nvPicPr>
-          <p:cNvPr id="16" name="Picture 15" descr="c414c4c741c779c8.png"/>
+          <p:cNvPr id="15" name="Picture 14" descr="0c0f23d02279b177.png"/>
           <p:cNvPicPr>
             <a:picLocks noChangeAspect="1"/>
           </p:cNvPicPr>
@@ -7767,8 +7981,185 @@
         </p:blipFill>
         <p:spPr>
           <a:xfrm>
-            <a:off x="6911340" y="4663440"/>
-            <a:ext cx="259080" cy="853440"/>
+            <a:off x="4483120" y="3684236"/>
+            <a:ext cx="1356360" cy="661416"/>
+          </a:xfrm>
+          <a:prstGeom prst="rect">
+            <a:avLst/>
+          </a:prstGeom>
+        </p:spPr>
+      </p:pic>
+      <p:sp>
+        <p:nvSpPr>
+          <p:cNvPr id="16" name="TextBox 15"/>
+          <p:cNvSpPr txBox="1"/>
+          <p:nvPr/>
+        </p:nvSpPr>
+        <p:spPr>
+          <a:xfrm>
+            <a:off x="4428256" y="4575776"/>
+            <a:ext cx="1342179" cy="457200"/>
+          </a:xfrm>
+          <a:prstGeom prst="rect">
+            <a:avLst/>
+          </a:prstGeom>
+          <a:noFill/>
+        </p:spPr>
+        <p:txBody>
+          <a:bodyPr wrap="none" lIns="45720" rIns="45720" tIns="18288" bIns="18288" anchor="ctr">
+            <a:noAutofit/>
+          </a:bodyPr>
+          <a:lstStyle/>
+          <a:p>
+            <a:pPr algn="l"/>
+            <a:r>
+              <a:rPr sz="2750" b="0" i="0">
+                <a:solidFill>
+                  <a:srgbClr val="1A1A1A"/>
+                </a:solidFill>
+                <a:latin typeface="Lexend"/>
+              </a:rPr>
+              <a:t>When </a:t>
+            </a:r>
+          </a:p>
+        </p:txBody>
+      </p:sp>
+      <p:pic>
+        <p:nvPicPr>
+          <p:cNvPr id="17" name="Picture 16" descr="07b139cdbb0c92ad.png"/>
+          <p:cNvPicPr>
+            <a:picLocks noChangeAspect="1"/>
+          </p:cNvPicPr>
+          <p:nvPr/>
+        </p:nvPicPr>
+        <p:blipFill>
+          <a:blip r:embed="rId5"/>
+          <a:stretch>
+            <a:fillRect/>
+          </a:stretch>
+        </p:blipFill>
+        <p:spPr>
+          <a:xfrm>
+            <a:off x="5633275" y="4679408"/>
+            <a:ext cx="704088" cy="249935"/>
+          </a:xfrm>
+          <a:prstGeom prst="rect">
+            <a:avLst/>
+          </a:prstGeom>
+        </p:spPr>
+      </p:pic>
+      <p:sp>
+        <p:nvSpPr>
+          <p:cNvPr id="18" name="TextBox 17"/>
+          <p:cNvSpPr txBox="1"/>
+          <p:nvPr/>
+        </p:nvSpPr>
+        <p:spPr>
+          <a:xfrm>
+            <a:off x="6337363" y="4575776"/>
+            <a:ext cx="606468" cy="457200"/>
+          </a:xfrm>
+          <a:prstGeom prst="rect">
+            <a:avLst/>
+          </a:prstGeom>
+          <a:noFill/>
+        </p:spPr>
+        <p:txBody>
+          <a:bodyPr wrap="none" lIns="45720" rIns="45720" tIns="18288" bIns="18288" anchor="ctr">
+            <a:noAutofit/>
+          </a:bodyPr>
+          <a:lstStyle/>
+          <a:p>
+            <a:pPr algn="l"/>
+            <a:r>
+              <a:rPr sz="2750" b="0" i="0">
+                <a:solidFill>
+                  <a:srgbClr val="1A1A1A"/>
+                </a:solidFill>
+                <a:latin typeface="Lexend"/>
+              </a:rPr>
+              <a:t>:   </a:t>
+            </a:r>
+          </a:p>
+        </p:txBody>
+      </p:sp>
+      <p:pic>
+        <p:nvPicPr>
+          <p:cNvPr id="19" name="Picture 18" descr="317e2464069192f5.png"/>
+          <p:cNvPicPr>
+            <a:picLocks noChangeAspect="1"/>
+          </p:cNvPicPr>
+          <p:nvPr/>
+        </p:nvPicPr>
+        <p:blipFill>
+          <a:blip r:embed="rId6"/>
+          <a:stretch>
+            <a:fillRect/>
+          </a:stretch>
+        </p:blipFill>
+        <p:spPr>
+          <a:xfrm>
+            <a:off x="6806671" y="4473668"/>
+            <a:ext cx="926592" cy="661416"/>
+          </a:xfrm>
+          <a:prstGeom prst="rect">
+            <a:avLst/>
+          </a:prstGeom>
+        </p:spPr>
+      </p:pic>
+      <p:sp>
+        <p:nvSpPr>
+          <p:cNvPr id="20" name="TextBox 19"/>
+          <p:cNvSpPr txBox="1"/>
+          <p:nvPr/>
+        </p:nvSpPr>
+        <p:spPr>
+          <a:xfrm>
+            <a:off x="4968239" y="5413976"/>
+            <a:ext cx="1920240" cy="548640"/>
+          </a:xfrm>
+          <a:prstGeom prst="rect">
+            <a:avLst/>
+          </a:prstGeom>
+          <a:noFill/>
+        </p:spPr>
+        <p:txBody>
+          <a:bodyPr wrap="square" lIns="45720" rIns="45720" tIns="18288" bIns="18288" anchor="ctr">
+            <a:spAutoFit/>
+          </a:bodyPr>
+          <a:lstStyle/>
+          <a:p>
+            <a:pPr algn="l"/>
+            <a:r>
+              <a:rPr sz="3040" b="1" i="0">
+                <a:solidFill>
+                  <a:srgbClr val="9E1B32"/>
+                </a:solidFill>
+                <a:latin typeface="Lexend"/>
+              </a:rPr>
+              <a:t>Answer:</a:t>
+            </a:r>
+          </a:p>
+        </p:txBody>
+      </p:sp>
+      <p:pic>
+        <p:nvPicPr>
+          <p:cNvPr id="21" name="Picture 20" descr="7857f3e6801ae956.png"/>
+          <p:cNvPicPr>
+            <a:picLocks noChangeAspect="1"/>
+          </p:cNvPicPr>
+          <p:nvPr/>
+        </p:nvPicPr>
+        <p:blipFill>
+          <a:blip r:embed="rId7"/>
+          <a:stretch>
+            <a:fillRect/>
+          </a:stretch>
+        </p:blipFill>
+        <p:spPr>
+          <a:xfrm>
+            <a:off x="6888480" y="5272244"/>
+            <a:ext cx="304800" cy="832104"/>
           </a:xfrm>
           <a:prstGeom prst="rect">
             <a:avLst/>
@@ -7817,11 +8208,11 @@
           <a:p>
             <a:pPr algn="l"/>
             <a:r>
-              <a:rPr sz="3400" b="1" i="0">
+              <a:rPr sz="3229" b="1" i="0">
                 <a:solidFill>
                   <a:srgbClr val="1A1A1A"/>
                 </a:solidFill>
-                <a:latin typeface="Century Schoolbook"/>
+                <a:latin typeface="Lexend"/>
               </a:rPr>
               <a:t>Whiteboards   ·   Question 4 of 9</a:t>
             </a:r>
@@ -7957,11 +8348,11 @@
           <a:p>
             <a:pPr algn="l"/>
             <a:r>
-              <a:rPr sz="1100" b="0" i="1">
+              <a:rPr sz="1040" b="0" i="0">
                 <a:solidFill>
                   <a:srgbClr val="6B6B6B"/>
                 </a:solidFill>
-                <a:latin typeface="Century Schoolbook"/>
+                <a:latin typeface="Lexend"/>
               </a:rPr>
               <a:t>Grade 7 Accelerated · Unit 3 · Thread A · Day 2 — Negative Exponents with Variable Bases</a:t>
             </a:r>
@@ -7992,11 +8383,11 @@
           <a:p>
             <a:pPr algn="r"/>
             <a:r>
-              <a:rPr sz="1100" b="0" i="0">
+              <a:rPr sz="1040" b="0" i="0">
                 <a:solidFill>
                   <a:srgbClr val="6B6B6B"/>
                 </a:solidFill>
-                <a:latin typeface="Century Schoolbook"/>
+                <a:latin typeface="Lexend"/>
               </a:rPr>
               <a:t>21</a:t>
             </a:r>
@@ -8005,7 +8396,7 @@
       </p:sp>
       <p:pic>
         <p:nvPicPr>
-          <p:cNvPr id="8" name="Picture 7" descr="42962fa6a8bfce14.png"/>
+          <p:cNvPr id="8" name="Picture 7" descr="ad788033b92abbfb.png"/>
           <p:cNvPicPr>
             <a:picLocks noChangeAspect="1"/>
           </p:cNvPicPr>
@@ -8019,8 +8410,8 @@
         </p:blipFill>
         <p:spPr>
           <a:xfrm>
-            <a:off x="5404103" y="2194560"/>
-            <a:ext cx="1353312" cy="530352"/>
+            <a:off x="5414771" y="2194560"/>
+            <a:ext cx="1331976" cy="524256"/>
           </a:xfrm>
           <a:prstGeom prst="rect">
             <a:avLst/>
@@ -8051,11 +8442,11 @@
           <a:p>
             <a:pPr algn="ctr"/>
             <a:r>
-              <a:rPr sz="2600" b="1" i="0">
+              <a:rPr sz="2470" b="1" i="0">
                 <a:solidFill>
                   <a:srgbClr val="1A1A1A"/>
                 </a:solidFill>
-                <a:latin typeface="Century Schoolbook"/>
+                <a:latin typeface="Lexend"/>
               </a:rPr>
               <a:t>Answer it.</a:t>
             </a:r>
@@ -8104,11 +8495,11 @@
           <a:p>
             <a:pPr algn="l"/>
             <a:r>
-              <a:rPr sz="3400" b="1" i="0">
+              <a:rPr sz="3229" b="1" i="0">
                 <a:solidFill>
                   <a:srgbClr val="1A1A1A"/>
                 </a:solidFill>
-                <a:latin typeface="Century Schoolbook"/>
+                <a:latin typeface="Lexend"/>
               </a:rPr>
               <a:t>Whiteboards   ·   Question 4 of 9</a:t>
             </a:r>
@@ -8244,11 +8635,11 @@
           <a:p>
             <a:pPr algn="l"/>
             <a:r>
-              <a:rPr sz="1100" b="0" i="1">
+              <a:rPr sz="1040" b="0" i="0">
                 <a:solidFill>
                   <a:srgbClr val="6B6B6B"/>
                 </a:solidFill>
-                <a:latin typeface="Century Schoolbook"/>
+                <a:latin typeface="Lexend"/>
               </a:rPr>
               <a:t>Grade 7 Accelerated · Unit 3 · Thread A · Day 2 — Negative Exponents with Variable Bases</a:t>
             </a:r>
@@ -8279,11 +8670,11 @@
           <a:p>
             <a:pPr algn="r"/>
             <a:r>
-              <a:rPr sz="1100" b="0" i="0">
+              <a:rPr sz="1040" b="0" i="0">
                 <a:solidFill>
                   <a:srgbClr val="6B6B6B"/>
                 </a:solidFill>
-                <a:latin typeface="Century Schoolbook"/>
+                <a:latin typeface="Lexend"/>
               </a:rPr>
               <a:t>22</a:t>
             </a:r>
@@ -8292,7 +8683,7 @@
       </p:sp>
       <p:pic>
         <p:nvPicPr>
-          <p:cNvPr id="8" name="Picture 7" descr="c896e7a3b1e79bee.png"/>
+          <p:cNvPr id="8" name="Picture 7" descr="b8711b9cfc864f9c.png"/>
           <p:cNvPicPr>
             <a:picLocks noChangeAspect="1"/>
           </p:cNvPicPr>
@@ -8306,52 +8697,17 @@
         </p:blipFill>
         <p:spPr>
           <a:xfrm>
-            <a:off x="5402580" y="2103120"/>
-            <a:ext cx="1356360" cy="524256"/>
+            <a:off x="5414771" y="2103120"/>
+            <a:ext cx="1331976" cy="524256"/>
           </a:xfrm>
           <a:prstGeom prst="rect">
             <a:avLst/>
           </a:prstGeom>
         </p:spPr>
       </p:pic>
-      <p:sp>
-        <p:nvSpPr>
-          <p:cNvPr id="9" name="TextBox 8"/>
-          <p:cNvSpPr txBox="1"/>
-          <p:nvPr/>
-        </p:nvSpPr>
-        <p:spPr>
-          <a:xfrm>
-            <a:off x="4669536" y="4904232"/>
-            <a:ext cx="1920240" cy="548640"/>
-          </a:xfrm>
-          <a:prstGeom prst="rect">
-            <a:avLst/>
-          </a:prstGeom>
-          <a:noFill/>
-        </p:spPr>
-        <p:txBody>
-          <a:bodyPr wrap="square" lIns="45720" rIns="45720" tIns="18288" bIns="18288" anchor="ctr">
-            <a:spAutoFit/>
-          </a:bodyPr>
-          <a:lstStyle/>
-          <a:p>
-            <a:pPr algn="l"/>
-            <a:r>
-              <a:rPr sz="3200" b="1" i="0">
-                <a:solidFill>
-                  <a:srgbClr val="9E1B32"/>
-                </a:solidFill>
-                <a:latin typeface="Century Schoolbook"/>
-              </a:rPr>
-              <a:t>Answer:</a:t>
-            </a:r>
-          </a:p>
-        </p:txBody>
-      </p:sp>
       <p:pic>
         <p:nvPicPr>
-          <p:cNvPr id="10" name="Picture 9" descr="f532a74f60c6ce26.png"/>
+          <p:cNvPr id="9" name="Picture 8" descr="8a0e20154d3860c8.png"/>
           <p:cNvPicPr>
             <a:picLocks noChangeAspect="1"/>
           </p:cNvPicPr>
@@ -8365,8 +8721,67 @@
         </p:blipFill>
         <p:spPr>
           <a:xfrm>
-            <a:off x="6589776" y="4663440"/>
-            <a:ext cx="902208" cy="1030224"/>
+            <a:off x="4459223" y="2929128"/>
+            <a:ext cx="3343656" cy="740664"/>
+          </a:xfrm>
+          <a:prstGeom prst="rect">
+            <a:avLst/>
+          </a:prstGeom>
+        </p:spPr>
+      </p:pic>
+      <p:sp>
+        <p:nvSpPr>
+          <p:cNvPr id="10" name="TextBox 9"/>
+          <p:cNvSpPr txBox="1"/>
+          <p:nvPr/>
+        </p:nvSpPr>
+        <p:spPr>
+          <a:xfrm>
+            <a:off x="4632960" y="4898136"/>
+            <a:ext cx="1920240" cy="548640"/>
+          </a:xfrm>
+          <a:prstGeom prst="rect">
+            <a:avLst/>
+          </a:prstGeom>
+          <a:noFill/>
+        </p:spPr>
+        <p:txBody>
+          <a:bodyPr wrap="square" lIns="45720" rIns="45720" tIns="18288" bIns="18288" anchor="ctr">
+            <a:spAutoFit/>
+          </a:bodyPr>
+          <a:lstStyle/>
+          <a:p>
+            <a:pPr algn="l"/>
+            <a:r>
+              <a:rPr sz="3040" b="1" i="0">
+                <a:solidFill>
+                  <a:srgbClr val="9E1B32"/>
+                </a:solidFill>
+                <a:latin typeface="Lexend"/>
+              </a:rPr>
+              <a:t>Answer:</a:t>
+            </a:r>
+          </a:p>
+        </p:txBody>
+      </p:sp>
+      <p:pic>
+        <p:nvPicPr>
+          <p:cNvPr id="11" name="Picture 10" descr="288f02ec57e35699.png"/>
+          <p:cNvPicPr>
+            <a:picLocks noChangeAspect="1"/>
+          </p:cNvPicPr>
+          <p:nvPr/>
+        </p:nvPicPr>
+        <p:blipFill>
+          <a:blip r:embed="rId4"/>
+          <a:stretch>
+            <a:fillRect/>
+          </a:stretch>
+        </p:blipFill>
+        <p:spPr>
+          <a:xfrm>
+            <a:off x="6553199" y="4663440"/>
+            <a:ext cx="975360" cy="1018032"/>
           </a:xfrm>
           <a:prstGeom prst="rect">
             <a:avLst/>
@@ -8415,11 +8830,11 @@
           <a:p>
             <a:pPr algn="l"/>
             <a:r>
-              <a:rPr sz="3400" b="1" i="0">
+              <a:rPr sz="3229" b="1" i="0">
                 <a:solidFill>
                   <a:srgbClr val="1A1A1A"/>
                 </a:solidFill>
-                <a:latin typeface="Century Schoolbook"/>
+                <a:latin typeface="Lexend"/>
               </a:rPr>
               <a:t>Whiteboards   ·   Question 5 of 9</a:t>
             </a:r>
@@ -8555,11 +8970,11 @@
           <a:p>
             <a:pPr algn="l"/>
             <a:r>
-              <a:rPr sz="1100" b="0" i="1">
+              <a:rPr sz="1040" b="0" i="0">
                 <a:solidFill>
                   <a:srgbClr val="6B6B6B"/>
                 </a:solidFill>
-                <a:latin typeface="Century Schoolbook"/>
+                <a:latin typeface="Lexend"/>
               </a:rPr>
               <a:t>Grade 7 Accelerated · Unit 3 · Thread A · Day 2 — Negative Exponents with Variable Bases</a:t>
             </a:r>
@@ -8590,11 +9005,11 @@
           <a:p>
             <a:pPr algn="r"/>
             <a:r>
-              <a:rPr sz="1100" b="0" i="0">
+              <a:rPr sz="1040" b="0" i="0">
                 <a:solidFill>
                   <a:srgbClr val="6B6B6B"/>
                 </a:solidFill>
-                <a:latin typeface="Century Schoolbook"/>
+                <a:latin typeface="Lexend"/>
               </a:rPr>
               <a:t>23</a:t>
             </a:r>
@@ -8603,7 +9018,7 @@
       </p:sp>
       <p:pic>
         <p:nvPicPr>
-          <p:cNvPr id="8" name="Picture 7" descr="950663683f0a3af4.png"/>
+          <p:cNvPr id="8" name="Picture 7" descr="76e7ce04dbed466e.png"/>
           <p:cNvPicPr>
             <a:picLocks noChangeAspect="1"/>
           </p:cNvPicPr>
@@ -8617,8 +9032,8 @@
         </p:blipFill>
         <p:spPr>
           <a:xfrm>
-            <a:off x="5364480" y="2194560"/>
-            <a:ext cx="1432560" cy="429768"/>
+            <a:off x="5347715" y="2194560"/>
+            <a:ext cx="1466088" cy="420624"/>
           </a:xfrm>
           <a:prstGeom prst="rect">
             <a:avLst/>
@@ -8633,7 +9048,7 @@
         </p:nvSpPr>
         <p:spPr>
           <a:xfrm>
-            <a:off x="777240" y="2852928"/>
+            <a:off x="777240" y="2843784"/>
             <a:ext cx="10607040" cy="465151"/>
           </a:xfrm>
           <a:prstGeom prst="rect">
@@ -8649,11 +9064,11 @@
           <a:p>
             <a:pPr algn="ctr"/>
             <a:r>
-              <a:rPr sz="2600" b="0" i="0">
+              <a:rPr sz="2470" b="0" i="0">
                 <a:solidFill>
                   <a:srgbClr val="1A1A1A"/>
                 </a:solidFill>
-                <a:latin typeface="Century Schoolbook"/>
+                <a:latin typeface="Lexend"/>
               </a:rPr>
               <a:t>Which expression is equivalent?</a:t>
             </a:r>
@@ -8668,7 +9083,7 @@
         </p:nvSpPr>
         <p:spPr>
           <a:xfrm>
-            <a:off x="1874519" y="3519247"/>
+            <a:off x="1874519" y="3510103"/>
             <a:ext cx="4572000" cy="548640"/>
           </a:xfrm>
           <a:prstGeom prst="rect">
@@ -8684,29 +9099,29 @@
           <a:p>
             <a:pPr algn="l"/>
             <a:r>
-              <a:rPr sz="2400" b="1" i="0">
+              <a:rPr sz="2280" b="1" i="0">
                 <a:solidFill>
                   <a:srgbClr val="1A1A1A"/>
                 </a:solidFill>
-                <a:latin typeface="Century Schoolbook"/>
+                <a:latin typeface="Lexend"/>
               </a:rPr>
               <a:t>A.   </a:t>
             </a:r>
             <a:r>
-              <a:rPr sz="2400" b="0" i="0">
+              <a:rPr sz="2280" b="0" i="0">
                 <a:solidFill>
                   <a:srgbClr val="1A1A1A"/>
                 </a:solidFill>
-                <a:latin typeface="Century Schoolbook"/>
+                <a:latin typeface="Lexend"/>
               </a:rPr>
               <a:t>−x</a:t>
             </a:r>
             <a:r>
-              <a:rPr sz="2400" b="0" i="0" baseline="30000">
+              <a:rPr sz="2280" b="0" i="0" baseline="30000">
                 <a:solidFill>
                   <a:srgbClr val="1A1A1A"/>
                 </a:solidFill>
-                <a:latin typeface="Century Schoolbook"/>
+                <a:latin typeface="Lexend"/>
               </a:rPr>
               <a:t>2</a:t>
             </a:r>
@@ -8721,7 +9136,7 @@
         </p:nvSpPr>
         <p:spPr>
           <a:xfrm>
-            <a:off x="6629400" y="3519247"/>
+            <a:off x="6629400" y="3510103"/>
             <a:ext cx="4572000" cy="548640"/>
           </a:xfrm>
           <a:prstGeom prst="rect">
@@ -8737,29 +9152,29 @@
           <a:p>
             <a:pPr algn="l"/>
             <a:r>
-              <a:rPr sz="2400" b="1" i="0">
+              <a:rPr sz="2280" b="1" i="0">
                 <a:solidFill>
                   <a:srgbClr val="1A1A1A"/>
                 </a:solidFill>
-                <a:latin typeface="Century Schoolbook"/>
+                <a:latin typeface="Lexend"/>
               </a:rPr>
               <a:t>B.   </a:t>
             </a:r>
             <a:r>
-              <a:rPr sz="2400" b="0" i="0">
+              <a:rPr sz="2280" b="0" i="0">
                 <a:solidFill>
                   <a:srgbClr val="1A1A1A"/>
                 </a:solidFill>
-                <a:latin typeface="Century Schoolbook"/>
+                <a:latin typeface="Lexend"/>
               </a:rPr>
               <a:t>1/x</a:t>
             </a:r>
             <a:r>
-              <a:rPr sz="2400" b="0" i="0" baseline="30000">
+              <a:rPr sz="2280" b="0" i="0" baseline="30000">
                 <a:solidFill>
                   <a:srgbClr val="1A1A1A"/>
                 </a:solidFill>
-                <a:latin typeface="Century Schoolbook"/>
+                <a:latin typeface="Lexend"/>
               </a:rPr>
               <a:t>24</a:t>
             </a:r>
@@ -8774,7 +9189,7 @@
         </p:nvSpPr>
         <p:spPr>
           <a:xfrm>
-            <a:off x="1874519" y="4205047"/>
+            <a:off x="1874519" y="4195903"/>
             <a:ext cx="4572000" cy="548640"/>
           </a:xfrm>
           <a:prstGeom prst="rect">
@@ -8790,29 +9205,29 @@
           <a:p>
             <a:pPr algn="l"/>
             <a:r>
-              <a:rPr sz="2400" b="1" i="0">
+              <a:rPr sz="2280" b="1" i="0">
                 <a:solidFill>
                   <a:srgbClr val="1A1A1A"/>
                 </a:solidFill>
-                <a:latin typeface="Century Schoolbook"/>
+                <a:latin typeface="Lexend"/>
               </a:rPr>
               <a:t>C.   </a:t>
             </a:r>
             <a:r>
-              <a:rPr sz="2400" b="0" i="0">
+              <a:rPr sz="2280" b="0" i="0">
                 <a:solidFill>
                   <a:srgbClr val="1A1A1A"/>
                 </a:solidFill>
-                <a:latin typeface="Century Schoolbook"/>
+                <a:latin typeface="Lexend"/>
               </a:rPr>
               <a:t>1/x</a:t>
             </a:r>
             <a:r>
-              <a:rPr sz="2400" b="0" i="0" baseline="30000">
+              <a:rPr sz="2280" b="0" i="0" baseline="30000">
                 <a:solidFill>
                   <a:srgbClr val="1A1A1A"/>
                 </a:solidFill>
-                <a:latin typeface="Century Schoolbook"/>
+                <a:latin typeface="Lexend"/>
               </a:rPr>
               <a:t>2</a:t>
             </a:r>
@@ -8827,7 +9242,7 @@
         </p:nvSpPr>
         <p:spPr>
           <a:xfrm>
-            <a:off x="6629400" y="4205047"/>
+            <a:off x="6629400" y="4195903"/>
             <a:ext cx="4572000" cy="548640"/>
           </a:xfrm>
           <a:prstGeom prst="rect">
@@ -8843,29 +9258,29 @@
           <a:p>
             <a:pPr algn="l"/>
             <a:r>
-              <a:rPr sz="2400" b="1" i="0">
+              <a:rPr sz="2280" b="1" i="0">
                 <a:solidFill>
                   <a:srgbClr val="1A1A1A"/>
                 </a:solidFill>
-                <a:latin typeface="Century Schoolbook"/>
+                <a:latin typeface="Lexend"/>
               </a:rPr>
               <a:t>D.   </a:t>
             </a:r>
             <a:r>
-              <a:rPr sz="2400" b="0" i="0">
+              <a:rPr sz="2280" b="0" i="0">
                 <a:solidFill>
                   <a:srgbClr val="1A1A1A"/>
                 </a:solidFill>
-                <a:latin typeface="Century Schoolbook"/>
+                <a:latin typeface="Lexend"/>
               </a:rPr>
               <a:t>x</a:t>
             </a:r>
             <a:r>
-              <a:rPr sz="2400" b="0" i="0" baseline="30000">
+              <a:rPr sz="2280" b="0" i="0" baseline="30000">
                 <a:solidFill>
                   <a:srgbClr val="1A1A1A"/>
                 </a:solidFill>
-                <a:latin typeface="Century Schoolbook"/>
+                <a:latin typeface="Lexend"/>
               </a:rPr>
               <a:t>10</a:t>
             </a:r>
@@ -8880,7 +9295,7 @@
         </p:nvSpPr>
         <p:spPr>
           <a:xfrm>
-            <a:off x="777240" y="5210887"/>
+            <a:off x="777240" y="5201743"/>
             <a:ext cx="10607040" cy="457200"/>
           </a:xfrm>
           <a:prstGeom prst="rect">
@@ -8896,11 +9311,11 @@
           <a:p>
             <a:pPr algn="ctr"/>
             <a:r>
-              <a:rPr sz="2600" b="1" i="0">
+              <a:rPr sz="2470" b="1" i="0">
                 <a:solidFill>
                   <a:srgbClr val="1A1A1A"/>
                 </a:solidFill>
-                <a:latin typeface="Century Schoolbook"/>
+                <a:latin typeface="Lexend"/>
               </a:rPr>
               <a:t>Answer it.</a:t>
             </a:r>
@@ -8949,11 +9364,11 @@
           <a:p>
             <a:pPr algn="l"/>
             <a:r>
-              <a:rPr sz="3400" b="1" i="0">
+              <a:rPr sz="3229" b="1" i="0">
                 <a:solidFill>
                   <a:srgbClr val="1A1A1A"/>
                 </a:solidFill>
-                <a:latin typeface="Century Schoolbook"/>
+                <a:latin typeface="Lexend"/>
               </a:rPr>
               <a:t>Whiteboards   ·   Question 5 of 9</a:t>
             </a:r>
@@ -9089,11 +9504,11 @@
           <a:p>
             <a:pPr algn="l"/>
             <a:r>
-              <a:rPr sz="1100" b="0" i="1">
+              <a:rPr sz="1040" b="0" i="0">
                 <a:solidFill>
                   <a:srgbClr val="6B6B6B"/>
                 </a:solidFill>
-                <a:latin typeface="Century Schoolbook"/>
+                <a:latin typeface="Lexend"/>
               </a:rPr>
               <a:t>Grade 7 Accelerated · Unit 3 · Thread A · Day 2 — Negative Exponents with Variable Bases</a:t>
             </a:r>
@@ -9124,11 +9539,11 @@
           <a:p>
             <a:pPr algn="r"/>
             <a:r>
-              <a:rPr sz="1100" b="0" i="0">
+              <a:rPr sz="1040" b="0" i="0">
                 <a:solidFill>
                   <a:srgbClr val="6B6B6B"/>
                 </a:solidFill>
-                <a:latin typeface="Century Schoolbook"/>
+                <a:latin typeface="Lexend"/>
               </a:rPr>
               <a:t>24</a:t>
             </a:r>
@@ -9137,7 +9552,7 @@
       </p:sp>
       <p:pic>
         <p:nvPicPr>
-          <p:cNvPr id="8" name="Picture 7" descr="1b7d9d459c285456.png"/>
+          <p:cNvPr id="8" name="Picture 7" descr="57c3b1d76dc5c999.png"/>
           <p:cNvPicPr>
             <a:picLocks noChangeAspect="1"/>
           </p:cNvPicPr>
@@ -9151,8 +9566,8 @@
         </p:blipFill>
         <p:spPr>
           <a:xfrm>
-            <a:off x="5366004" y="2103120"/>
-            <a:ext cx="1429512" cy="429768"/>
+            <a:off x="5346191" y="2103120"/>
+            <a:ext cx="1469136" cy="420624"/>
           </a:xfrm>
           <a:prstGeom prst="rect">
             <a:avLst/>
@@ -9167,7 +9582,7 @@
         </p:nvSpPr>
         <p:spPr>
           <a:xfrm>
-            <a:off x="777240" y="2761487"/>
+            <a:off x="777240" y="2752344"/>
             <a:ext cx="10607040" cy="465151"/>
           </a:xfrm>
           <a:prstGeom prst="rect">
@@ -9183,27 +9598,75 @@
           <a:p>
             <a:pPr algn="ctr"/>
             <a:r>
-              <a:rPr sz="2600" b="0" i="0">
+              <a:rPr sz="2470" b="0" i="0">
                 <a:solidFill>
                   <a:srgbClr val="1A1A1A"/>
                 </a:solidFill>
-                <a:latin typeface="Century Schoolbook"/>
+                <a:latin typeface="Lexend"/>
               </a:rPr>
               <a:t>Which expression is equivalent?</a:t>
             </a:r>
           </a:p>
         </p:txBody>
       </p:sp>
-      <p:sp>
-        <p:nvSpPr>
-          <p:cNvPr id="10" name="TextBox 9"/>
-          <p:cNvSpPr txBox="1"/>
-          <p:nvPr/>
-        </p:nvSpPr>
-        <p:spPr>
-          <a:xfrm>
-            <a:off x="1874519" y="3427807"/>
-            <a:ext cx="4572000" cy="548640"/>
+      <p:pic>
+        <p:nvPicPr>
+          <p:cNvPr id="10" name="Picture 9" descr="3dfe241d36c83f1a.png"/>
+          <p:cNvPicPr>
+            <a:picLocks noChangeAspect="1"/>
+          </p:cNvPicPr>
+          <p:nvPr/>
+        </p:nvPicPr>
+        <p:blipFill>
+          <a:blip r:embed="rId3"/>
+          <a:stretch>
+            <a:fillRect/>
+          </a:stretch>
+        </p:blipFill>
+        <p:spPr>
+          <a:xfrm>
+            <a:off x="4494275" y="3453715"/>
+            <a:ext cx="3279648" cy="304800"/>
+          </a:xfrm>
+          <a:prstGeom prst="rect">
+            <a:avLst/>
+          </a:prstGeom>
+        </p:spPr>
+      </p:pic>
+      <p:pic>
+        <p:nvPicPr>
+          <p:cNvPr id="11" name="Picture 10" descr="b1ab2b2f40b1e364.png"/>
+          <p:cNvPicPr>
+            <a:picLocks noChangeAspect="1"/>
+          </p:cNvPicPr>
+          <p:nvPr/>
+        </p:nvPicPr>
+        <p:blipFill>
+          <a:blip r:embed="rId4"/>
+          <a:stretch>
+            <a:fillRect/>
+          </a:stretch>
+        </p:blipFill>
+        <p:spPr>
+          <a:xfrm>
+            <a:off x="4494275" y="3939871"/>
+            <a:ext cx="1173480" cy="661416"/>
+          </a:xfrm>
+          <a:prstGeom prst="rect">
+            <a:avLst/>
+          </a:prstGeom>
+        </p:spPr>
+      </p:pic>
+      <p:sp>
+        <p:nvSpPr>
+          <p:cNvPr id="12" name="TextBox 11"/>
+          <p:cNvSpPr txBox="1"/>
+          <p:nvPr/>
+        </p:nvSpPr>
+        <p:spPr>
+          <a:xfrm>
+            <a:off x="777240" y="4738447"/>
+            <a:ext cx="10607040" cy="548640"/>
           </a:xfrm>
           <a:prstGeom prst="rect">
             <a:avLst/>
@@ -9216,234 +9679,22 @@
           </a:bodyPr>
           <a:lstStyle/>
           <a:p>
-            <a:pPr algn="l"/>
-            <a:r>
-              <a:rPr sz="2400" b="1" i="0">
-                <a:solidFill>
-                  <a:srgbClr val="1A1A1A"/>
-                </a:solidFill>
-                <a:latin typeface="Century Schoolbook"/>
-              </a:rPr>
-              <a:t>A.   </a:t>
-            </a:r>
-            <a:r>
-              <a:rPr sz="2400" b="0" i="0">
-                <a:solidFill>
-                  <a:srgbClr val="1A1A1A"/>
-                </a:solidFill>
-                <a:latin typeface="Century Schoolbook"/>
-              </a:rPr>
-              <a:t>−x</a:t>
-            </a:r>
-            <a:r>
-              <a:rPr sz="2400" b="0" i="0" baseline="30000">
-                <a:solidFill>
-                  <a:srgbClr val="1A1A1A"/>
-                </a:solidFill>
-                <a:latin typeface="Century Schoolbook"/>
-              </a:rPr>
-              <a:t>2</a:t>
-            </a:r>
-          </a:p>
-        </p:txBody>
-      </p:sp>
-      <p:sp>
-        <p:nvSpPr>
-          <p:cNvPr id="11" name="TextBox 10"/>
-          <p:cNvSpPr txBox="1"/>
-          <p:nvPr/>
-        </p:nvSpPr>
-        <p:spPr>
-          <a:xfrm>
-            <a:off x="6629400" y="3427807"/>
-            <a:ext cx="4572000" cy="548640"/>
-          </a:xfrm>
-          <a:prstGeom prst="rect">
-            <a:avLst/>
-          </a:prstGeom>
-          <a:noFill/>
-        </p:spPr>
-        <p:txBody>
-          <a:bodyPr wrap="square" lIns="45720" rIns="45720" tIns="18288" bIns="18288" anchor="t">
-            <a:spAutoFit/>
-          </a:bodyPr>
-          <a:lstStyle/>
-          <a:p>
-            <a:pPr algn="l"/>
-            <a:r>
-              <a:rPr sz="2400" b="1" i="0">
-                <a:solidFill>
-                  <a:srgbClr val="1A1A1A"/>
-                </a:solidFill>
-                <a:latin typeface="Century Schoolbook"/>
-              </a:rPr>
-              <a:t>B.   </a:t>
-            </a:r>
-            <a:r>
-              <a:rPr sz="2400" b="0" i="0">
-                <a:solidFill>
-                  <a:srgbClr val="1A1A1A"/>
-                </a:solidFill>
-                <a:latin typeface="Century Schoolbook"/>
-              </a:rPr>
-              <a:t>1/x</a:t>
-            </a:r>
-            <a:r>
-              <a:rPr sz="2400" b="0" i="0" baseline="30000">
-                <a:solidFill>
-                  <a:srgbClr val="1A1A1A"/>
-                </a:solidFill>
-                <a:latin typeface="Century Schoolbook"/>
-              </a:rPr>
-              <a:t>24</a:t>
-            </a:r>
-          </a:p>
-        </p:txBody>
-      </p:sp>
-      <p:sp>
-        <p:nvSpPr>
-          <p:cNvPr id="12" name="TextBox 11"/>
-          <p:cNvSpPr txBox="1"/>
-          <p:nvPr/>
-        </p:nvSpPr>
-        <p:spPr>
-          <a:xfrm>
-            <a:off x="1874519" y="4113607"/>
-            <a:ext cx="4572000" cy="548640"/>
-          </a:xfrm>
-          <a:prstGeom prst="rect">
-            <a:avLst/>
-          </a:prstGeom>
-          <a:noFill/>
-        </p:spPr>
-        <p:txBody>
-          <a:bodyPr wrap="square" lIns="45720" rIns="45720" tIns="18288" bIns="18288" anchor="t">
-            <a:spAutoFit/>
-          </a:bodyPr>
-          <a:lstStyle/>
-          <a:p>
-            <a:pPr algn="l"/>
-            <a:r>
-              <a:rPr sz="2400" b="1" i="0">
+            <a:pPr algn="ctr"/>
+            <a:r>
+              <a:rPr sz="3040" b="1" i="0">
                 <a:solidFill>
                   <a:srgbClr val="9E1B32"/>
                 </a:solidFill>
-                <a:latin typeface="Century Schoolbook"/>
-              </a:rPr>
-              <a:t>C.   </a:t>
-            </a:r>
-            <a:r>
-              <a:rPr sz="2400" b="1" i="0">
+                <a:latin typeface="Lexend"/>
+              </a:rPr>
+              <a:t>Answer:   C — 1/x</a:t>
+            </a:r>
+            <a:r>
+              <a:rPr sz="3040" b="1" i="0" baseline="30000">
                 <a:solidFill>
                   <a:srgbClr val="9E1B32"/>
                 </a:solidFill>
-                <a:latin typeface="Century Schoolbook"/>
-              </a:rPr>
-              <a:t>1/x</a:t>
-            </a:r>
-            <a:r>
-              <a:rPr sz="2400" b="1" i="0" baseline="30000">
-                <a:solidFill>
-                  <a:srgbClr val="9E1B32"/>
-                </a:solidFill>
-                <a:latin typeface="Century Schoolbook"/>
-              </a:rPr>
-              <a:t>2</a:t>
-            </a:r>
-          </a:p>
-        </p:txBody>
-      </p:sp>
-      <p:sp>
-        <p:nvSpPr>
-          <p:cNvPr id="13" name="TextBox 12"/>
-          <p:cNvSpPr txBox="1"/>
-          <p:nvPr/>
-        </p:nvSpPr>
-        <p:spPr>
-          <a:xfrm>
-            <a:off x="6629400" y="4113607"/>
-            <a:ext cx="4572000" cy="548640"/>
-          </a:xfrm>
-          <a:prstGeom prst="rect">
-            <a:avLst/>
-          </a:prstGeom>
-          <a:noFill/>
-        </p:spPr>
-        <p:txBody>
-          <a:bodyPr wrap="square" lIns="45720" rIns="45720" tIns="18288" bIns="18288" anchor="t">
-            <a:spAutoFit/>
-          </a:bodyPr>
-          <a:lstStyle/>
-          <a:p>
-            <a:pPr algn="l"/>
-            <a:r>
-              <a:rPr sz="2400" b="1" i="0">
-                <a:solidFill>
-                  <a:srgbClr val="1A1A1A"/>
-                </a:solidFill>
-                <a:latin typeface="Century Schoolbook"/>
-              </a:rPr>
-              <a:t>D.   </a:t>
-            </a:r>
-            <a:r>
-              <a:rPr sz="2400" b="0" i="0">
-                <a:solidFill>
-                  <a:srgbClr val="1A1A1A"/>
-                </a:solidFill>
-                <a:latin typeface="Century Schoolbook"/>
-              </a:rPr>
-              <a:t>x</a:t>
-            </a:r>
-            <a:r>
-              <a:rPr sz="2400" b="0" i="0" baseline="30000">
-                <a:solidFill>
-                  <a:srgbClr val="1A1A1A"/>
-                </a:solidFill>
-                <a:latin typeface="Century Schoolbook"/>
-              </a:rPr>
-              <a:t>10</a:t>
-            </a:r>
-          </a:p>
-        </p:txBody>
-      </p:sp>
-      <p:sp>
-        <p:nvSpPr>
-          <p:cNvPr id="14" name="TextBox 13"/>
-          <p:cNvSpPr txBox="1"/>
-          <p:nvPr/>
-        </p:nvSpPr>
-        <p:spPr>
-          <a:xfrm>
-            <a:off x="777240" y="5119447"/>
-            <a:ext cx="10607040" cy="548640"/>
-          </a:xfrm>
-          <a:prstGeom prst="rect">
-            <a:avLst/>
-          </a:prstGeom>
-          <a:noFill/>
-        </p:spPr>
-        <p:txBody>
-          <a:bodyPr wrap="square" lIns="45720" rIns="45720" tIns="18288" bIns="18288" anchor="t">
-            <a:spAutoFit/>
-          </a:bodyPr>
-          <a:lstStyle/>
-          <a:p>
-            <a:pPr algn="ctr"/>
-            <a:r>
-              <a:rPr sz="3200" b="1" i="0">
-                <a:solidFill>
-                  <a:srgbClr val="9E1B32"/>
-                </a:solidFill>
-                <a:latin typeface="Century Schoolbook"/>
-              </a:rPr>
-              <a:t>Answer:   C — 1/x</a:t>
-            </a:r>
-            <a:r>
-              <a:rPr sz="3200" b="1" i="0" baseline="30000">
-                <a:solidFill>
-                  <a:srgbClr val="9E1B32"/>
-                </a:solidFill>
-                <a:latin typeface="Century Schoolbook"/>
+                <a:latin typeface="Lexend"/>
               </a:rPr>
               <a:t>2</a:t>
             </a:r>
@@ -9492,11 +9743,11 @@
           <a:p>
             <a:pPr algn="l"/>
             <a:r>
-              <a:rPr sz="3400" b="1" i="0">
+              <a:rPr sz="3229" b="1" i="0">
                 <a:solidFill>
                   <a:srgbClr val="1A1A1A"/>
                 </a:solidFill>
-                <a:latin typeface="Century Schoolbook"/>
+                <a:latin typeface="Lexend"/>
               </a:rPr>
               <a:t>Whiteboards   ·   Question 6 of 9</a:t>
             </a:r>
@@ -9632,11 +9883,11 @@
           <a:p>
             <a:pPr algn="l"/>
             <a:r>
-              <a:rPr sz="1100" b="0" i="1">
+              <a:rPr sz="1040" b="0" i="0">
                 <a:solidFill>
                   <a:srgbClr val="6B6B6B"/>
                 </a:solidFill>
-                <a:latin typeface="Century Schoolbook"/>
+                <a:latin typeface="Lexend"/>
               </a:rPr>
               <a:t>Grade 7 Accelerated · Unit 3 · Thread A · Day 2 — Negative Exponents with Variable Bases</a:t>
             </a:r>
@@ -9667,11 +9918,11 @@
           <a:p>
             <a:pPr algn="r"/>
             <a:r>
-              <a:rPr sz="1100" b="0" i="0">
+              <a:rPr sz="1040" b="0" i="0">
                 <a:solidFill>
                   <a:srgbClr val="6B6B6B"/>
                 </a:solidFill>
-                <a:latin typeface="Century Schoolbook"/>
+                <a:latin typeface="Lexend"/>
               </a:rPr>
               <a:t>25</a:t>
             </a:r>
@@ -9680,7 +9931,7 @@
       </p:sp>
       <p:pic>
         <p:nvPicPr>
-          <p:cNvPr id="8" name="Picture 7" descr="cd9c5622a19be95d.png"/>
+          <p:cNvPr id="8" name="Picture 7" descr="5ddb63c42875a2b4.png"/>
           <p:cNvPicPr>
             <a:picLocks noChangeAspect="1"/>
           </p:cNvPicPr>
@@ -9694,8 +9945,8 @@
         </p:blipFill>
         <p:spPr>
           <a:xfrm>
-            <a:off x="5358383" y="2194560"/>
-            <a:ext cx="1444752" cy="518160"/>
+            <a:off x="5350764" y="2194560"/>
+            <a:ext cx="1459992" cy="509016"/>
           </a:xfrm>
           <a:prstGeom prst="rect">
             <a:avLst/>
@@ -9710,7 +9961,7 @@
         </p:nvSpPr>
         <p:spPr>
           <a:xfrm>
-            <a:off x="777240" y="2941320"/>
+            <a:off x="777240" y="2932176"/>
             <a:ext cx="10607040" cy="465151"/>
           </a:xfrm>
           <a:prstGeom prst="rect">
@@ -9726,11 +9977,11 @@
           <a:p>
             <a:pPr algn="ctr"/>
             <a:r>
-              <a:rPr sz="2600" b="0" i="0">
+              <a:rPr sz="2470" b="0" i="0">
                 <a:solidFill>
                   <a:srgbClr val="1A1A1A"/>
                 </a:solidFill>
-                <a:latin typeface="Century Schoolbook"/>
+                <a:latin typeface="Lexend"/>
               </a:rPr>
               <a:t>Which expression is equivalent?</a:t>
             </a:r>
@@ -9745,7 +9996,7 @@
         </p:nvSpPr>
         <p:spPr>
           <a:xfrm>
-            <a:off x="1874519" y="3607639"/>
+            <a:off x="1874519" y="3598495"/>
             <a:ext cx="4572000" cy="548640"/>
           </a:xfrm>
           <a:prstGeom prst="rect">
@@ -9761,20 +10012,20 @@
           <a:p>
             <a:pPr algn="l"/>
             <a:r>
-              <a:rPr sz="2400" b="1" i="0">
+              <a:rPr sz="2280" b="1" i="0">
                 <a:solidFill>
                   <a:srgbClr val="1A1A1A"/>
                 </a:solidFill>
-                <a:latin typeface="Century Schoolbook"/>
+                <a:latin typeface="Lexend"/>
               </a:rPr>
               <a:t>A.   </a:t>
             </a:r>
             <a:r>
-              <a:rPr sz="2400" b="0" i="0">
+              <a:rPr sz="2280" b="0" i="0">
                 <a:solidFill>
                   <a:srgbClr val="1A1A1A"/>
                 </a:solidFill>
-                <a:latin typeface="Century Schoolbook"/>
+                <a:latin typeface="Lexend"/>
               </a:rPr>
               <a:t>4/x</a:t>
             </a:r>
@@ -9789,7 +10040,7 @@
         </p:nvSpPr>
         <p:spPr>
           <a:xfrm>
-            <a:off x="6629400" y="3607639"/>
+            <a:off x="6629400" y="3598495"/>
             <a:ext cx="4572000" cy="548640"/>
           </a:xfrm>
           <a:prstGeom prst="rect">
@@ -9805,38 +10056,38 @@
           <a:p>
             <a:pPr algn="l"/>
             <a:r>
-              <a:rPr sz="2400" b="1" i="0">
+              <a:rPr sz="2280" b="1" i="0">
                 <a:solidFill>
                   <a:srgbClr val="1A1A1A"/>
                 </a:solidFill>
-                <a:latin typeface="Century Schoolbook"/>
+                <a:latin typeface="Lexend"/>
               </a:rPr>
               <a:t>B.   </a:t>
             </a:r>
             <a:r>
-              <a:rPr sz="2400" b="0" i="0">
+              <a:rPr sz="2280" b="0" i="0">
                 <a:solidFill>
                   <a:srgbClr val="1A1A1A"/>
                 </a:solidFill>
-                <a:latin typeface="Century Schoolbook"/>
+                <a:latin typeface="Lexend"/>
               </a:rPr>
               <a:t>1/(4x</a:t>
             </a:r>
             <a:r>
-              <a:rPr sz="2400" b="0" i="0" baseline="30000">
+              <a:rPr sz="2280" b="0" i="0" baseline="30000">
                 <a:solidFill>
                   <a:srgbClr val="1A1A1A"/>
                 </a:solidFill>
-                <a:latin typeface="Century Schoolbook"/>
+                <a:latin typeface="Lexend"/>
               </a:rPr>
               <a:t>6</a:t>
             </a:r>
             <a:r>
-              <a:rPr sz="2400" b="0" i="0">
+              <a:rPr sz="2280" b="0" i="0">
                 <a:solidFill>
                   <a:srgbClr val="1A1A1A"/>
                 </a:solidFill>
-                <a:latin typeface="Century Schoolbook"/>
+                <a:latin typeface="Lexend"/>
               </a:rPr>
               <a:t>)</a:t>
             </a:r>
@@ -9851,7 +10102,7 @@
         </p:nvSpPr>
         <p:spPr>
           <a:xfrm>
-            <a:off x="1874519" y="4293439"/>
+            <a:off x="1874519" y="4284295"/>
             <a:ext cx="4572000" cy="548640"/>
           </a:xfrm>
           <a:prstGeom prst="rect">
@@ -9867,29 +10118,29 @@
           <a:p>
             <a:pPr algn="l"/>
             <a:r>
-              <a:rPr sz="2400" b="1" i="0">
+              <a:rPr sz="2280" b="1" i="0">
                 <a:solidFill>
                   <a:srgbClr val="1A1A1A"/>
                 </a:solidFill>
-                <a:latin typeface="Century Schoolbook"/>
+                <a:latin typeface="Lexend"/>
               </a:rPr>
               <a:t>C.   </a:t>
             </a:r>
             <a:r>
-              <a:rPr sz="2400" b="0" i="0">
+              <a:rPr sz="2280" b="0" i="0">
                 <a:solidFill>
                   <a:srgbClr val="1A1A1A"/>
                 </a:solidFill>
-                <a:latin typeface="Century Schoolbook"/>
+                <a:latin typeface="Lexend"/>
               </a:rPr>
               <a:t>2/x</a:t>
             </a:r>
             <a:r>
-              <a:rPr sz="2400" b="0" i="0" baseline="30000">
+              <a:rPr sz="2280" b="0" i="0" baseline="30000">
                 <a:solidFill>
                   <a:srgbClr val="1A1A1A"/>
                 </a:solidFill>
-                <a:latin typeface="Century Schoolbook"/>
+                <a:latin typeface="Lexend"/>
               </a:rPr>
               <a:t>6</a:t>
             </a:r>
@@ -9904,7 +10155,7 @@
         </p:nvSpPr>
         <p:spPr>
           <a:xfrm>
-            <a:off x="6629400" y="4293439"/>
+            <a:off x="6629400" y="4284295"/>
             <a:ext cx="4572000" cy="548640"/>
           </a:xfrm>
           <a:prstGeom prst="rect">
@@ -9920,29 +10171,29 @@
           <a:p>
             <a:pPr algn="l"/>
             <a:r>
-              <a:rPr sz="2400" b="1" i="0">
+              <a:rPr sz="2280" b="1" i="0">
                 <a:solidFill>
                   <a:srgbClr val="1A1A1A"/>
                 </a:solidFill>
-                <a:latin typeface="Century Schoolbook"/>
+                <a:latin typeface="Lexend"/>
               </a:rPr>
               <a:t>D.   </a:t>
             </a:r>
             <a:r>
-              <a:rPr sz="2400" b="0" i="0">
+              <a:rPr sz="2280" b="0" i="0">
                 <a:solidFill>
                   <a:srgbClr val="1A1A1A"/>
                 </a:solidFill>
-                <a:latin typeface="Century Schoolbook"/>
+                <a:latin typeface="Lexend"/>
               </a:rPr>
               <a:t>4/x</a:t>
             </a:r>
             <a:r>
-              <a:rPr sz="2400" b="0" i="0" baseline="30000">
+              <a:rPr sz="2280" b="0" i="0" baseline="30000">
                 <a:solidFill>
                   <a:srgbClr val="1A1A1A"/>
                 </a:solidFill>
-                <a:latin typeface="Century Schoolbook"/>
+                <a:latin typeface="Lexend"/>
               </a:rPr>
               <a:t>6</a:t>
             </a:r>
@@ -9957,7 +10208,7 @@
         </p:nvSpPr>
         <p:spPr>
           <a:xfrm>
-            <a:off x="777240" y="5299279"/>
+            <a:off x="777240" y="5290135"/>
             <a:ext cx="10607040" cy="457200"/>
           </a:xfrm>
           <a:prstGeom prst="rect">
@@ -9973,11 +10224,11 @@
           <a:p>
             <a:pPr algn="ctr"/>
             <a:r>
-              <a:rPr sz="2600" b="1" i="0">
+              <a:rPr sz="2470" b="1" i="0">
                 <a:solidFill>
                   <a:srgbClr val="1A1A1A"/>
                 </a:solidFill>
-                <a:latin typeface="Century Schoolbook"/>
+                <a:latin typeface="Lexend"/>
               </a:rPr>
               <a:t>Answer it.</a:t>
             </a:r>
@@ -10026,11 +10277,11 @@
           <a:p>
             <a:pPr algn="l"/>
             <a:r>
-              <a:rPr sz="3400" b="1" i="0">
+              <a:rPr sz="3229" b="1" i="0">
                 <a:solidFill>
                   <a:srgbClr val="1A1A1A"/>
                 </a:solidFill>
-                <a:latin typeface="Century Schoolbook"/>
+                <a:latin typeface="Lexend"/>
               </a:rPr>
               <a:t>Whiteboards   ·   Question 6 of 9</a:t>
             </a:r>
@@ -10166,11 +10417,11 @@
           <a:p>
             <a:pPr algn="l"/>
             <a:r>
-              <a:rPr sz="1100" b="0" i="1">
+              <a:rPr sz="1040" b="0" i="0">
                 <a:solidFill>
                   <a:srgbClr val="6B6B6B"/>
                 </a:solidFill>
-                <a:latin typeface="Century Schoolbook"/>
+                <a:latin typeface="Lexend"/>
               </a:rPr>
               <a:t>Grade 7 Accelerated · Unit 3 · Thread A · Day 2 — Negative Exponents with Variable Bases</a:t>
             </a:r>
@@ -10201,11 +10452,11 @@
           <a:p>
             <a:pPr algn="r"/>
             <a:r>
-              <a:rPr sz="1100" b="0" i="0">
+              <a:rPr sz="1040" b="0" i="0">
                 <a:solidFill>
                   <a:srgbClr val="6B6B6B"/>
                 </a:solidFill>
-                <a:latin typeface="Century Schoolbook"/>
+                <a:latin typeface="Lexend"/>
               </a:rPr>
               <a:t>26</a:t>
             </a:r>
@@ -10214,7 +10465,7 @@
       </p:sp>
       <p:pic>
         <p:nvPicPr>
-          <p:cNvPr id="8" name="Picture 7" descr="1768e3b0aaa3b8d0.png"/>
+          <p:cNvPr id="8" name="Picture 7" descr="0b4a094821466f75.png"/>
           <p:cNvPicPr>
             <a:picLocks noChangeAspect="1"/>
           </p:cNvPicPr>
@@ -10228,8 +10479,8 @@
         </p:blipFill>
         <p:spPr>
           <a:xfrm>
-            <a:off x="5356859" y="2103120"/>
-            <a:ext cx="1447800" cy="518160"/>
+            <a:off x="5349240" y="2103120"/>
+            <a:ext cx="1463040" cy="509016"/>
           </a:xfrm>
           <a:prstGeom prst="rect">
             <a:avLst/>
@@ -10244,7 +10495,7 @@
         </p:nvSpPr>
         <p:spPr>
           <a:xfrm>
-            <a:off x="777240" y="2849879"/>
+            <a:off x="777240" y="2840736"/>
             <a:ext cx="10607040" cy="465151"/>
           </a:xfrm>
           <a:prstGeom prst="rect">
@@ -10260,27 +10511,75 @@
           <a:p>
             <a:pPr algn="ctr"/>
             <a:r>
-              <a:rPr sz="2600" b="0" i="0">
+              <a:rPr sz="2470" b="0" i="0">
                 <a:solidFill>
                   <a:srgbClr val="1A1A1A"/>
                 </a:solidFill>
-                <a:latin typeface="Century Schoolbook"/>
+                <a:latin typeface="Lexend"/>
               </a:rPr>
               <a:t>Which expression is equivalent?</a:t>
             </a:r>
           </a:p>
         </p:txBody>
       </p:sp>
-      <p:sp>
-        <p:nvSpPr>
-          <p:cNvPr id="10" name="TextBox 9"/>
-          <p:cNvSpPr txBox="1"/>
-          <p:nvPr/>
-        </p:nvSpPr>
-        <p:spPr>
-          <a:xfrm>
-            <a:off x="1874519" y="3516199"/>
-            <a:ext cx="4572000" cy="548640"/>
+      <p:pic>
+        <p:nvPicPr>
+          <p:cNvPr id="10" name="Picture 9" descr="7719b4b74c44dd36.png"/>
+          <p:cNvPicPr>
+            <a:picLocks noChangeAspect="1"/>
+          </p:cNvPicPr>
+          <p:nvPr/>
+        </p:nvPicPr>
+        <p:blipFill>
+          <a:blip r:embed="rId3"/>
+          <a:stretch>
+            <a:fillRect/>
+          </a:stretch>
+        </p:blipFill>
+        <p:spPr>
+          <a:xfrm>
+            <a:off x="4258056" y="3508579"/>
+            <a:ext cx="3752088" cy="371856"/>
+          </a:xfrm>
+          <a:prstGeom prst="rect">
+            <a:avLst/>
+          </a:prstGeom>
+        </p:spPr>
+      </p:pic>
+      <p:pic>
+        <p:nvPicPr>
+          <p:cNvPr id="11" name="Picture 10" descr="5bac0c5947c6ee52.png"/>
+          <p:cNvPicPr>
+            <a:picLocks noChangeAspect="1"/>
+          </p:cNvPicPr>
+          <p:nvPr/>
+        </p:nvPicPr>
+        <p:blipFill>
+          <a:blip r:embed="rId4"/>
+          <a:stretch>
+            <a:fillRect/>
+          </a:stretch>
+        </p:blipFill>
+        <p:spPr>
+          <a:xfrm>
+            <a:off x="4258056" y="4028263"/>
+            <a:ext cx="1389888" cy="661416"/>
+          </a:xfrm>
+          <a:prstGeom prst="rect">
+            <a:avLst/>
+          </a:prstGeom>
+        </p:spPr>
+      </p:pic>
+      <p:sp>
+        <p:nvSpPr>
+          <p:cNvPr id="12" name="TextBox 11"/>
+          <p:cNvSpPr txBox="1"/>
+          <p:nvPr/>
+        </p:nvSpPr>
+        <p:spPr>
+          <a:xfrm>
+            <a:off x="777240" y="4826839"/>
+            <a:ext cx="10607040" cy="548640"/>
           </a:xfrm>
           <a:prstGeom prst="rect">
             <a:avLst/>
@@ -10293,234 +10592,22 @@
           </a:bodyPr>
           <a:lstStyle/>
           <a:p>
-            <a:pPr algn="l"/>
-            <a:r>
-              <a:rPr sz="2400" b="1" i="0">
-                <a:solidFill>
-                  <a:srgbClr val="1A1A1A"/>
-                </a:solidFill>
-                <a:latin typeface="Century Schoolbook"/>
-              </a:rPr>
-              <a:t>A.   </a:t>
-            </a:r>
-            <a:r>
-              <a:rPr sz="2400" b="0" i="0">
-                <a:solidFill>
-                  <a:srgbClr val="1A1A1A"/>
-                </a:solidFill>
-                <a:latin typeface="Century Schoolbook"/>
-              </a:rPr>
-              <a:t>4/x</a:t>
-            </a:r>
-          </a:p>
-        </p:txBody>
-      </p:sp>
-      <p:sp>
-        <p:nvSpPr>
-          <p:cNvPr id="11" name="TextBox 10"/>
-          <p:cNvSpPr txBox="1"/>
-          <p:nvPr/>
-        </p:nvSpPr>
-        <p:spPr>
-          <a:xfrm>
-            <a:off x="6629400" y="3516199"/>
-            <a:ext cx="4572000" cy="548640"/>
-          </a:xfrm>
-          <a:prstGeom prst="rect">
-            <a:avLst/>
-          </a:prstGeom>
-          <a:noFill/>
-        </p:spPr>
-        <p:txBody>
-          <a:bodyPr wrap="square" lIns="45720" rIns="45720" tIns="18288" bIns="18288" anchor="t">
-            <a:spAutoFit/>
-          </a:bodyPr>
-          <a:lstStyle/>
-          <a:p>
-            <a:pPr algn="l"/>
-            <a:r>
-              <a:rPr sz="2400" b="1" i="0">
-                <a:solidFill>
-                  <a:srgbClr val="1A1A1A"/>
-                </a:solidFill>
-                <a:latin typeface="Century Schoolbook"/>
-              </a:rPr>
-              <a:t>B.   </a:t>
-            </a:r>
-            <a:r>
-              <a:rPr sz="2400" b="0" i="0">
-                <a:solidFill>
-                  <a:srgbClr val="1A1A1A"/>
-                </a:solidFill>
-                <a:latin typeface="Century Schoolbook"/>
-              </a:rPr>
-              <a:t>1/(4x</a:t>
-            </a:r>
-            <a:r>
-              <a:rPr sz="2400" b="0" i="0" baseline="30000">
-                <a:solidFill>
-                  <a:srgbClr val="1A1A1A"/>
-                </a:solidFill>
-                <a:latin typeface="Century Schoolbook"/>
-              </a:rPr>
-              <a:t>6</a:t>
-            </a:r>
-            <a:r>
-              <a:rPr sz="2400" b="0" i="0">
-                <a:solidFill>
-                  <a:srgbClr val="1A1A1A"/>
-                </a:solidFill>
-                <a:latin typeface="Century Schoolbook"/>
-              </a:rPr>
-              <a:t>)</a:t>
-            </a:r>
-          </a:p>
-        </p:txBody>
-      </p:sp>
-      <p:sp>
-        <p:nvSpPr>
-          <p:cNvPr id="12" name="TextBox 11"/>
-          <p:cNvSpPr txBox="1"/>
-          <p:nvPr/>
-        </p:nvSpPr>
-        <p:spPr>
-          <a:xfrm>
-            <a:off x="1874519" y="4201999"/>
-            <a:ext cx="4572000" cy="548640"/>
-          </a:xfrm>
-          <a:prstGeom prst="rect">
-            <a:avLst/>
-          </a:prstGeom>
-          <a:noFill/>
-        </p:spPr>
-        <p:txBody>
-          <a:bodyPr wrap="square" lIns="45720" rIns="45720" tIns="18288" bIns="18288" anchor="t">
-            <a:spAutoFit/>
-          </a:bodyPr>
-          <a:lstStyle/>
-          <a:p>
-            <a:pPr algn="l"/>
-            <a:r>
-              <a:rPr sz="2400" b="1" i="0">
-                <a:solidFill>
-                  <a:srgbClr val="1A1A1A"/>
-                </a:solidFill>
-                <a:latin typeface="Century Schoolbook"/>
-              </a:rPr>
-              <a:t>C.   </a:t>
-            </a:r>
-            <a:r>
-              <a:rPr sz="2400" b="0" i="0">
-                <a:solidFill>
-                  <a:srgbClr val="1A1A1A"/>
-                </a:solidFill>
-                <a:latin typeface="Century Schoolbook"/>
-              </a:rPr>
-              <a:t>2/x</a:t>
-            </a:r>
-            <a:r>
-              <a:rPr sz="2400" b="0" i="0" baseline="30000">
-                <a:solidFill>
-                  <a:srgbClr val="1A1A1A"/>
-                </a:solidFill>
-                <a:latin typeface="Century Schoolbook"/>
-              </a:rPr>
-              <a:t>6</a:t>
-            </a:r>
-          </a:p>
-        </p:txBody>
-      </p:sp>
-      <p:sp>
-        <p:nvSpPr>
-          <p:cNvPr id="13" name="TextBox 12"/>
-          <p:cNvSpPr txBox="1"/>
-          <p:nvPr/>
-        </p:nvSpPr>
-        <p:spPr>
-          <a:xfrm>
-            <a:off x="6629400" y="4201999"/>
-            <a:ext cx="4572000" cy="548640"/>
-          </a:xfrm>
-          <a:prstGeom prst="rect">
-            <a:avLst/>
-          </a:prstGeom>
-          <a:noFill/>
-        </p:spPr>
-        <p:txBody>
-          <a:bodyPr wrap="square" lIns="45720" rIns="45720" tIns="18288" bIns="18288" anchor="t">
-            <a:spAutoFit/>
-          </a:bodyPr>
-          <a:lstStyle/>
-          <a:p>
-            <a:pPr algn="l"/>
-            <a:r>
-              <a:rPr sz="2400" b="1" i="0">
+            <a:pPr algn="ctr"/>
+            <a:r>
+              <a:rPr sz="3040" b="1" i="0">
                 <a:solidFill>
                   <a:srgbClr val="9E1B32"/>
                 </a:solidFill>
-                <a:latin typeface="Century Schoolbook"/>
-              </a:rPr>
-              <a:t>D.   </a:t>
-            </a:r>
-            <a:r>
-              <a:rPr sz="2400" b="1" i="0">
+                <a:latin typeface="Lexend"/>
+              </a:rPr>
+              <a:t>Answer:   D — 4/x</a:t>
+            </a:r>
+            <a:r>
+              <a:rPr sz="3040" b="1" i="0" baseline="30000">
                 <a:solidFill>
                   <a:srgbClr val="9E1B32"/>
                 </a:solidFill>
-                <a:latin typeface="Century Schoolbook"/>
-              </a:rPr>
-              <a:t>4/x</a:t>
-            </a:r>
-            <a:r>
-              <a:rPr sz="2400" b="1" i="0" baseline="30000">
-                <a:solidFill>
-                  <a:srgbClr val="9E1B32"/>
-                </a:solidFill>
-                <a:latin typeface="Century Schoolbook"/>
-              </a:rPr>
-              <a:t>6</a:t>
-            </a:r>
-          </a:p>
-        </p:txBody>
-      </p:sp>
-      <p:sp>
-        <p:nvSpPr>
-          <p:cNvPr id="14" name="TextBox 13"/>
-          <p:cNvSpPr txBox="1"/>
-          <p:nvPr/>
-        </p:nvSpPr>
-        <p:spPr>
-          <a:xfrm>
-            <a:off x="777240" y="5207839"/>
-            <a:ext cx="10607040" cy="548640"/>
-          </a:xfrm>
-          <a:prstGeom prst="rect">
-            <a:avLst/>
-          </a:prstGeom>
-          <a:noFill/>
-        </p:spPr>
-        <p:txBody>
-          <a:bodyPr wrap="square" lIns="45720" rIns="45720" tIns="18288" bIns="18288" anchor="t">
-            <a:spAutoFit/>
-          </a:bodyPr>
-          <a:lstStyle/>
-          <a:p>
-            <a:pPr algn="ctr"/>
-            <a:r>
-              <a:rPr sz="3200" b="1" i="0">
-                <a:solidFill>
-                  <a:srgbClr val="9E1B32"/>
-                </a:solidFill>
-                <a:latin typeface="Century Schoolbook"/>
-              </a:rPr>
-              <a:t>Answer:   D — 4/x</a:t>
-            </a:r>
-            <a:r>
-              <a:rPr sz="3200" b="1" i="0" baseline="30000">
-                <a:solidFill>
-                  <a:srgbClr val="9E1B32"/>
-                </a:solidFill>
-                <a:latin typeface="Century Schoolbook"/>
+                <a:latin typeface="Lexend"/>
               </a:rPr>
               <a:t>6</a:t>
             </a:r>
@@ -10569,11 +10656,11 @@
           <a:p>
             <a:pPr algn="l"/>
             <a:r>
-              <a:rPr sz="3400" b="1" i="0">
+              <a:rPr sz="3229" b="1" i="0">
                 <a:solidFill>
                   <a:srgbClr val="1A1A1A"/>
                 </a:solidFill>
-                <a:latin typeface="Century Schoolbook"/>
+                <a:latin typeface="Lexend"/>
               </a:rPr>
               <a:t>Whiteboards   ·   Question 7 of 9</a:t>
             </a:r>
@@ -10709,11 +10796,11 @@
           <a:p>
             <a:pPr algn="l"/>
             <a:r>
-              <a:rPr sz="1100" b="0" i="1">
+              <a:rPr sz="1040" b="0" i="0">
                 <a:solidFill>
                   <a:srgbClr val="6B6B6B"/>
                 </a:solidFill>
-                <a:latin typeface="Century Schoolbook"/>
+                <a:latin typeface="Lexend"/>
               </a:rPr>
               <a:t>Grade 7 Accelerated · Unit 3 · Thread A · Day 2 — Negative Exponents with Variable Bases</a:t>
             </a:r>
@@ -10744,11 +10831,11 @@
           <a:p>
             <a:pPr algn="r"/>
             <a:r>
-              <a:rPr sz="1100" b="0" i="0">
+              <a:rPr sz="1040" b="0" i="0">
                 <a:solidFill>
                   <a:srgbClr val="6B6B6B"/>
                 </a:solidFill>
-                <a:latin typeface="Century Schoolbook"/>
+                <a:latin typeface="Lexend"/>
               </a:rPr>
               <a:t>27</a:t>
             </a:r>
@@ -10757,7 +10844,7 @@
       </p:sp>
       <p:pic>
         <p:nvPicPr>
-          <p:cNvPr id="8" name="Picture 7" descr="61aec65184b6beb1.png"/>
+          <p:cNvPr id="8" name="Picture 7" descr="636cf8092383896e.png"/>
           <p:cNvPicPr>
             <a:picLocks noChangeAspect="1"/>
           </p:cNvPicPr>
@@ -10771,8 +10858,8 @@
         </p:blipFill>
         <p:spPr>
           <a:xfrm>
-            <a:off x="5779007" y="2194560"/>
-            <a:ext cx="603504" cy="1005840"/>
+            <a:off x="5747003" y="2194560"/>
+            <a:ext cx="667512" cy="978408"/>
           </a:xfrm>
           <a:prstGeom prst="rect">
             <a:avLst/>
@@ -10803,11 +10890,11 @@
           <a:p>
             <a:pPr algn="ctr"/>
             <a:r>
-              <a:rPr sz="2600" b="1" i="0">
+              <a:rPr sz="2470" b="1" i="0">
                 <a:solidFill>
                   <a:srgbClr val="1A1A1A"/>
                 </a:solidFill>
-                <a:latin typeface="Century Schoolbook"/>
+                <a:latin typeface="Lexend"/>
               </a:rPr>
               <a:t>Answer it.</a:t>
             </a:r>
@@ -10856,11 +10943,11 @@
           <a:p>
             <a:pPr algn="l"/>
             <a:r>
-              <a:rPr sz="3400" b="1" i="0">
+              <a:rPr sz="3229" b="1" i="0">
                 <a:solidFill>
                   <a:srgbClr val="1A1A1A"/>
                 </a:solidFill>
-                <a:latin typeface="Century Schoolbook"/>
+                <a:latin typeface="Lexend"/>
               </a:rPr>
               <a:t>Whiteboards   ·   Question 7 of 9</a:t>
             </a:r>
@@ -10996,11 +11083,11 @@
           <a:p>
             <a:pPr algn="l"/>
             <a:r>
-              <a:rPr sz="1100" b="0" i="1">
+              <a:rPr sz="1040" b="0" i="0">
                 <a:solidFill>
                   <a:srgbClr val="6B6B6B"/>
                 </a:solidFill>
-                <a:latin typeface="Century Schoolbook"/>
+                <a:latin typeface="Lexend"/>
               </a:rPr>
               <a:t>Grade 7 Accelerated · Unit 3 · Thread A · Day 2 — Negative Exponents with Variable Bases</a:t>
             </a:r>
@@ -11031,11 +11118,11 @@
           <a:p>
             <a:pPr algn="r"/>
             <a:r>
-              <a:rPr sz="1100" b="0" i="0">
+              <a:rPr sz="1040" b="0" i="0">
                 <a:solidFill>
                   <a:srgbClr val="6B6B6B"/>
                 </a:solidFill>
-                <a:latin typeface="Century Schoolbook"/>
+                <a:latin typeface="Lexend"/>
               </a:rPr>
               <a:t>28</a:t>
             </a:r>
@@ -11044,7 +11131,7 @@
       </p:sp>
       <p:pic>
         <p:nvPicPr>
-          <p:cNvPr id="8" name="Picture 7" descr="00d9c35b01c5d10a.png"/>
+          <p:cNvPr id="8" name="Picture 7" descr="c5cfb9ca7ed5b513.png"/>
           <p:cNvPicPr>
             <a:picLocks noChangeAspect="1"/>
           </p:cNvPicPr>
@@ -11058,52 +11145,17 @@
         </p:blipFill>
         <p:spPr>
           <a:xfrm>
-            <a:off x="5782055" y="2103120"/>
-            <a:ext cx="597408" cy="1005840"/>
+            <a:off x="5750052" y="2103120"/>
+            <a:ext cx="661416" cy="978408"/>
           </a:xfrm>
           <a:prstGeom prst="rect">
             <a:avLst/>
           </a:prstGeom>
         </p:spPr>
       </p:pic>
-      <p:sp>
-        <p:nvSpPr>
-          <p:cNvPr id="9" name="TextBox 8"/>
-          <p:cNvSpPr txBox="1"/>
-          <p:nvPr/>
-        </p:nvSpPr>
-        <p:spPr>
-          <a:xfrm>
-            <a:off x="4818888" y="4855464"/>
-            <a:ext cx="1920240" cy="548640"/>
-          </a:xfrm>
-          <a:prstGeom prst="rect">
-            <a:avLst/>
-          </a:prstGeom>
-          <a:noFill/>
-        </p:spPr>
-        <p:txBody>
-          <a:bodyPr wrap="square" lIns="45720" rIns="45720" tIns="18288" bIns="18288" anchor="ctr">
-            <a:spAutoFit/>
-          </a:bodyPr>
-          <a:lstStyle/>
-          <a:p>
-            <a:pPr algn="l"/>
-            <a:r>
-              <a:rPr sz="3200" b="1" i="0">
-                <a:solidFill>
-                  <a:srgbClr val="9E1B32"/>
-                </a:solidFill>
-                <a:latin typeface="Century Schoolbook"/>
-              </a:rPr>
-              <a:t>Answer:</a:t>
-            </a:r>
-          </a:p>
-        </p:txBody>
-      </p:sp>
       <p:pic>
         <p:nvPicPr>
-          <p:cNvPr id="10" name="Picture 9" descr="a74f00062d590b9f.png"/>
+          <p:cNvPr id="9" name="Picture 8" descr="d5d202bb372dce8a.png"/>
           <p:cNvPicPr>
             <a:picLocks noChangeAspect="1"/>
           </p:cNvPicPr>
@@ -11117,8 +11169,91 @@
         </p:blipFill>
         <p:spPr>
           <a:xfrm>
-            <a:off x="6739127" y="4663440"/>
-            <a:ext cx="603504" cy="932688"/>
+            <a:off x="4815839" y="3383280"/>
+            <a:ext cx="2642616" cy="710184"/>
+          </a:xfrm>
+          <a:prstGeom prst="rect">
+            <a:avLst/>
+          </a:prstGeom>
+        </p:spPr>
+      </p:pic>
+      <p:pic>
+        <p:nvPicPr>
+          <p:cNvPr id="10" name="Picture 9" descr="b3a0847db3beb524.png"/>
+          <p:cNvPicPr>
+            <a:picLocks noChangeAspect="1"/>
+          </p:cNvPicPr>
+          <p:nvPr/>
+        </p:nvPicPr>
+        <p:blipFill>
+          <a:blip r:embed="rId4"/>
+          <a:stretch>
+            <a:fillRect/>
+          </a:stretch>
+        </p:blipFill>
+        <p:spPr>
+          <a:xfrm>
+            <a:off x="4815839" y="4221480"/>
+            <a:ext cx="1441704" cy="658368"/>
+          </a:xfrm>
+          <a:prstGeom prst="rect">
+            <a:avLst/>
+          </a:prstGeom>
+        </p:spPr>
+      </p:pic>
+      <p:sp>
+        <p:nvSpPr>
+          <p:cNvPr id="11" name="TextBox 10"/>
+          <p:cNvSpPr txBox="1"/>
+          <p:nvPr/>
+        </p:nvSpPr>
+        <p:spPr>
+          <a:xfrm>
+            <a:off x="4774692" y="5196840"/>
+            <a:ext cx="1920240" cy="548640"/>
+          </a:xfrm>
+          <a:prstGeom prst="rect">
+            <a:avLst/>
+          </a:prstGeom>
+          <a:noFill/>
+        </p:spPr>
+        <p:txBody>
+          <a:bodyPr wrap="square" lIns="45720" rIns="45720" tIns="18288" bIns="18288" anchor="ctr">
+            <a:spAutoFit/>
+          </a:bodyPr>
+          <a:lstStyle/>
+          <a:p>
+            <a:pPr algn="l"/>
+            <a:r>
+              <a:rPr sz="3040" b="1" i="0">
+                <a:solidFill>
+                  <a:srgbClr val="9E1B32"/>
+                </a:solidFill>
+                <a:latin typeface="Lexend"/>
+              </a:rPr>
+              <a:t>Answer:</a:t>
+            </a:r>
+          </a:p>
+        </p:txBody>
+      </p:sp>
+      <p:pic>
+        <p:nvPicPr>
+          <p:cNvPr id="12" name="Picture 11" descr="c3401cb351d5db04.png"/>
+          <p:cNvPicPr>
+            <a:picLocks noChangeAspect="1"/>
+          </p:cNvPicPr>
+          <p:nvPr/>
+        </p:nvPicPr>
+        <p:blipFill>
+          <a:blip r:embed="rId5"/>
+          <a:stretch>
+            <a:fillRect/>
+          </a:stretch>
+        </p:blipFill>
+        <p:spPr>
+          <a:xfrm>
+            <a:off x="6694932" y="5017008"/>
+            <a:ext cx="691896" cy="908304"/>
           </a:xfrm>
           <a:prstGeom prst="rect">
             <a:avLst/>
@@ -11167,11 +11302,11 @@
           <a:p>
             <a:pPr algn="l"/>
             <a:r>
-              <a:rPr sz="3400" b="1" i="0">
+              <a:rPr sz="3229" b="1" i="0">
                 <a:solidFill>
                   <a:srgbClr val="1A1A1A"/>
                 </a:solidFill>
-                <a:latin typeface="Century Schoolbook"/>
+                <a:latin typeface="Lexend"/>
               </a:rPr>
               <a:t>Whiteboards   ·   Question 8 of 9</a:t>
             </a:r>
@@ -11307,11 +11442,11 @@
           <a:p>
             <a:pPr algn="l"/>
             <a:r>
-              <a:rPr sz="1100" b="0" i="1">
+              <a:rPr sz="1040" b="0" i="0">
                 <a:solidFill>
                   <a:srgbClr val="6B6B6B"/>
                 </a:solidFill>
-                <a:latin typeface="Century Schoolbook"/>
+                <a:latin typeface="Lexend"/>
               </a:rPr>
               <a:t>Grade 7 Accelerated · Unit 3 · Thread A · Day 2 — Negative Exponents with Variable Bases</a:t>
             </a:r>
@@ -11342,11 +11477,11 @@
           <a:p>
             <a:pPr algn="r"/>
             <a:r>
-              <a:rPr sz="1100" b="0" i="0">
+              <a:rPr sz="1040" b="0" i="0">
                 <a:solidFill>
                   <a:srgbClr val="6B6B6B"/>
                 </a:solidFill>
-                <a:latin typeface="Century Schoolbook"/>
+                <a:latin typeface="Lexend"/>
               </a:rPr>
               <a:t>29</a:t>
             </a:r>
@@ -11361,8 +11496,8 @@
         </p:nvSpPr>
         <p:spPr>
           <a:xfrm>
-            <a:off x="4444343" y="2171700"/>
-            <a:ext cx="3047533" cy="457200"/>
+            <a:off x="4483087" y="2171700"/>
+            <a:ext cx="3006734" cy="457200"/>
           </a:xfrm>
           <a:prstGeom prst="rect">
             <a:avLst/>
@@ -11377,11 +11512,11 @@
           <a:p>
             <a:pPr algn="l"/>
             <a:r>
-              <a:rPr sz="2600" b="0" i="0">
+              <a:rPr sz="2470" b="0" i="0">
                 <a:solidFill>
                   <a:srgbClr val="1A1A1A"/>
                 </a:solidFill>
-                <a:latin typeface="Century Schoolbook"/>
+                <a:latin typeface="Lexend"/>
               </a:rPr>
               <a:t>Find the value of </a:t>
             </a:r>
@@ -11390,7 +11525,7 @@
       </p:sp>
       <p:pic>
         <p:nvPicPr>
-          <p:cNvPr id="9" name="Picture 8" descr="ce9b607ea85ce740.png"/>
+          <p:cNvPr id="9" name="Picture 8" descr="f14fce7cf077cd07.png"/>
           <p:cNvPicPr>
             <a:picLocks noChangeAspect="1"/>
           </p:cNvPicPr>
@@ -11404,8 +11539,8 @@
         </p:blipFill>
         <p:spPr>
           <a:xfrm>
-            <a:off x="7354716" y="2308860"/>
-            <a:ext cx="192024" cy="182880"/>
+            <a:off x="7352662" y="2296668"/>
+            <a:ext cx="176784" cy="207264"/>
           </a:xfrm>
           <a:prstGeom prst="rect">
             <a:avLst/>
@@ -11420,8 +11555,8 @@
         </p:nvSpPr>
         <p:spPr>
           <a:xfrm>
-            <a:off x="7546740" y="2171700"/>
-            <a:ext cx="307595" cy="457200"/>
+            <a:off x="7529446" y="2171700"/>
+            <a:ext cx="286146" cy="457200"/>
           </a:xfrm>
           <a:prstGeom prst="rect">
             <a:avLst/>
@@ -11436,11 +11571,11 @@
           <a:p>
             <a:pPr algn="l"/>
             <a:r>
-              <a:rPr sz="2600" b="0" i="0">
+              <a:rPr sz="2470" b="0" i="0">
                 <a:solidFill>
                   <a:srgbClr val="1A1A1A"/>
                 </a:solidFill>
-                <a:latin typeface="Century Schoolbook"/>
+                <a:latin typeface="Lexend"/>
               </a:rPr>
               <a:t>:</a:t>
             </a:r>
@@ -11449,7 +11584,7 @@
       </p:sp>
       <p:pic>
         <p:nvPicPr>
-          <p:cNvPr id="11" name="Picture 10" descr="768d523c6bd8c018.png"/>
+          <p:cNvPr id="11" name="Picture 10" descr="64533c8a20ef9755.png"/>
           <p:cNvPicPr>
             <a:picLocks noChangeAspect="1"/>
           </p:cNvPicPr>
@@ -11463,8 +11598,8 @@
         </p:blipFill>
         <p:spPr>
           <a:xfrm>
-            <a:off x="5125212" y="2912364"/>
-            <a:ext cx="1911095" cy="347472"/>
+            <a:off x="5119115" y="2916936"/>
+            <a:ext cx="1923288" cy="338328"/>
           </a:xfrm>
           <a:prstGeom prst="rect">
             <a:avLst/>
@@ -11495,11 +11630,11 @@
           <a:p>
             <a:pPr algn="ctr"/>
             <a:r>
-              <a:rPr sz="2600" b="1" i="0">
+              <a:rPr sz="2470" b="1" i="0">
                 <a:solidFill>
                   <a:srgbClr val="1A1A1A"/>
                 </a:solidFill>
-                <a:latin typeface="Century Schoolbook"/>
+                <a:latin typeface="Lexend"/>
               </a:rPr>
               <a:t>Answer it.</a:t>
             </a:r>
@@ -11548,11 +11683,11 @@
           <a:p>
             <a:pPr algn="l"/>
             <a:r>
-              <a:rPr sz="3600" b="1" i="0">
+              <a:rPr sz="3420" b="1" i="0">
                 <a:solidFill>
                   <a:srgbClr val="1A1A1A"/>
                 </a:solidFill>
-                <a:latin typeface="Century Schoolbook"/>
+                <a:latin typeface="Lexend"/>
               </a:rPr>
               <a:t>Warm-Up</a:t>
             </a:r>
@@ -11688,11 +11823,11 @@
           <a:p>
             <a:pPr algn="l"/>
             <a:r>
-              <a:rPr sz="1100" b="0" i="1">
+              <a:rPr sz="1040" b="0" i="0">
                 <a:solidFill>
                   <a:srgbClr val="6B6B6B"/>
                 </a:solidFill>
-                <a:latin typeface="Century Schoolbook"/>
+                <a:latin typeface="Lexend"/>
               </a:rPr>
               <a:t>Grade 7 Accelerated · Unit 3 · Thread A · Day 2 — Negative Exponents with Variable Bases</a:t>
             </a:r>
@@ -11723,11 +11858,11 @@
           <a:p>
             <a:pPr algn="r"/>
             <a:r>
-              <a:rPr sz="1100" b="0" i="0">
+              <a:rPr sz="1040" b="0" i="0">
                 <a:solidFill>
                   <a:srgbClr val="6B6B6B"/>
                 </a:solidFill>
-                <a:latin typeface="Century Schoolbook"/>
+                <a:latin typeface="Lexend"/>
               </a:rPr>
               <a:t>3</a:t>
             </a:r>
@@ -11743,7 +11878,7 @@
         <p:spPr>
           <a:xfrm>
             <a:off x="1874519" y="1440180"/>
-            <a:ext cx="4874632" cy="457200"/>
+            <a:ext cx="4774550" cy="457200"/>
           </a:xfrm>
           <a:prstGeom prst="rect">
             <a:avLst/>
@@ -11758,11 +11893,11 @@
           <a:p>
             <a:pPr algn="l"/>
             <a:r>
-              <a:rPr sz="2300" b="0" i="0">
+              <a:rPr sz="2180" b="0" i="0">
                 <a:solidFill>
                   <a:srgbClr val="1A1A1A"/>
                 </a:solidFill>
-                <a:latin typeface="Century Schoolbook"/>
+                <a:latin typeface="Lexend"/>
               </a:rPr>
               <a:t>1.   Write as a single monomial:  </a:t>
             </a:r>
@@ -11771,7 +11906,7 @@
       </p:sp>
       <p:pic>
         <p:nvPicPr>
-          <p:cNvPr id="9" name="Picture 8" descr="c0ecde76b6542cae.png"/>
+          <p:cNvPr id="9" name="Picture 8" descr="9876647aa2adbdc4.png"/>
           <p:cNvPicPr>
             <a:picLocks noChangeAspect="1"/>
           </p:cNvPicPr>
@@ -11785,8 +11920,8 @@
         </p:blipFill>
         <p:spPr>
           <a:xfrm>
-            <a:off x="6611992" y="1501140"/>
-            <a:ext cx="771144" cy="335280"/>
+            <a:off x="6511910" y="1501140"/>
+            <a:ext cx="813816" cy="335280"/>
           </a:xfrm>
           <a:prstGeom prst="rect">
             <a:avLst/>
@@ -11801,8 +11936,8 @@
         </p:nvSpPr>
         <p:spPr>
           <a:xfrm>
-            <a:off x="7931776" y="1440180"/>
-            <a:ext cx="841711" cy="457200"/>
+            <a:off x="7874366" y="1440180"/>
+            <a:ext cx="823329" cy="457200"/>
           </a:xfrm>
           <a:prstGeom prst="rect">
             <a:avLst/>
@@ -11817,20 +11952,20 @@
           <a:p>
             <a:pPr algn="l"/>
             <a:r>
-              <a:rPr sz="2300" b="1" i="0">
+              <a:rPr sz="2180" b="1" i="0">
                 <a:solidFill>
                   <a:srgbClr val="9E1B32"/>
                 </a:solidFill>
-                <a:latin typeface="Century Schoolbook"/>
+                <a:latin typeface="Lexend"/>
               </a:rPr>
               <a:t>27x</a:t>
             </a:r>
             <a:r>
-              <a:rPr sz="2300" b="1" i="0" baseline="30000">
+              <a:rPr sz="2180" b="1" i="0" baseline="30000">
                 <a:solidFill>
                   <a:srgbClr val="9E1B32"/>
                 </a:solidFill>
-                <a:latin typeface="Century Schoolbook"/>
+                <a:latin typeface="Lexend"/>
               </a:rPr>
               <a:t>6</a:t>
             </a:r>
@@ -11846,7 +11981,7 @@
         <p:spPr>
           <a:xfrm>
             <a:off x="1874519" y="2052828"/>
-            <a:ext cx="3064939" cy="457200"/>
+            <a:ext cx="2935946" cy="457200"/>
           </a:xfrm>
           <a:prstGeom prst="rect">
             <a:avLst/>
@@ -11861,11 +11996,11 @@
           <a:p>
             <a:pPr algn="l"/>
             <a:r>
-              <a:rPr sz="2300" b="0" i="0">
+              <a:rPr sz="2180" b="0" i="0">
                 <a:solidFill>
                   <a:srgbClr val="1A1A1A"/>
                 </a:solidFill>
-                <a:latin typeface="Century Schoolbook"/>
+                <a:latin typeface="Lexend"/>
               </a:rPr>
               <a:t>2.   Find the value:  </a:t>
             </a:r>
@@ -11874,7 +12009,7 @@
       </p:sp>
       <p:pic>
         <p:nvPicPr>
-          <p:cNvPr id="12" name="Picture 11" descr="baf21e0fadb8b9e2.png"/>
+          <p:cNvPr id="12" name="Picture 11" descr="daac0ec1771ab045.png"/>
           <p:cNvPicPr>
             <a:picLocks noChangeAspect="1"/>
           </p:cNvPicPr>
@@ -11888,8 +12023,8 @@
         </p:blipFill>
         <p:spPr>
           <a:xfrm>
-            <a:off x="4802299" y="2141220"/>
-            <a:ext cx="426720" cy="280416"/>
+            <a:off x="4673306" y="2142744"/>
+            <a:ext cx="411480" cy="277368"/>
           </a:xfrm>
           <a:prstGeom prst="rect">
             <a:avLst/>
@@ -11904,8 +12039,8 @@
         </p:nvSpPr>
         <p:spPr>
           <a:xfrm>
-            <a:off x="5777659" y="2052828"/>
-            <a:ext cx="829616" cy="457200"/>
+            <a:off x="5633426" y="2052828"/>
+            <a:ext cx="877982" cy="457200"/>
           </a:xfrm>
           <a:prstGeom prst="rect">
             <a:avLst/>
@@ -11920,11 +12055,11 @@
           <a:p>
             <a:pPr algn="l"/>
             <a:r>
-              <a:rPr sz="2300" b="1" i="0">
+              <a:rPr sz="2180" b="1" i="0">
                 <a:solidFill>
                   <a:srgbClr val="9E1B32"/>
                 </a:solidFill>
-                <a:latin typeface="Century Schoolbook"/>
+                <a:latin typeface="Lexend"/>
               </a:rPr>
               <a:t>1/25</a:t>
             </a:r>
@@ -11940,7 +12075,7 @@
         <p:spPr>
           <a:xfrm>
             <a:off x="1874519" y="2665476"/>
-            <a:ext cx="3341646" cy="457200"/>
+            <a:ext cx="3236185" cy="457200"/>
           </a:xfrm>
           <a:prstGeom prst="rect">
             <a:avLst/>
@@ -11955,11 +12090,11 @@
           <a:p>
             <a:pPr algn="l"/>
             <a:r>
-              <a:rPr sz="2300" b="0" i="0">
+              <a:rPr sz="2180" b="0" i="0">
                 <a:solidFill>
                   <a:srgbClr val="1A1A1A"/>
                 </a:solidFill>
-                <a:latin typeface="Century Schoolbook"/>
+                <a:latin typeface="Lexend"/>
               </a:rPr>
               <a:t>3.   Which is greater,  </a:t>
             </a:r>
@@ -11968,7 +12103,7 @@
       </p:sp>
       <p:pic>
         <p:nvPicPr>
-          <p:cNvPr id="15" name="Picture 14" descr="57c771350ef6ea07.png"/>
+          <p:cNvPr id="15" name="Picture 14" descr="36070a9ce3916390.png"/>
           <p:cNvPicPr>
             <a:picLocks noChangeAspect="1"/>
           </p:cNvPicPr>
@@ -11982,8 +12117,8 @@
         </p:blipFill>
         <p:spPr>
           <a:xfrm>
-            <a:off x="5079006" y="2689860"/>
-            <a:ext cx="688848" cy="408432"/>
+            <a:off x="4973545" y="2699004"/>
+            <a:ext cx="713232" cy="390144"/>
           </a:xfrm>
           <a:prstGeom prst="rect">
             <a:avLst/>
@@ -11998,8 +12133,8 @@
         </p:nvSpPr>
         <p:spPr>
           <a:xfrm>
-            <a:off x="5767854" y="2665476"/>
-            <a:ext cx="1156543" cy="457200"/>
+            <a:off x="5686777" y="2665476"/>
+            <a:ext cx="1151644" cy="457200"/>
           </a:xfrm>
           <a:prstGeom prst="rect">
             <a:avLst/>
@@ -12014,11 +12149,11 @@
           <a:p>
             <a:pPr algn="l"/>
             <a:r>
-              <a:rPr sz="2300" b="0" i="0">
+              <a:rPr sz="2180" b="0" i="0">
                 <a:solidFill>
                   <a:srgbClr val="1A1A1A"/>
                 </a:solidFill>
-                <a:latin typeface="Century Schoolbook"/>
+                <a:latin typeface="Lexend"/>
               </a:rPr>
               <a:t>  or  9?</a:t>
             </a:r>
@@ -12033,8 +12168,8 @@
         </p:nvSpPr>
         <p:spPr>
           <a:xfrm>
-            <a:off x="7335878" y="2665476"/>
-            <a:ext cx="388052" cy="457200"/>
+            <a:off x="7249902" y="2665476"/>
+            <a:ext cx="380014" cy="457200"/>
           </a:xfrm>
           <a:prstGeom prst="rect">
             <a:avLst/>
@@ -12049,11 +12184,11 @@
           <a:p>
             <a:pPr algn="l"/>
             <a:r>
-              <a:rPr sz="2300" b="1" i="0">
+              <a:rPr sz="2180" b="1" i="0">
                 <a:solidFill>
                   <a:srgbClr val="9E1B32"/>
                 </a:solidFill>
-                <a:latin typeface="Century Schoolbook"/>
+                <a:latin typeface="Lexend"/>
               </a:rPr>
               <a:t>9</a:t>
             </a:r>
@@ -12068,8 +12203,8 @@
         </p:nvSpPr>
         <p:spPr>
           <a:xfrm>
-            <a:off x="1874519" y="3348228"/>
-            <a:ext cx="4395048" cy="457200"/>
+            <a:off x="1874519" y="3343656"/>
+            <a:ext cx="4361259" cy="457200"/>
           </a:xfrm>
           <a:prstGeom prst="rect">
             <a:avLst/>
@@ -12084,11 +12219,11 @@
           <a:p>
             <a:pPr algn="l"/>
             <a:r>
-              <a:rPr sz="2300" b="0" i="0">
+              <a:rPr sz="2180" b="0" i="0">
                 <a:solidFill>
                   <a:srgbClr val="1A1A1A"/>
                 </a:solidFill>
-                <a:latin typeface="Century Schoolbook"/>
+                <a:latin typeface="Lexend"/>
               </a:rPr>
               <a:t>4.   What is the reciprocal of  </a:t>
             </a:r>
@@ -12097,7 +12232,7 @@
       </p:sp>
       <p:pic>
         <p:nvPicPr>
-          <p:cNvPr id="19" name="Picture 18" descr="e8022fa09c25c018.png"/>
+          <p:cNvPr id="19" name="Picture 18" descr="6fa687cf29161665.png"/>
           <p:cNvPicPr>
             <a:picLocks noChangeAspect="1"/>
           </p:cNvPicPr>
@@ -12111,8 +12246,8 @@
         </p:blipFill>
         <p:spPr>
           <a:xfrm>
-            <a:off x="6132408" y="3300984"/>
-            <a:ext cx="170688" cy="551688"/>
+            <a:off x="6098619" y="3300984"/>
+            <a:ext cx="176784" cy="542544"/>
           </a:xfrm>
           <a:prstGeom prst="rect">
             <a:avLst/>
@@ -12127,8 +12262,8 @@
         </p:nvSpPr>
         <p:spPr>
           <a:xfrm>
-            <a:off x="6303096" y="3348228"/>
-            <a:ext cx="433854" cy="457200"/>
+            <a:off x="6275403" y="3343656"/>
+            <a:ext cx="443010" cy="457200"/>
           </a:xfrm>
           <a:prstGeom prst="rect">
             <a:avLst/>
@@ -12143,11 +12278,11 @@
           <a:p>
             <a:pPr algn="l"/>
             <a:r>
-              <a:rPr sz="2300" b="0" i="0">
+              <a:rPr sz="2180" b="0" i="0">
                 <a:solidFill>
                   <a:srgbClr val="1A1A1A"/>
                 </a:solidFill>
-                <a:latin typeface="Century Schoolbook"/>
+                <a:latin typeface="Lexend"/>
               </a:rPr>
               <a:t> ?</a:t>
             </a:r>
@@ -12156,7 +12291,7 @@
       </p:sp>
       <p:pic>
         <p:nvPicPr>
-          <p:cNvPr id="21" name="Picture 20" descr="0ea9c861f6451dd4.png"/>
+          <p:cNvPr id="21" name="Picture 20" descr="0ef102b5f3cf8fb5.png"/>
           <p:cNvPicPr>
             <a:picLocks noChangeAspect="1"/>
           </p:cNvPicPr>
@@ -12170,8 +12305,8 @@
         </p:blipFill>
         <p:spPr>
           <a:xfrm>
-            <a:off x="7148431" y="3300984"/>
-            <a:ext cx="170688" cy="551688"/>
+            <a:off x="7129893" y="3300984"/>
+            <a:ext cx="176784" cy="542544"/>
           </a:xfrm>
           <a:prstGeom prst="rect">
             <a:avLst/>
@@ -12220,11 +12355,11 @@
           <a:p>
             <a:pPr algn="l"/>
             <a:r>
-              <a:rPr sz="3400" b="1" i="0">
+              <a:rPr sz="3229" b="1" i="0">
                 <a:solidFill>
                   <a:srgbClr val="1A1A1A"/>
                 </a:solidFill>
-                <a:latin typeface="Century Schoolbook"/>
+                <a:latin typeface="Lexend"/>
               </a:rPr>
               <a:t>Whiteboards   ·   Question 8 of 9</a:t>
             </a:r>
@@ -12360,11 +12495,11 @@
           <a:p>
             <a:pPr algn="l"/>
             <a:r>
-              <a:rPr sz="1100" b="0" i="1">
+              <a:rPr sz="1040" b="0" i="0">
                 <a:solidFill>
                   <a:srgbClr val="6B6B6B"/>
                 </a:solidFill>
-                <a:latin typeface="Century Schoolbook"/>
+                <a:latin typeface="Lexend"/>
               </a:rPr>
               <a:t>Grade 7 Accelerated · Unit 3 · Thread A · Day 2 — Negative Exponents with Variable Bases</a:t>
             </a:r>
@@ -12395,11 +12530,11 @@
           <a:p>
             <a:pPr algn="r"/>
             <a:r>
-              <a:rPr sz="1100" b="0" i="0">
+              <a:rPr sz="1040" b="0" i="0">
                 <a:solidFill>
                   <a:srgbClr val="6B6B6B"/>
                 </a:solidFill>
-                <a:latin typeface="Century Schoolbook"/>
+                <a:latin typeface="Lexend"/>
               </a:rPr>
               <a:t>30</a:t>
             </a:r>
@@ -12414,8 +12549,8 @@
         </p:nvSpPr>
         <p:spPr>
           <a:xfrm>
-            <a:off x="4444343" y="2080260"/>
-            <a:ext cx="3047533" cy="457200"/>
+            <a:off x="4483087" y="2080260"/>
+            <a:ext cx="3006734" cy="457200"/>
           </a:xfrm>
           <a:prstGeom prst="rect">
             <a:avLst/>
@@ -12430,11 +12565,11 @@
           <a:p>
             <a:pPr algn="l"/>
             <a:r>
-              <a:rPr sz="2600" b="0" i="0">
+              <a:rPr sz="2470" b="0" i="0">
                 <a:solidFill>
                   <a:srgbClr val="1A1A1A"/>
                 </a:solidFill>
-                <a:latin typeface="Century Schoolbook"/>
+                <a:latin typeface="Lexend"/>
               </a:rPr>
               <a:t>Find the value of </a:t>
             </a:r>
@@ -12443,7 +12578,7 @@
       </p:sp>
       <p:pic>
         <p:nvPicPr>
-          <p:cNvPr id="9" name="Picture 8" descr="ce9b607ea85ce740.png"/>
+          <p:cNvPr id="9" name="Picture 8" descr="f14fce7cf077cd07.png"/>
           <p:cNvPicPr>
             <a:picLocks noChangeAspect="1"/>
           </p:cNvPicPr>
@@ -12457,8 +12592,8 @@
         </p:blipFill>
         <p:spPr>
           <a:xfrm>
-            <a:off x="7354716" y="2217420"/>
-            <a:ext cx="192024" cy="182880"/>
+            <a:off x="7352662" y="2205228"/>
+            <a:ext cx="176784" cy="207264"/>
           </a:xfrm>
           <a:prstGeom prst="rect">
             <a:avLst/>
@@ -12473,8 +12608,8 @@
         </p:nvSpPr>
         <p:spPr>
           <a:xfrm>
-            <a:off x="7546740" y="2080260"/>
-            <a:ext cx="307595" cy="457200"/>
+            <a:off x="7529446" y="2080260"/>
+            <a:ext cx="286146" cy="457200"/>
           </a:xfrm>
           <a:prstGeom prst="rect">
             <a:avLst/>
@@ -12489,11 +12624,11 @@
           <a:p>
             <a:pPr algn="l"/>
             <a:r>
-              <a:rPr sz="2600" b="0" i="0">
+              <a:rPr sz="2470" b="0" i="0">
                 <a:solidFill>
                   <a:srgbClr val="1A1A1A"/>
                 </a:solidFill>
-                <a:latin typeface="Century Schoolbook"/>
+                <a:latin typeface="Lexend"/>
               </a:rPr>
               <a:t>:</a:t>
             </a:r>
@@ -12502,7 +12637,7 @@
       </p:sp>
       <p:pic>
         <p:nvPicPr>
-          <p:cNvPr id="11" name="Picture 10" descr="06d7fcaebeec005c.png"/>
+          <p:cNvPr id="11" name="Picture 10" descr="46b0784f7c873392.png"/>
           <p:cNvPicPr>
             <a:picLocks noChangeAspect="1"/>
           </p:cNvPicPr>
@@ -12516,8 +12651,8 @@
         </p:blipFill>
         <p:spPr>
           <a:xfrm>
-            <a:off x="5123687" y="2820924"/>
-            <a:ext cx="1914144" cy="347472"/>
+            <a:off x="5119115" y="2825496"/>
+            <a:ext cx="1923288" cy="338328"/>
           </a:xfrm>
           <a:prstGeom prst="rect">
             <a:avLst/>
@@ -12527,6 +12662,89 @@
       <p:sp>
         <p:nvSpPr>
           <p:cNvPr id="12" name="TextBox 11"/>
+          <p:cNvSpPr txBox="1"/>
+          <p:nvPr/>
+        </p:nvSpPr>
+        <p:spPr>
+          <a:xfrm>
+            <a:off x="2143292" y="3525012"/>
+            <a:ext cx="6573439" cy="457200"/>
+          </a:xfrm>
+          <a:prstGeom prst="rect">
+            <a:avLst/>
+          </a:prstGeom>
+          <a:noFill/>
+        </p:spPr>
+        <p:txBody>
+          <a:bodyPr wrap="none" lIns="45720" rIns="45720" tIns="18288" bIns="18288" anchor="ctr">
+            <a:noAutofit/>
+          </a:bodyPr>
+          <a:lstStyle/>
+          <a:p>
+            <a:pPr algn="l"/>
+            <a:r>
+              <a:rPr sz="2750" b="0" i="0">
+                <a:solidFill>
+                  <a:srgbClr val="1A1A1A"/>
+                </a:solidFill>
+                <a:latin typeface="Lexend"/>
+              </a:rPr>
+              <a:t>Same base, so the exponents add:  </a:t>
+            </a:r>
+          </a:p>
+        </p:txBody>
+      </p:sp>
+      <p:pic>
+        <p:nvPicPr>
+          <p:cNvPr id="13" name="Picture 12" descr="448fa4db260ab5ea.png"/>
+          <p:cNvPicPr>
+            <a:picLocks noChangeAspect="1"/>
+          </p:cNvPicPr>
+          <p:nvPr/>
+        </p:nvPicPr>
+        <p:blipFill>
+          <a:blip r:embed="rId4"/>
+          <a:stretch>
+            <a:fillRect/>
+          </a:stretch>
+        </p:blipFill>
+        <p:spPr>
+          <a:xfrm>
+            <a:off x="8579571" y="3627120"/>
+            <a:ext cx="1438656" cy="252984"/>
+          </a:xfrm>
+          <a:prstGeom prst="rect">
+            <a:avLst/>
+          </a:prstGeom>
+        </p:spPr>
+      </p:pic>
+      <p:pic>
+        <p:nvPicPr>
+          <p:cNvPr id="14" name="Picture 13" descr="070b8a66ba960fdd.png"/>
+          <p:cNvPicPr>
+            <a:picLocks noChangeAspect="1"/>
+          </p:cNvPicPr>
+          <p:nvPr/>
+        </p:nvPicPr>
+        <p:blipFill>
+          <a:blip r:embed="rId5"/>
+          <a:stretch>
+            <a:fillRect/>
+          </a:stretch>
+        </p:blipFill>
+        <p:spPr>
+          <a:xfrm>
+            <a:off x="2198156" y="4166616"/>
+            <a:ext cx="1746504" cy="252984"/>
+          </a:xfrm>
+          <a:prstGeom prst="rect">
+            <a:avLst/>
+          </a:prstGeom>
+        </p:spPr>
+      </p:pic>
+      <p:sp>
+        <p:nvSpPr>
+          <p:cNvPr id="15" name="TextBox 14"/>
           <p:cNvSpPr txBox="1"/>
           <p:nvPr/>
         </p:nvSpPr>
@@ -12548,11 +12766,11 @@
           <a:p>
             <a:pPr algn="ctr"/>
             <a:r>
-              <a:rPr sz="3200" b="1" i="0">
+              <a:rPr sz="3040" b="1" i="0">
                 <a:solidFill>
                   <a:srgbClr val="9E1B32"/>
                 </a:solidFill>
-                <a:latin typeface="Century Schoolbook"/>
+                <a:latin typeface="Lexend"/>
               </a:rPr>
               <a:t>Answer:   n = 7</a:t>
             </a:r>
@@ -12601,11 +12819,11 @@
           <a:p>
             <a:pPr algn="l"/>
             <a:r>
-              <a:rPr sz="3400" b="1" i="0">
+              <a:rPr sz="3229" b="1" i="0">
                 <a:solidFill>
                   <a:srgbClr val="1A1A1A"/>
                 </a:solidFill>
-                <a:latin typeface="Century Schoolbook"/>
+                <a:latin typeface="Lexend"/>
               </a:rPr>
               <a:t>Whiteboards   ·   Question 9 of 9</a:t>
             </a:r>
@@ -12741,11 +12959,11 @@
           <a:p>
             <a:pPr algn="l"/>
             <a:r>
-              <a:rPr sz="1100" b="0" i="1">
+              <a:rPr sz="1040" b="0" i="0">
                 <a:solidFill>
                   <a:srgbClr val="6B6B6B"/>
                 </a:solidFill>
-                <a:latin typeface="Century Schoolbook"/>
+                <a:latin typeface="Lexend"/>
               </a:rPr>
               <a:t>Grade 7 Accelerated · Unit 3 · Thread A · Day 2 — Negative Exponents with Variable Bases</a:t>
             </a:r>
@@ -12776,11 +12994,11 @@
           <a:p>
             <a:pPr algn="r"/>
             <a:r>
-              <a:rPr sz="1100" b="0" i="0">
+              <a:rPr sz="1040" b="0" i="0">
                 <a:solidFill>
                   <a:srgbClr val="6B6B6B"/>
                 </a:solidFill>
-                <a:latin typeface="Century Schoolbook"/>
+                <a:latin typeface="Lexend"/>
               </a:rPr>
               <a:t>31</a:t>
             </a:r>
@@ -12795,8 +13013,8 @@
         </p:nvSpPr>
         <p:spPr>
           <a:xfrm>
-            <a:off x="3506774" y="2171700"/>
-            <a:ext cx="1757285" cy="457200"/>
+            <a:off x="3519191" y="2171700"/>
+            <a:ext cx="1738535" cy="457200"/>
           </a:xfrm>
           <a:prstGeom prst="rect">
             <a:avLst/>
@@ -12811,11 +13029,11 @@
           <a:p>
             <a:pPr algn="l"/>
             <a:r>
-              <a:rPr sz="2600" b="0" i="0">
+              <a:rPr sz="2470" b="0" i="0">
                 <a:solidFill>
                   <a:srgbClr val="1A1A1A"/>
                 </a:solidFill>
-                <a:latin typeface="Century Schoolbook"/>
+                <a:latin typeface="Lexend"/>
               </a:rPr>
               <a:t>How are  </a:t>
             </a:r>
@@ -12824,7 +13042,7 @@
       </p:sp>
       <p:pic>
         <p:nvPicPr>
-          <p:cNvPr id="9" name="Picture 8" descr="cc078cbc81823c99.png"/>
+          <p:cNvPr id="9" name="Picture 8" descr="7f8cc9402f9faa55.png"/>
           <p:cNvPicPr>
             <a:picLocks noChangeAspect="1"/>
           </p:cNvPicPr>
@@ -12838,8 +13056,8 @@
         </p:blipFill>
         <p:spPr>
           <a:xfrm>
-            <a:off x="5126899" y="2228088"/>
-            <a:ext cx="344424" cy="344424"/>
+            <a:off x="5120567" y="2232660"/>
+            <a:ext cx="362712" cy="335280"/>
           </a:xfrm>
           <a:prstGeom prst="rect">
             <a:avLst/>
@@ -12854,8 +13072,8 @@
         </p:nvSpPr>
         <p:spPr>
           <a:xfrm>
-            <a:off x="5471323" y="2171700"/>
-            <a:ext cx="1208866" cy="457200"/>
+            <a:off x="5483279" y="2171700"/>
+            <a:ext cx="1201901" cy="457200"/>
           </a:xfrm>
           <a:prstGeom prst="rect">
             <a:avLst/>
@@ -12870,11 +13088,11 @@
           <a:p>
             <a:pPr algn="l"/>
             <a:r>
-              <a:rPr sz="2600" b="0" i="0">
+              <a:rPr sz="2470" b="0" i="0">
                 <a:solidFill>
                   <a:srgbClr val="1A1A1A"/>
                 </a:solidFill>
-                <a:latin typeface="Century Schoolbook"/>
+                <a:latin typeface="Lexend"/>
               </a:rPr>
               <a:t>  and  </a:t>
             </a:r>
@@ -12883,7 +13101,7 @@
       </p:sp>
       <p:pic>
         <p:nvPicPr>
-          <p:cNvPr id="11" name="Picture 10" descr="d31e0d14216148d7.png"/>
+          <p:cNvPr id="11" name="Picture 10" descr="985ff9dbb24c3672.png"/>
           <p:cNvPicPr>
             <a:picLocks noChangeAspect="1"/>
           </p:cNvPicPr>
@@ -12897,8 +13115,8 @@
         </p:blipFill>
         <p:spPr>
           <a:xfrm>
-            <a:off x="6543030" y="2228088"/>
-            <a:ext cx="539496" cy="344424"/>
+            <a:off x="6548020" y="2232660"/>
+            <a:ext cx="521207" cy="335280"/>
           </a:xfrm>
           <a:prstGeom prst="rect">
             <a:avLst/>
@@ -12913,8 +13131,8 @@
         </p:nvSpPr>
         <p:spPr>
           <a:xfrm>
-            <a:off x="7082526" y="2171700"/>
-            <a:ext cx="1709379" cy="457200"/>
+            <a:off x="7069228" y="2171700"/>
+            <a:ext cx="1710260" cy="457200"/>
           </a:xfrm>
           <a:prstGeom prst="rect">
             <a:avLst/>
@@ -12929,11 +13147,11 @@
           <a:p>
             <a:pPr algn="l"/>
             <a:r>
-              <a:rPr sz="2600" b="0" i="0">
+              <a:rPr sz="2470" b="0" i="0">
                 <a:solidFill>
                   <a:srgbClr val="1A1A1A"/>
                 </a:solidFill>
-                <a:latin typeface="Century Schoolbook"/>
+                <a:latin typeface="Lexend"/>
               </a:rPr>
               <a:t>  related?</a:t>
             </a:r>
@@ -12948,8 +13166,8 @@
         </p:nvSpPr>
         <p:spPr>
           <a:xfrm>
-            <a:off x="2165540" y="2857500"/>
-            <a:ext cx="7013828" cy="457200"/>
+            <a:off x="2194335" y="2857500"/>
+            <a:ext cx="6986830" cy="457200"/>
           </a:xfrm>
           <a:prstGeom prst="rect">
             <a:avLst/>
@@ -12964,11 +13182,11 @@
           <a:p>
             <a:pPr algn="l"/>
             <a:r>
-              <a:rPr sz="2600" b="0" i="0">
+              <a:rPr sz="2470" b="0" i="0">
                 <a:solidFill>
                   <a:srgbClr val="1A1A1A"/>
                 </a:solidFill>
-                <a:latin typeface="Century Schoolbook"/>
+                <a:latin typeface="Lexend"/>
               </a:rPr>
               <a:t>Explain, and give the value of each when  </a:t>
             </a:r>
@@ -12977,7 +13195,7 @@
       </p:sp>
       <p:pic>
         <p:nvPicPr>
-          <p:cNvPr id="14" name="Picture 13" descr="118dd4b796dc8502.png"/>
+          <p:cNvPr id="14" name="Picture 13" descr="1c40b7a80b3cb06b.png"/>
           <p:cNvPicPr>
             <a:picLocks noChangeAspect="1"/>
           </p:cNvPicPr>
@@ -12991,8 +13209,8 @@
         </p:blipFill>
         <p:spPr>
           <a:xfrm>
-            <a:off x="9042208" y="2945892"/>
-            <a:ext cx="783336" cy="280416"/>
+            <a:off x="9044006" y="2948940"/>
+            <a:ext cx="774192" cy="274320"/>
           </a:xfrm>
           <a:prstGeom prst="rect">
             <a:avLst/>
@@ -13007,8 +13225,8 @@
         </p:nvSpPr>
         <p:spPr>
           <a:xfrm>
-            <a:off x="9825544" y="2857500"/>
-            <a:ext cx="307595" cy="457200"/>
+            <a:off x="9818198" y="2857500"/>
+            <a:ext cx="286146" cy="457200"/>
           </a:xfrm>
           <a:prstGeom prst="rect">
             <a:avLst/>
@@ -13023,11 +13241,11 @@
           <a:p>
             <a:pPr algn="l"/>
             <a:r>
-              <a:rPr sz="2600" b="0" i="0">
+              <a:rPr sz="2470" b="0" i="0">
                 <a:solidFill>
                   <a:srgbClr val="1A1A1A"/>
                 </a:solidFill>
-                <a:latin typeface="Century Schoolbook"/>
+                <a:latin typeface="Lexend"/>
               </a:rPr>
               <a:t>.</a:t>
             </a:r>
@@ -13058,11 +13276,11 @@
           <a:p>
             <a:pPr algn="ctr"/>
             <a:r>
-              <a:rPr sz="2600" b="1" i="0">
+              <a:rPr sz="2470" b="1" i="0">
                 <a:solidFill>
                   <a:srgbClr val="1A1A1A"/>
                 </a:solidFill>
-                <a:latin typeface="Century Schoolbook"/>
+                <a:latin typeface="Lexend"/>
               </a:rPr>
               <a:t>Write your answer in sentences.</a:t>
             </a:r>
@@ -13111,11 +13329,11 @@
           <a:p>
             <a:pPr algn="l"/>
             <a:r>
-              <a:rPr sz="3400" b="1" i="0">
+              <a:rPr sz="3229" b="1" i="0">
                 <a:solidFill>
                   <a:srgbClr val="1A1A1A"/>
                 </a:solidFill>
-                <a:latin typeface="Century Schoolbook"/>
+                <a:latin typeface="Lexend"/>
               </a:rPr>
               <a:t>Whiteboards   ·   Question 9 of 9</a:t>
             </a:r>
@@ -13251,11 +13469,11 @@
           <a:p>
             <a:pPr algn="l"/>
             <a:r>
-              <a:rPr sz="1100" b="0" i="1">
+              <a:rPr sz="1040" b="0" i="0">
                 <a:solidFill>
                   <a:srgbClr val="6B6B6B"/>
                 </a:solidFill>
-                <a:latin typeface="Century Schoolbook"/>
+                <a:latin typeface="Lexend"/>
               </a:rPr>
               <a:t>Grade 7 Accelerated · Unit 3 · Thread A · Day 2 — Negative Exponents with Variable Bases</a:t>
             </a:r>
@@ -13286,11 +13504,11 @@
           <a:p>
             <a:pPr algn="r"/>
             <a:r>
-              <a:rPr sz="1100" b="0" i="0">
+              <a:rPr sz="1040" b="0" i="0">
                 <a:solidFill>
                   <a:srgbClr val="6B6B6B"/>
                 </a:solidFill>
-                <a:latin typeface="Century Schoolbook"/>
+                <a:latin typeface="Lexend"/>
               </a:rPr>
               <a:t>32</a:t>
             </a:r>
@@ -13305,8 +13523,8 @@
         </p:nvSpPr>
         <p:spPr>
           <a:xfrm>
-            <a:off x="3506774" y="2080260"/>
-            <a:ext cx="1757285" cy="457200"/>
+            <a:off x="3519191" y="2080260"/>
+            <a:ext cx="1738535" cy="457200"/>
           </a:xfrm>
           <a:prstGeom prst="rect">
             <a:avLst/>
@@ -13321,11 +13539,11 @@
           <a:p>
             <a:pPr algn="l"/>
             <a:r>
-              <a:rPr sz="2600" b="0" i="0">
+              <a:rPr sz="2470" b="0" i="0">
                 <a:solidFill>
                   <a:srgbClr val="1A1A1A"/>
                 </a:solidFill>
-                <a:latin typeface="Century Schoolbook"/>
+                <a:latin typeface="Lexend"/>
               </a:rPr>
               <a:t>How are  </a:t>
             </a:r>
@@ -13334,7 +13552,7 @@
       </p:sp>
       <p:pic>
         <p:nvPicPr>
-          <p:cNvPr id="9" name="Picture 8" descr="3da309422df21aa5.png"/>
+          <p:cNvPr id="9" name="Picture 8" descr="fb0a7a04003102df.png"/>
           <p:cNvPicPr>
             <a:picLocks noChangeAspect="1"/>
           </p:cNvPicPr>
@@ -13348,8 +13566,8 @@
         </p:blipFill>
         <p:spPr>
           <a:xfrm>
-            <a:off x="5126899" y="2136648"/>
-            <a:ext cx="344424" cy="344424"/>
+            <a:off x="5120567" y="2141219"/>
+            <a:ext cx="362712" cy="335280"/>
           </a:xfrm>
           <a:prstGeom prst="rect">
             <a:avLst/>
@@ -13364,8 +13582,8 @@
         </p:nvSpPr>
         <p:spPr>
           <a:xfrm>
-            <a:off x="5471323" y="2080260"/>
-            <a:ext cx="1208866" cy="457200"/>
+            <a:off x="5483279" y="2080260"/>
+            <a:ext cx="1201901" cy="457200"/>
           </a:xfrm>
           <a:prstGeom prst="rect">
             <a:avLst/>
@@ -13380,11 +13598,11 @@
           <a:p>
             <a:pPr algn="l"/>
             <a:r>
-              <a:rPr sz="2600" b="0" i="0">
+              <a:rPr sz="2470" b="0" i="0">
                 <a:solidFill>
                   <a:srgbClr val="1A1A1A"/>
                 </a:solidFill>
-                <a:latin typeface="Century Schoolbook"/>
+                <a:latin typeface="Lexend"/>
               </a:rPr>
               <a:t>  and  </a:t>
             </a:r>
@@ -13393,7 +13611,7 @@
       </p:sp>
       <p:pic>
         <p:nvPicPr>
-          <p:cNvPr id="11" name="Picture 10" descr="50a3dff9085ab532.png"/>
+          <p:cNvPr id="11" name="Picture 10" descr="127b4fbd30bb78c2.png"/>
           <p:cNvPicPr>
             <a:picLocks noChangeAspect="1"/>
           </p:cNvPicPr>
@@ -13407,8 +13625,8 @@
         </p:blipFill>
         <p:spPr>
           <a:xfrm>
-            <a:off x="6543030" y="2136648"/>
-            <a:ext cx="539496" cy="344424"/>
+            <a:off x="6548020" y="2141219"/>
+            <a:ext cx="521207" cy="335280"/>
           </a:xfrm>
           <a:prstGeom prst="rect">
             <a:avLst/>
@@ -13423,8 +13641,8 @@
         </p:nvSpPr>
         <p:spPr>
           <a:xfrm>
-            <a:off x="7082526" y="2080260"/>
-            <a:ext cx="1709379" cy="457200"/>
+            <a:off x="7069228" y="2080260"/>
+            <a:ext cx="1710260" cy="457200"/>
           </a:xfrm>
           <a:prstGeom prst="rect">
             <a:avLst/>
@@ -13439,11 +13657,11 @@
           <a:p>
             <a:pPr algn="l"/>
             <a:r>
-              <a:rPr sz="2600" b="0" i="0">
+              <a:rPr sz="2470" b="0" i="0">
                 <a:solidFill>
                   <a:srgbClr val="1A1A1A"/>
                 </a:solidFill>
-                <a:latin typeface="Century Schoolbook"/>
+                <a:latin typeface="Lexend"/>
               </a:rPr>
               <a:t>  related?</a:t>
             </a:r>
@@ -13458,8 +13676,8 @@
         </p:nvSpPr>
         <p:spPr>
           <a:xfrm>
-            <a:off x="2164016" y="2766060"/>
-            <a:ext cx="7013828" cy="457200"/>
+            <a:off x="2194335" y="2766060"/>
+            <a:ext cx="6986830" cy="457200"/>
           </a:xfrm>
           <a:prstGeom prst="rect">
             <a:avLst/>
@@ -13474,11 +13692,11 @@
           <a:p>
             <a:pPr algn="l"/>
             <a:r>
-              <a:rPr sz="2600" b="0" i="0">
+              <a:rPr sz="2470" b="0" i="0">
                 <a:solidFill>
                   <a:srgbClr val="1A1A1A"/>
                 </a:solidFill>
-                <a:latin typeface="Century Schoolbook"/>
+                <a:latin typeface="Lexend"/>
               </a:rPr>
               <a:t>Explain, and give the value of each when  </a:t>
             </a:r>
@@ -13487,7 +13705,7 @@
       </p:sp>
       <p:pic>
         <p:nvPicPr>
-          <p:cNvPr id="14" name="Picture 13" descr="2cebf16dedade385.png"/>
+          <p:cNvPr id="14" name="Picture 13" descr="1c40b7a80b3cb06b.png"/>
           <p:cNvPicPr>
             <a:picLocks noChangeAspect="1"/>
           </p:cNvPicPr>
@@ -13501,8 +13719,8 @@
         </p:blipFill>
         <p:spPr>
           <a:xfrm>
-            <a:off x="9040684" y="2854452"/>
-            <a:ext cx="786384" cy="280416"/>
+            <a:off x="9044006" y="2857500"/>
+            <a:ext cx="774192" cy="274320"/>
           </a:xfrm>
           <a:prstGeom prst="rect">
             <a:avLst/>
@@ -13517,8 +13735,8 @@
         </p:nvSpPr>
         <p:spPr>
           <a:xfrm>
-            <a:off x="9827068" y="2766060"/>
-            <a:ext cx="307595" cy="457200"/>
+            <a:off x="9818198" y="2766060"/>
+            <a:ext cx="286146" cy="457200"/>
           </a:xfrm>
           <a:prstGeom prst="rect">
             <a:avLst/>
@@ -13533,26 +13751,286 @@
           <a:p>
             <a:pPr algn="l"/>
             <a:r>
-              <a:rPr sz="2600" b="0" i="0">
+              <a:rPr sz="2470" b="0" i="0">
                 <a:solidFill>
                   <a:srgbClr val="1A1A1A"/>
                 </a:solidFill>
-                <a:latin typeface="Century Schoolbook"/>
+                <a:latin typeface="Lexend"/>
               </a:rPr>
               <a:t>.</a:t>
             </a:r>
           </a:p>
         </p:txBody>
       </p:sp>
-      <p:sp>
-        <p:nvSpPr>
-          <p:cNvPr id="16" name="TextBox 15"/>
-          <p:cNvSpPr txBox="1"/>
-          <p:nvPr/>
-        </p:nvSpPr>
-        <p:spPr>
-          <a:xfrm>
-            <a:off x="777240" y="4663440"/>
+      <p:pic>
+        <p:nvPicPr>
+          <p:cNvPr id="16" name="Picture 15" descr="4b887876abd33259.png"/>
+          <p:cNvPicPr>
+            <a:picLocks noChangeAspect="1"/>
+          </p:cNvPicPr>
+          <p:nvPr/>
+        </p:nvPicPr>
+        <p:blipFill>
+          <a:blip r:embed="rId5"/>
+          <a:stretch>
+            <a:fillRect/>
+          </a:stretch>
+        </p:blipFill>
+        <p:spPr>
+          <a:xfrm>
+            <a:off x="3343157" y="3547872"/>
+            <a:ext cx="1164336" cy="658368"/>
+          </a:xfrm>
+          <a:prstGeom prst="rect">
+            <a:avLst/>
+          </a:prstGeom>
+        </p:spPr>
+      </p:pic>
+      <p:sp>
+        <p:nvSpPr>
+          <p:cNvPr id="17" name="TextBox 16"/>
+          <p:cNvSpPr txBox="1"/>
+          <p:nvPr/>
+        </p:nvSpPr>
+        <p:spPr>
+          <a:xfrm>
+            <a:off x="4507493" y="3648456"/>
+            <a:ext cx="3876979" cy="457200"/>
+          </a:xfrm>
+          <a:prstGeom prst="rect">
+            <a:avLst/>
+          </a:prstGeom>
+          <a:noFill/>
+        </p:spPr>
+        <p:txBody>
+          <a:bodyPr wrap="none" lIns="45720" rIns="45720" tIns="18288" bIns="18288" anchor="ctr">
+            <a:noAutofit/>
+          </a:bodyPr>
+          <a:lstStyle/>
+          <a:p>
+            <a:pPr algn="l"/>
+            <a:r>
+              <a:rPr sz="2750" b="0" i="0">
+                <a:solidFill>
+                  <a:srgbClr val="1A1A1A"/>
+                </a:solidFill>
+                <a:latin typeface="Lexend"/>
+              </a:rPr>
+              <a:t>,   the reciprocal of   </a:t>
+            </a:r>
+          </a:p>
+        </p:txBody>
+      </p:sp>
+      <p:pic>
+        <p:nvPicPr>
+          <p:cNvPr id="18" name="Picture 17" descr="0273c9ade1e97bbe.png"/>
+          <p:cNvPicPr>
+            <a:picLocks noChangeAspect="1"/>
+          </p:cNvPicPr>
+          <p:nvPr/>
+        </p:nvPicPr>
+        <p:blipFill>
+          <a:blip r:embed="rId6"/>
+          <a:stretch>
+            <a:fillRect/>
+          </a:stretch>
+        </p:blipFill>
+        <p:spPr>
+          <a:xfrm>
+            <a:off x="8247312" y="3726180"/>
+            <a:ext cx="329184" cy="301752"/>
+          </a:xfrm>
+          <a:prstGeom prst="rect">
+            <a:avLst/>
+          </a:prstGeom>
+        </p:spPr>
+      </p:pic>
+      <p:sp>
+        <p:nvSpPr>
+          <p:cNvPr id="19" name="TextBox 18"/>
+          <p:cNvSpPr txBox="1"/>
+          <p:nvPr/>
+        </p:nvSpPr>
+        <p:spPr>
+          <a:xfrm>
+            <a:off x="3288293" y="4407408"/>
+            <a:ext cx="1342179" cy="457200"/>
+          </a:xfrm>
+          <a:prstGeom prst="rect">
+            <a:avLst/>
+          </a:prstGeom>
+          <a:noFill/>
+        </p:spPr>
+        <p:txBody>
+          <a:bodyPr wrap="none" lIns="45720" rIns="45720" tIns="18288" bIns="18288" anchor="ctr">
+            <a:noAutofit/>
+          </a:bodyPr>
+          <a:lstStyle/>
+          <a:p>
+            <a:pPr algn="l"/>
+            <a:r>
+              <a:rPr sz="2750" b="0" i="0">
+                <a:solidFill>
+                  <a:srgbClr val="1A1A1A"/>
+                </a:solidFill>
+                <a:latin typeface="Lexend"/>
+              </a:rPr>
+              <a:t>When </a:t>
+            </a:r>
+          </a:p>
+        </p:txBody>
+      </p:sp>
+      <p:pic>
+        <p:nvPicPr>
+          <p:cNvPr id="20" name="Picture 19" descr="07b139cdbb0c92ad.png"/>
+          <p:cNvPicPr>
+            <a:picLocks noChangeAspect="1"/>
+          </p:cNvPicPr>
+          <p:nvPr/>
+        </p:nvPicPr>
+        <p:blipFill>
+          <a:blip r:embed="rId7"/>
+          <a:stretch>
+            <a:fillRect/>
+          </a:stretch>
+        </p:blipFill>
+        <p:spPr>
+          <a:xfrm>
+            <a:off x="4493312" y="4511040"/>
+            <a:ext cx="704088" cy="249935"/>
+          </a:xfrm>
+          <a:prstGeom prst="rect">
+            <a:avLst/>
+          </a:prstGeom>
+        </p:spPr>
+      </p:pic>
+      <p:sp>
+        <p:nvSpPr>
+          <p:cNvPr id="21" name="TextBox 20"/>
+          <p:cNvSpPr txBox="1"/>
+          <p:nvPr/>
+        </p:nvSpPr>
+        <p:spPr>
+          <a:xfrm>
+            <a:off x="5197400" y="4407408"/>
+            <a:ext cx="606468" cy="457200"/>
+          </a:xfrm>
+          <a:prstGeom prst="rect">
+            <a:avLst/>
+          </a:prstGeom>
+          <a:noFill/>
+        </p:spPr>
+        <p:txBody>
+          <a:bodyPr wrap="none" lIns="45720" rIns="45720" tIns="18288" bIns="18288" anchor="ctr">
+            <a:noAutofit/>
+          </a:bodyPr>
+          <a:lstStyle/>
+          <a:p>
+            <a:pPr algn="l"/>
+            <a:r>
+              <a:rPr sz="2750" b="0" i="0">
+                <a:solidFill>
+                  <a:srgbClr val="1A1A1A"/>
+                </a:solidFill>
+                <a:latin typeface="Lexend"/>
+              </a:rPr>
+              <a:t>:   </a:t>
+            </a:r>
+          </a:p>
+        </p:txBody>
+      </p:sp>
+      <p:pic>
+        <p:nvPicPr>
+          <p:cNvPr id="22" name="Picture 21" descr="5e737102846c6421.png"/>
+          <p:cNvPicPr>
+            <a:picLocks noChangeAspect="1"/>
+          </p:cNvPicPr>
+          <p:nvPr/>
+        </p:nvPicPr>
+        <p:blipFill>
+          <a:blip r:embed="rId8"/>
+          <a:stretch>
+            <a:fillRect/>
+          </a:stretch>
+        </p:blipFill>
+        <p:spPr>
+          <a:xfrm>
+            <a:off x="5666708" y="4485132"/>
+            <a:ext cx="829056" cy="301752"/>
+          </a:xfrm>
+          <a:prstGeom prst="rect">
+            <a:avLst/>
+          </a:prstGeom>
+        </p:spPr>
+      </p:pic>
+      <p:sp>
+        <p:nvSpPr>
+          <p:cNvPr id="23" name="TextBox 22"/>
+          <p:cNvSpPr txBox="1"/>
+          <p:nvPr/>
+        </p:nvSpPr>
+        <p:spPr>
+          <a:xfrm>
+            <a:off x="6495764" y="4407408"/>
+            <a:ext cx="1524021" cy="457200"/>
+          </a:xfrm>
+          <a:prstGeom prst="rect">
+            <a:avLst/>
+          </a:prstGeom>
+          <a:noFill/>
+        </p:spPr>
+        <p:txBody>
+          <a:bodyPr wrap="none" lIns="45720" rIns="45720" tIns="18288" bIns="18288" anchor="ctr">
+            <a:noAutofit/>
+          </a:bodyPr>
+          <a:lstStyle/>
+          <a:p>
+            <a:pPr algn="l"/>
+            <a:r>
+              <a:rPr sz="2750" b="0" i="0">
+                <a:solidFill>
+                  <a:srgbClr val="1A1A1A"/>
+                </a:solidFill>
+                <a:latin typeface="Lexend"/>
+              </a:rPr>
+              <a:t>   and   </a:t>
+            </a:r>
+          </a:p>
+        </p:txBody>
+      </p:sp>
+      <p:pic>
+        <p:nvPicPr>
+          <p:cNvPr id="24" name="Picture 23" descr="175de81595c1b41a.png"/>
+          <p:cNvPicPr>
+            <a:picLocks noChangeAspect="1"/>
+          </p:cNvPicPr>
+          <p:nvPr/>
+        </p:nvPicPr>
+        <p:blipFill>
+          <a:blip r:embed="rId9"/>
+          <a:stretch>
+            <a:fillRect/>
+          </a:stretch>
+        </p:blipFill>
+        <p:spPr>
+          <a:xfrm>
+            <a:off x="7882626" y="4334256"/>
+            <a:ext cx="987552" cy="603504"/>
+          </a:xfrm>
+          <a:prstGeom prst="rect">
+            <a:avLst/>
+          </a:prstGeom>
+        </p:spPr>
+      </p:pic>
+      <p:sp>
+        <p:nvSpPr>
+          <p:cNvPr id="25" name="TextBox 24"/>
+          <p:cNvSpPr txBox="1"/>
+          <p:nvPr/>
+        </p:nvSpPr>
+        <p:spPr>
+          <a:xfrm>
+            <a:off x="777240" y="5074920"/>
             <a:ext cx="10607040" cy="1072896"/>
           </a:xfrm>
           <a:prstGeom prst="rect">
@@ -13568,83 +14046,83 @@
           <a:p>
             <a:pPr algn="ctr"/>
             <a:r>
-              <a:rPr sz="3200" b="1" i="0">
+              <a:rPr sz="3040" b="1" i="0">
                 <a:solidFill>
                   <a:srgbClr val="9E1B32"/>
                 </a:solidFill>
-                <a:latin typeface="Century Schoolbook"/>
+                <a:latin typeface="Lexend"/>
               </a:rPr>
               <a:t>Answer:   x</a:t>
             </a:r>
             <a:r>
-              <a:rPr sz="3200" b="1" i="0" baseline="30000">
+              <a:rPr sz="3040" b="1" i="0" baseline="30000">
                 <a:solidFill>
                   <a:srgbClr val="9E1B32"/>
                 </a:solidFill>
-                <a:latin typeface="Century Schoolbook"/>
+                <a:latin typeface="Lexend"/>
               </a:rPr>
               <a:t>-3</a:t>
             </a:r>
             <a:r>
-              <a:rPr sz="3200" b="1" i="0">
+              <a:rPr sz="3040" b="1" i="0">
                 <a:solidFill>
                   <a:srgbClr val="9E1B32"/>
                 </a:solidFill>
-                <a:latin typeface="Century Schoolbook"/>
+                <a:latin typeface="Lexend"/>
               </a:rPr>
               <a:t> is the reciprocal of x</a:t>
             </a:r>
             <a:r>
-              <a:rPr sz="3200" b="1" i="0" baseline="30000">
+              <a:rPr sz="3040" b="1" i="0" baseline="30000">
                 <a:solidFill>
                   <a:srgbClr val="9E1B32"/>
                 </a:solidFill>
-                <a:latin typeface="Century Schoolbook"/>
+                <a:latin typeface="Lexend"/>
               </a:rPr>
               <a:t>3</a:t>
             </a:r>
             <a:r>
-              <a:rPr sz="3200" b="1" i="0">
+              <a:rPr sz="3040" b="1" i="0">
                 <a:solidFill>
                   <a:srgbClr val="9E1B32"/>
                 </a:solidFill>
-                <a:latin typeface="Century Schoolbook"/>
+                <a:latin typeface="Lexend"/>
               </a:rPr>
               <a:t>. When x = 2: x</a:t>
             </a:r>
             <a:r>
-              <a:rPr sz="3200" b="1" i="0" baseline="30000">
+              <a:rPr sz="3040" b="1" i="0" baseline="30000">
                 <a:solidFill>
                   <a:srgbClr val="9E1B32"/>
                 </a:solidFill>
-                <a:latin typeface="Century Schoolbook"/>
+                <a:latin typeface="Lexend"/>
               </a:rPr>
               <a:t>3</a:t>
             </a:r>
             <a:r>
-              <a:rPr sz="3200" b="1" i="0">
+              <a:rPr sz="3040" b="1" i="0">
                 <a:solidFill>
                   <a:srgbClr val="9E1B32"/>
                 </a:solidFill>
-                <a:latin typeface="Century Schoolbook"/>
+                <a:latin typeface="Lexend"/>
               </a:rPr>
               <a:t> = 8 and x</a:t>
             </a:r>
             <a:r>
-              <a:rPr sz="3200" b="1" i="0" baseline="30000">
+              <a:rPr sz="3040" b="1" i="0" baseline="30000">
                 <a:solidFill>
                   <a:srgbClr val="9E1B32"/>
                 </a:solidFill>
-                <a:latin typeface="Century Schoolbook"/>
+                <a:latin typeface="Lexend"/>
               </a:rPr>
               <a:t>-3</a:t>
             </a:r>
             <a:r>
-              <a:rPr sz="3200" b="1" i="0">
+              <a:rPr sz="3040" b="1" i="0">
                 <a:solidFill>
                   <a:srgbClr val="9E1B32"/>
                 </a:solidFill>
-                <a:latin typeface="Century Schoolbook"/>
+                <a:latin typeface="Lexend"/>
               </a:rPr>
               <a:t> = 1/8.</a:t>
             </a:r>
@@ -13693,11 +14171,11 @@
           <a:p>
             <a:pPr algn="l"/>
             <a:r>
-              <a:rPr sz="3600" b="1" i="0">
+              <a:rPr sz="3420" b="1" i="0">
                 <a:solidFill>
                   <a:srgbClr val="1A1A1A"/>
                 </a:solidFill>
-                <a:latin typeface="Century Schoolbook"/>
+                <a:latin typeface="Lexend"/>
               </a:rPr>
               <a:t>Independent Set</a:t>
             </a:r>
@@ -13833,11 +14311,11 @@
           <a:p>
             <a:pPr algn="l"/>
             <a:r>
-              <a:rPr sz="1100" b="0" i="1">
+              <a:rPr sz="1040" b="0" i="0">
                 <a:solidFill>
                   <a:srgbClr val="6B6B6B"/>
                 </a:solidFill>
-                <a:latin typeface="Century Schoolbook"/>
+                <a:latin typeface="Lexend"/>
               </a:rPr>
               <a:t>Grade 7 Accelerated · Unit 3 · Thread A · Day 2 — Negative Exponents with Variable Bases</a:t>
             </a:r>
@@ -13868,11 +14346,11 @@
           <a:p>
             <a:pPr algn="r"/>
             <a:r>
-              <a:rPr sz="1100" b="0" i="0">
+              <a:rPr sz="1040" b="0" i="0">
                 <a:solidFill>
                   <a:srgbClr val="6B6B6B"/>
                 </a:solidFill>
-                <a:latin typeface="Century Schoolbook"/>
+                <a:latin typeface="Lexend"/>
               </a:rPr>
               <a:t>33</a:t>
             </a:r>
@@ -13903,11 +14381,11 @@
           <a:p>
             <a:pPr algn="l"/>
             <a:r>
-              <a:rPr sz="2300" b="1" i="0">
+              <a:rPr sz="2180" b="1" i="0">
                 <a:solidFill>
                   <a:srgbClr val="0B5394"/>
                 </a:solidFill>
-                <a:latin typeface="Century Schoolbook"/>
+                <a:latin typeface="Lexend"/>
               </a:rPr>
               <a:t>1.</a:t>
             </a:r>
@@ -13923,7 +14401,7 @@
         <p:spPr>
           <a:xfrm>
             <a:off x="1554480" y="1495044"/>
-            <a:ext cx="5875657" cy="457200"/>
+            <a:ext cx="5827436" cy="457200"/>
           </a:xfrm>
           <a:prstGeom prst="rect">
             <a:avLst/>
@@ -13938,11 +14416,11 @@
           <a:p>
             <a:pPr algn="l"/>
             <a:r>
-              <a:rPr sz="2300" b="0" i="0">
+              <a:rPr sz="2180" b="0" i="0">
                 <a:solidFill>
                   <a:srgbClr val="1A1A1A"/>
                 </a:solidFill>
-                <a:latin typeface="Century Schoolbook"/>
+                <a:latin typeface="Lexend"/>
               </a:rPr>
               <a:t>Rewrite using only positive exponents.  </a:t>
             </a:r>
@@ -13951,7 +14429,7 @@
       </p:sp>
       <p:pic>
         <p:nvPicPr>
-          <p:cNvPr id="10" name="Picture 9" descr="ba5843684750475f.png"/>
+          <p:cNvPr id="10" name="Picture 9" descr="d0b6a1cb6c510439.png"/>
           <p:cNvPicPr>
             <a:picLocks noChangeAspect="1"/>
           </p:cNvPicPr>
@@ -13965,8 +14443,8 @@
         </p:blipFill>
         <p:spPr>
           <a:xfrm>
-            <a:off x="7292977" y="1584959"/>
-            <a:ext cx="521207" cy="277368"/>
+            <a:off x="7244756" y="1588008"/>
+            <a:ext cx="524256" cy="271272"/>
           </a:xfrm>
           <a:prstGeom prst="rect">
             <a:avLst/>
@@ -13997,11 +14475,11 @@
           <a:p>
             <a:pPr algn="l"/>
             <a:r>
-              <a:rPr sz="2300" b="1" i="0">
+              <a:rPr sz="2180" b="1" i="0">
                 <a:solidFill>
                   <a:srgbClr val="0B5394"/>
                 </a:solidFill>
-                <a:latin typeface="Century Schoolbook"/>
+                <a:latin typeface="Lexend"/>
               </a:rPr>
               <a:t>2.</a:t>
             </a:r>
@@ -14017,7 +14495,7 @@
         <p:spPr>
           <a:xfrm>
             <a:off x="1554480" y="2089403"/>
-            <a:ext cx="5875657" cy="457200"/>
+            <a:ext cx="5827436" cy="457200"/>
           </a:xfrm>
           <a:prstGeom prst="rect">
             <a:avLst/>
@@ -14032,11 +14510,11 @@
           <a:p>
             <a:pPr algn="l"/>
             <a:r>
-              <a:rPr sz="2300" b="0" i="0">
+              <a:rPr sz="2180" b="0" i="0">
                 <a:solidFill>
                   <a:srgbClr val="1A1A1A"/>
                 </a:solidFill>
-                <a:latin typeface="Century Schoolbook"/>
+                <a:latin typeface="Lexend"/>
               </a:rPr>
               <a:t>Rewrite using only positive exponents.  </a:t>
             </a:r>
@@ -14045,7 +14523,7 @@
       </p:sp>
       <p:pic>
         <p:nvPicPr>
-          <p:cNvPr id="13" name="Picture 12" descr="e1af689e41d8f915.png"/>
+          <p:cNvPr id="13" name="Picture 12" descr="43c032e9738a9353.png"/>
           <p:cNvPicPr>
             <a:picLocks noChangeAspect="1"/>
           </p:cNvPicPr>
@@ -14059,8 +14537,8 @@
         </p:blipFill>
         <p:spPr>
           <a:xfrm>
-            <a:off x="7292977" y="2147315"/>
-            <a:ext cx="579120" cy="341376"/>
+            <a:off x="7244756" y="2147315"/>
+            <a:ext cx="597408" cy="341376"/>
           </a:xfrm>
           <a:prstGeom prst="rect">
             <a:avLst/>
@@ -14075,7 +14553,7 @@
         </p:nvSpPr>
         <p:spPr>
           <a:xfrm>
-            <a:off x="960120" y="2778251"/>
+            <a:off x="960120" y="2772155"/>
             <a:ext cx="548640" cy="457200"/>
           </a:xfrm>
           <a:prstGeom prst="rect">
@@ -14091,11 +14569,11 @@
           <a:p>
             <a:pPr algn="l"/>
             <a:r>
-              <a:rPr sz="2300" b="1" i="0">
+              <a:rPr sz="2180" b="1" i="0">
                 <a:solidFill>
                   <a:srgbClr val="0B5394"/>
                 </a:solidFill>
-                <a:latin typeface="Century Schoolbook"/>
+                <a:latin typeface="Lexend"/>
               </a:rPr>
               <a:t>3.</a:t>
             </a:r>
@@ -14110,8 +14588,8 @@
         </p:nvSpPr>
         <p:spPr>
           <a:xfrm>
-            <a:off x="1554480" y="2778251"/>
-            <a:ext cx="5875657" cy="457200"/>
+            <a:off x="1554480" y="2772155"/>
+            <a:ext cx="5827436" cy="457200"/>
           </a:xfrm>
           <a:prstGeom prst="rect">
             <a:avLst/>
@@ -14126,11 +14604,11 @@
           <a:p>
             <a:pPr algn="l"/>
             <a:r>
-              <a:rPr sz="2300" b="0" i="0">
+              <a:rPr sz="2180" b="0" i="0">
                 <a:solidFill>
                   <a:srgbClr val="1A1A1A"/>
                 </a:solidFill>
-                <a:latin typeface="Century Schoolbook"/>
+                <a:latin typeface="Lexend"/>
               </a:rPr>
               <a:t>Rewrite using only positive exponents.  </a:t>
             </a:r>
@@ -14139,7 +14617,7 @@
       </p:sp>
       <p:pic>
         <p:nvPicPr>
-          <p:cNvPr id="16" name="Picture 15" descr="0c2d1dd467193a91.png"/>
+          <p:cNvPr id="16" name="Picture 15" descr="06266648dc403e6c.png"/>
           <p:cNvPicPr>
             <a:picLocks noChangeAspect="1"/>
           </p:cNvPicPr>
@@ -14153,8 +14631,8 @@
         </p:blipFill>
         <p:spPr>
           <a:xfrm>
-            <a:off x="7292977" y="2706623"/>
-            <a:ext cx="472440" cy="600456"/>
+            <a:off x="7244756" y="2706623"/>
+            <a:ext cx="448056" cy="588264"/>
           </a:xfrm>
           <a:prstGeom prst="rect">
             <a:avLst/>
@@ -14169,7 +14647,7 @@
         </p:nvSpPr>
         <p:spPr>
           <a:xfrm>
-            <a:off x="960120" y="3467100"/>
+            <a:off x="960120" y="3454907"/>
             <a:ext cx="548640" cy="457200"/>
           </a:xfrm>
           <a:prstGeom prst="rect">
@@ -14185,11 +14663,11 @@
           <a:p>
             <a:pPr algn="l"/>
             <a:r>
-              <a:rPr sz="2300" b="1" i="0">
+              <a:rPr sz="2180" b="1" i="0">
                 <a:solidFill>
                   <a:srgbClr val="0B5394"/>
                 </a:solidFill>
-                <a:latin typeface="Century Schoolbook"/>
+                <a:latin typeface="Lexend"/>
               </a:rPr>
               <a:t>4.</a:t>
             </a:r>
@@ -14204,8 +14682,8 @@
         </p:nvSpPr>
         <p:spPr>
           <a:xfrm>
-            <a:off x="1554480" y="3467100"/>
-            <a:ext cx="5748452" cy="457200"/>
+            <a:off x="1554480" y="3454907"/>
+            <a:ext cx="5711837" cy="457200"/>
           </a:xfrm>
           <a:prstGeom prst="rect">
             <a:avLst/>
@@ -14220,11 +14698,11 @@
           <a:p>
             <a:pPr algn="l"/>
             <a:r>
-              <a:rPr sz="2300" b="0" i="0">
+              <a:rPr sz="2180" b="0" i="0">
                 <a:solidFill>
                   <a:srgbClr val="1A1A1A"/>
                 </a:solidFill>
-                <a:latin typeface="Century Schoolbook"/>
+                <a:latin typeface="Lexend"/>
               </a:rPr>
               <a:t>Simplify. Use positive exponents only.  </a:t>
             </a:r>
@@ -14233,7 +14711,7 @@
       </p:sp>
       <p:pic>
         <p:nvPicPr>
-          <p:cNvPr id="19" name="Picture 18" descr="c5f7759a92eb2630.png"/>
+          <p:cNvPr id="19" name="Picture 18" descr="374d67a93a7cbdfc.png"/>
           <p:cNvPicPr>
             <a:picLocks noChangeAspect="1"/>
           </p:cNvPicPr>
@@ -14247,8 +14725,8 @@
         </p:blipFill>
         <p:spPr>
           <a:xfrm>
-            <a:off x="7165772" y="3557015"/>
-            <a:ext cx="929640" cy="277368"/>
+            <a:off x="7129157" y="3546347"/>
+            <a:ext cx="938784" cy="274320"/>
           </a:xfrm>
           <a:prstGeom prst="rect">
             <a:avLst/>
@@ -14263,7 +14741,7 @@
         </p:nvSpPr>
         <p:spPr>
           <a:xfrm>
-            <a:off x="960120" y="4061460"/>
+            <a:off x="960120" y="4049267"/>
             <a:ext cx="548640" cy="457200"/>
           </a:xfrm>
           <a:prstGeom prst="rect">
@@ -14279,11 +14757,11 @@
           <a:p>
             <a:pPr algn="l"/>
             <a:r>
-              <a:rPr sz="2300" b="1" i="0">
+              <a:rPr sz="2180" b="1" i="0">
                 <a:solidFill>
                   <a:srgbClr val="0B5394"/>
                 </a:solidFill>
-                <a:latin typeface="Century Schoolbook"/>
+                <a:latin typeface="Lexend"/>
               </a:rPr>
               <a:t>5.</a:t>
             </a:r>
@@ -14298,8 +14776,8 @@
         </p:nvSpPr>
         <p:spPr>
           <a:xfrm>
-            <a:off x="1554480" y="4061460"/>
-            <a:ext cx="5748452" cy="457200"/>
+            <a:off x="1554480" y="4049267"/>
+            <a:ext cx="5711837" cy="457200"/>
           </a:xfrm>
           <a:prstGeom prst="rect">
             <a:avLst/>
@@ -14314,11 +14792,11 @@
           <a:p>
             <a:pPr algn="l"/>
             <a:r>
-              <a:rPr sz="2300" b="0" i="0">
+              <a:rPr sz="2180" b="0" i="0">
                 <a:solidFill>
                   <a:srgbClr val="1A1A1A"/>
                 </a:solidFill>
-                <a:latin typeface="Century Schoolbook"/>
+                <a:latin typeface="Lexend"/>
               </a:rPr>
               <a:t>Simplify. Use positive exponents only.  </a:t>
             </a:r>
@@ -14327,7 +14805,7 @@
       </p:sp>
       <p:pic>
         <p:nvPicPr>
-          <p:cNvPr id="22" name="Picture 21" descr="60d888c7ce1f9850.png"/>
+          <p:cNvPr id="22" name="Picture 21" descr="c40b3e76d5e8f93e.png"/>
           <p:cNvPicPr>
             <a:picLocks noChangeAspect="1"/>
           </p:cNvPicPr>
@@ -14341,8 +14819,8 @@
         </p:blipFill>
         <p:spPr>
           <a:xfrm>
-            <a:off x="7165772" y="4122420"/>
-            <a:ext cx="1021080" cy="335280"/>
+            <a:off x="7129157" y="4111751"/>
+            <a:ext cx="1033271" cy="332232"/>
           </a:xfrm>
           <a:prstGeom prst="rect">
             <a:avLst/>
@@ -14357,7 +14835,7 @@
         </p:nvSpPr>
         <p:spPr>
           <a:xfrm>
-            <a:off x="960120" y="4655820"/>
+            <a:off x="960120" y="4643628"/>
             <a:ext cx="548640" cy="457200"/>
           </a:xfrm>
           <a:prstGeom prst="rect">
@@ -14373,11 +14851,11 @@
           <a:p>
             <a:pPr algn="l"/>
             <a:r>
-              <a:rPr sz="2300" b="1" i="0">
+              <a:rPr sz="2180" b="1" i="0">
                 <a:solidFill>
                   <a:srgbClr val="0B5394"/>
                 </a:solidFill>
-                <a:latin typeface="Century Schoolbook"/>
+                <a:latin typeface="Lexend"/>
               </a:rPr>
               <a:t>6.</a:t>
             </a:r>
@@ -14392,8 +14870,8 @@
         </p:nvSpPr>
         <p:spPr>
           <a:xfrm>
-            <a:off x="1554480" y="4655820"/>
-            <a:ext cx="2720291" cy="457200"/>
+            <a:off x="1554480" y="4643628"/>
+            <a:ext cx="2684114" cy="457200"/>
           </a:xfrm>
           <a:prstGeom prst="rect">
             <a:avLst/>
@@ -14408,11 +14886,11 @@
           <a:p>
             <a:pPr algn="l"/>
             <a:r>
-              <a:rPr sz="2300" b="0" i="0">
+              <a:rPr sz="2180" b="0" i="0">
                 <a:solidFill>
                   <a:srgbClr val="1A1A1A"/>
                 </a:solidFill>
-                <a:latin typeface="Century Schoolbook"/>
+                <a:latin typeface="Lexend"/>
               </a:rPr>
               <a:t>Find the value of </a:t>
             </a:r>
@@ -14421,7 +14899,7 @@
       </p:sp>
       <p:pic>
         <p:nvPicPr>
-          <p:cNvPr id="25" name="Picture 24" descr="0afe177f69dd5e06.png"/>
+          <p:cNvPr id="25" name="Picture 24" descr="6d78c2be12150bf5.png"/>
           <p:cNvPicPr>
             <a:picLocks noChangeAspect="1"/>
           </p:cNvPicPr>
@@ -14435,8 +14913,8 @@
         </p:blipFill>
         <p:spPr>
           <a:xfrm>
-            <a:off x="4137611" y="4809744"/>
-            <a:ext cx="155448" cy="149352"/>
+            <a:off x="4101434" y="4788408"/>
+            <a:ext cx="146304" cy="167640"/>
           </a:xfrm>
           <a:prstGeom prst="rect">
             <a:avLst/>
@@ -14451,8 +14929,8 @@
         </p:nvSpPr>
         <p:spPr>
           <a:xfrm>
-            <a:off x="4293059" y="4655820"/>
-            <a:ext cx="468561" cy="457200"/>
+            <a:off x="4247738" y="4643628"/>
+            <a:ext cx="442110" cy="457200"/>
           </a:xfrm>
           <a:prstGeom prst="rect">
             <a:avLst/>
@@ -14467,11 +14945,11 @@
           <a:p>
             <a:pPr algn="l"/>
             <a:r>
-              <a:rPr sz="2300" b="0" i="0">
+              <a:rPr sz="2180" b="0" i="0">
                 <a:solidFill>
                   <a:srgbClr val="1A1A1A"/>
                 </a:solidFill>
-                <a:latin typeface="Century Schoolbook"/>
+                <a:latin typeface="Lexend"/>
               </a:rPr>
               <a:t>.  </a:t>
             </a:r>
@@ -14480,7 +14958,7 @@
       </p:sp>
       <p:pic>
         <p:nvPicPr>
-          <p:cNvPr id="27" name="Picture 26" descr="6cb3df3e64f6e06f.png"/>
+          <p:cNvPr id="27" name="Picture 26" descr="6e9a5405552d7f91.png"/>
           <p:cNvPicPr>
             <a:picLocks noChangeAspect="1"/>
           </p:cNvPicPr>
@@ -14494,8 +14972,8 @@
         </p:blipFill>
         <p:spPr>
           <a:xfrm>
-            <a:off x="4624460" y="4713732"/>
-            <a:ext cx="1551432" cy="341376"/>
+            <a:off x="4552689" y="4701540"/>
+            <a:ext cx="1588008" cy="341376"/>
           </a:xfrm>
           <a:prstGeom prst="rect">
             <a:avLst/>
@@ -14544,11 +15022,11 @@
           <a:p>
             <a:pPr algn="l"/>
             <a:r>
-              <a:rPr sz="3600" b="1" i="0">
+              <a:rPr sz="3420" b="1" i="0">
                 <a:solidFill>
                   <a:srgbClr val="1A1A1A"/>
                 </a:solidFill>
-                <a:latin typeface="Century Schoolbook"/>
+                <a:latin typeface="Lexend"/>
               </a:rPr>
               <a:t>IXL</a:t>
             </a:r>
@@ -14684,11 +15162,11 @@
           <a:p>
             <a:pPr algn="l"/>
             <a:r>
-              <a:rPr sz="1100" b="0" i="1">
+              <a:rPr sz="1040" b="0" i="0">
                 <a:solidFill>
                   <a:srgbClr val="6B6B6B"/>
                 </a:solidFill>
-                <a:latin typeface="Century Schoolbook"/>
+                <a:latin typeface="Lexend"/>
               </a:rPr>
               <a:t>Grade 7 Accelerated · Unit 3 · Thread A · Day 2 — Negative Exponents with Variable Bases</a:t>
             </a:r>
@@ -14719,11 +15197,11 @@
           <a:p>
             <a:pPr algn="r"/>
             <a:r>
-              <a:rPr sz="1100" b="0" i="0">
+              <a:rPr sz="1040" b="0" i="0">
                 <a:solidFill>
                   <a:srgbClr val="6B6B6B"/>
                 </a:solidFill>
-                <a:latin typeface="Century Schoolbook"/>
+                <a:latin typeface="Lexend"/>
               </a:rPr>
               <a:t>34</a:t>
             </a:r>
@@ -14754,11 +15232,11 @@
           <a:p>
             <a:pPr algn="l"/>
             <a:r>
-              <a:rPr sz="2100" b="1" i="0">
+              <a:rPr sz="1989" b="1" i="0">
                 <a:solidFill>
                   <a:srgbClr val="0B5394"/>
                 </a:solidFill>
-                <a:latin typeface="Century Schoolbook"/>
+                <a:latin typeface="Lexend"/>
               </a:rPr>
               <a:t>1.</a:t>
             </a:r>
@@ -14789,11 +15267,11 @@
           <a:p>
             <a:pPr algn="l"/>
             <a:r>
-              <a:rPr sz="2100" b="0" i="0">
+              <a:rPr sz="1989" b="0" i="0">
                 <a:solidFill>
                   <a:srgbClr val="1A1A1A"/>
                 </a:solidFill>
-                <a:latin typeface="Century Schoolbook"/>
+                <a:latin typeface="Lexend"/>
               </a:rPr>
               <a:t>Open IXL and start today's skills.</a:t>
             </a:r>
@@ -14824,11 +15302,11 @@
           <a:p>
             <a:pPr algn="l"/>
             <a:r>
-              <a:rPr sz="2100" b="1" i="0">
+              <a:rPr sz="1989" b="1" i="0">
                 <a:solidFill>
                   <a:srgbClr val="0B5394"/>
                 </a:solidFill>
-                <a:latin typeface="Century Schoolbook"/>
+                <a:latin typeface="Lexend"/>
               </a:rPr>
               <a:t>2.</a:t>
             </a:r>
@@ -14859,11 +15337,11 @@
           <a:p>
             <a:pPr algn="l"/>
             <a:r>
-              <a:rPr sz="2100" b="0" i="0">
+              <a:rPr sz="1989" b="0" i="0">
                 <a:solidFill>
                   <a:srgbClr val="1A1A1A"/>
                 </a:solidFill>
-                <a:latin typeface="Century Schoolbook"/>
+                <a:latin typeface="Lexend"/>
               </a:rPr>
               <a:t>Work on paper where the question needs work. The answer box does not show it.</a:t>
             </a:r>
@@ -14894,11 +15372,11 @@
           <a:p>
             <a:pPr algn="l"/>
             <a:r>
-              <a:rPr sz="2100" b="1" i="0">
+              <a:rPr sz="1989" b="1" i="0">
                 <a:solidFill>
                   <a:srgbClr val="0B5394"/>
                 </a:solidFill>
-                <a:latin typeface="Century Schoolbook"/>
+                <a:latin typeface="Lexend"/>
               </a:rPr>
               <a:t>3.</a:t>
             </a:r>
@@ -14929,11 +15407,11 @@
           <a:p>
             <a:pPr algn="l"/>
             <a:r>
-              <a:rPr sz="2100" b="0" i="0">
+              <a:rPr sz="1989" b="0" i="0">
                 <a:solidFill>
                   <a:srgbClr val="1A1A1A"/>
                 </a:solidFill>
-                <a:latin typeface="Century Schoolbook"/>
+                <a:latin typeface="Lexend"/>
               </a:rPr>
               <a:t>Every skill listed is required, to a SmartScore of 67. Due at the start of the next class.</a:t>
             </a:r>
@@ -14964,11 +15442,11 @@
           <a:p>
             <a:pPr algn="l"/>
             <a:r>
-              <a:rPr sz="2100" b="1" i="0">
+              <a:rPr sz="1989" b="1" i="0">
                 <a:solidFill>
                   <a:srgbClr val="1A1A1A"/>
                 </a:solidFill>
-                <a:latin typeface="Century Schoolbook"/>
+                <a:latin typeface="Lexend"/>
               </a:rPr>
               <a:t>Today's skills — all required</a:t>
             </a:r>
@@ -14999,11 +15477,11 @@
           <a:p>
             <a:pPr algn="l"/>
             <a:r>
-              <a:rPr sz="1900" b="0" i="0">
+              <a:rPr sz="1810" b="0" i="0">
                 <a:solidFill>
                   <a:srgbClr val="1A1A1A"/>
                 </a:solidFill>
-                <a:latin typeface="Century Schoolbook"/>
+                <a:latin typeface="Lexend"/>
               </a:rPr>
               <a:t>Variables with negative exponents — 2NL</a:t>
             </a:r>
@@ -15034,11 +15512,11 @@
           <a:p>
             <a:pPr algn="l"/>
             <a:r>
-              <a:rPr sz="1900" b="0" i="0">
+              <a:rPr sz="1810" b="0" i="0">
                 <a:solidFill>
                   <a:srgbClr val="1A1A1A"/>
                 </a:solidFill>
-                <a:latin typeface="Century Schoolbook"/>
+                <a:latin typeface="Lexend"/>
               </a:rPr>
               <a:t>Multiply and divide powers: variable bases — 85P</a:t>
             </a:r>
@@ -15087,11 +15565,11 @@
           <a:p>
             <a:pPr algn="l"/>
             <a:r>
-              <a:rPr sz="3600" b="1" i="0">
+              <a:rPr sz="3420" b="1" i="0">
                 <a:solidFill>
                   <a:srgbClr val="1A1A1A"/>
                 </a:solidFill>
-                <a:latin typeface="Century Schoolbook"/>
+                <a:latin typeface="Lexend"/>
               </a:rPr>
               <a:t>Notes</a:t>
             </a:r>
@@ -15227,11 +15705,11 @@
           <a:p>
             <a:pPr algn="l"/>
             <a:r>
-              <a:rPr sz="1100" b="0" i="1">
+              <a:rPr sz="1040" b="0" i="0">
                 <a:solidFill>
                   <a:srgbClr val="6B6B6B"/>
                 </a:solidFill>
-                <a:latin typeface="Century Schoolbook"/>
+                <a:latin typeface="Lexend"/>
               </a:rPr>
               <a:t>Grade 7 Accelerated · Unit 3 · Thread A · Day 2 — Negative Exponents with Variable Bases</a:t>
             </a:r>
@@ -15262,11 +15740,11 @@
           <a:p>
             <a:pPr algn="r"/>
             <a:r>
-              <a:rPr sz="1100" b="0" i="0">
+              <a:rPr sz="1040" b="0" i="0">
                 <a:solidFill>
                   <a:srgbClr val="6B6B6B"/>
                 </a:solidFill>
-                <a:latin typeface="Century Schoolbook"/>
+                <a:latin typeface="Lexend"/>
               </a:rPr>
               <a:t>4</a:t>
             </a:r>
@@ -15297,11 +15775,11 @@
           <a:p>
             <a:pPr algn="l"/>
             <a:r>
-              <a:rPr sz="2500" b="1" i="0">
+              <a:rPr sz="2380" b="1" i="0">
                 <a:solidFill>
                   <a:srgbClr val="1A1A1A"/>
                 </a:solidFill>
-                <a:latin typeface="Century Schoolbook"/>
+                <a:latin typeface="Lexend"/>
               </a:rPr>
               <a:t>I.  The pattern, with a letter</a:t>
             </a:r>
@@ -15379,20 +15857,20 @@
                     <a:p>
                       <a:pPr algn="ctr"/>
                       <a:r>
-                        <a:rPr sz="1800" b="1">
+                        <a:rPr sz="1710" b="1">
                           <a:solidFill>
                             <a:srgbClr val="1A1A1A"/>
                           </a:solidFill>
-                          <a:latin typeface="Century Schoolbook"/>
+                          <a:latin typeface="Lexend"/>
                         </a:rPr>
                         <a:t>x</a:t>
                       </a:r>
                       <a:r>
-                        <a:rPr sz="1800" b="1" baseline="30000">
+                        <a:rPr sz="1710" b="1" baseline="30000">
                           <a:solidFill>
                             <a:srgbClr val="1A1A1A"/>
                           </a:solidFill>
-                          <a:latin typeface="Century Schoolbook"/>
+                          <a:latin typeface="Lexend"/>
                         </a:rPr>
                         <a:t>4</a:t>
                       </a:r>
@@ -15435,20 +15913,20 @@
                     <a:p>
                       <a:pPr algn="ctr"/>
                       <a:r>
-                        <a:rPr sz="1800" b="1">
+                        <a:rPr sz="1710" b="1">
                           <a:solidFill>
                             <a:srgbClr val="1A1A1A"/>
                           </a:solidFill>
-                          <a:latin typeface="Century Schoolbook"/>
+                          <a:latin typeface="Lexend"/>
                         </a:rPr>
                         <a:t>x</a:t>
                       </a:r>
                       <a:r>
-                        <a:rPr sz="1800" b="1" baseline="30000">
+                        <a:rPr sz="1710" b="1" baseline="30000">
                           <a:solidFill>
                             <a:srgbClr val="1A1A1A"/>
                           </a:solidFill>
-                          <a:latin typeface="Century Schoolbook"/>
+                          <a:latin typeface="Lexend"/>
                         </a:rPr>
                         <a:t>3</a:t>
                       </a:r>
@@ -15491,20 +15969,20 @@
                     <a:p>
                       <a:pPr algn="ctr"/>
                       <a:r>
-                        <a:rPr sz="1800" b="1">
+                        <a:rPr sz="1710" b="1">
                           <a:solidFill>
                             <a:srgbClr val="1A1A1A"/>
                           </a:solidFill>
-                          <a:latin typeface="Century Schoolbook"/>
+                          <a:latin typeface="Lexend"/>
                         </a:rPr>
                         <a:t>x</a:t>
                       </a:r>
                       <a:r>
-                        <a:rPr sz="1800" b="1" baseline="30000">
+                        <a:rPr sz="1710" b="1" baseline="30000">
                           <a:solidFill>
                             <a:srgbClr val="1A1A1A"/>
                           </a:solidFill>
-                          <a:latin typeface="Century Schoolbook"/>
+                          <a:latin typeface="Lexend"/>
                         </a:rPr>
                         <a:t>2</a:t>
                       </a:r>
@@ -15547,20 +16025,20 @@
                     <a:p>
                       <a:pPr algn="ctr"/>
                       <a:r>
-                        <a:rPr sz="1800" b="1">
+                        <a:rPr sz="1710" b="1">
                           <a:solidFill>
                             <a:srgbClr val="1A1A1A"/>
                           </a:solidFill>
-                          <a:latin typeface="Century Schoolbook"/>
+                          <a:latin typeface="Lexend"/>
                         </a:rPr>
                         <a:t>x</a:t>
                       </a:r>
                       <a:r>
-                        <a:rPr sz="1800" b="1" baseline="30000">
+                        <a:rPr sz="1710" b="1" baseline="30000">
                           <a:solidFill>
                             <a:srgbClr val="1A1A1A"/>
                           </a:solidFill>
-                          <a:latin typeface="Century Schoolbook"/>
+                          <a:latin typeface="Lexend"/>
                         </a:rPr>
                         <a:t>1</a:t>
                       </a:r>
@@ -15603,20 +16081,20 @@
                     <a:p>
                       <a:pPr algn="ctr"/>
                       <a:r>
-                        <a:rPr sz="1800" b="1">
+                        <a:rPr sz="1710" b="1">
                           <a:solidFill>
                             <a:srgbClr val="1A1A1A"/>
                           </a:solidFill>
-                          <a:latin typeface="Century Schoolbook"/>
+                          <a:latin typeface="Lexend"/>
                         </a:rPr>
                         <a:t>x</a:t>
                       </a:r>
                       <a:r>
-                        <a:rPr sz="1800" b="1" baseline="30000">
+                        <a:rPr sz="1710" b="1" baseline="30000">
                           <a:solidFill>
                             <a:srgbClr val="1A1A1A"/>
                           </a:solidFill>
-                          <a:latin typeface="Century Schoolbook"/>
+                          <a:latin typeface="Lexend"/>
                         </a:rPr>
                         <a:t>0</a:t>
                       </a:r>
@@ -15659,20 +16137,20 @@
                     <a:p>
                       <a:pPr algn="ctr"/>
                       <a:r>
-                        <a:rPr sz="1800" b="1">
+                        <a:rPr sz="1710" b="1">
                           <a:solidFill>
                             <a:srgbClr val="1A1A1A"/>
                           </a:solidFill>
-                          <a:latin typeface="Century Schoolbook"/>
+                          <a:latin typeface="Lexend"/>
                         </a:rPr>
                         <a:t>x</a:t>
                       </a:r>
                       <a:r>
-                        <a:rPr sz="1800" b="1" baseline="30000">
+                        <a:rPr sz="1710" b="1" baseline="30000">
                           <a:solidFill>
                             <a:srgbClr val="1A1A1A"/>
                           </a:solidFill>
-                          <a:latin typeface="Century Schoolbook"/>
+                          <a:latin typeface="Lexend"/>
                         </a:rPr>
                         <a:t>-1</a:t>
                       </a:r>
@@ -15715,20 +16193,20 @@
                     <a:p>
                       <a:pPr algn="ctr"/>
                       <a:r>
-                        <a:rPr sz="1800" b="1">
+                        <a:rPr sz="1710" b="1">
                           <a:solidFill>
                             <a:srgbClr val="1A1A1A"/>
                           </a:solidFill>
-                          <a:latin typeface="Century Schoolbook"/>
+                          <a:latin typeface="Lexend"/>
                         </a:rPr>
                         <a:t>x</a:t>
                       </a:r>
                       <a:r>
-                        <a:rPr sz="1800" b="1" baseline="30000">
+                        <a:rPr sz="1710" b="1" baseline="30000">
                           <a:solidFill>
                             <a:srgbClr val="1A1A1A"/>
                           </a:solidFill>
-                          <a:latin typeface="Century Schoolbook"/>
+                          <a:latin typeface="Lexend"/>
                         </a:rPr>
                         <a:t>-2</a:t>
                       </a:r>
@@ -15771,20 +16249,20 @@
                     <a:p>
                       <a:pPr algn="ctr"/>
                       <a:r>
-                        <a:rPr sz="1800" b="1">
+                        <a:rPr sz="1710" b="1">
                           <a:solidFill>
                             <a:srgbClr val="1A1A1A"/>
                           </a:solidFill>
-                          <a:latin typeface="Century Schoolbook"/>
+                          <a:latin typeface="Lexend"/>
                         </a:rPr>
                         <a:t>x</a:t>
                       </a:r>
                       <a:r>
-                        <a:rPr sz="1800" b="1" baseline="30000">
+                        <a:rPr sz="1710" b="1" baseline="30000">
                           <a:solidFill>
                             <a:srgbClr val="1A1A1A"/>
                           </a:solidFill>
-                          <a:latin typeface="Century Schoolbook"/>
+                          <a:latin typeface="Lexend"/>
                         </a:rPr>
                         <a:t>-3</a:t>
                       </a:r>
@@ -15829,11 +16307,11 @@
                     <a:p>
                       <a:pPr algn="ctr"/>
                       <a:r>
-                        <a:rPr sz="1800" b="0">
+                        <a:rPr sz="1710" b="0">
                           <a:solidFill>
                             <a:srgbClr val="1A1A1A"/>
                           </a:solidFill>
-                          <a:latin typeface="Century Schoolbook"/>
+                          <a:latin typeface="Lexend"/>
                         </a:rPr>
                         <a:t>x·x·x·x</a:t>
                       </a:r>
@@ -15876,11 +16354,11 @@
                     <a:p>
                       <a:pPr algn="ctr"/>
                       <a:r>
-                        <a:rPr sz="1800" b="0">
+                        <a:rPr sz="1710" b="0">
                           <a:solidFill>
                             <a:srgbClr val="1A1A1A"/>
                           </a:solidFill>
-                          <a:latin typeface="Century Schoolbook"/>
+                          <a:latin typeface="Lexend"/>
                         </a:rPr>
                         <a:t>x·x·x</a:t>
                       </a:r>
@@ -15923,11 +16401,11 @@
                     <a:p>
                       <a:pPr algn="ctr"/>
                       <a:r>
-                        <a:rPr sz="1800" b="0">
+                        <a:rPr sz="1710" b="0">
                           <a:solidFill>
                             <a:srgbClr val="1A1A1A"/>
                           </a:solidFill>
-                          <a:latin typeface="Century Schoolbook"/>
+                          <a:latin typeface="Lexend"/>
                         </a:rPr>
                         <a:t>x·x</a:t>
                       </a:r>
@@ -15970,11 +16448,11 @@
                     <a:p>
                       <a:pPr algn="ctr"/>
                       <a:r>
-                        <a:rPr sz="1800" b="0">
+                        <a:rPr sz="1710" b="0">
                           <a:solidFill>
                             <a:srgbClr val="1A1A1A"/>
                           </a:solidFill>
-                          <a:latin typeface="Century Schoolbook"/>
+                          <a:latin typeface="Lexend"/>
                         </a:rPr>
                         <a:t>x</a:t>
                       </a:r>
@@ -16017,11 +16495,11 @@
                     <a:p>
                       <a:pPr algn="ctr"/>
                       <a:r>
-                        <a:rPr sz="1800" b="0">
+                        <a:rPr sz="1710" b="0">
                           <a:solidFill>
                             <a:srgbClr val="1A1A1A"/>
                           </a:solidFill>
-                          <a:latin typeface="Century Schoolbook"/>
+                          <a:latin typeface="Lexend"/>
                         </a:rPr>
                         <a:t>1</a:t>
                       </a:r>
@@ -16064,11 +16542,11 @@
                     <a:p>
                       <a:pPr algn="ctr"/>
                       <a:r>
-                        <a:rPr sz="1800" b="0">
+                        <a:rPr sz="1710" b="0">
                           <a:solidFill>
                             <a:srgbClr val="1A1A1A"/>
                           </a:solidFill>
-                          <a:latin typeface="Century Schoolbook"/>
+                          <a:latin typeface="Lexend"/>
                         </a:rPr>
                         <a:t>1/x</a:t>
                       </a:r>
@@ -16111,20 +16589,20 @@
                     <a:p>
                       <a:pPr algn="ctr"/>
                       <a:r>
-                        <a:rPr sz="1800" b="0">
+                        <a:rPr sz="1710" b="0">
                           <a:solidFill>
                             <a:srgbClr val="1A1A1A"/>
                           </a:solidFill>
-                          <a:latin typeface="Century Schoolbook"/>
+                          <a:latin typeface="Lexend"/>
                         </a:rPr>
                         <a:t>1/x</a:t>
                       </a:r>
                       <a:r>
-                        <a:rPr sz="1800" b="0" baseline="30000">
+                        <a:rPr sz="1710" b="0" baseline="30000">
                           <a:solidFill>
                             <a:srgbClr val="1A1A1A"/>
                           </a:solidFill>
-                          <a:latin typeface="Century Schoolbook"/>
+                          <a:latin typeface="Lexend"/>
                         </a:rPr>
                         <a:t>2</a:t>
                       </a:r>
@@ -16167,20 +16645,20 @@
                     <a:p>
                       <a:pPr algn="ctr"/>
                       <a:r>
-                        <a:rPr sz="1800" b="0">
+                        <a:rPr sz="1710" b="0">
                           <a:solidFill>
                             <a:srgbClr val="1A1A1A"/>
                           </a:solidFill>
-                          <a:latin typeface="Century Schoolbook"/>
+                          <a:latin typeface="Lexend"/>
                         </a:rPr>
                         <a:t>1/x</a:t>
                       </a:r>
                       <a:r>
-                        <a:rPr sz="1800" b="0" baseline="30000">
+                        <a:rPr sz="1710" b="0" baseline="30000">
                           <a:solidFill>
                             <a:srgbClr val="1A1A1A"/>
                           </a:solidFill>
-                          <a:latin typeface="Century Schoolbook"/>
+                          <a:latin typeface="Lexend"/>
                         </a:rPr>
                         <a:t>3</a:t>
                       </a:r>
@@ -16223,7 +16701,7 @@
       </p:graphicFrame>
       <p:pic>
         <p:nvPicPr>
-          <p:cNvPr id="11" name="Picture 10" descr="566883ffdb25670b.png"/>
+          <p:cNvPr id="11" name="Picture 10" descr="959d23703025cfca.png"/>
           <p:cNvPicPr>
             <a:picLocks noChangeAspect="1"/>
           </p:cNvPicPr>
@@ -16237,8 +16715,8 @@
         </p:blipFill>
         <p:spPr>
           <a:xfrm>
-            <a:off x="3141253" y="2990088"/>
-            <a:ext cx="1335024" cy="676656"/>
+            <a:off x="3188405" y="2990088"/>
+            <a:ext cx="1319784" cy="682752"/>
           </a:xfrm>
           <a:prstGeom prst="rect">
             <a:avLst/>
@@ -16253,8 +16731,8 @@
         </p:nvSpPr>
         <p:spPr>
           <a:xfrm>
-            <a:off x="4476277" y="3099816"/>
-            <a:ext cx="1183151" cy="457200"/>
+            <a:off x="4508189" y="3102864"/>
+            <a:ext cx="1141503" cy="457200"/>
           </a:xfrm>
           <a:prstGeom prst="rect">
             <a:avLst/>
@@ -16269,11 +16747,11 @@
           <a:p>
             <a:pPr algn="l"/>
             <a:r>
-              <a:rPr sz="2600" b="0" i="0">
+              <a:rPr sz="2470" b="0" i="0">
                 <a:solidFill>
                   <a:srgbClr val="1A1A1A"/>
                 </a:solidFill>
-                <a:latin typeface="Century Schoolbook"/>
+                <a:latin typeface="Lexend"/>
               </a:rPr>
               <a:t>          </a:t>
             </a:r>
@@ -16282,7 +16760,7 @@
       </p:sp>
       <p:pic>
         <p:nvPicPr>
-          <p:cNvPr id="13" name="Picture 12" descr="bdac5bab61ffd0ec.png"/>
+          <p:cNvPr id="13" name="Picture 12" descr="50055cd3f97ed51c.png"/>
           <p:cNvPicPr>
             <a:picLocks noChangeAspect="1"/>
           </p:cNvPicPr>
@@ -16296,8 +16774,8 @@
         </p:blipFill>
         <p:spPr>
           <a:xfrm>
-            <a:off x="5522269" y="2990088"/>
-            <a:ext cx="1362456" cy="676656"/>
+            <a:off x="5512533" y="2990088"/>
+            <a:ext cx="1347216" cy="682752"/>
           </a:xfrm>
           <a:prstGeom prst="rect">
             <a:avLst/>
@@ -16312,8 +16790,8 @@
         </p:nvSpPr>
         <p:spPr>
           <a:xfrm>
-            <a:off x="6884725" y="3099816"/>
-            <a:ext cx="1299682" cy="457200"/>
+            <a:off x="6859749" y="3102864"/>
+            <a:ext cx="1263198" cy="457200"/>
           </a:xfrm>
           <a:prstGeom prst="rect">
             <a:avLst/>
@@ -16328,11 +16806,11 @@
           <a:p>
             <a:pPr algn="l"/>
             <a:r>
-              <a:rPr sz="2600" b="0" i="0">
+              <a:rPr sz="2470" b="0" i="0">
                 <a:solidFill>
                   <a:srgbClr val="1A1A1A"/>
                 </a:solidFill>
-                <a:latin typeface="Century Schoolbook"/>
+                <a:latin typeface="Lexend"/>
               </a:rPr>
               <a:t>          (</a:t>
             </a:r>
@@ -16341,7 +16819,7 @@
       </p:sp>
       <p:pic>
         <p:nvPicPr>
-          <p:cNvPr id="15" name="Picture 14" descr="3202774bcb053046.png"/>
+          <p:cNvPr id="15" name="Picture 14" descr="69c32b8b9be7844f.png"/>
           <p:cNvPicPr>
             <a:picLocks noChangeAspect="1"/>
           </p:cNvPicPr>
@@ -16355,8 +16833,8 @@
         </p:blipFill>
         <p:spPr>
           <a:xfrm>
-            <a:off x="8047247" y="3159252"/>
-            <a:ext cx="783336" cy="338328"/>
+            <a:off x="7985787" y="3192780"/>
+            <a:ext cx="792480" cy="277368"/>
           </a:xfrm>
           <a:prstGeom prst="rect">
             <a:avLst/>
@@ -16371,8 +16849,8 @@
         </p:nvSpPr>
         <p:spPr>
           <a:xfrm>
-            <a:off x="8830583" y="3099816"/>
-            <a:ext cx="326842" cy="457200"/>
+            <a:off x="8778267" y="3102864"/>
+            <a:ext cx="332006" cy="457200"/>
           </a:xfrm>
           <a:prstGeom prst="rect">
             <a:avLst/>
@@ -16387,11 +16865,11 @@
           <a:p>
             <a:pPr algn="l"/>
             <a:r>
-              <a:rPr sz="2600" b="0" i="0">
+              <a:rPr sz="2470" b="0" i="0">
                 <a:solidFill>
                   <a:srgbClr val="1A1A1A"/>
                 </a:solidFill>
-                <a:latin typeface="Century Schoolbook"/>
+                <a:latin typeface="Lexend"/>
               </a:rPr>
               <a:t>)</a:t>
             </a:r>
@@ -16440,11 +16918,11 @@
           <a:p>
             <a:pPr algn="l"/>
             <a:r>
-              <a:rPr sz="3600" b="1" i="0">
+              <a:rPr sz="3420" b="1" i="0">
                 <a:solidFill>
                   <a:srgbClr val="1A1A1A"/>
                 </a:solidFill>
-                <a:latin typeface="Century Schoolbook"/>
+                <a:latin typeface="Lexend"/>
               </a:rPr>
               <a:t>Notes</a:t>
             </a:r>
@@ -16580,11 +17058,11 @@
           <a:p>
             <a:pPr algn="l"/>
             <a:r>
-              <a:rPr sz="1100" b="0" i="1">
+              <a:rPr sz="1040" b="0" i="0">
                 <a:solidFill>
                   <a:srgbClr val="6B6B6B"/>
                 </a:solidFill>
-                <a:latin typeface="Century Schoolbook"/>
+                <a:latin typeface="Lexend"/>
               </a:rPr>
               <a:t>Grade 7 Accelerated · Unit 3 · Thread A · Day 2 — Negative Exponents with Variable Bases</a:t>
             </a:r>
@@ -16615,11 +17093,11 @@
           <a:p>
             <a:pPr algn="r"/>
             <a:r>
-              <a:rPr sz="1100" b="0" i="0">
+              <a:rPr sz="1040" b="0" i="0">
                 <a:solidFill>
                   <a:srgbClr val="6B6B6B"/>
                 </a:solidFill>
-                <a:latin typeface="Century Schoolbook"/>
+                <a:latin typeface="Lexend"/>
               </a:rPr>
               <a:t>5</a:t>
             </a:r>
@@ -16650,11 +17128,11 @@
           <a:p>
             <a:pPr algn="l"/>
             <a:r>
-              <a:rPr sz="2500" b="1" i="0">
+              <a:rPr sz="2380" b="1" i="0">
                 <a:solidFill>
                   <a:srgbClr val="1A1A1A"/>
                 </a:solidFill>
-                <a:latin typeface="Century Schoolbook"/>
+                <a:latin typeface="Lexend"/>
               </a:rPr>
               <a:t>II.  Moving factors across the fraction bar</a:t>
             </a:r>
@@ -16698,7 +17176,7 @@
       </p:cxnSp>
       <p:pic>
         <p:nvPicPr>
-          <p:cNvPr id="10" name="Picture 9" descr="7f7d04d8cca9730e.png"/>
+          <p:cNvPr id="10" name="Picture 9" descr="840171f025bff87b.png"/>
           <p:cNvPicPr>
             <a:picLocks noChangeAspect="1"/>
           </p:cNvPicPr>
@@ -16712,8 +17190,8 @@
         </p:blipFill>
         <p:spPr>
           <a:xfrm>
-            <a:off x="2267184" y="2029968"/>
-            <a:ext cx="1508760" cy="743712"/>
+            <a:off x="2308832" y="2036064"/>
+            <a:ext cx="1496568" cy="731520"/>
           </a:xfrm>
           <a:prstGeom prst="rect">
             <a:avLst/>
@@ -16728,8 +17206,8 @@
         </p:nvSpPr>
         <p:spPr>
           <a:xfrm>
-            <a:off x="3775944" y="2173224"/>
-            <a:ext cx="1183151" cy="457200"/>
+            <a:off x="3805400" y="2173224"/>
+            <a:ext cx="1141503" cy="457200"/>
           </a:xfrm>
           <a:prstGeom prst="rect">
             <a:avLst/>
@@ -16744,11 +17222,11 @@
           <a:p>
             <a:pPr algn="l"/>
             <a:r>
-              <a:rPr sz="2600" b="0" i="0">
+              <a:rPr sz="2470" b="0" i="0">
                 <a:solidFill>
                   <a:srgbClr val="1A1A1A"/>
                 </a:solidFill>
-                <a:latin typeface="Century Schoolbook"/>
+                <a:latin typeface="Lexend"/>
               </a:rPr>
               <a:t>          </a:t>
             </a:r>
@@ -16757,7 +17235,7 @@
       </p:sp>
       <p:pic>
         <p:nvPicPr>
-          <p:cNvPr id="12" name="Picture 11" descr="4816a7a2bcf2f26c.png"/>
+          <p:cNvPr id="12" name="Picture 11" descr="b3850983250dec2c.png"/>
           <p:cNvPicPr>
             <a:picLocks noChangeAspect="1"/>
           </p:cNvPicPr>
@@ -16771,8 +17249,8 @@
         </p:blipFill>
         <p:spPr>
           <a:xfrm>
-            <a:off x="4821935" y="1993392"/>
-            <a:ext cx="2209800" cy="816864"/>
+            <a:off x="4809744" y="1993392"/>
+            <a:ext cx="2221992" cy="816864"/>
           </a:xfrm>
           <a:prstGeom prst="rect">
             <a:avLst/>
@@ -16788,7 +17266,7 @@
         <p:spPr>
           <a:xfrm>
             <a:off x="7031736" y="2173224"/>
-            <a:ext cx="1183151" cy="457200"/>
+            <a:ext cx="1141503" cy="457200"/>
           </a:xfrm>
           <a:prstGeom prst="rect">
             <a:avLst/>
@@ -16803,11 +17281,11 @@
           <a:p>
             <a:pPr algn="l"/>
             <a:r>
-              <a:rPr sz="2600" b="0" i="0">
+              <a:rPr sz="2470" b="0" i="0">
                 <a:solidFill>
                   <a:srgbClr val="1A1A1A"/>
                 </a:solidFill>
-                <a:latin typeface="Century Schoolbook"/>
+                <a:latin typeface="Lexend"/>
               </a:rPr>
               <a:t>          </a:t>
             </a:r>
@@ -16816,7 +17294,7 @@
       </p:sp>
       <p:pic>
         <p:nvPicPr>
-          <p:cNvPr id="14" name="Picture 13" descr="0f65a6bfbd89b504.png"/>
+          <p:cNvPr id="14" name="Picture 13" descr="560526d4cbdf3f8e.png"/>
           <p:cNvPicPr>
             <a:picLocks noChangeAspect="1"/>
           </p:cNvPicPr>
@@ -16830,8 +17308,8 @@
         </p:blipFill>
         <p:spPr>
           <a:xfrm>
-            <a:off x="8077727" y="1997964"/>
-            <a:ext cx="1816608" cy="807720"/>
+            <a:off x="8036079" y="2002536"/>
+            <a:ext cx="1816608" cy="798576"/>
           </a:xfrm>
           <a:prstGeom prst="rect">
             <a:avLst/>
@@ -16840,7 +17318,7 @@
       </p:pic>
       <p:pic>
         <p:nvPicPr>
-          <p:cNvPr id="15" name="Picture 14" descr="70bc6e0f1b3ecac9.png"/>
+          <p:cNvPr id="15" name="Picture 14" descr="e650137e6d4e49d9.png"/>
           <p:cNvPicPr>
             <a:picLocks noChangeAspect="1"/>
           </p:cNvPicPr>
@@ -16854,8 +17332,8 @@
         </p:blipFill>
         <p:spPr>
           <a:xfrm>
-            <a:off x="4928616" y="3084575"/>
-            <a:ext cx="2304288" cy="920495"/>
+            <a:off x="4881372" y="3084575"/>
+            <a:ext cx="2398776" cy="880872"/>
           </a:xfrm>
           <a:prstGeom prst="rect">
             <a:avLst/>
@@ -16870,7 +17348,7 @@
         </p:nvSpPr>
         <p:spPr>
           <a:xfrm>
-            <a:off x="987552" y="4343400"/>
+            <a:off x="987552" y="4303775"/>
             <a:ext cx="10131551" cy="475488"/>
           </a:xfrm>
           <a:prstGeom prst="rect">
@@ -16886,11 +17364,11 @@
           <a:p>
             <a:pPr algn="l"/>
             <a:r>
-              <a:rPr sz="2300" b="1" i="0">
+              <a:rPr sz="2180" b="1" i="0">
                 <a:solidFill>
                   <a:srgbClr val="1A1A1A"/>
                 </a:solidFill>
-                <a:latin typeface="Century Schoolbook"/>
+                <a:latin typeface="Lexend"/>
               </a:rPr>
               <a:t>Only the factor with the negative exponent moves. Its exponent turns positive.</a:t>
             </a:r>
@@ -16939,11 +17417,11 @@
           <a:p>
             <a:pPr algn="l"/>
             <a:r>
-              <a:rPr sz="3600" b="1" i="0">
+              <a:rPr sz="3420" b="1" i="0">
                 <a:solidFill>
                   <a:srgbClr val="1A1A1A"/>
                 </a:solidFill>
-                <a:latin typeface="Century Schoolbook"/>
+                <a:latin typeface="Lexend"/>
               </a:rPr>
               <a:t>Notes</a:t>
             </a:r>
@@ -17079,11 +17557,11 @@
           <a:p>
             <a:pPr algn="l"/>
             <a:r>
-              <a:rPr sz="1100" b="0" i="1">
+              <a:rPr sz="1040" b="0" i="0">
                 <a:solidFill>
                   <a:srgbClr val="6B6B6B"/>
                 </a:solidFill>
-                <a:latin typeface="Century Schoolbook"/>
+                <a:latin typeface="Lexend"/>
               </a:rPr>
               <a:t>Grade 7 Accelerated · Unit 3 · Thread A · Day 2 — Negative Exponents with Variable Bases</a:t>
             </a:r>
@@ -17114,11 +17592,11 @@
           <a:p>
             <a:pPr algn="r"/>
             <a:r>
-              <a:rPr sz="1100" b="0" i="0">
+              <a:rPr sz="1040" b="0" i="0">
                 <a:solidFill>
                   <a:srgbClr val="6B6B6B"/>
                 </a:solidFill>
-                <a:latin typeface="Century Schoolbook"/>
+                <a:latin typeface="Lexend"/>
               </a:rPr>
               <a:t>6</a:t>
             </a:r>
@@ -17149,11 +17627,11 @@
           <a:p>
             <a:pPr algn="l"/>
             <a:r>
-              <a:rPr sz="2500" b="1" i="0">
+              <a:rPr sz="2380" b="1" i="0">
                 <a:solidFill>
                   <a:srgbClr val="1A1A1A"/>
                 </a:solidFill>
-                <a:latin typeface="Century Schoolbook"/>
+                <a:latin typeface="Lexend"/>
               </a:rPr>
               <a:t>III.  The laws with negative exponents</a:t>
             </a:r>
@@ -17197,7 +17675,7 @@
       </p:cxnSp>
       <p:pic>
         <p:nvPicPr>
-          <p:cNvPr id="10" name="Picture 9" descr="47aaf26d66cf989f.png"/>
+          <p:cNvPr id="10" name="Picture 9" descr="4a24d7800dcaf051.png"/>
           <p:cNvPicPr>
             <a:picLocks noChangeAspect="1"/>
           </p:cNvPicPr>
@@ -17211,8 +17689,8 @@
         </p:blipFill>
         <p:spPr>
           <a:xfrm>
-            <a:off x="1446012" y="2026920"/>
-            <a:ext cx="4456176" cy="740664"/>
+            <a:off x="1462264" y="2020824"/>
+            <a:ext cx="4389120" cy="731520"/>
           </a:xfrm>
           <a:prstGeom prst="rect">
             <a:avLst/>
@@ -17227,8 +17705,8 @@
         </p:nvSpPr>
         <p:spPr>
           <a:xfrm>
-            <a:off x="5902188" y="2168652"/>
-            <a:ext cx="1183151" cy="457200"/>
+            <a:off x="5851384" y="2157984"/>
+            <a:ext cx="1141503" cy="457200"/>
           </a:xfrm>
           <a:prstGeom prst="rect">
             <a:avLst/>
@@ -17243,11 +17721,11 @@
           <a:p>
             <a:pPr algn="l"/>
             <a:r>
-              <a:rPr sz="2600" b="0" i="0">
+              <a:rPr sz="2470" b="0" i="0">
                 <a:solidFill>
                   <a:srgbClr val="1A1A1A"/>
                 </a:solidFill>
-                <a:latin typeface="Century Schoolbook"/>
+                <a:latin typeface="Lexend"/>
               </a:rPr>
               <a:t>          </a:t>
             </a:r>
@@ -17256,7 +17734,7 @@
       </p:sp>
       <p:pic>
         <p:nvPicPr>
-          <p:cNvPr id="12" name="Picture 11" descr="1fc48e462d92b635.png"/>
+          <p:cNvPr id="12" name="Picture 11" descr="2c9767efe7def644.png"/>
           <p:cNvPicPr>
             <a:picLocks noChangeAspect="1"/>
           </p:cNvPicPr>
@@ -17270,8 +17748,8 @@
         </p:blipFill>
         <p:spPr>
           <a:xfrm>
-            <a:off x="6948179" y="1993392"/>
-            <a:ext cx="3767328" cy="807720"/>
+            <a:off x="6855727" y="1993392"/>
+            <a:ext cx="3843528" cy="786384"/>
           </a:xfrm>
           <a:prstGeom prst="rect">
             <a:avLst/>
@@ -17280,7 +17758,7 @@
       </p:pic>
       <p:pic>
         <p:nvPicPr>
-          <p:cNvPr id="13" name="Picture 12" descr="92a6d22e61379cff.png"/>
+          <p:cNvPr id="13" name="Picture 12" descr="84afeb60d2ecec04.png"/>
           <p:cNvPicPr>
             <a:picLocks noChangeAspect="1"/>
           </p:cNvPicPr>
@@ -17294,8 +17772,8 @@
         </p:blipFill>
         <p:spPr>
           <a:xfrm>
-            <a:off x="4328159" y="3075432"/>
-            <a:ext cx="3505200" cy="819912"/>
+            <a:off x="4340351" y="3054096"/>
+            <a:ext cx="3480816" cy="813816"/>
           </a:xfrm>
           <a:prstGeom prst="rect">
             <a:avLst/>
@@ -17310,7 +17788,7 @@
         </p:nvSpPr>
         <p:spPr>
           <a:xfrm>
-            <a:off x="987552" y="4233672"/>
+            <a:off x="987552" y="4206240"/>
             <a:ext cx="10131551" cy="475488"/>
           </a:xfrm>
           <a:prstGeom prst="rect">
@@ -17326,11 +17804,11 @@
           <a:p>
             <a:pPr algn="l"/>
             <a:r>
-              <a:rPr sz="2300" b="1" i="0">
+              <a:rPr sz="2180" b="1" i="0">
                 <a:solidFill>
                   <a:srgbClr val="1A1A1A"/>
                 </a:solidFill>
-                <a:latin typeface="Century Schoolbook"/>
+                <a:latin typeface="Lexend"/>
               </a:rPr>
               <a:t>Apply the law. Then rewrite so that every exponent is positive.</a:t>
             </a:r>
@@ -17379,11 +17857,11 @@
           <a:p>
             <a:pPr algn="l"/>
             <a:r>
-              <a:rPr sz="3600" b="1" i="0">
+              <a:rPr sz="3420" b="1" i="0">
                 <a:solidFill>
                   <a:srgbClr val="1A1A1A"/>
                 </a:solidFill>
-                <a:latin typeface="Century Schoolbook"/>
+                <a:latin typeface="Lexend"/>
               </a:rPr>
               <a:t>Example 1</a:t>
             </a:r>
@@ -17519,11 +17997,11 @@
           <a:p>
             <a:pPr algn="l"/>
             <a:r>
-              <a:rPr sz="1100" b="0" i="1">
+              <a:rPr sz="1040" b="0" i="0">
                 <a:solidFill>
                   <a:srgbClr val="6B6B6B"/>
                 </a:solidFill>
-                <a:latin typeface="Century Schoolbook"/>
+                <a:latin typeface="Lexend"/>
               </a:rPr>
               <a:t>Grade 7 Accelerated · Unit 3 · Thread A · Day 2 — Negative Exponents with Variable Bases</a:t>
             </a:r>
@@ -17554,11 +18032,11 @@
           <a:p>
             <a:pPr algn="r"/>
             <a:r>
-              <a:rPr sz="1100" b="0" i="0">
+              <a:rPr sz="1040" b="0" i="0">
                 <a:solidFill>
                   <a:srgbClr val="6B6B6B"/>
                 </a:solidFill>
-                <a:latin typeface="Century Schoolbook"/>
+                <a:latin typeface="Lexend"/>
               </a:rPr>
               <a:t>7</a:t>
             </a:r>
@@ -17567,7 +18045,7 @@
       </p:sp>
       <p:pic>
         <p:nvPicPr>
-          <p:cNvPr id="8" name="Picture 7" descr="284a92747d139ebf.png"/>
+          <p:cNvPr id="8" name="Picture 7" descr="c31c4577474535c4.png"/>
           <p:cNvPicPr>
             <a:picLocks noChangeAspect="1"/>
           </p:cNvPicPr>
@@ -17581,8 +18059,8 @@
         </p:blipFill>
         <p:spPr>
           <a:xfrm>
-            <a:off x="4700016" y="2103120"/>
-            <a:ext cx="2761488" cy="423672"/>
+            <a:off x="4642104" y="2103120"/>
+            <a:ext cx="2877312" cy="426720"/>
           </a:xfrm>
           <a:prstGeom prst="rect">
             <a:avLst/>
@@ -17597,7 +18075,7 @@
         </p:nvSpPr>
         <p:spPr>
           <a:xfrm>
-            <a:off x="777240" y="3029712"/>
+            <a:off x="777240" y="3032760"/>
             <a:ext cx="10607040" cy="429370"/>
           </a:xfrm>
           <a:prstGeom prst="rect">
@@ -17613,11 +18091,11 @@
           <a:p>
             <a:pPr algn="ctr"/>
             <a:r>
-              <a:rPr sz="2400" b="1" i="0">
+              <a:rPr sz="2280" b="1" i="0">
                 <a:solidFill>
                   <a:srgbClr val="1A1A1A"/>
                 </a:solidFill>
-                <a:latin typeface="Century Schoolbook"/>
+                <a:latin typeface="Lexend"/>
               </a:rPr>
               <a:t>Write an equivalent expression with positive exponents only.</a:t>
             </a:r>
@@ -17666,11 +18144,11 @@
           <a:p>
             <a:pPr algn="l"/>
             <a:r>
-              <a:rPr sz="3600" b="1" i="0">
+              <a:rPr sz="3420" b="1" i="0">
                 <a:solidFill>
                   <a:srgbClr val="1A1A1A"/>
                 </a:solidFill>
-                <a:latin typeface="Century Schoolbook"/>
+                <a:latin typeface="Lexend"/>
               </a:rPr>
               <a:t>Example 1</a:t>
             </a:r>
@@ -17806,11 +18284,11 @@
           <a:p>
             <a:pPr algn="l"/>
             <a:r>
-              <a:rPr sz="1100" b="0" i="1">
+              <a:rPr sz="1040" b="0" i="0">
                 <a:solidFill>
                   <a:srgbClr val="6B6B6B"/>
                 </a:solidFill>
-                <a:latin typeface="Century Schoolbook"/>
+                <a:latin typeface="Lexend"/>
               </a:rPr>
               <a:t>Grade 7 Accelerated · Unit 3 · Thread A · Day 2 — Negative Exponents with Variable Bases</a:t>
             </a:r>
@@ -17841,11 +18319,11 @@
           <a:p>
             <a:pPr algn="r"/>
             <a:r>
-              <a:rPr sz="1100" b="0" i="0">
+              <a:rPr sz="1040" b="0" i="0">
                 <a:solidFill>
                   <a:srgbClr val="6B6B6B"/>
                 </a:solidFill>
-                <a:latin typeface="Century Schoolbook"/>
+                <a:latin typeface="Lexend"/>
               </a:rPr>
               <a:t>8</a:t>
             </a:r>
@@ -17854,7 +18332,7 @@
       </p:sp>
       <p:pic>
         <p:nvPicPr>
-          <p:cNvPr id="8" name="Picture 7" descr="99ce65e5c8ec578d.png"/>
+          <p:cNvPr id="8" name="Picture 7" descr="30c11d9477e5ce77.png"/>
           <p:cNvPicPr>
             <a:picLocks noChangeAspect="1"/>
           </p:cNvPicPr>
@@ -17869,7 +18347,7 @@
         <p:spPr>
           <a:xfrm>
             <a:off x="1828800" y="1920240"/>
-            <a:ext cx="6172200" cy="423672"/>
+            <a:ext cx="6245352" cy="426720"/>
           </a:xfrm>
           <a:prstGeom prst="rect">
             <a:avLst/>
@@ -17878,7 +18356,7 @@
       </p:pic>
       <p:pic>
         <p:nvPicPr>
-          <p:cNvPr id="9" name="Picture 8" descr="52caabd3337864a9.png"/>
+          <p:cNvPr id="9" name="Picture 8" descr="d89781ec39076510.png"/>
           <p:cNvPicPr>
             <a:picLocks noChangeAspect="1"/>
           </p:cNvPicPr>
@@ -17892,8 +18370,8 @@
         </p:blipFill>
         <p:spPr>
           <a:xfrm>
-            <a:off x="1828800" y="2618232"/>
-            <a:ext cx="2816352" cy="883920"/>
+            <a:off x="1828800" y="2621280"/>
+            <a:ext cx="2776728" cy="880872"/>
           </a:xfrm>
           <a:prstGeom prst="rect">
             <a:avLst/>
@@ -17924,38 +18402,38 @@
           <a:p>
             <a:pPr algn="ctr"/>
             <a:r>
-              <a:rPr sz="3200" b="1" i="0">
+              <a:rPr sz="3040" b="1" i="0">
                 <a:solidFill>
                   <a:srgbClr val="9E1B32"/>
                 </a:solidFill>
-                <a:latin typeface="Century Schoolbook"/>
+                <a:latin typeface="Lexend"/>
               </a:rPr>
               <a:t>Answer:   12x</a:t>
             </a:r>
             <a:r>
-              <a:rPr sz="3200" b="1" i="0" baseline="30000">
+              <a:rPr sz="3040" b="1" i="0" baseline="30000">
                 <a:solidFill>
                   <a:srgbClr val="9E1B32"/>
                 </a:solidFill>
-                <a:latin typeface="Century Schoolbook"/>
+                <a:latin typeface="Lexend"/>
               </a:rPr>
               <a:t>2</a:t>
             </a:r>
             <a:r>
-              <a:rPr sz="3200" b="1" i="0">
+              <a:rPr sz="3040" b="1" i="0">
                 <a:solidFill>
                   <a:srgbClr val="9E1B32"/>
                 </a:solidFill>
-                <a:latin typeface="Century Schoolbook"/>
+                <a:latin typeface="Lexend"/>
               </a:rPr>
               <a:t>/y</a:t>
             </a:r>
             <a:r>
-              <a:rPr sz="3200" b="1" i="0" baseline="30000">
+              <a:rPr sz="3040" b="1" i="0" baseline="30000">
                 <a:solidFill>
                   <a:srgbClr val="9E1B32"/>
                 </a:solidFill>
-                <a:latin typeface="Century Schoolbook"/>
+                <a:latin typeface="Lexend"/>
               </a:rPr>
               <a:t>2</a:t>
             </a:r>
@@ -18004,11 +18482,11 @@
           <a:p>
             <a:pPr algn="l"/>
             <a:r>
-              <a:rPr sz="3600" b="1" i="0">
+              <a:rPr sz="3420" b="1" i="0">
                 <a:solidFill>
                   <a:srgbClr val="1A1A1A"/>
                 </a:solidFill>
-                <a:latin typeface="Century Schoolbook"/>
+                <a:latin typeface="Lexend"/>
               </a:rPr>
               <a:t>Your Turn</a:t>
             </a:r>
@@ -18144,11 +18622,11 @@
           <a:p>
             <a:pPr algn="l"/>
             <a:r>
-              <a:rPr sz="1100" b="0" i="1">
+              <a:rPr sz="1040" b="0" i="0">
                 <a:solidFill>
                   <a:srgbClr val="6B6B6B"/>
                 </a:solidFill>
-                <a:latin typeface="Century Schoolbook"/>
+                <a:latin typeface="Lexend"/>
               </a:rPr>
               <a:t>Grade 7 Accelerated · Unit 3 · Thread A · Day 2 — Negative Exponents with Variable Bases</a:t>
             </a:r>
@@ -18179,11 +18657,11 @@
           <a:p>
             <a:pPr algn="r"/>
             <a:r>
-              <a:rPr sz="1100" b="0" i="0">
+              <a:rPr sz="1040" b="0" i="0">
                 <a:solidFill>
                   <a:srgbClr val="6B6B6B"/>
                 </a:solidFill>
-                <a:latin typeface="Century Schoolbook"/>
+                <a:latin typeface="Lexend"/>
               </a:rPr>
               <a:t>9</a:t>
             </a:r>
@@ -18192,7 +18670,7 @@
       </p:sp>
       <p:pic>
         <p:nvPicPr>
-          <p:cNvPr id="8" name="Picture 7" descr="26181856cce005b5.png"/>
+          <p:cNvPr id="8" name="Picture 7" descr="69930e82b2e70ee2.png"/>
           <p:cNvPicPr>
             <a:picLocks noChangeAspect="1"/>
           </p:cNvPicPr>
@@ -18206,8 +18684,8 @@
         </p:blipFill>
         <p:spPr>
           <a:xfrm>
-            <a:off x="4526279" y="2194560"/>
-            <a:ext cx="3108960" cy="515112"/>
+            <a:off x="4454651" y="1600200"/>
+            <a:ext cx="3252216" cy="509016"/>
           </a:xfrm>
           <a:prstGeom prst="rect">
             <a:avLst/>
@@ -18222,7 +18700,7 @@
         </p:nvSpPr>
         <p:spPr>
           <a:xfrm>
-            <a:off x="777240" y="3212592"/>
+            <a:off x="777240" y="2612136"/>
             <a:ext cx="10607040" cy="429370"/>
           </a:xfrm>
           <a:prstGeom prst="rect">
@@ -18238,11 +18716,11 @@
           <a:p>
             <a:pPr algn="ctr"/>
             <a:r>
-              <a:rPr sz="2400" b="1" i="0">
+              <a:rPr sz="2280" b="1" i="0">
                 <a:solidFill>
                   <a:srgbClr val="1A1A1A"/>
                 </a:solidFill>
-                <a:latin typeface="Century Schoolbook"/>
+                <a:latin typeface="Lexend"/>
               </a:rPr>
               <a:t>Write an equivalent expression with positive exponents only.</a:t>
             </a:r>

--- a/a7/build/out/u3/A7 3.T2 Negative Exponents with Variable Bases - Slides.pptx
+++ b/a7/build/out/u3/A7 3.T2 Negative Exponents with Variable Bases - Slides.pptx
@@ -5480,7 +5480,7 @@
       </p:sp>
       <p:pic>
         <p:nvPicPr>
-          <p:cNvPr id="8" name="Picture 7" descr="ec408266b0457393.png"/>
+          <p:cNvPr id="8" name="Picture 7" descr="66674280269050ae.png"/>
           <p:cNvPicPr>
             <a:picLocks noChangeAspect="1"/>
           </p:cNvPicPr>
@@ -5494,8 +5494,8 @@
         </p:blipFill>
         <p:spPr>
           <a:xfrm>
-            <a:off x="5742431" y="2194560"/>
-            <a:ext cx="676656" cy="414528"/>
+            <a:off x="5750052" y="2194560"/>
+            <a:ext cx="661416" cy="417576"/>
           </a:xfrm>
           <a:prstGeom prst="rect">
             <a:avLst/>
@@ -5767,7 +5767,7 @@
       </p:sp>
       <p:pic>
         <p:nvPicPr>
-          <p:cNvPr id="8" name="Picture 7" descr="d0e787fdcb7c6f21.png"/>
+          <p:cNvPr id="8" name="Picture 7" descr="701db6ee3c3d847d.png"/>
           <p:cNvPicPr>
             <a:picLocks noChangeAspect="1"/>
           </p:cNvPicPr>
@@ -5781,8 +5781,8 @@
         </p:blipFill>
         <p:spPr>
           <a:xfrm>
-            <a:off x="5742431" y="2103120"/>
-            <a:ext cx="676656" cy="414528"/>
+            <a:off x="5748528" y="2103120"/>
+            <a:ext cx="664464" cy="417576"/>
           </a:xfrm>
           <a:prstGeom prst="rect">
             <a:avLst/>
@@ -5791,7 +5791,7 @@
       </p:pic>
       <p:pic>
         <p:nvPicPr>
-          <p:cNvPr id="9" name="Picture 8" descr="120fc012f8affb54.png"/>
+          <p:cNvPr id="9" name="Picture 8" descr="d97f5e29590d2845.png"/>
           <p:cNvPicPr>
             <a:picLocks noChangeAspect="1"/>
           </p:cNvPicPr>
@@ -5805,8 +5805,8 @@
         </p:blipFill>
         <p:spPr>
           <a:xfrm>
-            <a:off x="5527547" y="2819399"/>
-            <a:ext cx="1207008" cy="658368"/>
+            <a:off x="5538215" y="2822448"/>
+            <a:ext cx="1188720" cy="658368"/>
           </a:xfrm>
           <a:prstGeom prst="rect">
             <a:avLst/>
@@ -5821,7 +5821,7 @@
         </p:nvSpPr>
         <p:spPr>
           <a:xfrm>
-            <a:off x="4861560" y="4843271"/>
+            <a:off x="4867656" y="4843271"/>
             <a:ext cx="1920240" cy="548640"/>
           </a:xfrm>
           <a:prstGeom prst="rect">
@@ -5850,7 +5850,7 @@
       </p:sp>
       <p:pic>
         <p:nvPicPr>
-          <p:cNvPr id="11" name="Picture 10" descr="fb1ddbcef519bcae.png"/>
+          <p:cNvPr id="11" name="Picture 10" descr="32577d3055fb5c64.png"/>
           <p:cNvPicPr>
             <a:picLocks noChangeAspect="1"/>
           </p:cNvPicPr>
@@ -5864,8 +5864,8 @@
         </p:blipFill>
         <p:spPr>
           <a:xfrm>
-            <a:off x="6781799" y="4663440"/>
-            <a:ext cx="518160" cy="908304"/>
+            <a:off x="6787896" y="4663440"/>
+            <a:ext cx="505968" cy="908304"/>
           </a:xfrm>
           <a:prstGeom prst="rect">
             <a:avLst/>
@@ -6818,7 +6818,7 @@
       </p:sp>
       <p:pic>
         <p:nvPicPr>
-          <p:cNvPr id="11" name="Picture 10" descr="bea5ec65db107fb5.png"/>
+          <p:cNvPr id="11" name="Picture 10" descr="84926e2d69875820.png"/>
           <p:cNvPicPr>
             <a:picLocks noChangeAspect="1"/>
           </p:cNvPicPr>
@@ -6833,7 +6833,7 @@
         <p:spPr>
           <a:xfrm>
             <a:off x="8781706" y="1941575"/>
-            <a:ext cx="591312" cy="277368"/>
+            <a:ext cx="597408" cy="277368"/>
           </a:xfrm>
           <a:prstGeom prst="rect">
             <a:avLst/>
@@ -6848,7 +6848,7 @@
         </p:nvSpPr>
         <p:spPr>
           <a:xfrm>
-            <a:off x="9373018" y="1851660"/>
+            <a:off x="9379114" y="1851660"/>
             <a:ext cx="1176823" cy="457200"/>
           </a:xfrm>
           <a:prstGeom prst="rect">
@@ -6940,7 +6940,7 @@
                 </a:solidFill>
                 <a:latin typeface="Lexend"/>
               </a:rPr>
-              <a:t>How bright is the lamp from 2 meters away?</a:t>
+              <a:t>How bright is the lamp from 3 meters away?</a:t>
             </a:r>
           </a:p>
         </p:txBody>
@@ -7838,7 +7838,7 @@
       </p:sp>
       <p:pic>
         <p:nvPicPr>
-          <p:cNvPr id="11" name="Picture 10" descr="751d7165ce0bd930.png"/>
+          <p:cNvPr id="11" name="Picture 10" descr="59a0045a99994c77.png"/>
           <p:cNvPicPr>
             <a:picLocks noChangeAspect="1"/>
           </p:cNvPicPr>
@@ -7853,7 +7853,7 @@
         <p:spPr>
           <a:xfrm>
             <a:off x="8781706" y="1941575"/>
-            <a:ext cx="594360" cy="277368"/>
+            <a:ext cx="600456" cy="277368"/>
           </a:xfrm>
           <a:prstGeom prst="rect">
             <a:avLst/>
@@ -7868,7 +7868,7 @@
         </p:nvSpPr>
         <p:spPr>
           <a:xfrm>
-            <a:off x="9376066" y="1851660"/>
+            <a:off x="9382162" y="1851660"/>
             <a:ext cx="1176823" cy="457200"/>
           </a:xfrm>
           <a:prstGeom prst="rect">
@@ -7960,14 +7960,14 @@
                 </a:solidFill>
                 <a:latin typeface="Lexend"/>
               </a:rPr>
-              <a:t>How bright is the lamp from 2 meters away?</a:t>
+              <a:t>How bright is the lamp from 3 meters away?</a:t>
             </a:r>
           </a:p>
         </p:txBody>
       </p:sp>
       <p:pic>
         <p:nvPicPr>
-          <p:cNvPr id="15" name="Picture 14" descr="0c0f23d02279b177.png"/>
+          <p:cNvPr id="15" name="Picture 14" descr="5c284e4651c465ae.png"/>
           <p:cNvPicPr>
             <a:picLocks noChangeAspect="1"/>
           </p:cNvPicPr>
@@ -7981,8 +7981,8 @@
         </p:blipFill>
         <p:spPr>
           <a:xfrm>
-            <a:off x="4483120" y="3684236"/>
-            <a:ext cx="1356360" cy="661416"/>
+            <a:off x="4499884" y="3684236"/>
+            <a:ext cx="1365504" cy="661416"/>
           </a:xfrm>
           <a:prstGeom prst="rect">
             <a:avLst/>
@@ -7997,7 +7997,7 @@
         </p:nvSpPr>
         <p:spPr>
           <a:xfrm>
-            <a:off x="4428256" y="4575776"/>
+            <a:off x="4445020" y="4577300"/>
             <a:ext cx="1342179" cy="457200"/>
           </a:xfrm>
           <a:prstGeom prst="rect">
@@ -8026,7 +8026,7 @@
       </p:sp>
       <p:pic>
         <p:nvPicPr>
-          <p:cNvPr id="17" name="Picture 16" descr="07b139cdbb0c92ad.png"/>
+          <p:cNvPr id="17" name="Picture 16" descr="c75e225ddc14232b.png"/>
           <p:cNvPicPr>
             <a:picLocks noChangeAspect="1"/>
           </p:cNvPicPr>
@@ -8040,8 +8040,8 @@
         </p:blipFill>
         <p:spPr>
           <a:xfrm>
-            <a:off x="5633275" y="4679408"/>
-            <a:ext cx="704088" cy="249935"/>
+            <a:off x="5650039" y="4680932"/>
+            <a:ext cx="691896" cy="249935"/>
           </a:xfrm>
           <a:prstGeom prst="rect">
             <a:avLst/>
@@ -8056,7 +8056,7 @@
         </p:nvSpPr>
         <p:spPr>
           <a:xfrm>
-            <a:off x="6337363" y="4575776"/>
+            <a:off x="6341935" y="4577300"/>
             <a:ext cx="606468" cy="457200"/>
           </a:xfrm>
           <a:prstGeom prst="rect">
@@ -8085,7 +8085,7 @@
       </p:sp>
       <p:pic>
         <p:nvPicPr>
-          <p:cNvPr id="19" name="Picture 18" descr="317e2464069192f5.png"/>
+          <p:cNvPr id="19" name="Picture 18" descr="797e4763244917a2.png"/>
           <p:cNvPicPr>
             <a:picLocks noChangeAspect="1"/>
           </p:cNvPicPr>
@@ -8099,8 +8099,8 @@
         </p:blipFill>
         <p:spPr>
           <a:xfrm>
-            <a:off x="6806671" y="4473668"/>
-            <a:ext cx="926592" cy="661416"/>
+            <a:off x="6811243" y="4473668"/>
+            <a:ext cx="902208" cy="664464"/>
           </a:xfrm>
           <a:prstGeom prst="rect">
             <a:avLst/>
@@ -8115,7 +8115,7 @@
         </p:nvSpPr>
         <p:spPr>
           <a:xfrm>
-            <a:off x="4968239" y="5413976"/>
+            <a:off x="4981956" y="5418548"/>
             <a:ext cx="1920240" cy="548640"/>
           </a:xfrm>
           <a:prstGeom prst="rect">
@@ -8144,7 +8144,7 @@
       </p:sp>
       <p:pic>
         <p:nvPicPr>
-          <p:cNvPr id="21" name="Picture 20" descr="7857f3e6801ae956.png"/>
+          <p:cNvPr id="21" name="Picture 20" descr="7cc84f7ce49a4b30.png"/>
           <p:cNvPicPr>
             <a:picLocks noChangeAspect="1"/>
           </p:cNvPicPr>
@@ -8158,8 +8158,8 @@
         </p:blipFill>
         <p:spPr>
           <a:xfrm>
-            <a:off x="6888480" y="5272244"/>
-            <a:ext cx="304800" cy="832104"/>
+            <a:off x="6902196" y="5275292"/>
+            <a:ext cx="277368" cy="835152"/>
           </a:xfrm>
           <a:prstGeom prst="rect">
             <a:avLst/>
@@ -8396,7 +8396,7 @@
       </p:sp>
       <p:pic>
         <p:nvPicPr>
-          <p:cNvPr id="8" name="Picture 7" descr="ad788033b92abbfb.png"/>
+          <p:cNvPr id="8" name="Picture 7" descr="dffbc97436ffe1ee.png"/>
           <p:cNvPicPr>
             <a:picLocks noChangeAspect="1"/>
           </p:cNvPicPr>
@@ -8410,8 +8410,8 @@
         </p:blipFill>
         <p:spPr>
           <a:xfrm>
-            <a:off x="5414771" y="2194560"/>
-            <a:ext cx="1331976" cy="524256"/>
+            <a:off x="5390388" y="2194560"/>
+            <a:ext cx="1380744" cy="524256"/>
           </a:xfrm>
           <a:prstGeom prst="rect">
             <a:avLst/>
@@ -8683,7 +8683,7 @@
       </p:sp>
       <p:pic>
         <p:nvPicPr>
-          <p:cNvPr id="8" name="Picture 7" descr="b8711b9cfc864f9c.png"/>
+          <p:cNvPr id="8" name="Picture 7" descr="379041f8448abc42.png"/>
           <p:cNvPicPr>
             <a:picLocks noChangeAspect="1"/>
           </p:cNvPicPr>
@@ -8697,8 +8697,8 @@
         </p:blipFill>
         <p:spPr>
           <a:xfrm>
-            <a:off x="5414771" y="2103120"/>
-            <a:ext cx="1331976" cy="524256"/>
+            <a:off x="5388863" y="2103120"/>
+            <a:ext cx="1383792" cy="524256"/>
           </a:xfrm>
           <a:prstGeom prst="rect">
             <a:avLst/>
@@ -8707,7 +8707,7 @@
       </p:pic>
       <p:pic>
         <p:nvPicPr>
-          <p:cNvPr id="9" name="Picture 8" descr="8a0e20154d3860c8.png"/>
+          <p:cNvPr id="9" name="Picture 8" descr="df4259ca5ca27323.png"/>
           <p:cNvPicPr>
             <a:picLocks noChangeAspect="1"/>
           </p:cNvPicPr>
@@ -8721,8 +8721,8 @@
         </p:blipFill>
         <p:spPr>
           <a:xfrm>
-            <a:off x="4459223" y="2929128"/>
-            <a:ext cx="3343656" cy="740664"/>
+            <a:off x="4389119" y="2929128"/>
+            <a:ext cx="3486912" cy="737616"/>
           </a:xfrm>
           <a:prstGeom prst="rect">
             <a:avLst/>
@@ -8737,7 +8737,7 @@
         </p:nvSpPr>
         <p:spPr>
           <a:xfrm>
-            <a:off x="4632960" y="4898136"/>
+            <a:off x="4596384" y="4898136"/>
             <a:ext cx="1920240" cy="548640"/>
           </a:xfrm>
           <a:prstGeom prst="rect">
@@ -8766,7 +8766,7 @@
       </p:sp>
       <p:pic>
         <p:nvPicPr>
-          <p:cNvPr id="11" name="Picture 10" descr="288f02ec57e35699.png"/>
+          <p:cNvPr id="11" name="Picture 10" descr="ae9b99218356569f.png"/>
           <p:cNvPicPr>
             <a:picLocks noChangeAspect="1"/>
           </p:cNvPicPr>
@@ -8780,8 +8780,8 @@
         </p:blipFill>
         <p:spPr>
           <a:xfrm>
-            <a:off x="6553199" y="4663440"/>
-            <a:ext cx="975360" cy="1018032"/>
+            <a:off x="6516624" y="4663440"/>
+            <a:ext cx="1048512" cy="1018032"/>
           </a:xfrm>
           <a:prstGeom prst="rect">
             <a:avLst/>
@@ -9018,7 +9018,7 @@
       </p:sp>
       <p:pic>
         <p:nvPicPr>
-          <p:cNvPr id="8" name="Picture 7" descr="76e7ce04dbed466e.png"/>
+          <p:cNvPr id="8" name="Picture 7" descr="8fef075fd5991491.png"/>
           <p:cNvPicPr>
             <a:picLocks noChangeAspect="1"/>
           </p:cNvPicPr>
@@ -9032,8 +9032,8 @@
         </p:blipFill>
         <p:spPr>
           <a:xfrm>
-            <a:off x="5347715" y="2194560"/>
-            <a:ext cx="1466088" cy="420624"/>
+            <a:off x="5268467" y="2194560"/>
+            <a:ext cx="1624584" cy="420624"/>
           </a:xfrm>
           <a:prstGeom prst="rect">
             <a:avLst/>
@@ -9123,7 +9123,7 @@
                 </a:solidFill>
                 <a:latin typeface="Lexend"/>
               </a:rPr>
-              <a:t>2</a:t>
+              <a:t>11</a:t>
             </a:r>
           </a:p>
         </p:txBody>
@@ -9176,7 +9176,7 @@
                 </a:solidFill>
                 <a:latin typeface="Lexend"/>
               </a:rPr>
-              <a:t>24</a:t>
+              <a:t>42</a:t>
             </a:r>
           </a:p>
         </p:txBody>
@@ -9229,7 +9229,7 @@
                 </a:solidFill>
                 <a:latin typeface="Lexend"/>
               </a:rPr>
-              <a:t>2</a:t>
+              <a:t>11</a:t>
             </a:r>
           </a:p>
         </p:txBody>
@@ -9282,7 +9282,7 @@
                 </a:solidFill>
                 <a:latin typeface="Lexend"/>
               </a:rPr>
-              <a:t>10</a:t>
+              <a:t>17</a:t>
             </a:r>
           </a:p>
         </p:txBody>
@@ -9552,7 +9552,7 @@
       </p:sp>
       <p:pic>
         <p:nvPicPr>
-          <p:cNvPr id="8" name="Picture 7" descr="57c3b1d76dc5c999.png"/>
+          <p:cNvPr id="8" name="Picture 7" descr="15fe40f55398ba6d.png"/>
           <p:cNvPicPr>
             <a:picLocks noChangeAspect="1"/>
           </p:cNvPicPr>
@@ -9566,8 +9566,8 @@
         </p:blipFill>
         <p:spPr>
           <a:xfrm>
-            <a:off x="5346191" y="2103120"/>
-            <a:ext cx="1469136" cy="420624"/>
+            <a:off x="5268467" y="2103120"/>
+            <a:ext cx="1624584" cy="420624"/>
           </a:xfrm>
           <a:prstGeom prst="rect">
             <a:avLst/>
@@ -9611,7 +9611,7 @@
       </p:sp>
       <p:pic>
         <p:nvPicPr>
-          <p:cNvPr id="10" name="Picture 9" descr="3dfe241d36c83f1a.png"/>
+          <p:cNvPr id="10" name="Picture 9" descr="fa30cce62b6157ca.png"/>
           <p:cNvPicPr>
             <a:picLocks noChangeAspect="1"/>
           </p:cNvPicPr>
@@ -9625,8 +9625,8 @@
         </p:blipFill>
         <p:spPr>
           <a:xfrm>
-            <a:off x="4494275" y="3453715"/>
-            <a:ext cx="3279648" cy="304800"/>
+            <a:off x="4326635" y="3455239"/>
+            <a:ext cx="3617976" cy="301752"/>
           </a:xfrm>
           <a:prstGeom prst="rect">
             <a:avLst/>
@@ -9635,7 +9635,7 @@
       </p:pic>
       <p:pic>
         <p:nvPicPr>
-          <p:cNvPr id="11" name="Picture 10" descr="b1ab2b2f40b1e364.png"/>
+          <p:cNvPr id="11" name="Picture 10" descr="62056a37b2fbb2df.png"/>
           <p:cNvPicPr>
             <a:picLocks noChangeAspect="1"/>
           </p:cNvPicPr>
@@ -9649,8 +9649,8 @@
         </p:blipFill>
         <p:spPr>
           <a:xfrm>
-            <a:off x="4494275" y="3939871"/>
-            <a:ext cx="1173480" cy="661416"/>
+            <a:off x="4326635" y="3939871"/>
+            <a:ext cx="1392936" cy="661416"/>
           </a:xfrm>
           <a:prstGeom prst="rect">
             <a:avLst/>
@@ -9696,7 +9696,7 @@
                 </a:solidFill>
                 <a:latin typeface="Lexend"/>
               </a:rPr>
-              <a:t>2</a:t>
+              <a:t>11</a:t>
             </a:r>
           </a:p>
         </p:txBody>
@@ -9931,7 +9931,7 @@
       </p:sp>
       <p:pic>
         <p:nvPicPr>
-          <p:cNvPr id="8" name="Picture 7" descr="5ddb63c42875a2b4.png"/>
+          <p:cNvPr id="8" name="Picture 7" descr="cf3a56c40449a58b.png"/>
           <p:cNvPicPr>
             <a:picLocks noChangeAspect="1"/>
           </p:cNvPicPr>
@@ -9945,8 +9945,8 @@
         </p:blipFill>
         <p:spPr>
           <a:xfrm>
-            <a:off x="5350764" y="2194560"/>
-            <a:ext cx="1459992" cy="509016"/>
+            <a:off x="5349240" y="2194560"/>
+            <a:ext cx="1463040" cy="509016"/>
           </a:xfrm>
           <a:prstGeom prst="rect">
             <a:avLst/>
@@ -10027,7 +10027,16 @@
                 </a:solidFill>
                 <a:latin typeface="Lexend"/>
               </a:rPr>
-              <a:t>4/x</a:t>
+              <a:t>9/x</a:t>
+            </a:r>
+            <a:r>
+              <a:rPr sz="2280" b="0" i="0" baseline="30000">
+                <a:solidFill>
+                  <a:srgbClr val="1A1A1A"/>
+                </a:solidFill>
+                <a:latin typeface="Lexend"/>
+              </a:rPr>
+              <a:t>3</a:t>
             </a:r>
           </a:p>
         </p:txBody>
@@ -10071,7 +10080,7 @@
                 </a:solidFill>
                 <a:latin typeface="Lexend"/>
               </a:rPr>
-              <a:t>1/(4x</a:t>
+              <a:t>1/(9x</a:t>
             </a:r>
             <a:r>
               <a:rPr sz="2280" b="0" i="0" baseline="30000">
@@ -10080,7 +10089,7 @@
                 </a:solidFill>
                 <a:latin typeface="Lexend"/>
               </a:rPr>
-              <a:t>6</a:t>
+              <a:t>10</a:t>
             </a:r>
             <a:r>
               <a:rPr sz="2280" b="0" i="0">
@@ -10133,7 +10142,7 @@
                 </a:solidFill>
                 <a:latin typeface="Lexend"/>
               </a:rPr>
-              <a:t>2/x</a:t>
+              <a:t>3/x</a:t>
             </a:r>
             <a:r>
               <a:rPr sz="2280" b="0" i="0" baseline="30000">
@@ -10142,7 +10151,7 @@
                 </a:solidFill>
                 <a:latin typeface="Lexend"/>
               </a:rPr>
-              <a:t>6</a:t>
+              <a:t>10</a:t>
             </a:r>
           </a:p>
         </p:txBody>
@@ -10186,7 +10195,7 @@
                 </a:solidFill>
                 <a:latin typeface="Lexend"/>
               </a:rPr>
-              <a:t>4/x</a:t>
+              <a:t>9/x</a:t>
             </a:r>
             <a:r>
               <a:rPr sz="2280" b="0" i="0" baseline="30000">
@@ -10195,7 +10204,7 @@
                 </a:solidFill>
                 <a:latin typeface="Lexend"/>
               </a:rPr>
-              <a:t>6</a:t>
+              <a:t>10</a:t>
             </a:r>
           </a:p>
         </p:txBody>
@@ -10465,7 +10474,7 @@
       </p:sp>
       <p:pic>
         <p:nvPicPr>
-          <p:cNvPr id="8" name="Picture 7" descr="0b4a094821466f75.png"/>
+          <p:cNvPr id="8" name="Picture 7" descr="0a90fe1e36bfa0f8.png"/>
           <p:cNvPicPr>
             <a:picLocks noChangeAspect="1"/>
           </p:cNvPicPr>
@@ -10479,8 +10488,8 @@
         </p:blipFill>
         <p:spPr>
           <a:xfrm>
-            <a:off x="5349240" y="2103120"/>
-            <a:ext cx="1463040" cy="509016"/>
+            <a:off x="5347715" y="2103120"/>
+            <a:ext cx="1466088" cy="509016"/>
           </a:xfrm>
           <a:prstGeom prst="rect">
             <a:avLst/>
@@ -10524,7 +10533,7 @@
       </p:sp>
       <p:pic>
         <p:nvPicPr>
-          <p:cNvPr id="10" name="Picture 9" descr="7719b4b74c44dd36.png"/>
+          <p:cNvPr id="10" name="Picture 9" descr="8fdbef022020a71c.png"/>
           <p:cNvPicPr>
             <a:picLocks noChangeAspect="1"/>
           </p:cNvPicPr>
@@ -10538,8 +10547,8 @@
         </p:blipFill>
         <p:spPr>
           <a:xfrm>
-            <a:off x="4258056" y="3508579"/>
-            <a:ext cx="3752088" cy="371856"/>
+            <a:off x="4200144" y="3508579"/>
+            <a:ext cx="3870960" cy="371856"/>
           </a:xfrm>
           <a:prstGeom prst="rect">
             <a:avLst/>
@@ -10548,7 +10557,7 @@
       </p:pic>
       <p:pic>
         <p:nvPicPr>
-          <p:cNvPr id="11" name="Picture 10" descr="5bac0c5947c6ee52.png"/>
+          <p:cNvPr id="11" name="Picture 10" descr="6b6d8bee23985d82.png"/>
           <p:cNvPicPr>
             <a:picLocks noChangeAspect="1"/>
           </p:cNvPicPr>
@@ -10562,8 +10571,8 @@
         </p:blipFill>
         <p:spPr>
           <a:xfrm>
-            <a:off x="4258056" y="4028263"/>
-            <a:ext cx="1389888" cy="661416"/>
+            <a:off x="4200144" y="4028263"/>
+            <a:ext cx="1636776" cy="661416"/>
           </a:xfrm>
           <a:prstGeom prst="rect">
             <a:avLst/>
@@ -10600,7 +10609,7 @@
                 </a:solidFill>
                 <a:latin typeface="Lexend"/>
               </a:rPr>
-              <a:t>Answer:   D — 4/x</a:t>
+              <a:t>Answer:   D — 9/x</a:t>
             </a:r>
             <a:r>
               <a:rPr sz="3040" b="1" i="0" baseline="30000">
@@ -10609,7 +10618,7 @@
                 </a:solidFill>
                 <a:latin typeface="Lexend"/>
               </a:rPr>
-              <a:t>6</a:t>
+              <a:t>10</a:t>
             </a:r>
           </a:p>
         </p:txBody>
@@ -10844,7 +10853,7 @@
       </p:sp>
       <p:pic>
         <p:nvPicPr>
-          <p:cNvPr id="8" name="Picture 7" descr="636cf8092383896e.png"/>
+          <p:cNvPr id="8" name="Picture 7" descr="d250187780958f10.png"/>
           <p:cNvPicPr>
             <a:picLocks noChangeAspect="1"/>
           </p:cNvPicPr>
@@ -10858,8 +10867,8 @@
         </p:blipFill>
         <p:spPr>
           <a:xfrm>
-            <a:off x="5747003" y="2194560"/>
-            <a:ext cx="667512" cy="978408"/>
+            <a:off x="5739384" y="2194560"/>
+            <a:ext cx="682752" cy="996696"/>
           </a:xfrm>
           <a:prstGeom prst="rect">
             <a:avLst/>
@@ -11131,7 +11140,7 @@
       </p:sp>
       <p:pic>
         <p:nvPicPr>
-          <p:cNvPr id="8" name="Picture 7" descr="c5cfb9ca7ed5b513.png"/>
+          <p:cNvPr id="8" name="Picture 7" descr="80545a7c6c29eb15.png"/>
           <p:cNvPicPr>
             <a:picLocks noChangeAspect="1"/>
           </p:cNvPicPr>
@@ -11145,8 +11154,8 @@
         </p:blipFill>
         <p:spPr>
           <a:xfrm>
-            <a:off x="5750052" y="2103120"/>
-            <a:ext cx="661416" cy="978408"/>
+            <a:off x="5742431" y="2103120"/>
+            <a:ext cx="676656" cy="993648"/>
           </a:xfrm>
           <a:prstGeom prst="rect">
             <a:avLst/>
@@ -11155,7 +11164,7 @@
       </p:pic>
       <p:pic>
         <p:nvPicPr>
-          <p:cNvPr id="9" name="Picture 8" descr="d5d202bb372dce8a.png"/>
+          <p:cNvPr id="9" name="Picture 8" descr="827875b902783bf3.png"/>
           <p:cNvPicPr>
             <a:picLocks noChangeAspect="1"/>
           </p:cNvPicPr>
@@ -11169,8 +11178,8 @@
         </p:blipFill>
         <p:spPr>
           <a:xfrm>
-            <a:off x="4815839" y="3383280"/>
-            <a:ext cx="2642616" cy="710184"/>
+            <a:off x="4860035" y="3398520"/>
+            <a:ext cx="2554224" cy="722376"/>
           </a:xfrm>
           <a:prstGeom prst="rect">
             <a:avLst/>
@@ -11179,7 +11188,7 @@
       </p:pic>
       <p:pic>
         <p:nvPicPr>
-          <p:cNvPr id="10" name="Picture 9" descr="b3a0847db3beb524.png"/>
+          <p:cNvPr id="10" name="Picture 9" descr="7f1840715d0010c6.png"/>
           <p:cNvPicPr>
             <a:picLocks noChangeAspect="1"/>
           </p:cNvPicPr>
@@ -11193,8 +11202,8 @@
         </p:blipFill>
         <p:spPr>
           <a:xfrm>
-            <a:off x="4815839" y="4221480"/>
-            <a:ext cx="1441704" cy="658368"/>
+            <a:off x="4860035" y="4248912"/>
+            <a:ext cx="1219200" cy="664464"/>
           </a:xfrm>
           <a:prstGeom prst="rect">
             <a:avLst/>
@@ -11209,7 +11218,7 @@
         </p:nvSpPr>
         <p:spPr>
           <a:xfrm>
-            <a:off x="4774692" y="5196840"/>
+            <a:off x="4855464" y="5234940"/>
             <a:ext cx="1920240" cy="548640"/>
           </a:xfrm>
           <a:prstGeom prst="rect">
@@ -11238,7 +11247,7 @@
       </p:sp>
       <p:pic>
         <p:nvPicPr>
-          <p:cNvPr id="12" name="Picture 11" descr="c3401cb351d5db04.png"/>
+          <p:cNvPr id="12" name="Picture 11" descr="dbcbf103259ff015.png"/>
           <p:cNvPicPr>
             <a:picLocks noChangeAspect="1"/>
           </p:cNvPicPr>
@@ -11252,8 +11261,8 @@
         </p:blipFill>
         <p:spPr>
           <a:xfrm>
-            <a:off x="6694932" y="5017008"/>
-            <a:ext cx="691896" cy="908304"/>
+            <a:off x="6775704" y="5050536"/>
+            <a:ext cx="530352" cy="917448"/>
           </a:xfrm>
           <a:prstGeom prst="rect">
             <a:avLst/>
@@ -13013,7 +13022,7 @@
         </p:nvSpPr>
         <p:spPr>
           <a:xfrm>
-            <a:off x="3519191" y="2171700"/>
+            <a:off x="3516143" y="2171700"/>
             <a:ext cx="1738535" cy="457200"/>
           </a:xfrm>
           <a:prstGeom prst="rect">
@@ -13042,7 +13051,7 @@
       </p:sp>
       <p:pic>
         <p:nvPicPr>
-          <p:cNvPr id="9" name="Picture 8" descr="7f8cc9402f9faa55.png"/>
+          <p:cNvPr id="9" name="Picture 8" descr="fe49da65f71bdf6f.png"/>
           <p:cNvPicPr>
             <a:picLocks noChangeAspect="1"/>
           </p:cNvPicPr>
@@ -13056,8 +13065,8 @@
         </p:blipFill>
         <p:spPr>
           <a:xfrm>
-            <a:off x="5120567" y="2232660"/>
-            <a:ext cx="362712" cy="335280"/>
+            <a:off x="5117519" y="2234184"/>
+            <a:ext cx="365760" cy="332232"/>
           </a:xfrm>
           <a:prstGeom prst="rect">
             <a:avLst/>
@@ -13101,7 +13110,7 @@
       </p:sp>
       <p:pic>
         <p:nvPicPr>
-          <p:cNvPr id="11" name="Picture 10" descr="985ff9dbb24c3672.png"/>
+          <p:cNvPr id="11" name="Picture 10" descr="0b08484e668b3163.png"/>
           <p:cNvPicPr>
             <a:picLocks noChangeAspect="1"/>
           </p:cNvPicPr>
@@ -13115,8 +13124,8 @@
         </p:blipFill>
         <p:spPr>
           <a:xfrm>
-            <a:off x="6548020" y="2232660"/>
-            <a:ext cx="521207" cy="335280"/>
+            <a:off x="6548020" y="2234184"/>
+            <a:ext cx="524256" cy="332232"/>
           </a:xfrm>
           <a:prstGeom prst="rect">
             <a:avLst/>
@@ -13131,7 +13140,7 @@
         </p:nvSpPr>
         <p:spPr>
           <a:xfrm>
-            <a:off x="7069228" y="2171700"/>
+            <a:off x="7072276" y="2171700"/>
             <a:ext cx="1710260" cy="457200"/>
           </a:xfrm>
           <a:prstGeom prst="rect">
@@ -13523,7 +13532,7 @@
         </p:nvSpPr>
         <p:spPr>
           <a:xfrm>
-            <a:off x="3519191" y="2080260"/>
+            <a:off x="3516143" y="2080260"/>
             <a:ext cx="1738535" cy="457200"/>
           </a:xfrm>
           <a:prstGeom prst="rect">
@@ -13552,7 +13561,7 @@
       </p:sp>
       <p:pic>
         <p:nvPicPr>
-          <p:cNvPr id="9" name="Picture 8" descr="fb0a7a04003102df.png"/>
+          <p:cNvPr id="9" name="Picture 8" descr="d6ec3cb3152693fc.png"/>
           <p:cNvPicPr>
             <a:picLocks noChangeAspect="1"/>
           </p:cNvPicPr>
@@ -13566,8 +13575,8 @@
         </p:blipFill>
         <p:spPr>
           <a:xfrm>
-            <a:off x="5120567" y="2141219"/>
-            <a:ext cx="362712" cy="335280"/>
+            <a:off x="5117519" y="2142744"/>
+            <a:ext cx="365760" cy="332232"/>
           </a:xfrm>
           <a:prstGeom prst="rect">
             <a:avLst/>
@@ -13611,7 +13620,7 @@
       </p:sp>
       <p:pic>
         <p:nvPicPr>
-          <p:cNvPr id="11" name="Picture 10" descr="127b4fbd30bb78c2.png"/>
+          <p:cNvPr id="11" name="Picture 10" descr="95ab217f46ae0ac2.png"/>
           <p:cNvPicPr>
             <a:picLocks noChangeAspect="1"/>
           </p:cNvPicPr>
@@ -13625,8 +13634,8 @@
         </p:blipFill>
         <p:spPr>
           <a:xfrm>
-            <a:off x="6548020" y="2141219"/>
-            <a:ext cx="521207" cy="335280"/>
+            <a:off x="6548020" y="2142744"/>
+            <a:ext cx="524256" cy="332232"/>
           </a:xfrm>
           <a:prstGeom prst="rect">
             <a:avLst/>
@@ -13641,7 +13650,7 @@
         </p:nvSpPr>
         <p:spPr>
           <a:xfrm>
-            <a:off x="7069228" y="2080260"/>
+            <a:off x="7072276" y="2080260"/>
             <a:ext cx="1710260" cy="457200"/>
           </a:xfrm>
           <a:prstGeom prst="rect">
@@ -13764,7 +13773,7 @@
       </p:sp>
       <p:pic>
         <p:nvPicPr>
-          <p:cNvPr id="16" name="Picture 15" descr="4b887876abd33259.png"/>
+          <p:cNvPr id="16" name="Picture 15" descr="5d03ae494c514300.png"/>
           <p:cNvPicPr>
             <a:picLocks noChangeAspect="1"/>
           </p:cNvPicPr>
@@ -13778,8 +13787,8 @@
         </p:blipFill>
         <p:spPr>
           <a:xfrm>
-            <a:off x="3343157" y="3547872"/>
-            <a:ext cx="1164336" cy="658368"/>
+            <a:off x="3154181" y="3547872"/>
+            <a:ext cx="1182624" cy="658368"/>
           </a:xfrm>
           <a:prstGeom prst="rect">
             <a:avLst/>
@@ -13794,7 +13803,7 @@
         </p:nvSpPr>
         <p:spPr>
           <a:xfrm>
-            <a:off x="4507493" y="3648456"/>
+            <a:off x="4336805" y="3648456"/>
             <a:ext cx="3876979" cy="457200"/>
           </a:xfrm>
           <a:prstGeom prst="rect">
@@ -13823,7 +13832,7 @@
       </p:sp>
       <p:pic>
         <p:nvPicPr>
-          <p:cNvPr id="18" name="Picture 17" descr="0273c9ade1e97bbe.png"/>
+          <p:cNvPr id="18" name="Picture 17" descr="5a584fe5a654e327.png"/>
           <p:cNvPicPr>
             <a:picLocks noChangeAspect="1"/>
           </p:cNvPicPr>
@@ -13837,8 +13846,8 @@
         </p:blipFill>
         <p:spPr>
           <a:xfrm>
-            <a:off x="8247312" y="3726180"/>
-            <a:ext cx="329184" cy="301752"/>
+            <a:off x="8076624" y="3726180"/>
+            <a:ext cx="332232" cy="301752"/>
           </a:xfrm>
           <a:prstGeom prst="rect">
             <a:avLst/>
@@ -13853,7 +13862,7 @@
         </p:nvSpPr>
         <p:spPr>
           <a:xfrm>
-            <a:off x="3288293" y="4407408"/>
+            <a:off x="3099317" y="4410456"/>
             <a:ext cx="1342179" cy="457200"/>
           </a:xfrm>
           <a:prstGeom prst="rect">
@@ -13896,7 +13905,7 @@
         </p:blipFill>
         <p:spPr>
           <a:xfrm>
-            <a:off x="4493312" y="4511040"/>
+            <a:off x="4304336" y="4514088"/>
             <a:ext cx="704088" cy="249935"/>
           </a:xfrm>
           <a:prstGeom prst="rect">
@@ -13912,7 +13921,7 @@
         </p:nvSpPr>
         <p:spPr>
           <a:xfrm>
-            <a:off x="5197400" y="4407408"/>
+            <a:off x="5008424" y="4410456"/>
             <a:ext cx="606468" cy="457200"/>
           </a:xfrm>
           <a:prstGeom prst="rect">
@@ -13941,7 +13950,7 @@
       </p:sp>
       <p:pic>
         <p:nvPicPr>
-          <p:cNvPr id="22" name="Picture 21" descr="5e737102846c6421.png"/>
+          <p:cNvPr id="22" name="Picture 21" descr="3bf425c97d8d917a.png"/>
           <p:cNvPicPr>
             <a:picLocks noChangeAspect="1"/>
           </p:cNvPicPr>
@@ -13955,8 +13964,8 @@
         </p:blipFill>
         <p:spPr>
           <a:xfrm>
-            <a:off x="5666708" y="4485132"/>
-            <a:ext cx="829056" cy="301752"/>
+            <a:off x="5477732" y="4486656"/>
+            <a:ext cx="1021080" cy="304800"/>
           </a:xfrm>
           <a:prstGeom prst="rect">
             <a:avLst/>
@@ -13971,7 +13980,7 @@
         </p:nvSpPr>
         <p:spPr>
           <a:xfrm>
-            <a:off x="6495764" y="4407408"/>
+            <a:off x="6498812" y="4410456"/>
             <a:ext cx="1524021" cy="457200"/>
           </a:xfrm>
           <a:prstGeom prst="rect">
@@ -14000,7 +14009,7 @@
       </p:sp>
       <p:pic>
         <p:nvPicPr>
-          <p:cNvPr id="24" name="Picture 23" descr="175de81595c1b41a.png"/>
+          <p:cNvPr id="24" name="Picture 23" descr="b22ccf291db4015b.png"/>
           <p:cNvPicPr>
             <a:picLocks noChangeAspect="1"/>
           </p:cNvPicPr>
@@ -14014,8 +14023,8 @@
         </p:blipFill>
         <p:spPr>
           <a:xfrm>
-            <a:off x="7882626" y="4334256"/>
-            <a:ext cx="987552" cy="603504"/>
+            <a:off x="7885674" y="4334256"/>
+            <a:ext cx="1170432" cy="609600"/>
           </a:xfrm>
           <a:prstGeom prst="rect">
             <a:avLst/>
@@ -14030,7 +14039,7 @@
         </p:nvSpPr>
         <p:spPr>
           <a:xfrm>
-            <a:off x="777240" y="5074920"/>
+            <a:off x="777240" y="5081016"/>
             <a:ext cx="10607040" cy="1072896"/>
           </a:xfrm>
           <a:prstGeom prst="rect">
@@ -14061,7 +14070,7 @@
                 </a:solidFill>
                 <a:latin typeface="Lexend"/>
               </a:rPr>
-              <a:t>-3</a:t>
+              <a:t>-5</a:t>
             </a:r>
             <a:r>
               <a:rPr sz="3040" b="1" i="0">
@@ -14079,7 +14088,7 @@
                 </a:solidFill>
                 <a:latin typeface="Lexend"/>
               </a:rPr>
-              <a:t>3</a:t>
+              <a:t>5</a:t>
             </a:r>
             <a:r>
               <a:rPr sz="3040" b="1" i="0">
@@ -14097,7 +14106,7 @@
                 </a:solidFill>
                 <a:latin typeface="Lexend"/>
               </a:rPr>
-              <a:t>3</a:t>
+              <a:t>5</a:t>
             </a:r>
             <a:r>
               <a:rPr sz="3040" b="1" i="0">
@@ -14106,7 +14115,7 @@
                 </a:solidFill>
                 <a:latin typeface="Lexend"/>
               </a:rPr>
-              <a:t> = 8 and x</a:t>
+              <a:t> = 32 and x</a:t>
             </a:r>
             <a:r>
               <a:rPr sz="3040" b="1" i="0" baseline="30000">
@@ -14115,7 +14124,7 @@
                 </a:solidFill>
                 <a:latin typeface="Lexend"/>
               </a:rPr>
-              <a:t>-3</a:t>
+              <a:t>-5</a:t>
             </a:r>
             <a:r>
               <a:rPr sz="3040" b="1" i="0">
@@ -14124,7 +14133,7 @@
                 </a:solidFill>
                 <a:latin typeface="Lexend"/>
               </a:rPr>
-              <a:t> = 1/8.</a:t>
+              <a:t> = 1/32.</a:t>
             </a:r>
           </a:p>
         </p:txBody>

--- a/a7/build/out/u3/A7 3.T2 Negative Exponents with Variable Bases - Slides.pptx
+++ b/a7/build/out/u3/A7 3.T2 Negative Exponents with Variable Bases - Slides.pptx
@@ -6102,7 +6102,7 @@
       </p:sp>
       <p:pic>
         <p:nvPicPr>
-          <p:cNvPr id="8" name="Picture 7" descr="1b13ec9f58c1824c.png"/>
+          <p:cNvPr id="8" name="Picture 7" descr="393407e2af196cf4.png"/>
           <p:cNvPicPr>
             <a:picLocks noChangeAspect="1"/>
           </p:cNvPicPr>
@@ -6116,8 +6116,8 @@
         </p:blipFill>
         <p:spPr>
           <a:xfrm>
-            <a:off x="5727191" y="2194560"/>
-            <a:ext cx="707136" cy="1018032"/>
+            <a:off x="5730239" y="2194560"/>
+            <a:ext cx="701040" cy="1021080"/>
           </a:xfrm>
           <a:prstGeom prst="rect">
             <a:avLst/>
@@ -6389,7 +6389,7 @@
       </p:sp>
       <p:pic>
         <p:nvPicPr>
-          <p:cNvPr id="8" name="Picture 7" descr="7eacf3d693b1d7f9.png"/>
+          <p:cNvPr id="8" name="Picture 7" descr="777177b459190355.png"/>
           <p:cNvPicPr>
             <a:picLocks noChangeAspect="1"/>
           </p:cNvPicPr>
@@ -6403,8 +6403,8 @@
         </p:blipFill>
         <p:spPr>
           <a:xfrm>
-            <a:off x="5730239" y="2103120"/>
-            <a:ext cx="701040" cy="1018032"/>
+            <a:off x="5733288" y="2103120"/>
+            <a:ext cx="694944" cy="1021080"/>
           </a:xfrm>
           <a:prstGeom prst="rect">
             <a:avLst/>
@@ -6413,7 +6413,7 @@
       </p:pic>
       <p:pic>
         <p:nvPicPr>
-          <p:cNvPr id="9" name="Picture 8" descr="6b87df3e62c7c1cf.png"/>
+          <p:cNvPr id="9" name="Picture 8" descr="ed6b513a0faffd23.png"/>
           <p:cNvPicPr>
             <a:picLocks noChangeAspect="1"/>
           </p:cNvPicPr>
@@ -6427,8 +6427,8 @@
         </p:blipFill>
         <p:spPr>
           <a:xfrm>
-            <a:off x="5524499" y="3422904"/>
-            <a:ext cx="1222248" cy="740664"/>
+            <a:off x="5526023" y="3425952"/>
+            <a:ext cx="1222248" cy="743712"/>
           </a:xfrm>
           <a:prstGeom prst="rect">
             <a:avLst/>
@@ -6443,7 +6443,7 @@
         </p:nvSpPr>
         <p:spPr>
           <a:xfrm>
-            <a:off x="4884419" y="4651247"/>
+            <a:off x="4882896" y="4652772"/>
             <a:ext cx="1920240" cy="548640"/>
           </a:xfrm>
           <a:prstGeom prst="rect">
@@ -6472,7 +6472,7 @@
       </p:sp>
       <p:pic>
         <p:nvPicPr>
-          <p:cNvPr id="11" name="Picture 10" descr="552d05db14a86453.png"/>
+          <p:cNvPr id="11" name="Picture 10" descr="739c7a2665113bfa.png"/>
           <p:cNvPicPr>
             <a:picLocks noChangeAspect="1"/>
           </p:cNvPicPr>
@@ -6486,8 +6486,8 @@
         </p:blipFill>
         <p:spPr>
           <a:xfrm>
-            <a:off x="6804660" y="4663440"/>
-            <a:ext cx="472440" cy="524256"/>
+            <a:off x="6803136" y="4663440"/>
+            <a:ext cx="475488" cy="527304"/>
           </a:xfrm>
           <a:prstGeom prst="rect">
             <a:avLst/>
@@ -14814,7 +14814,7 @@
       </p:sp>
       <p:pic>
         <p:nvPicPr>
-          <p:cNvPr id="22" name="Picture 21" descr="c40b3e76d5e8f93e.png"/>
+          <p:cNvPr id="22" name="Picture 21" descr="50045c27c617c37c.png"/>
           <p:cNvPicPr>
             <a:picLocks noChangeAspect="1"/>
           </p:cNvPicPr>
@@ -14828,8 +14828,8 @@
         </p:blipFill>
         <p:spPr>
           <a:xfrm>
-            <a:off x="7129157" y="4111751"/>
-            <a:ext cx="1033271" cy="332232"/>
+            <a:off x="7129157" y="4114800"/>
+            <a:ext cx="1042415" cy="326136"/>
           </a:xfrm>
           <a:prstGeom prst="rect">
             <a:avLst/>
